--- a/docs/Storybook for application teams.pptx
+++ b/docs/Storybook for application teams.pptx
@@ -605,7 +605,7 @@
           <a:p>
             <a:r>
               <a:rPr lang="en-US" dirty="0"/>
-              <a:t>KEY MESSAGE: four gates, one rule — nothing merges on trust. - Before commit: git hook check:commit — docs, contracts, tokens, lint, generated files saved. - Every Plectrum PR (ci.yml): intake-guard · build (drift audit, docs:check, contracts:check, lint, unit tests) · pack-smoke · storybook-tests (interaction + a11y) · storybook-packed · figma-plugin. - Chromatic visual tests: only when enabled — don't promise more. - Every token sync: three-way drift audit (blocking); report in the PR and in Figma. - Every app repo: plectrum check --profile ci — no hex, no px, no unknown --pds-*. - Release: same commit's CI, clean-app install, matching Storybook; "latest" never moves on a partial release. Source: Maintainer workflow — https://solidaris-danielbodigil.github.io/solidaris-plectrum/storybook/?path=/docs/docs-maintainer-workflow--docs</a:t>
+              <a:t>KEY MESSAGE: four gates, one rule — nothing merges on trust. - Before commit: git hook — check:commit in Plectrum, a fast token check in apps. - Every Plectrum PR (ci.yml): intake-guard · build (drift audit, docs:check, contracts:check, lint, unit tests) · pack-smoke · storybook-tests (interaction + a11y) · storybook-packed · figma-plugin. - Chromatic visual tests: only when enabled — don't promise more. - Every token sync: three-way drift audit (blocking); report in the PR and in Figma. - Every app repo: the generated workflow runs the Plectrum checks (no hex, px or unknown --pds-*), the build, unit tests, story + accessibility tests, and sends the usage report after a push to main. - Release: same commit's CI, clean-app install, matching Storybook; "latest" never moves on a partial release. Source: Maintainer workflow — https://solidaris-danielbodigil.github.io/solidaris-plectrum/storybook/latest/?path=/docs/docs-maintainer-workflow--docs</a:t>
             </a:r>
             <a:endParaRPr lang="en-US" dirty="0"/>
           </a:p>
@@ -693,7 +693,7 @@
           <a:p>
             <a:r>
               <a:rPr lang="en-US" dirty="0"/>
-              <a:t>KEY MESSAGE: a PR merges on evidence, not trust — tests and CI produce it, with or without AI. - Unit tests: Vitest — logic and coverage. - Story tests: every story renders; interaction (play) tests; axe accessibility checks. - Contracts + tokens: contracts:check (API), docs:check, generated files committed, token audit. - Package smoke: pack the libraries, install them in a clean throwaway app and build it — exactly what a team repo does (1 app = 1 repo). - Application CI: plectrum check --profile ci — compatibility, source scan, Candidate evidence. - Chromatic visual tests only when enabled — don't promise more. - Same gates for agent and human changes. Source: Maintainer workflow — https://solidaris-danielbodigil.github.io/solidaris-plectrum/storybook/?path=/docs/docs-maintainer-workflow--docs</a:t>
+              <a:t>KEY MESSAGE: a PR merges on evidence, not trust — tests and CI produce it, with or without AI. - Unit tests: Vitest — logic and coverage. - Story tests: every story renders; interaction (play) tests; axe accessibility checks. - Contracts + tokens: contracts:check (API), docs:check, generated files committed, token audit. - Package smoke: pack the libraries, install them in a clean app built from the starter, build it and run its stories — exactly what a team repo does. - Application CI: Plectrum checks, build, unit tests, story + accessibility tests. - Chromatic visual tests only when enabled — don't promise more. - Same gates for agent and human changes. Source: Maintainer workflow — https://solidaris-danielbodigil.github.io/solidaris-plectrum/storybook/latest/?path=/docs/docs-maintainer-workflow--docs</a:t>
             </a:r>
             <a:endParaRPr lang="en-US" dirty="0"/>
           </a:p>
@@ -781,7 +781,7 @@
           <a:p>
             <a:r>
               <a:rPr lang="en-US" dirty="0"/>
-              <a:t>KEY MESSAGE: every change lands through a reviewed PR; humans own the decisions. - Plectrum code (libs/): Code Owner review + design-system review. - Figma → repo: staging branch only; promotion needs a reviewed PR. - App candidates: candidate-submit opens a reviewed central PR; nothing becomes Core automatically. - Repo → Figma: a designer reviews proposals/{app}, then merges and publishes. - Apps: bumps arrive as Renovate / Dependabot PRs, gated by the app CI profile. - Releases: Changesets version PR; a maintainer runs the attended release. Source: Contribute · Maintainer workflow — https://solidaris-danielbodigil.github.io/solidaris-plectrum/storybook/?path=/docs/get-started-contribute--docs</a:t>
+              <a:t>KEY MESSAGE: every change lands through a reviewed PR; humans own the decisions. - Plectrum code (libs/): Code Owner review + design-system review. - Figma → repo: staging branch only; promotion needs a reviewed PR. - App candidates: candidate-submit opens a reviewed central PR; nothing becomes Core automatically. - Usage reports: app CI opens a central PR after a push to main; Core reviews it. - Repo → Figma: a designer reviews proposals/{app}, then merges and publishes. - Apps: bumps arrive as Renovate / Dependabot PRs, gated by the app's checks and tests. - Releases: Changesets version PR; a maintainer runs the attended release. Source: Contribute · Maintainer workflow — https://solidaris-danielbodigil.github.io/solidaris-plectrum/storybook/latest/?path=/docs/get-started-contribute--docs</a:t>
             </a:r>
             <a:endParaRPr lang="en-US" dirty="0"/>
           </a:p>
@@ -869,7 +869,7 @@
           <a:p>
             <a:r>
               <a:rPr lang="en-US" dirty="0"/>
-              <a:t>KEY MESSAGE: a typo is a PR; a gap is a proposal. - Small fix (typo, example, link): PR on Plectrum. - Gap (component, variant, token): proposal = a GitHub issue on Plectrum — the need, what you tried, a Figma link. Core records the decision on it. - Check themed PrimeNG and Core first — "a Candidate is not a core-team ticket". - Core records one decision: use-existing · app-specific · rejected · approved-candidate. - The toolkit only scaffolds and submits under approved-candidate. - Your team builds it → your team owns it. Nothing becomes Core automatically. - Already built it? Open the proposal anyway and attach it. Source: Contribute › Proposal decisions — https://solidaris-danielbodigil.github.io/solidaris-plectrum/storybook/?path=/docs/get-started-contribute--docs</a:t>
+              <a:t>KEY MESSAGE: build locally; propose to share. - Small fix (typo, example, link): PR on Plectrum. - Gap (component, variant, token): check themed PrimeNG and Core first; if nothing fits, the team builds it in its own repo — no approval needed. - To share it, open a proposal = a GitHub issue on Plectrum: the need, what you tried, a Figma link, a preview. - Core records one decision: use-existing · app-specific · rejected · approved-candidate. - Only approved-candidate lets the team submit the component to Core; the other decisions keep it local. - Your team builds it → your team owns it. Nothing becomes Core automatically. Source: Contribute › Proposal decisions — https://solidaris-danielbodigil.github.io/solidaris-plectrum/storybook/latest/?path=/docs/get-started-contribute--docs</a:t>
             </a:r>
             <a:endParaRPr lang="en-US" dirty="0"/>
           </a:p>
@@ -957,7 +957,7 @@
           <a:p>
             <a:r>
               <a:rPr lang="en-US" dirty="0"/>
-              <a:t>KEY MESSAGE: two routes to Core — from an app team or from the design team. - IMPORTANT: keep Core in the loop from the start of development — it avoids a Core bottleneck at integration, avoids building something that gets rejected or already exists, and you get guidance on reuse, naming and tokens. - Colours = actor: green app, blue Core, orange designer, grey release. - Every proposal is a GitHub issue in the central Plectrum repo — from an app team or a designer. - Step names simplified from Storybook: Discover → Propose, Approve → Decide, Implement → Build, Design return → Update Figma. - App route: the team proposes the gap → Core decides → the team builds in its repo and submits (candidate-submit) → Core integrates → designer updates Figma → release → the app adopts. - Until integration, the component stays the app's; nothing becomes Core automatically. - Candidates use feature names (c-affiliate-*), never Core names; the app CI profile still applies. - Design route: designer proposes from Custom components → Core decides and builds → release. Example: Profile header. - Corrections and Core work: a reviewed PR in the Plectrum repo. Source: Process and contracts — https://solidaris-danielbodigil.github.io/solidaris-plectrum/storybook/?path=/docs/docs-pipeline-contracts--docs</a:t>
+              <a:t>KEY MESSAGE: two routes to Core — from an app team or from the design team. - Propose early: Core can spot duplicates and give guidance on reuse, naming and tokens — and the team never waits to build locally. - Colours = actor: green app, blue Core, orange designer, grey release. - Every proposal is a GitHub issue in the central Plectrum repo — from an app team or a designer. - App route: the team builds in its repo → proposes the component → Core decides → the team submits (candidate-submit) → Core integrates → designer updates Figma → release → the app adopts. - Until integration, the component stays the app's; nothing becomes Core automatically. - Local components use feature names (c-affiliate-*), never Core names; the app checks still apply. - Design route: designer proposes from Custom components → Core decides and builds → release. Example: Profile header. - Corrections and Core work: a reviewed PR in the Plectrum repo. Source: Contribute — https://solidaris-danielbodigil.github.io/solidaris-plectrum/storybook/latest/?path=/docs/get-started-contribute--docs</a:t>
             </a:r>
             <a:endParaRPr lang="en-US" dirty="0"/>
           </a:p>
@@ -1045,7 +1045,7 @@
           <a:p>
             <a:r>
               <a:rPr lang="en-US" dirty="0"/>
-              <a:t>KEY MESSAGE: the whole process exists to stop teams redoing the same work — and everyone gains something. - Less duplicate maintenance (Core, app teams): one source, generated docs, no design-system code copied into apps. - Fewer local variants (app teams, Solidaris): PrimeNG → Core → proposal; one look across applications. - Earlier feedback (app teams, designers): stories, CI and review catch issues in the PR; sync results land in Figma. - Repeatable adoption (Solidaris, new teams): a new team = a registry entry + plectrum init; upgrades arrive as PRs. - Ask of every team: consume the packages, run the checks, return shared improvements through a GitHub issue. - Next step: one real pilot team walks the full path — proposal → decision → candidate → integration → release → adoption. Name who decides, builds and reviews. Source: Overview — https://solidaris-danielbodigil.github.io/solidaris-plectrum/storybook/?path=/docs/introduction--docs</a:t>
+              <a:t>KEY MESSAGE: the whole process exists to stop teams redoing the same work — and everyone gains something. - Less duplicate maintenance (Core, app teams): one source, generated docs, no design-system code copied into apps. - Fewer local variants (app teams, Solidaris): PrimeNG → Core → local build → proposal; one look across applications. - Earlier feedback (app teams, designers): stories, CI and review catch issues in the PR; sync results land in Figma. - Repeatable adoption (Solidaris, new teams): a new team = the starter + npm install; upgrades arrive as PRs; usage reports show who uses what. - Ask of every team: consume the packages, run the checks, return shared improvements through a GitHub issue. - Next step: one real pilot team walks the full path — local build → proposal → decision → submission → integration → release → adoption. Source: Overview — https://solidaris-danielbodigil.github.io/solidaris-plectrum/storybook/latest/?path=/docs/introduction--docs</a:t>
             </a:r>
             <a:endParaRPr lang="en-US" dirty="0"/>
           </a:p>
@@ -1133,7 +1133,7 @@
           <a:p>
             <a:r>
               <a:rPr lang="en-US" dirty="0"/>
-              <a:t>KEY MESSAGE: collect concrete blockers — let the teams speak first. - Sort questions: find · install · contribute · validate. - Note owners, pilot and missing access; command details → Storybook or a technical session. - Rebuild our app? No — install packages; build locally only after a decision. - Code to copy? No — consume a published version. - Can AI build a component? It prepares; people review. - Missing token? Describe the need, check existing roles, propose it; the value is reviewed. - Our own repo already? The isolated trial passed; a real repo is the pilot's goal. - Close: restate the pilot and access prerequisites.</a:t>
+              <a:t>KEY MESSAGE: collect concrete blockers — let the teams speak first. - Sort questions: find · install · contribute · validate. - Note owners, pilot and missing access; command details → Storybook or a technical session. - Rebuild our app? No — install packages; build local components whenever you need them. - Code to copy? No — consume a published version. - Can AI build a component? It prepares; people review. - Missing token? Use a local token file if only your app needs it; otherwise propose it. - Our own repo already? The starter and the consumer smoke test pass; a real repo is the pilot's goal. - Close: restate the pilot and access prerequisites.</a:t>
             </a:r>
             <a:endParaRPr lang="en-US" dirty="0"/>
           </a:p>
@@ -1221,7 +1221,7 @@
           <a:p>
             <a:r>
               <a:rPr lang="en-US" dirty="0"/>
-              <a:t>KEY MESSAGE: one shared system; each team owns its application. - Figma: shared visual decisions — designers own the values and the component designs. - Plectrum: shared code and contracts, published as Storybook + versioned packages; the Core team owns it. - Application teams: own repositories and screens; local Candidates only after a Core decision. - Apps install a version: nothing is copied, no Plectrum folder in the app. - Boundary: shared things change through Plectrum PRs and proposals; app code stays with the team. - Transition: "So how does a team actually use Plectrum? Through packages." Source: Overview — https://solidaris-danielbodigil.github.io/solidaris-plectrum/storybook/?path=/docs/introduction--docs</a:t>
+              <a:t>KEY MESSAGE: one shared system; each team owns its application. - Figma: shared visual decisions — designers own the values and the component designs. - Plectrum: shared code and contracts, published as Storybook + versioned packages; the Core team owns it. - Application teams: own repositories, screens and local components — they build them without waiting for Core. - Apps install a version: nothing is copied, no Plectrum folder in the app. - Boundary: shared things change through Plectrum PRs and proposals; app code stays with the team. - Transition: "So how does a team actually use Plectrum? Through packages." Source: Overview — https://solidaris-danielbodigil.github.io/solidaris-plectrum/storybook/latest/?path=/docs/introduction--docs</a:t>
             </a:r>
             <a:endParaRPr lang="en-US" dirty="0"/>
           </a:p>
@@ -1309,7 +1309,7 @@
           <a:p>
             <a:r>
               <a:rPr lang="en-US" dirty="0"/>
-              <a:t>KEY MESSAGE: teams don't copy Plectrum — they install it as versioned packages and keep their own repo. - 4 packages under @solidaris-danielbodigil on GitHub Packages (private; the team needs read access). - Runtime: pds-ui, pds-plectrum, pds-styles — version together. Toolkit: pds-devkit — dev dependency, own version. - Before init: Core registers the team, application and repo URL. - Initialize: plectrum init writes .plectrum/config.json, the Cursor / VS Code agents and a PR workflow running the CI profile. - Build: pds-styles on the include path + one @use in styles.scss; providePlectrum() in app.config themes PrimeNG. - Before you invent: themed PrimeNG → a Core pds-* component → a proposal. - App rules: CSS is the API (var(--pds-*), o- / c- / u- classes); no token copies; no silent duplicates. - Upgrade: Renovate / Dependabot PRs → plectrum update → validate. What's new lists breaking changes. - Today main is a development preview: a pilot installs packed tarballs until the release is published. Source: Build with Plectrum — https://solidaris-danielbodigil.github.io/solidaris-plectrum/storybook/?path=/docs/get-started-use-plectrum-in-an-app--docs</a:t>
+              <a:t>KEY MESSAGE: teams don't copy Plectrum — they install it as versioned packages and keep their own repo. - 4 packages under @solidaris-danielbodigil on GitHub Packages (private; the team needs read access). - Runtime: pds-ui, pds-plectrum, pds-styles (styles, tokens, Agenda and Open Sans fonts) — version together. Toolkit: pds-devkit — dev dependency, own version. - Install: copy the Plectrum starter, set the team and application IDs in package.json, run npm install. - Set up: npm install runs plectrum bootstrap — empty local ITCSS layers, styles and fonts wired, local Storybook, unit and story tests, a pre-commit hook, agents and a CI workflow. Commit the generated files. - Build: providePlectrum() is already in app.config; local styles go in src/styles/06-components. - Validate: the generated workflow runs the checks, the build, unit tests and story + accessibility tests on every PR. - Adopt: CI sends a usage report to Core once the team is registered and the PLECTRUM_ADOPTION_TOKEN secret is set; the local Storybook page Plectrum/Setup shows what is missing. - Upgrade: Renovate / Dependabot PRs → plectrum update → checks. What's new lists the changes. Source: Build with Plectrum — https://solidaris-danielbodigil.github.io/solidaris-plectrum/storybook/latest/?path=/docs/get-started-use-plectrum-in-an-app--docs</a:t>
             </a:r>
             <a:endParaRPr lang="en-US" dirty="0"/>
           </a:p>
@@ -1573,7 +1573,7 @@
           <a:p>
             <a:r>
               <a:rPr lang="en-US" dirty="0"/>
-              <a:t>KEY MESSAGE: one loop — tokens flow down to apps and back up to Figma; every direction ends in a human merge. - Diagram: Storybook's "Pipeline architecture". Orange = Figma, blue = repo, green = app; dashed = manual. - 1: plugin sync → staging branch design-tokens/sync → reviewed PR into tokens.json. - 2: tokens:build → CSS + Storybook manifest. 3–4: packages published → Renovate / Dependabot bump the apps. - 5: an app team PR adds code-owned --pds-* tokens in Plectrum. - 6–7: tokens:propose → agent (Figma MCP) or tokens plugin → proposals/{app} → a designer merges and publishes. - Every sync: three-way drift audit (Figma, preset, SCSS); report in the PR and as a Figma comment. - Last sync: 25 Sept 2026 — 2,849 / 2,849 tokens resolve, audit passed. Source: Token pipeline › Architecture · Figma sync — https://solidaris-danielbodigil.github.io/solidaris-plectrum/storybook/?path=/docs/docs-token-pipeline--docs</a:t>
+              <a:t>KEY MESSAGE: one loop — tokens flow down to apps and back up to Figma; every direction ends in a human merge. - Diagram: Storybook's "Pipeline architecture". Orange = Figma, blue = repo, green = app; dashed = manual. - 1: plugin sync → staging branch design-tokens/sync → reviewed PR into tokens.json. - 2: tokens:build → CSS + Storybook manifest. 3–4: packages released → Renovate / Dependabot bump the apps. - 5: a token only one app needs stays in that app (local token file); a token other teams could use is proposed, and Core adds it to 01-settings. - 6–7: tokens:propose → agent (Figma MCP) or tokens plugin → proposals/{app} → a designer merges and publishes. - Every sync: three-way drift audit (Figma, preset, SCSS); report in the PR and as a Figma comment. Source: Token pipeline › Architecture · Figma sync — https://solidaris-danielbodigil.github.io/solidaris-plectrum/storybook/latest/?path=/docs/docs-token-pipeline--docs</a:t>
             </a:r>
             <a:endParaRPr lang="en-US" dirty="0"/>
           </a:p>
@@ -1661,7 +1661,7 @@
           <a:p>
             <a:r>
               <a:rPr lang="en-US" dirty="0"/>
-              <a:t>KEY MESSAGE: agents read typed contracts, not the whole repo — Contract-Driven Development (CDD). - One flow = Storybook's "Contract layers" (index → metadata → protocols → libs/ui) + the component-creation pre-flight (PrimeNG, Figma, index, Storybook MCP). - index.json: generated map — what exists, where, status, owner. - {name}.metadata.ts: how and why to use it — use cases, anti-patterns, tokens, a11y, AI hints. - protocols/: decision trees for create, query, audit. - Steps 1–4 find what exists; steps 5–7 only run when something is really missing. - "Starter files" (Storybook says "scaffold"): one command creates the Angular files, .metadata.ts, story stub and styles — only after Core approves. - Example prompt: the pre-flight finds PrimeNG DatePicker (range mode) already covers the need → no new component, no proposal. The Storybook's own example (status banner) is on slide 8. - Humans still own review, Storybook, CSS and Figma publication. - By hand: covered on slide 9 (No AI?) — same scripts, tests, CI gates and reviews, just slower. Source: AI strategy — https://solidaris-danielbodigil.github.io/solidaris-plectrum/storybook/?path=/docs/docs-ai-strategy--docs</a:t>
+              <a:t>KEY MESSAGE: agents read typed contracts, not the whole repo — Contract-Driven Development (CDD). - One flow = Storybook's "Contract layers" (index → metadata → protocols → component) + the pre-flight (PrimeNG, Figma, index, Storybook MCP). - index.json: generated map — what exists, where, status, owner. - {name}.metadata.ts: how and why to use it — use cases, anti-patterns, tokens, a11y, AI hints. - protocols/: decision trees for create, query, audit. - Steps 1–4 find what exists; steps 5–7 only run when something is really missing. - In an app, the scaffold creates the component, story, unit test, metadata and styles — no Core approval needed. In Plectrum, a Core component starts after Core's decision. - Example prompt: the pre-flight finds PrimeNG DatePicker (range mode) already covers the need → no new component. - Humans still own review, Storybook, CSS and Figma publication. - By hand: slide 9 — same scripts, tests, CI gates and reviews. Source: AI strategy — https://solidaris-danielbodigil.github.io/solidaris-plectrum/storybook/latest/?path=/docs/docs-ai-strategy--docs</a:t>
             </a:r>
             <a:endParaRPr lang="en-US" dirty="0"/>
           </a:p>
@@ -1749,7 +1749,7 @@
           <a:p>
             <a:r>
               <a:rPr lang="en-US" dirty="0"/>
-              <a:t>KEY MESSAGE: the agent prepares, checks verify, people decide. - /plectrum is the only user-facing agent; it coordinates 6 specialists. - UX Researcher: Figma inspection, design brief (read-only). - UX Engineer: SCSS tokens, styles, stories. - Frontend Dev: Angular implementation, a11y, PrimeNG wiring. - Tester: unit tests, story coverage, WCAG 2.1 AA. - Token Auditor + Architect: drift, naming, boundaries (read-only). - Written once in .ai/agents/; plectrum init installs them in each app repo. - Every route still needs a proposal, a Core decision, a review and a human Figma merge. Source: AI strategy › Subagents — https://solidaris-danielbodigil.github.io/solidaris-plectrum/storybook/?path=/docs/docs-ai-strategy--docs</a:t>
+              <a:t>KEY MESSAGE: the agent prepares, checks verify, people decide. - /plectrum is the only user-facing agent; it coordinates 6 specialists. - UX Researcher: Figma inspection, design brief (read-only). - UX Engineer: SCSS tokens, styles, stories. - Frontend Dev: Angular implementation, a11y, PrimeNG wiring. - Tester: unit tests, story coverage, WCAG 2.1 AA. - Token Auditor + Architect: drift, naming, boundaries (read-only). - Written once in .ai/agents/; npm install (plectrum bootstrap) generates them in each app repo. - Local components need no Core decision; sharing through Core still needs a proposal, a decision, a review and a release. Source: AI strategy › Subagents — https://solidaris-danielbodigil.github.io/solidaris-plectrum/storybook/latest/?path=/docs/docs-ai-strategy--docs</a:t>
             </a:r>
             <a:endParaRPr lang="en-US" dirty="0"/>
           </a:p>
@@ -1837,7 +1837,7 @@
           <a:p>
             <a:r>
               <a:rPr lang="en-US" dirty="0"/>
-              <a:t>KEY MESSAGE: no AI? Nothing lost — same scripts, same CI, same reviews. - Storybook: "It is a choice, not a requirement." - Find — agent: PrimeNG MCP → index.json → Storybook MCP (same order as the pre-flight on slide 7). - Find — by hand: check themed PrimeNG first, then Find a component or plectrum catalogue (offline). - Create: plectrum scaffold (app repo, after approval) or pds:component (Plectrum repo). - Check: plectrum check --profile ci. - Figma to tokens: an agent can read variables via Figma MCP, or the designer runs the plugin sync; either way the CI drift audit runs and a developer merges the PR. - Tokens to Figma: tokens:propose + the Plectrum tokens plugin. - Figma components: a designer draws them; merge and publish stay human. - CI runs regardless — agent and human changes alike. Source: AI strategy · Token pipeline › Commands — https://solidaris-danielbodigil.github.io/solidaris-plectrum/storybook/?path=/docs/docs-ai-strategy--docs</a:t>
+              <a:t>KEY MESSAGE: no AI? Nothing lost — same scripts, same CI, same reviews. - Find — agent: PrimeNG MCP → index.json → Storybook MCP (same order as the pre-flight on slide 7). - Find — by hand: themed PrimeNG first, then Find a component or plectrum catalogue (offline). - Create: npm run pds:component in an app (no approval needed), pds:component in the Plectrum repo. - Check: npm run pds:check:ci, then build and tests. - Figma to tokens: an agent reads variables via Figma MCP, or the designer runs the plugin sync; the CI drift audit runs and a developer merges the PR. - Tokens to Figma: tokens:propose + the Plectrum tokens plugin. - Figma components: a designer draws them; merge and publish stay human. - CI runs regardless — agent and human changes alike. Source: AI strategy · Token pipeline › Commands — https://solidaris-danielbodigil.github.io/solidaris-plectrum/storybook/latest/?path=/docs/docs-ai-strategy--docs</a:t>
             </a:r>
             <a:endParaRPr lang="en-US" dirty="0"/>
           </a:p>
@@ -3486,7 +3486,7 @@
                 <a:ea typeface="Nunito Sans" pitchFamily="34" charset="-122"/>
                 <a:cs typeface="Nunito Sans" pitchFamily="34" charset="-120"/>
               </a:rPr>
-              <a:t>The CI profile</a:t>
+              <a:t>The generated workflow</a:t>
             </a:r>
             <a:endParaRPr lang="en-US" sz="1400" dirty="0"/>
           </a:p>
@@ -3531,7 +3531,7 @@
                 <a:ea typeface="Nunito Sans" pitchFamily="34" charset="-122"/>
                 <a:cs typeface="Nunito Sans" pitchFamily="34" charset="-120"/>
               </a:rPr>
-              <a:t>no hex, px or unknown token</a:t>
+              <a:t>token and contract checks</a:t>
             </a:r>
             <a:endParaRPr lang="en-US" sz="1200" dirty="0"/>
           </a:p>
@@ -3552,7 +3552,7 @@
                 <a:ea typeface="Nunito Sans" pitchFamily="34" charset="-122"/>
                 <a:cs typeface="Nunito Sans" pitchFamily="34" charset="-120"/>
               </a:rPr>
-              <a:t>source scan</a:t>
+              <a:t>build + unit tests</a:t>
             </a:r>
             <a:endParaRPr lang="en-US" sz="1200" dirty="0"/>
           </a:p>
@@ -3573,7 +3573,7 @@
                 <a:ea typeface="Nunito Sans" pitchFamily="34" charset="-122"/>
                 <a:cs typeface="Nunito Sans" pitchFamily="34" charset="-120"/>
               </a:rPr>
-              <a:t>packages and adapters</a:t>
+              <a:t>stories + accessibility</a:t>
             </a:r>
             <a:endParaRPr lang="en-US" sz="1200" dirty="0"/>
           </a:p>
@@ -3594,7 +3594,7 @@
                 <a:ea typeface="Nunito Sans" pitchFamily="34" charset="-122"/>
                 <a:cs typeface="Nunito Sans" pitchFamily="34" charset="-120"/>
               </a:rPr>
-              <a:t>candidate stories, evidence</a:t>
+              <a:t>usage report to Core</a:t>
             </a:r>
             <a:endParaRPr lang="en-US" sz="1200" dirty="0"/>
           </a:p>
@@ -4450,7 +4450,7 @@
                 <a:ea typeface="Nunito Sans" pitchFamily="34" charset="-122"/>
                 <a:cs typeface="Nunito Sans" pitchFamily="34" charset="-120"/>
               </a:rPr>
-              <a:t>Compatibility, source + Candidate evidence</a:t>
+              <a:t>Checks, build, unit + story tests</a:t>
             </a:r>
             <a:endParaRPr lang="en-US" sz="1600" dirty="0"/>
           </a:p>
@@ -5946,7 +5946,7 @@
                           <a:ea typeface="Nunito Sans" pitchFamily="34" charset="-122"/>
                           <a:cs typeface="Nunito Sans" pitchFamily="34" charset="-120"/>
                         </a:rPr>
-                        <a:t>An adoption report</a:t>
+                        <a:t>A usage report</a:t>
                       </a:r>
                       <a:endParaRPr lang="en-US" sz="1200" dirty="0">
                         <a:latin typeface="Nunito Sans" charset="0"/>
@@ -6014,7 +6014,7 @@
                           <a:ea typeface="Nunito Sans" pitchFamily="34" charset="-122"/>
                           <a:cs typeface="Nunito Sans" pitchFamily="34" charset="-120"/>
                         </a:rPr>
-                        <a:t>central PR</a:t>
+                        <a:t>central PR from app CI</a:t>
                       </a:r>
                       <a:endParaRPr lang="en-US" sz="1200" dirty="0">
                         <a:latin typeface="Nunito Sans" charset="0"/>
@@ -6294,7 +6294,7 @@
                           <a:ea typeface="Nunito Sans" pitchFamily="34" charset="-122"/>
                           <a:cs typeface="Nunito Sans" pitchFamily="34" charset="-120"/>
                         </a:rPr>
-                        <a:t>your team, with the CI profile</a:t>
+                        <a:t>your team, with its checks and tests</a:t>
                       </a:r>
                       <a:endParaRPr lang="en-US" sz="1200" dirty="0">
                         <a:latin typeface="Nunito Sans" charset="0"/>
@@ -6758,7 +6758,7 @@
                 <a:ea typeface="Alegreya Sans" pitchFamily="34" charset="-122"/>
                 <a:cs typeface="Alegreya Sans" pitchFamily="34" charset="-120"/>
               </a:rPr>
-              <a:t>CONTRIBUTING — PROPOSE BEFORE CODE</a:t>
+              <a:t>CONTRIBUTING — BUILD LOCALLY, PROPOSE TO SHARE</a:t>
             </a:r>
             <a:endParaRPr lang="en-US" sz="1300" dirty="0"/>
           </a:p>
@@ -7590,7 +7590,7 @@
                 <a:ea typeface="Nunito Sans" pitchFamily="34" charset="-122"/>
                 <a:cs typeface="Nunito Sans" pitchFamily="34" charset="-120"/>
               </a:rPr>
-              <a:t>no candidate</a:t>
+              <a:t>not shared; build locally if needed</a:t>
             </a:r>
             <a:endParaRPr lang="en-US" sz="1200" dirty="0"/>
           </a:p>
@@ -8189,7 +8189,7 @@
                 <a:ea typeface="Alegreya Sans" pitchFamily="34" charset="-122"/>
                 <a:cs typeface="Alegreya Sans" pitchFamily="34" charset="-120"/>
               </a:rPr>
-              <a:t>App team → proposal → decision → Core release</a:t>
+              <a:t>App team → build → proposal → Core release</a:t>
             </a:r>
             <a:endParaRPr lang="en-US" sz="3070" dirty="0"/>
           </a:p>
@@ -8381,7 +8381,7 @@
                 <a:ea typeface="Nunito Sans" pitchFamily="34" charset="-122"/>
                 <a:cs typeface="Nunito Sans" pitchFamily="34" charset="-120"/>
               </a:rPr>
-              <a:t>Propose </a:t>
+              <a:t>Build + propose </a:t>
             </a:r>
             <a:r>
               <a:rPr lang="en-US" sz="1300" b="1" dirty="0">
@@ -8436,7 +8436,7 @@
                 <a:ea typeface="Nunito Sans" pitchFamily="34" charset="-122"/>
                 <a:cs typeface="Nunito Sans" pitchFamily="34" charset="-120"/>
               </a:rPr>
-              <a:t>GitHub issue: the need, what you tried, a Figma link</a:t>
+              <a:t>No approval to build; open an issue to share it</a:t>
             </a:r>
             <a:endParaRPr lang="en-US" sz="1200" dirty="0"/>
           </a:p>
@@ -8765,7 +8765,7 @@
                 <a:ea typeface="Nunito Sans" pitchFamily="34" charset="-122"/>
                 <a:cs typeface="Nunito Sans" pitchFamily="34" charset="-120"/>
               </a:rPr>
-              <a:t>Build </a:t>
+              <a:t>Complete </a:t>
             </a:r>
             <a:r>
               <a:rPr lang="en-US" sz="1300" b="1" dirty="0">
@@ -8820,7 +8820,7 @@
                 <a:ea typeface="Nunito Sans" pitchFamily="34" charset="-122"/>
                 <a:cs typeface="Nunito Sans" pitchFamily="34" charset="-120"/>
               </a:rPr>
-              <a:t>In your repo: starter files, stories, metadata, tests</a:t>
+              <a:t>Stories, tests, evidence and a preview</a:t>
             </a:r>
             <a:endParaRPr lang="en-US" sz="1200" dirty="0"/>
           </a:p>
@@ -10657,7 +10657,7 @@
                 <a:ea typeface="Nunito Sans" pitchFamily="34" charset="-122"/>
                 <a:cs typeface="Nunito Sans" pitchFamily="34" charset="-120"/>
               </a:rPr>
-              <a:t> bring the Core team in early — no bottleneck, no wasted work, better guidance.</a:t>
+              <a:t> propose early so Core can spot duplicates — you never wait to build locally.</a:t>
             </a:r>
             <a:endParaRPr lang="en-US" sz="1400" dirty="0"/>
           </a:p>
@@ -13515,7 +13515,7 @@
                 <a:ea typeface="Nunito Sans" pitchFamily="34" charset="-122"/>
                 <a:cs typeface="Nunito Sans" pitchFamily="34" charset="-120"/>
               </a:rPr>
-              <a:t>ITCSS styles and --pds-* tokens</a:t>
+              <a:t>ITCSS styles, --pds-* tokens, fonts</a:t>
             </a:r>
             <a:endParaRPr lang="en-US" sz="1200" dirty="0"/>
           </a:p>
@@ -13625,7 +13625,7 @@
                 <a:ea typeface="Nunito Sans" pitchFamily="34" charset="-122"/>
                 <a:cs typeface="Nunito Sans" pitchFamily="34" charset="-120"/>
               </a:rPr>
-              <a:t>Team toolkit: plectrum CLI, agents, contracts</a:t>
+              <a:t>Team toolkit: CLI, app setup, agents, checks</a:t>
             </a:r>
             <a:endParaRPr lang="en-US" sz="1200" dirty="0"/>
           </a:p>
@@ -13861,7 +13861,7 @@
                 <a:ea typeface="Nunito Sans" pitchFamily="34" charset="-122"/>
                 <a:cs typeface="Nunito Sans" pitchFamily="34" charset="-120"/>
               </a:rPr>
-              <a:t> — the four packages from GitHub Packages</a:t>
+              <a:t> — copy the starter, then npm install</a:t>
             </a:r>
             <a:endParaRPr lang="en-US" sz="1300" dirty="0"/>
           </a:p>
@@ -13998,7 +13998,7 @@
                 <a:ea typeface="Nunito Sans" pitchFamily="34" charset="-122"/>
                 <a:cs typeface="Nunito Sans" pitchFamily="34" charset="-120"/>
               </a:rPr>
-              <a:t>Initialize</a:t>
+              <a:t>Set up</a:t>
             </a:r>
             <a:r>
               <a:rPr lang="en-US" sz="1300" dirty="0">
@@ -14009,7 +14009,7 @@
                 <a:ea typeface="Nunito Sans" pitchFamily="34" charset="-122"/>
                 <a:cs typeface="Nunito Sans" pitchFamily="34" charset="-120"/>
               </a:rPr>
-              <a:t> — plectrum init: config, agents, CI workflow</a:t>
+              <a:t> — styles, Storybook, tests, hook and CI generated</a:t>
             </a:r>
             <a:endParaRPr lang="en-US" sz="1300" dirty="0"/>
           </a:p>
@@ -14157,7 +14157,7 @@
                 <a:ea typeface="Nunito Sans" pitchFamily="34" charset="-122"/>
                 <a:cs typeface="Nunito Sans" pitchFamily="34" charset="-120"/>
               </a:rPr>
-              <a:t> — one @use + providePlectrum() → themed screens</a:t>
+              <a:t> — theme, styles and fonts already wired</a:t>
             </a:r>
             <a:endParaRPr lang="en-US" sz="1300" dirty="0"/>
           </a:p>
@@ -14305,7 +14305,7 @@
                 <a:ea typeface="Nunito Sans" pitchFamily="34" charset="-122"/>
                 <a:cs typeface="Nunito Sans" pitchFamily="34" charset="-120"/>
               </a:rPr>
-              <a:t> — plectrum check --profile ci on every PR</a:t>
+              <a:t> — checks, build and tests on every PR</a:t>
             </a:r>
             <a:endParaRPr lang="en-US" sz="1300" dirty="0"/>
           </a:p>
@@ -14453,7 +14453,7 @@
                 <a:ea typeface="Nunito Sans" pitchFamily="34" charset="-122"/>
                 <a:cs typeface="Nunito Sans" pitchFamily="34" charset="-120"/>
               </a:rPr>
-              <a:t> — report installed versions and component usage</a:t>
+              <a:t> — CI reports component usage to Core</a:t>
             </a:r>
             <a:endParaRPr lang="en-US" sz="1300" dirty="0"/>
           </a:p>
@@ -19765,7 +19765,7 @@
                 <a:ea typeface="Nunito Sans" pitchFamily="34" charset="-122"/>
                 <a:cs typeface="Nunito Sans" pitchFamily="34" charset="-120"/>
               </a:rPr>
-              <a:t>libs/ui component</a:t>
+              <a:t>your component</a:t>
             </a:r>
             <a:endParaRPr lang="en-US" sz="1300" dirty="0"/>
           </a:p>
@@ -19809,7 +19809,7 @@
                 <a:ea typeface="Nunito Sans" pitchFamily="34" charset="-122"/>
                 <a:cs typeface="Nunito Sans" pitchFamily="34" charset="-120"/>
               </a:rPr>
-              <a:t>starter files, generated once Core approves</a:t>
+              <a:t>scaffolded locally, no approval needed</a:t>
             </a:r>
             <a:endParaRPr lang="en-US" sz="1200" dirty="0"/>
           </a:p>
@@ -20434,7 +20434,7 @@
                 <a:ea typeface="Nunito Sans" pitchFamily="34" charset="-122"/>
                 <a:cs typeface="Nunito Sans" pitchFamily="34" charset="-120"/>
               </a:rPr>
-              <a:t>Cursor and VS Code / Copilot, generated by plectrum init.</a:t>
+              <a:t>Cursor and VS Code / Copilot, generated at npm install.</a:t>
             </a:r>
             <a:endParaRPr lang="en-US" sz="1200" dirty="0"/>
           </a:p>
@@ -23058,7 +23058,7 @@
                 <a:ea typeface="Alegreya Sans" pitchFamily="34" charset="-122"/>
                 <a:cs typeface="Alegreya Sans" pitchFamily="34" charset="-120"/>
               </a:rPr>
-              <a:t>“You can still do any of these steps by hand. It is a choice, not a requirement.”</a:t>
+              <a:t>“The agent usually runs these steps; you can do each one by hand.”</a:t>
             </a:r>
             <a:endParaRPr lang="en-US" sz="1600" dirty="0"/>
           </a:p>

--- a/docs/Storybook for application teams.pptx
+++ b/docs/Storybook for application teams.pptx
@@ -869,7 +869,7 @@
           <a:p>
             <a:r>
               <a:rPr lang="en-US" dirty="0"/>
-              <a:t>KEY MESSAGE: build locally; propose to share. - Small fix (typo, example, link): PR on Plectrum. - Gap (component, variant, token): check themed PrimeNG and Core first; if nothing fits, the team builds it in its own repo — no approval needed. - To share it, open a proposal = a GitHub issue on Plectrum: the need, what you tried, a Figma link, a preview. - Core records one decision: use-existing · app-specific · rejected · approved-candidate. - Only approved-candidate lets the team submit the component to Core; the other decisions keep it local. - Your team builds it → your team owns it. Nothing becomes Core automatically. Source: Contribute › Proposal decisions — https://solidaris-danielbodigil.github.io/solidaris-plectrum/storybook/latest/?path=/docs/get-started-contribute--docs</a:t>
+              <a:t>KEY MESSAGE: build locally; propose to share. - Small fix (typo, example, link): PR on Plectrum. - Gap (component, variant, token): check themed PrimeNG and Core first; if nothing fits, the team builds it in its own repo — no approval needed. - To share it, open a proposal = a GitHub issue on Plectrum: the need, what you tried, a Figma link, a preview. - Core records one decision: use-existing · app-specific · rejected · approved-candidate. - Only approved-candidate lets the team submit the component to Core; the other decisions keep it local. - Your team builds it → your team owns it. Nothing becomes Core automatically. - Before building, ask /plectrum: it often finds that an existing component or composition already does the job. For new UX, talk early to the core team or a designer — advice, not an approval step. Source: Contribute › Proposal decisions — https://solidaris-danielbodigil.github.io/solidaris-plectrum/storybook/latest/?path=/docs/get-started-contribute--docs</a:t>
             </a:r>
             <a:endParaRPr lang="en-US" dirty="0"/>
           </a:p>
@@ -957,7 +957,7 @@
           <a:p>
             <a:r>
               <a:rPr lang="en-US" dirty="0"/>
-              <a:t>KEY MESSAGE: two routes to Core — from an app team or from the design team. - Propose early: Core can spot duplicates and give guidance on reuse, naming and tokens — and the team never waits to build locally. - Colours = actor: green app, blue Core, orange designer, grey release. - Every proposal is a GitHub issue in the central Plectrum repo — from an app team or a designer. - App route: the team builds in its repo → proposes the component → Core decides → the team submits (candidate-submit) → Core integrates → designer updates Figma → release → the app adopts. - Until integration, the component stays the app's; nothing becomes Core automatically. - Local components use feature names (c-affiliate-*), never Core names; the app checks still apply. - Design route: designer proposes from Custom components → Core decides and builds → release. Example: Profile header. - Corrections and Core work: a reviewed PR in the Plectrum repo. Source: Contribute — https://solidaris-danielbodigil.github.io/solidaris-plectrum/storybook/latest/?path=/docs/get-started-contribute--docs</a:t>
+              <a:t>KEY MESSAGE: two routes to Core — from an app team or from the design team. - Propose early: Core can spot duplicates and give guidance on reuse, naming and tokens — and the team never waits to build locally. - Ask /plectrum first: it checks reuse and helps with layout and UX; designers still join the loop early for new UX. - Colours = actor: green app, blue Core, orange designer, grey release. - Every proposal is a GitHub issue in the central Plectrum repo — from an app team or a designer. - App route: the team builds in its repo → proposes the component → Core decides → the team submits (candidate-submit) → Core integrates → designer updates Figma → release → the app adopts. - Until integration, the component stays the app's; nothing becomes Core automatically. - Local components use feature names (c-affiliate-*), never Core names; the app checks still apply. - Design route: designer proposes from Custom components → Core decides and builds → release. Example: Profile header. - Corrections and Core work: a reviewed PR in the Plectrum repo. Source: Contribute — https://solidaris-danielbodigil.github.io/solidaris-plectrum/storybook/latest/?path=/docs/get-started-contribute--docs</a:t>
             </a:r>
             <a:endParaRPr lang="en-US" dirty="0"/>
           </a:p>
@@ -1749,7 +1749,7 @@
           <a:p>
             <a:r>
               <a:rPr lang="en-US" dirty="0"/>
-              <a:t>KEY MESSAGE: the agent prepares, checks verify, people decide. - /plectrum is the only user-facing agent; it coordinates 6 specialists. - UX Researcher: Figma inspection, design brief (read-only). - UX Engineer: SCSS tokens, styles, stories. - Frontend Dev: Angular implementation, a11y, PrimeNG wiring. - Tester: unit tests, story coverage, WCAG 2.1 AA. - Token Auditor + Architect: drift, naming, boundaries (read-only). - Written once in .ai/agents/; npm install (plectrum bootstrap) generates them in each app repo. - Local components need no Core decision; sharing through Core still needs a proposal, a decision, a review and a release. Source: AI strategy › Subagents — https://solidaris-danielbodigil.github.io/solidaris-plectrum/storybook/latest/?path=/docs/docs-ai-strategy--docs</a:t>
+              <a:t>KEY MESSAGE: the agent prepares, checks verify, people decide. - /plectrum is the only user-facing agent; it coordinates 6 specialists. - UX Researcher: Figma inspection, design brief (read-only). - UX Engineer: SCSS tokens, styles, stories. - Frontend Dev: Angular implementation, a11y, PrimeNG wiring. - Tester: unit tests, story coverage, WCAG 2.1 AA. - Token Auditor + Architect: drift, naming, boundaries (read-only). - Written once in .ai/agents/; npm install (plectrum bootstrap) generates them in each app repo. - Local components need no Core decision; sharing through Core still needs a proposal, a decision, a review and a release. - In an application, /plectrum is the team's first reviewer: before anything is built it checks PrimeNG and the catalogue, says when an existing component or composition already covers the need, and answers layout and UX questions. It names what a designer should decide and recommends showing new UX early to the core team or a designer — it does not replace them. Source: AI strategy › Subagents — https://solidaris-danielbodigil.github.io/solidaris-plectrum/storybook/latest/?path=/docs/docs-ai-strategy--docs</a:t>
             </a:r>
             <a:endParaRPr lang="en-US" dirty="0"/>
           </a:p>
@@ -10657,7 +10657,7 @@
                 <a:ea typeface="Nunito Sans" pitchFamily="34" charset="-122"/>
                 <a:cs typeface="Nunito Sans" pitchFamily="34" charset="-120"/>
               </a:rPr>
-              <a:t> propose early so Core can spot duplicates — you never wait to build locally.</a:t>
+              <a:t> ask /plectrum first, and show new UX early to Core or a designer.</a:t>
             </a:r>
             <a:endParaRPr lang="en-US" sz="1400" dirty="0"/>
           </a:p>
@@ -20390,7 +20390,7 @@
                 <a:ea typeface="Nunito Sans" pitchFamily="34" charset="-122"/>
                 <a:cs typeface="Nunito Sans" pitchFamily="34" charset="-120"/>
               </a:rPr>
-              <a:t>The only agent you talk to. It delegates to the specialists.</a:t>
+              <a:t>Your first reviewer: reuse, layout, UX. It delegates to the specialists.</a:t>
             </a:r>
             <a:endParaRPr lang="en-US" sz="1200" dirty="0"/>
           </a:p>

--- a/docs/Storybook for application teams.pptx
+++ b/docs/Storybook for application teams.pptx
@@ -869,7 +869,7 @@
           <a:p>
             <a:r>
               <a:rPr lang="en-US" dirty="0"/>
-              <a:t>KEY MESSAGE: build locally; propose to share. - Small fix (typo, example, link): PR on Plectrum. - Gap (component, variant, token): check themed PrimeNG and Core first; if nothing fits, the team builds it in its own repo — no approval needed. - To share it, open a proposal = a GitHub issue on Plectrum: the need, what you tried, a Figma link, a preview. - Core records one decision: use-existing · app-specific · rejected · approved-candidate. - Only approved-candidate lets the team submit the component to Core; the other decisions keep it local. - Your team builds it → your team owns it. Nothing becomes Core automatically. - Before building, ask /plectrum: it often finds that an existing component or composition already does the job. For new UX, talk early to the core team or a designer — advice, not an approval step. Source: Contribute › Proposal decisions — https://solidaris-danielbodigil.github.io/solidaris-plectrum/storybook/latest/?path=/docs/get-started-contribute--docs</a:t>
+              <a:t>KEY MESSAGE: build locally; propose to share. - Small fix (typo, example, link): PR on Plectrum. - Gap (component, variant, token): check themed PrimeNG and Core first; if nothing fits, the team builds it in its own repo — no approval needed. - To share it, open a proposal = a GitHub issue on Plectrum: the need, what you tried, a Figma link, a preview. - Core records one decision: use-existing · app-specific · rejected · approved-candidate. - Only approved-candidate lets the team submit the component to Core; the other decisions keep it local. - Your team builds it → your team owns it. Nothing becomes Core automatically. - Before building, ask /plectrum: it often finds that an existing component or composition already does the job. For new UX, talk early to the core team or a designer — advice, not an approval step. - Teams do not have to spot what is worth sharing: each local component's evidence checklist has a Reuse potential line (none / possible / likely), the usage report sends it to Core, and Core reviews the Local scope of Find a component to pick what to share. Source: Contribute › Proposal decisions — https://solidaris-danielbodigil.github.io/solidaris-plectrum/storybook/latest/?path=/docs/get-started-contribute--docs</a:t>
             </a:r>
             <a:endParaRPr lang="en-US" dirty="0"/>
           </a:p>
@@ -957,7 +957,7 @@
           <a:p>
             <a:r>
               <a:rPr lang="en-US" dirty="0"/>
-              <a:t>KEY MESSAGE: two routes to Core — from an app team or from the design team. - Propose early: Core can spot duplicates and give guidance on reuse, naming and tokens — and the team never waits to build locally. - Ask /plectrum first: it checks reuse and helps with layout and UX; designers still join the loop early for new UX. - Colours = actor: green app, blue Core, orange designer, grey release. - Every proposal is a GitHub issue in the central Plectrum repo — from an app team or a designer. - App route: the team builds in its repo → proposes the component → Core decides → the team submits (candidate-submit) → Core integrates → designer updates Figma → release → the app adopts. - Until integration, the component stays the app's; nothing becomes Core automatically. - Local components use feature names (c-affiliate-*), never Core names; the app checks still apply. - Design route: designer proposes from Custom components → Core decides and builds → release. Example: Profile header. - Corrections and Core work: a reviewed PR in the Plectrum repo. Source: Contribute — https://solidaris-danielbodigil.github.io/solidaris-plectrum/storybook/latest/?path=/docs/get-started-contribute--docs</a:t>
+              <a:t>KEY MESSAGE: two routes to Core — from an app team or from the design team. - Propose early: Core can spot duplicates and give guidance on reuse, naming and tokens — and the team never waits to build locally. - Ask /plectrum first: it checks reuse and helps with layout and UX; designers still join the loop early for new UX. - Step 1 in practice: npm run pds:component lists similar components other teams already built; the team fills the Reuse potential line; CI reports the component to Core. Core contacts the team when a component is worth sharing. - Colours = actor: green app, blue Core, orange designer, grey release. - Every proposal is a GitHub issue in the central Plectrum repo — from an app team or a designer. - App route: the team builds in its repo → proposes the component → Core decides → the team submits (candidate-submit) → Core integrates → designer updates Figma → release → the app adopts. - Until integration, the component stays the app's; nothing becomes Core automatically. - Local components use feature names (c-affiliate-*), never Core names; the app checks still apply. - Design route: designer proposes from Custom components → Core decides and builds → release. Example: Profile header. - Corrections and Core work: a reviewed PR in the Plectrum repo. Source: Contribute — https://solidaris-danielbodigil.github.io/solidaris-plectrum/storybook/latest/?path=/docs/get-started-contribute--docs</a:t>
             </a:r>
             <a:endParaRPr lang="en-US" dirty="0"/>
           </a:p>
@@ -1045,7 +1045,7 @@
           <a:p>
             <a:r>
               <a:rPr lang="en-US" dirty="0"/>
-              <a:t>KEY MESSAGE: the whole process exists to stop teams redoing the same work — and everyone gains something. - Less duplicate maintenance (Core, app teams): one source, generated docs, no design-system code copied into apps. - Fewer local variants (app teams, Solidaris): PrimeNG → Core → local build → proposal; one look across applications. - Earlier feedback (app teams, designers): stories, CI and review catch issues in the PR; sync results land in Figma. - Repeatable adoption (Solidaris, new teams): a new team = the starter + npm install; upgrades arrive as PRs; usage reports show who uses what. - Ask of every team: consume the packages, run the checks, return shared improvements through a GitHub issue. - Next step: one real pilot team walks the full path — local build → proposal → decision → submission → integration → release → adoption. Source: Overview — https://solidaris-danielbodigil.github.io/solidaris-plectrum/storybook/latest/?path=/docs/introduction--docs</a:t>
+              <a:t>KEY MESSAGE: the whole process exists to stop teams redoing the same work — and everyone gains something. - Less duplicate maintenance (Core, app teams): one source, generated docs, no design-system code copied into apps. - Fewer local variants (app teams, Solidaris): PrimeNG → Core → local build; local components are reported to Core, scaffold warns about similar ones from other teams, and Core picks what to share. - Earlier feedback (app teams, designers): stories, CI and review catch issues in the PR; sync results land in Figma. - Repeatable adoption (Solidaris, new teams): a new team = the starter + npm install; upgrades arrive as PRs; usage reports show who uses what. - Ask of every team: consume the packages, run the checks, return shared improvements through a GitHub issue. - Next step: one real pilot team walks the full path — local build → proposal → decision → submission → integration → release → adoption. Source: Overview — https://solidaris-danielbodigil.github.io/solidaris-plectrum/storybook/latest/?path=/docs/introduction--docs</a:t>
             </a:r>
             <a:endParaRPr lang="en-US" dirty="0"/>
           </a:p>
@@ -1309,7 +1309,7 @@
           <a:p>
             <a:r>
               <a:rPr lang="en-US" dirty="0"/>
-              <a:t>KEY MESSAGE: teams don't copy Plectrum — they install it as versioned packages and keep their own repo. - 4 packages under @solidaris-danielbodigil on GitHub Packages (private; the team needs read access). - Runtime: pds-ui, pds-plectrum, pds-styles (styles, tokens, Agenda and Open Sans fonts) — version together. Toolkit: pds-devkit — dev dependency, own version. - Install: copy the Plectrum starter, set the team and application IDs in package.json, run npm install. - Set up: npm install runs plectrum bootstrap — empty local ITCSS layers, styles and fonts wired, local Storybook, unit and story tests, a pre-commit hook, agents and a CI workflow. Commit the generated files. - Build: providePlectrum() is already in app.config; local styles go in src/styles/06-components. - Validate: the generated workflow runs the checks, the build, unit tests and story + accessibility tests on every PR. - Adopt: CI sends a usage report to Core once the team is registered and the PLECTRUM_ADOPTION_TOKEN secret is set; the local Storybook page Plectrum/Setup shows what is missing. - Upgrade: Renovate / Dependabot PRs → plectrum update → checks. What's new lists the changes. Source: Build with Plectrum — https://solidaris-danielbodigil.github.io/solidaris-plectrum/storybook/latest/?path=/docs/get-started-use-plectrum-in-an-app--docs</a:t>
+              <a:t>KEY MESSAGE: teams don't copy Plectrum — they install it as versioned packages and keep their own repo. - 4 packages under @solidaris-danielbodigil on GitHub Packages (private; the team needs read access). - Runtime: pds-ui, pds-plectrum, pds-styles (styles, tokens, Agenda and Open Sans fonts) — version together. Toolkit: pds-devkit — dev dependency, own version. - Install: copy the Plectrum starter, set the team and application IDs in package.json, run npm install. - Set up: npm install runs plectrum bootstrap — empty local ITCSS layers, styles and fonts wired, local Storybook, unit and story tests, a pre-commit hook, agents and a CI workflow. Commit the generated files. - Build: providePlectrum() is already in app.config; local styles go in src/styles/06-components. - Validate: the generated workflow runs the checks, the build, unit tests and story + accessibility tests on every PR. - Adopt: CI sends a usage report to Core — the Plectrum components the app uses and the team's local components with their reuse estimate — once the team is registered and the PLECTRUM_ADOPTION_TOKEN secret is set; the local Storybook page Plectrum/Setup shows what is missing. - Upgrade: Renovate / Dependabot PRs → plectrum update → checks. What's new lists the changes. Source: Build with Plectrum — https://solidaris-danielbodigil.github.io/solidaris-plectrum/storybook/latest/?path=/docs/get-started-use-plectrum-in-an-app--docs</a:t>
             </a:r>
             <a:endParaRPr lang="en-US" dirty="0"/>
           </a:p>
@@ -7705,7 +7705,7 @@
                 <a:ea typeface="Nunito Sans" pitchFamily="34" charset="-122"/>
                 <a:cs typeface="Nunito Sans" pitchFamily="34" charset="-120"/>
               </a:rPr>
-              <a:t>your team builds and owns it</a:t>
+              <a:t>your team builds it, then submits it</a:t>
             </a:r>
             <a:endParaRPr lang="en-US" sz="1196" dirty="0"/>
           </a:p>
@@ -11241,7 +11241,7 @@
                 <a:ea typeface="Nunito Sans" pitchFamily="34" charset="-122"/>
                 <a:cs typeface="Nunito Sans" pitchFamily="34" charset="-120"/>
               </a:rPr>
-              <a:t>reuse + contracts</a:t>
+              <a:t>reuse + local components seen by Core</a:t>
             </a:r>
             <a:endParaRPr lang="en-US" sz="1200" dirty="0"/>
           </a:p>
@@ -14453,7 +14453,7 @@
                 <a:ea typeface="Nunito Sans" pitchFamily="34" charset="-122"/>
                 <a:cs typeface="Nunito Sans" pitchFamily="34" charset="-120"/>
               </a:rPr>
-              <a:t> — CI reports component usage to Core</a:t>
+              <a:t> — CI reports usage and local components</a:t>
             </a:r>
             <a:endParaRPr lang="en-US" sz="1300" dirty="0"/>
           </a:p>

--- a/docs/Storybook for application teams.pptx
+++ b/docs/Storybook for application teams.pptx
@@ -869,7 +869,7 @@
           <a:p>
             <a:r>
               <a:rPr lang="en-US" dirty="0"/>
-              <a:t>KEY MESSAGE: build locally; propose to share. - Small fix (typo, example, link): PR on Plectrum. - Gap (component, variant, token): check themed PrimeNG and Core first; if nothing fits, the team builds it in its own repo — no approval needed. - To share it, open a proposal = a GitHub issue on Plectrum: the need, what you tried, a Figma link, a preview. - Core records one decision: use-existing · app-specific · rejected · approved-candidate. - Only approved-candidate lets the team submit the component to Core; the other decisions keep it local. - Your team builds it → your team owns it. Nothing becomes Core automatically. - Before building, ask /plectrum: it often finds that an existing component or composition already does the job. For new UX, talk early to the core team or a designer — advice, not an approval step. - Teams do not have to spot what is worth sharing: each local component's evidence checklist has a Reuse potential line (none / possible / likely), the usage report sends it to Core, and Core reviews the Local scope of Find a component to pick what to share. Source: Contribute › Proposal decisions — https://solidaris-danielbodigil.github.io/solidaris-plectrum/storybook/latest/?path=/docs/get-started-contribute--docs</a:t>
+              <a:t>KEY MESSAGE: build locally; propose to share. - Small fix (typo, example, link): PR on Plectrum. - Gap (component, variant, token): check themed PrimeNG and Core first; if nothing fits, the team builds it in its own repo — no approval needed. - To share it, open a proposal = a GitHub issue on Plectrum: the need, what you tried, a Figma link, a preview. - Core records one of three decisions: use-existing · app-specific · approved-candidate. There is no rejection — the team owns its component and can always keep it locally. - Only approved-candidate lets the team submit the component to Core; the other two keep it in the application. - Your team builds it → your team owns it. Nothing becomes Core automatically. - Before building, ask /plectrum: it often finds that an existing component or composition already does the job. For new UX, talk early to the core team or a designer — advice, not an approval step. - Teams do not have to spot what is worth sharing: each local component's evidence checklist has a Reuse potential line (none / possible / likely), the usage report sends it to Core, and Core reviews the Local scope of Find a component to pick what to share. Source: Contribute › Proposal decisions — https://solidaris-danielbodigil.github.io/solidaris-plectrum/storybook/latest/?path=/docs/get-started-contribute--docs</a:t>
             </a:r>
             <a:endParaRPr lang="en-US" dirty="0"/>
           </a:p>
@@ -7483,128 +7483,13 @@
       </p:sp>
       <p:sp>
         <p:nvSpPr>
-          <p:cNvPr id="22" name="Shape 20"/>
-          <p:cNvSpPr/>
-          <p:nvPr/>
-        </p:nvSpPr>
-        <p:spPr>
-          <a:xfrm>
-            <a:off x="8210550" y="4397871"/>
-            <a:ext cx="3162300" cy="546100"/>
-          </a:xfrm>
-          <a:prstGeom prst="roundRect">
-            <a:avLst>
-              <a:gd name="adj" fmla="val 15116"/>
-            </a:avLst>
-          </a:prstGeom>
-          <a:solidFill>
-            <a:srgbClr val="FFFFFF"/>
-          </a:solidFill>
-          <a:ln w="12700">
-            <a:solidFill>
-              <a:srgbClr val="7A838C"/>
-            </a:solidFill>
-            <a:prstDash val="solid"/>
-          </a:ln>
-        </p:spPr>
-      </p:sp>
-      <p:sp>
-        <p:nvSpPr>
-          <p:cNvPr id="23" name="Text 21"/>
-          <p:cNvSpPr/>
-          <p:nvPr/>
-        </p:nvSpPr>
-        <p:spPr>
-          <a:xfrm>
-            <a:off x="8343900" y="4457601"/>
-            <a:ext cx="2982468" cy="238720"/>
-          </a:xfrm>
-          <a:prstGeom prst="rect">
-            <a:avLst/>
-          </a:prstGeom>
-          <a:noFill/>
-          <a:ln/>
-        </p:spPr>
-        <p:txBody>
-          <a:bodyPr wrap="square" lIns="0" tIns="0" rIns="0" bIns="0" rtlCol="0" anchor="t">
-            <a:normAutofit/>
-          </a:bodyPr>
-          <a:lstStyle/>
-          <a:p>
-            <a:pPr algn="l" indent="0" marL="0">
-              <a:lnSpc>
-                <a:spcPts val="1680"/>
-              </a:lnSpc>
-              <a:buNone/>
-            </a:pPr>
-            <a:r>
-              <a:rPr lang="en-US" sz="1200" b="1" dirty="0">
-                <a:solidFill>
-                  <a:srgbClr val="4A535B"/>
-                </a:solidFill>
-                <a:latin typeface="JetBrains Mono" pitchFamily="34" charset="0"/>
-                <a:ea typeface="JetBrains Mono" pitchFamily="34" charset="-122"/>
-                <a:cs typeface="JetBrains Mono" pitchFamily="34" charset="-120"/>
-              </a:rPr>
-              <a:t>rejected</a:t>
-            </a:r>
-            <a:endParaRPr lang="en-US" sz="1200" dirty="0"/>
-          </a:p>
-        </p:txBody>
-      </p:sp>
-      <p:sp>
-        <p:nvSpPr>
-          <p:cNvPr id="24" name="Text 22"/>
-          <p:cNvSpPr/>
-          <p:nvPr/>
-        </p:nvSpPr>
-        <p:spPr>
-          <a:xfrm>
-            <a:off x="8343900" y="4670921"/>
-            <a:ext cx="2982468" cy="238720"/>
-          </a:xfrm>
-          <a:prstGeom prst="rect">
-            <a:avLst/>
-          </a:prstGeom>
-          <a:noFill/>
-          <a:ln/>
-        </p:spPr>
-        <p:txBody>
-          <a:bodyPr wrap="square" lIns="0" tIns="0" rIns="0" bIns="0" rtlCol="0" anchor="t">
-            <a:normAutofit/>
-          </a:bodyPr>
-          <a:lstStyle/>
-          <a:p>
-            <a:pPr algn="l" indent="0" marL="0">
-              <a:lnSpc>
-                <a:spcPts val="1680"/>
-              </a:lnSpc>
-              <a:buNone/>
-            </a:pPr>
-            <a:r>
-              <a:rPr lang="en-US" sz="1200" dirty="0">
-                <a:solidFill>
-                  <a:srgbClr val="55555C"/>
-                </a:solidFill>
-                <a:latin typeface="Nunito Sans" pitchFamily="34" charset="0"/>
-                <a:ea typeface="Nunito Sans" pitchFamily="34" charset="-122"/>
-                <a:cs typeface="Nunito Sans" pitchFamily="34" charset="-120"/>
-              </a:rPr>
-              <a:t>not shared; build locally if needed</a:t>
-            </a:r>
-            <a:endParaRPr lang="en-US" sz="1200" dirty="0"/>
-          </a:p>
-        </p:txBody>
-      </p:sp>
-      <p:sp>
-        <p:nvSpPr>
           <p:cNvPr id="25" name="Shape 23"/>
           <p:cNvSpPr/>
           <p:nvPr/>
         </p:nvSpPr>
         <p:spPr>
           <a:xfrm>
-            <a:off x="8213725" y="5112246"/>
+            <a:off x="8213725" y="4397871"/>
             <a:ext cx="3155950" cy="539750"/>
           </a:xfrm>
           <a:prstGeom prst="roundRect">
@@ -7631,7 +7516,7 @@
         </p:nvSpPr>
         <p:spPr>
           <a:xfrm>
-            <a:off x="8350250" y="5172571"/>
+            <a:off x="8350250" y="4458196"/>
             <a:ext cx="2969387" cy="234950"/>
           </a:xfrm>
           <a:prstGeom prst="rect">
@@ -7675,7 +7560,7 @@
         </p:nvSpPr>
         <p:spPr>
           <a:xfrm>
-            <a:off x="8350250" y="5382121"/>
+            <a:off x="8350250" y="4667746"/>
             <a:ext cx="2969387" cy="234950"/>
           </a:xfrm>
           <a:prstGeom prst="rect">
@@ -7888,7 +7773,7 @@
         <p:spPr>
           <a:xfrm>
             <a:off x="8013700" y="3197721"/>
-            <a:ext cx="101600" cy="2235200"/>
+            <a:ext cx="101600" cy="1524000"/>
           </a:xfrm>
           <a:prstGeom prst="rect">
             <a:avLst/>
@@ -7943,29 +7828,6 @@
       </p:pic>
       <p:pic>
         <p:nvPicPr>
-          <p:cNvPr id="38" name="Image 10" descr="connector">    </p:cNvPr>
-          <p:cNvPicPr>
-            <a:picLocks noChangeAspect="1"/>
-          </p:cNvPicPr>
-          <p:nvPr/>
-        </p:nvPicPr>
-        <p:blipFill>
-          <a:blip r:embed="rId11"/>
-          <a:srcRect l="0" r="0" t="0" b="0"/>
-          <a:stretch/>
-        </p:blipFill>
-        <p:spPr>
-          <a:xfrm>
-            <a:off x="8013700" y="4620121"/>
-            <a:ext cx="241300" cy="101600"/>
-          </a:xfrm>
-          <a:prstGeom prst="rect">
-            <a:avLst/>
-          </a:prstGeom>
-        </p:spPr>
-      </p:pic>
-      <p:pic>
-        <p:nvPicPr>
           <p:cNvPr id="39" name="Image 11" descr="connector">    </p:cNvPr>
           <p:cNvPicPr>
             <a:picLocks noChangeAspect="1"/>
@@ -7979,7 +7841,7 @@
         </p:blipFill>
         <p:spPr>
           <a:xfrm>
-            <a:off x="8013700" y="5331321"/>
+            <a:off x="8013700" y="4620121"/>
             <a:ext cx="241300" cy="101600"/>
           </a:xfrm>
           <a:prstGeom prst="rect">

--- a/docs/Storybook for application teams.pptx
+++ b/docs/Storybook for application teams.pptx
@@ -517,7 +517,7 @@
           <a:p>
             <a:r>
               <a:rPr lang="en-US" dirty="0"/>
-              <a:t>KEY MESSAGE: Storybook is the entry point to Plectrum — what exists, how to use it, what state it is in. - Goal: everyone leaves knowing where to find a component, how to start, where to report a gap. - Overview only: no terminal, no live demo; details stay in Storybook. - For every application team: iShare, iCRM, iGED and every team that joins later. - Flow: structure · SSOTs · token pipelines · AI-first (optional) · CI · PRs · contributing · scale · benefits. - About 25 min + questions. - Transition: "First, where Storybook sits in Plectrum." Source: Overview — https://solidaris-danielbodigil.github.io/solidaris-plectrum/storybook/?path=/docs/introduction--docs</a:t>
+              <a:t>KEY MESSAGE: Storybook is the entry point to Plectrum — what exists, how to use it, what state it is in. - Goal: everyone leaves knowing where to find a component, how to start, where to report a gap. - Overview only: no terminal, no live demo; details stay in Storybook. - For every application team: iShare, iCRM, iGED and every team that joins later. - Flow: structure · SSOTs · token pipelines · AI-first (recommended) · CI · PRs · contributing · scale · benefits. - About 25 min + questions. - Transition: "First, where Storybook sits in Plectrum." Source: Overview — https://solidaris-danielbodigil.github.io/solidaris-plectrum/storybook/?path=/docs/introduction--docs</a:t>
             </a:r>
             <a:endParaRPr lang="en-US" dirty="0"/>
           </a:p>
@@ -1837,7 +1837,7 @@
           <a:p>
             <a:r>
               <a:rPr lang="en-US" dirty="0"/>
-              <a:t>KEY MESSAGE: no AI? Nothing lost — same scripts, same CI, same reviews. - Find — agent: PrimeNG MCP → index.json → Storybook MCP (same order as the pre-flight on slide 7). - Find — by hand: themed PrimeNG first, then Find a component or plectrum catalogue (offline). - Create: npm run pds:component in an app (no approval needed), pds:component in the Plectrum repo. - Check: npm run pds:check:ci, then build and tests. - Figma to tokens: an agent reads variables via Figma MCP, or the designer runs the plugin sync; the CI drift audit runs and a developer merges the PR. - Tokens to Figma: tokens:propose + the Plectrum tokens plugin. - Figma components: a designer draws them; merge and publish stay human. - CI runs regardless — agent and human changes alike. Source: AI strategy · Token pipeline › Commands — https://solidaris-danielbodigil.github.io/solidaris-plectrum/storybook/latest/?path=/docs/docs-ai-strategy--docs</a:t>
+              <a:t>KEY MESSAGE: the agent is recommended — it answers most reuse, layout and UX questions without waiting for Core — but working by hand stays possible: same scripts, same CI, same reviews. - Find — agent: PrimeNG MCP → index.json → Storybook MCP (same order as the pre-flight on slide 7). - Find — by hand: themed PrimeNG first, then Find a component or plectrum catalogue (offline). - Create: npm run pds:component in an app (no approval needed), pds:component in the Plectrum repo. - Check: npm run pds:check:ci, then build and tests. - Figma to tokens: an agent reads variables via Figma MCP, or the designer runs the plugin sync; the CI drift audit runs and a developer merges the PR. - Tokens to Figma: tokens:propose + the Plectrum tokens plugin. - Figma components: a designer draws them; merge and publish stay human. - CI runs regardless — agent and human changes alike. Source: AI strategy · Token pipeline › Commands — https://solidaris-danielbodigil.github.io/solidaris-plectrum/storybook/latest/?path=/docs/docs-ai-strategy--docs</a:t>
             </a:r>
             <a:endParaRPr lang="en-US" dirty="0"/>
           </a:p>
@@ -21301,7 +21301,7 @@
                 <a:ea typeface="Alegreya Sans" pitchFamily="34" charset="-122"/>
                 <a:cs typeface="Alegreya Sans" pitchFamily="34" charset="-120"/>
               </a:rPr>
-              <a:t>AI-FIRST — OPTIONAL</a:t>
+              <a:t>AI-FIRST — RECOMMENDED, NOT REQUIRED</a:t>
             </a:r>
             <a:endParaRPr lang="en-US" sz="1300" dirty="0"/>
           </a:p>

--- a/docs/Storybook for application teams.pptx
+++ b/docs/Storybook for application teams.pptx
@@ -4,6 +4,9 @@
   <p:sldMasterIdLst>
     <p:sldMasterId id="2147483648" r:id="rId1"/>
   </p:sldMasterIdLst>
+  <p:notesMasterIdLst>
+    <p:notesMasterId r:id="rId19"/>
+  </p:notesMasterIdLst>
   <p:sldIdLst>
     <p:sldId id="256" r:id="rId2"/>
     <p:sldId id="257" r:id="rId3"/>
@@ -14,17 +17,15 @@
     <p:sldId id="262" r:id="rId8"/>
     <p:sldId id="263" r:id="rId9"/>
     <p:sldId id="264" r:id="rId10"/>
-    <p:sldId id="265" r:id="rId11"/>
-    <p:sldId id="266" r:id="rId12"/>
-    <p:sldId id="267" r:id="rId13"/>
-    <p:sldId id="268" r:id="rId14"/>
-    <p:sldId id="269" r:id="rId15"/>
-    <p:sldId id="270" r:id="rId16"/>
-    <p:sldId id="271" r:id="rId17"/>
+    <p:sldId id="272" r:id="rId11"/>
+    <p:sldId id="265" r:id="rId12"/>
+    <p:sldId id="266" r:id="rId13"/>
+    <p:sldId id="267" r:id="rId14"/>
+    <p:sldId id="268" r:id="rId15"/>
+    <p:sldId id="269" r:id="rId16"/>
+    <p:sldId id="270" r:id="rId17"/>
+    <p:sldId id="271" r:id="rId18"/>
   </p:sldIdLst>
-  <p:notesMasterIdLst>
-    <p:notesMasterId r:id="rId18"/>
-  </p:notesMasterIdLst>
   <p:sldSz cx="12192000" cy="6858000"/>
   <p:notesSz cx="6858000" cy="12192000"/>
   <p:defaultTextStyle>
@@ -119,6 +120,11 @@
       </a:defRPr>
     </a:lvl9pPr>
   </p:defaultTextStyle>
+  <p:extLst>
+    <p:ext uri="{EFAFB233-063F-42B5-8137-9DF3F51BA10A}">
+      <p15:sldGuideLst xmlns:p15="http://schemas.microsoft.com/office/powerpoint/2012/main"/>
+    </p:ext>
+  </p:extLst>
 </p:presentation>
 </file>
 
@@ -144,234 +150,10 @@
           <a:chExt cx="0" cy="0"/>
         </a:xfrm>
       </p:grpSpPr>
-      <p:sp>
-        <p:nvSpPr>
-          <p:cNvPr id="2" name="Header Placeholder 1"/>
-          <p:cNvSpPr>
-            <a:spLocks noGrp="1"/>
-          </p:cNvSpPr>
-          <p:nvPr>
-            <p:ph type="hdr" sz="quarter"/>
-          </p:nvPr>
-        </p:nvSpPr>
-        <p:spPr>
-          <a:xfrm>
-            <a:off x="0" y="0"/>
-            <a:ext cx="2971800" cy="458788"/>
-          </a:xfrm>
-          <a:prstGeom prst="rect">
-            <a:avLst/>
-          </a:prstGeom>
-        </p:spPr>
-        <p:txBody>
-          <a:bodyPr vert="horz" lIns="91440" tIns="45720" rIns="91440" bIns="45720" rtlCol="0"/>
-          <a:lstStyle>
-            <a:lvl1pPr algn="l">
-              <a:defRPr sz="1200"/>
-            </a:lvl1pPr>
-          </a:lstStyle>
-          <a:p>
-            <a:endParaRPr lang="en-US"/>
-          </a:p>
-        </p:txBody>
-      </p:sp>
-      <p:sp>
-        <p:nvSpPr>
-          <p:cNvPr id="3" name="Date Placeholder 2"/>
-          <p:cNvSpPr>
-            <a:spLocks noGrp="1"/>
-          </p:cNvSpPr>
-          <p:nvPr>
-            <p:ph type="dt" idx="1"/>
-          </p:nvPr>
-        </p:nvSpPr>
-        <p:spPr>
-          <a:xfrm>
-            <a:off x="3884613" y="0"/>
-            <a:ext cx="2971800" cy="458788"/>
-          </a:xfrm>
-          <a:prstGeom prst="rect">
-            <a:avLst/>
-          </a:prstGeom>
-        </p:spPr>
-        <p:txBody>
-          <a:bodyPr vert="horz" lIns="91440" tIns="45720" rIns="91440" bIns="45720" rtlCol="0"/>
-          <a:lstStyle>
-            <a:lvl1pPr algn="r">
-              <a:defRPr sz="1200"/>
-            </a:lvl1pPr>
-          </a:lstStyle>
-          <a:p>
-            <a:fld id="{5282F153-3F37-0F45-9E97-73ACFA13230C}" type="datetimeFigureOut">
-              <a:rPr lang="en-US"/>
-              <a:t>7/23/19</a:t>
-            </a:fld>
-            <a:endParaRPr lang="en-US"/>
-          </a:p>
-        </p:txBody>
-      </p:sp>
-      <p:sp>
-        <p:nvSpPr>
-          <p:cNvPr id="4" name="Slide Image Placeholder 3"/>
-          <p:cNvSpPr>
-            <a:spLocks noGrp="1" noRot="1" noChangeAspect="1"/>
-          </p:cNvSpPr>
-          <p:nvPr>
-            <p:ph type="sldImg" idx="2"/>
-          </p:nvPr>
-        </p:nvSpPr>
-        <p:spPr>
-          <a:xfrm>
-            <a:off x="685800" y="1143000"/>
-            <a:ext cx="5486400" cy="3086100"/>
-          </a:xfrm>
-          <a:prstGeom prst="rect">
-            <a:avLst/>
-          </a:prstGeom>
-          <a:noFill/>
-          <a:ln w="12700">
-            <a:solidFill>
-              <a:prstClr val="black"/>
-            </a:solidFill>
-          </a:ln>
-        </p:spPr>
-        <p:txBody>
-          <a:bodyPr vert="horz" lIns="91440" tIns="45720" rIns="91440" bIns="45720" rtlCol="0" anchor="ctr"/>
-          <a:lstStyle/>
-          <a:p>
-            <a:endParaRPr lang="en-US"/>
-          </a:p>
-        </p:txBody>
-      </p:sp>
-      <p:sp>
-        <p:nvSpPr>
-          <p:cNvPr id="5" name="Notes Placeholder 4"/>
-          <p:cNvSpPr>
-            <a:spLocks noGrp="1"/>
-          </p:cNvSpPr>
-          <p:nvPr>
-            <p:ph type="body" sz="quarter" idx="3"/>
-          </p:nvPr>
-        </p:nvSpPr>
-        <p:spPr>
-          <a:xfrm>
-            <a:off x="685800" y="4400550"/>
-            <a:ext cx="5486400" cy="3600450"/>
-          </a:xfrm>
-          <a:prstGeom prst="rect">
-            <a:avLst/>
-          </a:prstGeom>
-        </p:spPr>
-        <p:txBody>
-          <a:bodyPr vert="horz" lIns="91440" tIns="45720" rIns="91440" bIns="45720" rtlCol="0"/>
-          <a:lstStyle/>
-          <a:p>
-            <a:pPr lvl="0"/>
-            <a:r>
-              <a:rPr lang="en-US"/>
-              <a:t>Click to edit Master text styles</a:t>
-            </a:r>
-          </a:p>
-          <a:p>
-            <a:pPr lvl="1"/>
-            <a:r>
-              <a:rPr lang="en-US"/>
-              <a:t>Second level</a:t>
-            </a:r>
-          </a:p>
-          <a:p>
-            <a:pPr lvl="2"/>
-            <a:r>
-              <a:rPr lang="en-US"/>
-              <a:t>Third level</a:t>
-            </a:r>
-          </a:p>
-          <a:p>
-            <a:pPr lvl="3"/>
-            <a:r>
-              <a:rPr lang="en-US"/>
-              <a:t>Fourth level</a:t>
-            </a:r>
-          </a:p>
-          <a:p>
-            <a:pPr lvl="4"/>
-            <a:r>
-              <a:rPr lang="en-US"/>
-              <a:t>Fifth level</a:t>
-            </a:r>
-          </a:p>
-        </p:txBody>
-      </p:sp>
-      <p:sp>
-        <p:nvSpPr>
-          <p:cNvPr id="6" name="Footer Placeholder 5"/>
-          <p:cNvSpPr>
-            <a:spLocks noGrp="1"/>
-          </p:cNvSpPr>
-          <p:nvPr>
-            <p:ph type="ftr" sz="quarter" idx="4"/>
-          </p:nvPr>
-        </p:nvSpPr>
-        <p:spPr>
-          <a:xfrm>
-            <a:off x="0" y="8685213"/>
-            <a:ext cx="2971800" cy="458787"/>
-          </a:xfrm>
-          <a:prstGeom prst="rect">
-            <a:avLst/>
-          </a:prstGeom>
-        </p:spPr>
-        <p:txBody>
-          <a:bodyPr vert="horz" lIns="91440" tIns="45720" rIns="91440" bIns="45720" rtlCol="0" anchor="b"/>
-          <a:lstStyle>
-            <a:lvl1pPr algn="l">
-              <a:defRPr sz="1200"/>
-            </a:lvl1pPr>
-          </a:lstStyle>
-          <a:p>
-            <a:endParaRPr lang="en-US"/>
-          </a:p>
-        </p:txBody>
-      </p:sp>
-      <p:sp>
-        <p:nvSpPr>
-          <p:cNvPr id="7" name="Slide Number Placeholder 6"/>
-          <p:cNvSpPr>
-            <a:spLocks noGrp="1"/>
-          </p:cNvSpPr>
-          <p:nvPr>
-            <p:ph type="sldNum" sz="quarter" idx="5"/>
-          </p:nvPr>
-        </p:nvSpPr>
-        <p:spPr>
-          <a:xfrm>
-            <a:off x="3884613" y="8685213"/>
-            <a:ext cx="2971800" cy="458787"/>
-          </a:xfrm>
-          <a:prstGeom prst="rect">
-            <a:avLst/>
-          </a:prstGeom>
-        </p:spPr>
-        <p:txBody>
-          <a:bodyPr vert="horz" lIns="91440" tIns="45720" rIns="91440" bIns="45720" rtlCol="0" anchor="b"/>
-          <a:lstStyle>
-            <a:lvl1pPr algn="r">
-              <a:defRPr sz="1200"/>
-            </a:lvl1pPr>
-          </a:lstStyle>
-          <a:p>
-            <a:fld id="{CE5E9CC1-C706-0F49-92D6-E571CC5EEA8F}" type="slidenum">
-              <a:rPr lang="en-US"/>
-              <a:t>‹#›</a:t>
-            </a:fld>
-            <a:endParaRPr lang="en-US"/>
-          </a:p>
-        </p:txBody>
-      </p:sp>
     </p:spTree>
     <p:extLst>
       <p:ext uri="{BB962C8B-B14F-4D97-AF65-F5344CB8AC3E}">
-        <p14:creationId xmlns:p14="http://schemas.microsoft.com/office/powerpoint/2010/main" val="1024086991"/>
+        <p14:creationId xmlns:p14="http://schemas.microsoft.com/office/powerpoint/2010/main" val="1268315064"/>
       </p:ext>
     </p:extLst>
   </p:cSld>
@@ -519,7 +301,6 @@
               <a:rPr lang="en-US" dirty="0"/>
               <a:t>KEY MESSAGE: Storybook is the entry point to Plectrum — what exists, how to use it, what state it is in. - Goal: everyone leaves knowing where to find a component, how to start, where to report a gap. - Overview only: no terminal, no live demo; details stay in Storybook. - For every application team: iShare, iCRM, iGED and every team that joins later. - Flow: structure · SSOTs · token pipelines · AI-first (recommended) · CI · PRs · contributing · scale · benefits. - About 25 min + questions. - Transition: "First, where Storybook sits in Plectrum." Source: Overview — https://solidaris-danielbodigil.github.io/solidaris-plectrum/storybook/?path=/docs/introduction--docs</a:t>
             </a:r>
-            <a:endParaRPr lang="en-US" dirty="0"/>
           </a:p>
         </p:txBody>
       </p:sp>
@@ -607,7 +388,6 @@
               <a:rPr lang="en-US" dirty="0"/>
               <a:t>KEY MESSAGE: four gates, one rule — nothing merges on trust. - Before commit: git hook — check:commit in Plectrum, a fast token check in apps. - Every Plectrum PR (ci.yml): intake-guard · build (drift audit, docs:check, contracts:check, lint, unit tests) · pack-smoke · storybook-tests (interaction + a11y) · storybook-packed · figma-plugin. - Chromatic visual tests: only when enabled — don't promise more. - Every token sync: three-way drift audit (blocking); report in the PR and in Figma. - Every app repo: the generated workflow runs the Plectrum checks (no hex, px or unknown --pds-*), the build, unit tests, story + accessibility tests, and sends the usage report after a push to main. - Release: same commit's CI, clean-app install, matching Storybook; "latest" never moves on a partial release. Source: Maintainer workflow — https://solidaris-danielbodigil.github.io/solidaris-plectrum/storybook/latest/?path=/docs/docs-maintainer-workflow--docs</a:t>
             </a:r>
-            <a:endParaRPr lang="en-US" dirty="0"/>
           </a:p>
         </p:txBody>
       </p:sp>
@@ -693,9 +473,8 @@
           <a:p>
             <a:r>
               <a:rPr lang="en-US" dirty="0"/>
-              <a:t>KEY MESSAGE: a PR merges on evidence, not trust — tests and CI produce it, with or without AI. - Unit tests: Vitest — logic and coverage. - Story tests: every story renders; interaction (play) tests; axe accessibility checks. - Contracts + tokens: contracts:check (API), docs:check, generated files committed, token audit. - Package smoke: pack the libraries, install them in a clean app built from the starter, build it and run its stories — exactly what a team repo does. - Application CI: Plectrum checks, build, unit tests, story + accessibility tests. - Chromatic visual tests only when enabled — don't promise more. - Same gates for agent and human changes. Source: Maintainer workflow — https://solidaris-danielbodigil.github.io/solidaris-plectrum/storybook/latest/?path=/docs/docs-maintainer-workflow--docs</a:t>
-            </a:r>
-            <a:endParaRPr lang="en-US" dirty="0"/>
+              <a:t>KEY MESSAGE: four gates, one rule — nothing merges on trust. - Before commit: git hook — check:commit in Plectrum, a fast token check in apps. - Every Plectrum PR (ci.yml): intake-guard · build (drift audit, docs:check, contracts:check, lint, unit tests) · pack-smoke · storybook-tests (interaction + a11y) · storybook-packed · figma-plugin. - Chromatic visual tests: only when enabled — don't promise more. - Every token sync: three-way drift audit (blocking); report in the PR and in Figma. - Every app repo: the generated workflow runs the Plectrum checks (no hex, px or unknown --pds-*), the build, unit tests, story + accessibility tests, and sends the usage report after a push to main. - Release: same commit's CI, clean-app install, matching Storybook; "latest" never moves on a partial release. Source: Maintainer workflow — https://solidaris-danielbodigil.github.io/solidaris-plectrum/storybook/latest/?path=/docs/docs-maintainer-workflow--docs</a:t>
+            </a:r>
           </a:p>
         </p:txBody>
       </p:sp>
@@ -781,9 +560,8 @@
           <a:p>
             <a:r>
               <a:rPr lang="en-US" dirty="0"/>
-              <a:t>KEY MESSAGE: every change lands through a reviewed PR; humans own the decisions. - Plectrum code (libs/): Code Owner review + design-system review. - Figma → repo: staging branch only; promotion needs a reviewed PR. - App candidates: candidate-submit opens a reviewed central PR; nothing becomes Core automatically. - Usage reports: app CI opens a central PR after a push to main; Core reviews it. - Repo → Figma: a designer reviews proposals/{app}, then merges and publishes. - Apps: bumps arrive as Renovate / Dependabot PRs, gated by the app's checks and tests. - Releases: Changesets version PR; a maintainer runs the attended release. Source: Contribute · Maintainer workflow — https://solidaris-danielbodigil.github.io/solidaris-plectrum/storybook/latest/?path=/docs/get-started-contribute--docs</a:t>
-            </a:r>
-            <a:endParaRPr lang="en-US" dirty="0"/>
+              <a:t>KEY MESSAGE: a PR merges on evidence, not trust — tests and CI produce it, with or without AI. - Unit tests: Vitest — logic and coverage. - Story tests: every story renders; interaction (play) tests; axe accessibility checks. - Contracts + tokens: contracts:check (API), docs:check, generated files committed, token audit. - Package smoke: pack the libraries, install them in a clean app built from the starter, build it and run its stories — exactly what a team repo does. - Application CI: Plectrum checks, build, unit tests, story + accessibility tests. - Chromatic visual tests only when enabled — don't promise more. - Same gates for agent and human changes. Source: Maintainer workflow — https://solidaris-danielbodigil.github.io/solidaris-plectrum/storybook/latest/?path=/docs/docs-maintainer-workflow--docs</a:t>
+            </a:r>
           </a:p>
         </p:txBody>
       </p:sp>
@@ -869,9 +647,8 @@
           <a:p>
             <a:r>
               <a:rPr lang="en-US" dirty="0"/>
-              <a:t>KEY MESSAGE: build locally; propose to share. - Small fix (typo, example, link): PR on Plectrum. - Gap (component, variant, token): check themed PrimeNG and Core first; if nothing fits, the team builds it in its own repo — no approval needed. - To share it, open a proposal = a GitHub issue on Plectrum: the need, what you tried, a Figma link, a preview. - Core records one of three decisions: use-existing · app-specific · approved-candidate. There is no rejection — the team owns its component and can always keep it locally. - Only approved-candidate lets the team submit the component to Core; the other two keep it in the application. - Your team builds it → your team owns it. Nothing becomes Core automatically. - Before building, ask /plectrum: it often finds that an existing component or composition already does the job. For new UX, talk early to the core team or a designer — advice, not an approval step. - Teams do not have to spot what is worth sharing: each local component's evidence checklist has a Reuse potential line (none / possible / likely), the usage report sends it to Core, and Core reviews the Local scope of Find a component to pick what to share. Source: Contribute › Proposal decisions — https://solidaris-danielbodigil.github.io/solidaris-plectrum/storybook/latest/?path=/docs/get-started-contribute--docs</a:t>
-            </a:r>
-            <a:endParaRPr lang="en-US" dirty="0"/>
+              <a:t>KEY MESSAGE: every change lands through a reviewed PR; humans own the decisions. - Plectrum code (libs/): Code Owner review + design-system review. - Figma → repo: staging branch only; promotion needs a reviewed PR. - App candidates: candidate-submit opens a reviewed central PR; nothing becomes Core automatically. - Usage reports: app CI opens a central PR after a push to main; Core reviews it. - Repo → Figma: a designer reviews proposals/{app}, then merges and publishes. - Apps: bumps arrive as Renovate / Dependabot PRs, gated by the app's checks and tests. - Releases: Changesets version PR; a maintainer runs the attended release. Source: Contribute · Maintainer workflow — https://solidaris-danielbodigil.github.io/solidaris-plectrum/storybook/latest/?path=/docs/get-started-contribute--docs</a:t>
+            </a:r>
           </a:p>
         </p:txBody>
       </p:sp>
@@ -957,9 +734,8 @@
           <a:p>
             <a:r>
               <a:rPr lang="en-US" dirty="0"/>
-              <a:t>KEY MESSAGE: two routes to Core — from an app team or from the design team. - Propose early: Core can spot duplicates and give guidance on reuse, naming and tokens — and the team never waits to build locally. - Ask /plectrum first: it checks reuse and helps with layout and UX; designers still join the loop early for new UX. - Step 1 in practice: npm run pds:component lists similar components other teams already built; the team fills the Reuse potential line; CI reports the component to Core. Core contacts the team when a component is worth sharing. - Colours = actor: green app, blue Core, orange designer, grey release. - Every proposal is a GitHub issue in the central Plectrum repo — from an app team or a designer. - App route: the team builds in its repo → proposes the component → Core decides → the team submits (candidate-submit) → Core integrates → designer updates Figma → release → the app adopts. - Until integration, the component stays the app's; nothing becomes Core automatically. - Local components use feature names (c-affiliate-*), never Core names; the app checks still apply. - Design route: designer proposes from Custom components → Core decides and builds → release. Example: Profile header. - Corrections and Core work: a reviewed PR in the Plectrum repo. Source: Contribute — https://solidaris-danielbodigil.github.io/solidaris-plectrum/storybook/latest/?path=/docs/get-started-contribute--docs</a:t>
-            </a:r>
-            <a:endParaRPr lang="en-US" dirty="0"/>
+              <a:t>KEY MESSAGE: build locally; propose to share. - Small fix (typo, example, link): PR on Plectrum. - Gap (component, variant, token): check themed PrimeNG and Core first; if nothing fits, the team builds it in its own repo — no approval needed. - To share it, open a proposal = a GitHub issue on Plectrum: the need, what you tried, a Figma link, a preview. - Core records one of three decisions: use-existing · app-specific · approved-candidate. There is no rejection — the team owns its component and can always keep it locally. - Only approved-candidate lets the team submit the component to Core; the other two keep it in the application. - Your team builds it → your team owns it. Nothing becomes Core automatically. - Before building, ask /plectrum: it often finds that an existing component or composition already does the job. For new UX, talk early to the core team or a designer — advice, not an approval step. - Teams do not have to spot what is worth sharing: each local component's evidence checklist has a Reuse potential line (none / possible / likely), the usage report sends it to Core, and Core reviews the Local scope of Find a component to pick what to share. Source: Contribute › Proposal decisions — https://solidaris-danielbodigil.github.io/solidaris-plectrum/storybook/latest/?path=/docs/get-started-contribute--docs</a:t>
+            </a:r>
           </a:p>
         </p:txBody>
       </p:sp>
@@ -1045,9 +821,8 @@
           <a:p>
             <a:r>
               <a:rPr lang="en-US" dirty="0"/>
-              <a:t>KEY MESSAGE: the whole process exists to stop teams redoing the same work — and everyone gains something. - Less duplicate maintenance (Core, app teams): one source, generated docs, no design-system code copied into apps. - Fewer local variants (app teams, Solidaris): PrimeNG → Core → local build; local components are reported to Core, scaffold warns about similar ones from other teams, and Core picks what to share. - Earlier feedback (app teams, designers): stories, CI and review catch issues in the PR; sync results land in Figma. - Repeatable adoption (Solidaris, new teams): a new team = the starter + npm install; upgrades arrive as PRs; usage reports show who uses what. - Ask of every team: consume the packages, run the checks, return shared improvements through a GitHub issue. - Next step: one real pilot team walks the full path — local build → proposal → decision → submission → integration → release → adoption. Source: Overview — https://solidaris-danielbodigil.github.io/solidaris-plectrum/storybook/latest/?path=/docs/introduction--docs</a:t>
-            </a:r>
-            <a:endParaRPr lang="en-US" dirty="0"/>
+              <a:t>KEY MESSAGE: two routes to Core — from an app team or from the design team. - Propose early: Core can spot duplicates and give guidance on reuse, naming and tokens — and the team never waits to build locally. - Ask /plectrum first: it checks reuse and helps with layout and UX; designers still join the loop early for new UX. - Step 1 in practice: npm run pds:component lists similar components other teams already built; the team fills the Reuse potential line; CI reports the component to Core. Core contacts the team when a component is worth sharing. - Colours = actor: green app, blue Core, orange designer, grey release. - Every proposal is a GitHub issue in the central Plectrum repo — from an app team or a designer. - App route: the team builds in its repo → proposes the component → Core decides → the team submits (candidate-submit) → Core integrates → designer updates Figma → release → the app adopts. - Until integration, the component stays the app's; nothing becomes Core automatically. - Local components use feature names (c-affiliate-*), never Core names; the app checks still apply. - Design route: designer proposes from Custom components → Core decides and builds → release. Example: Profile header. - Corrections and Core work: a reviewed PR in the Plectrum repo. Source: Contribute — https://solidaris-danielbodigil.github.io/solidaris-plectrum/storybook/latest/?path=/docs/get-started-contribute--docs</a:t>
+            </a:r>
           </a:p>
         </p:txBody>
       </p:sp>
@@ -1133,9 +908,8 @@
           <a:p>
             <a:r>
               <a:rPr lang="en-US" dirty="0"/>
-              <a:t>KEY MESSAGE: collect concrete blockers — let the teams speak first. - Sort questions: find · install · contribute · validate. - Note owners, pilot and missing access; command details → Storybook or a technical session. - Rebuild our app? No — install packages; build local components whenever you need them. - Code to copy? No — consume a published version. - Can AI build a component? It prepares; people review. - Missing token? Use a local token file if only your app needs it; otherwise propose it. - Our own repo already? The starter and the consumer smoke test pass; a real repo is the pilot's goal. - Close: restate the pilot and access prerequisites.</a:t>
-            </a:r>
-            <a:endParaRPr lang="en-US" dirty="0"/>
+              <a:t>KEY MESSAGE: the whole process exists to stop teams redoing the same work — and everyone gains something. - Less duplicate maintenance (Core, app teams): one source, generated docs, no design-system code copied into apps. - Fewer local variants (app teams, Solidaris): PrimeNG → Core → local build; local components are reported to Core, scaffold warns about similar ones from other teams, and Core picks what to share. - Earlier feedback (app teams, designers): stories, CI and review catch issues in the PR; sync results land in Figma. - Repeatable adoption (Solidaris, new teams): a new team = the starter + npm install; upgrades arrive as PRs; usage reports show who uses what. - Ask of every team: consume the packages, run the checks, return shared improvements through a GitHub issue. - Next step: one real pilot team walks the full path — local build → proposal → decision → submission → integration → release → adoption. Source: Overview — https://solidaris-danielbodigil.github.io/solidaris-plectrum/storybook/latest/?path=/docs/introduction--docs</a:t>
+            </a:r>
           </a:p>
         </p:txBody>
       </p:sp>
@@ -1157,6 +931,93 @@
             <a:fld id="{F7021451-1387-4CA6-816F-3879F97B5CBC}" type="slidenum">
               <a:rPr lang="en-US"/>
               <a:t>16</a:t>
+            </a:fld>
+            <a:endParaRPr lang="en-US"/>
+          </a:p>
+        </p:txBody>
+      </p:sp>
+    </p:spTree>
+    <p:extLst>
+      <p:ext uri="{BB962C8B-B14F-4D97-AF65-F5344CB8AC3E}">
+        <p14:creationId xmlns:p14="http://schemas.microsoft.com/office/powerpoint/2010/main" val="1024086991"/>
+      </p:ext>
+    </p:extLst>
+  </p:cSld>
+  <p:clrMapOvr>
+    <a:masterClrMapping/>
+  </p:clrMapOvr>
+</p:notes>
+</file>
+
+<file path=ppt/notesSlides/notesSlide17.xml><?xml version="1.0" encoding="utf-8"?>
+<p:notes xmlns:a="http://schemas.openxmlformats.org/drawingml/2006/main" xmlns:r="http://schemas.openxmlformats.org/officeDocument/2006/relationships" xmlns:p="http://schemas.openxmlformats.org/presentationml/2006/main">
+  <p:cSld>
+    <p:spTree>
+      <p:nvGrpSpPr>
+        <p:cNvPr id="1" name=""/>
+        <p:cNvGrpSpPr/>
+        <p:nvPr/>
+      </p:nvGrpSpPr>
+      <p:grpSpPr>
+        <a:xfrm>
+          <a:off x="0" y="0"/>
+          <a:ext cx="0" cy="0"/>
+          <a:chOff x="0" y="0"/>
+          <a:chExt cx="0" cy="0"/>
+        </a:xfrm>
+      </p:grpSpPr>
+      <p:sp>
+        <p:nvSpPr>
+          <p:cNvPr id="2" name="Slide Image Placeholder 1"/>
+          <p:cNvSpPr>
+            <a:spLocks noGrp="1" noRot="1" noChangeAspect="1"/>
+          </p:cNvSpPr>
+          <p:nvPr>
+            <p:ph type="sldImg"/>
+          </p:nvPr>
+        </p:nvSpPr>
+        <p:spPr/>
+      </p:sp>
+      <p:sp>
+        <p:nvSpPr>
+          <p:cNvPr id="3" name="Notes Placeholder 2"/>
+          <p:cNvSpPr>
+            <a:spLocks noGrp="1"/>
+          </p:cNvSpPr>
+          <p:nvPr>
+            <p:ph type="body" idx="1"/>
+          </p:nvPr>
+        </p:nvSpPr>
+        <p:spPr/>
+        <p:txBody>
+          <a:bodyPr/>
+          <a:lstStyle/>
+          <a:p>
+            <a:r>
+              <a:rPr lang="en-US" dirty="0"/>
+              <a:t>KEY MESSAGE: collect concrete blockers — let the teams speak first. - Sort questions: find · install · contribute · validate. - Note owners, pilot and missing access; command details → Storybook or a technical session. - Rebuild our app? No — install packages; build local components whenever you need them. - Code to copy? No — consume a published version. - Can AI build a component? It prepares; people review. - Missing token? Use a local token file if only your app needs it; otherwise propose it. - Our own repo already? The starter and the consumer smoke test pass; a real repo is the pilot's goal. - Close: restate the pilot and access prerequisites.</a:t>
+            </a:r>
+          </a:p>
+        </p:txBody>
+      </p:sp>
+      <p:sp>
+        <p:nvSpPr>
+          <p:cNvPr id="4" name="Slide Number Placeholder 3"/>
+          <p:cNvSpPr>
+            <a:spLocks noGrp="1"/>
+          </p:cNvSpPr>
+          <p:nvPr>
+            <p:ph type="sldNum" sz="quarter" idx="10"/>
+          </p:nvPr>
+        </p:nvSpPr>
+        <p:spPr/>
+        <p:txBody>
+          <a:bodyPr/>
+          <a:lstStyle/>
+          <a:p>
+            <a:fld id="{F7021451-1387-4CA6-816F-3879F97B5CBC}" type="slidenum">
+              <a:rPr lang="en-US"/>
+              <a:t>17</a:t>
             </a:fld>
             <a:endParaRPr lang="en-US"/>
           </a:p>
@@ -1223,7 +1084,6 @@
               <a:rPr lang="en-US" dirty="0"/>
               <a:t>KEY MESSAGE: one shared system; each team owns its application. - Figma: shared visual decisions — designers own the values and the component designs. - Plectrum: shared code and contracts, published as Storybook + versioned packages; the Core team owns it. - Application teams: own repositories, screens and local components — they build them without waiting for Core. - Apps install a version: nothing is copied, no Plectrum folder in the app. - Boundary: shared things change through Plectrum PRs and proposals; app code stays with the team. - Transition: "So how does a team actually use Plectrum? Through packages." Source: Overview — https://solidaris-danielbodigil.github.io/solidaris-plectrum/storybook/latest/?path=/docs/introduction--docs</a:t>
             </a:r>
-            <a:endParaRPr lang="en-US" dirty="0"/>
           </a:p>
         </p:txBody>
       </p:sp>
@@ -1311,7 +1171,6 @@
               <a:rPr lang="en-US" dirty="0"/>
               <a:t>KEY MESSAGE: teams don't copy Plectrum — they install it as versioned packages and keep their own repo. - 4 packages under @solidaris-danielbodigil on GitHub Packages (private; the team needs read access). - Runtime: pds-ui, pds-plectrum, pds-styles (styles, tokens, Agenda and Open Sans fonts) — version together. Toolkit: pds-devkit — dev dependency, own version. - Install: copy the Plectrum starter, set the team and application IDs in package.json, run npm install. - Set up: npm install runs plectrum bootstrap — empty local ITCSS layers, styles and fonts wired, local Storybook, unit and story tests, a pre-commit hook, agents and a CI workflow. Commit the generated files. - Build: providePlectrum() is already in app.config; local styles go in src/styles/06-components. - Validate: the generated workflow runs the checks, the build, unit tests and story + accessibility tests on every PR. - Adopt: CI sends a usage report to Core — the Plectrum components the app uses and the team's local components with their reuse estimate — once the team is registered and the PLECTRUM_ADOPTION_TOKEN secret is set; the local Storybook page Plectrum/Setup shows what is missing. - Upgrade: Renovate / Dependabot PRs → plectrum update → checks. What's new lists the changes. Source: Build with Plectrum — https://solidaris-danielbodigil.github.io/solidaris-plectrum/storybook/latest/?path=/docs/get-started-use-plectrum-in-an-app--docs</a:t>
             </a:r>
-            <a:endParaRPr lang="en-US" dirty="0"/>
           </a:p>
         </p:txBody>
       </p:sp>
@@ -1399,7 +1258,6 @@
               <a:rPr lang="en-US" dirty="0"/>
               <a:t>KEY MESSAGE: the system scales because each thing has one source — change it once, regenerate, CI catches drift. - Token sources: imported Figma values + code-owned settings → CSS and Foundations pages. - Component metadata: one contract beside the component → docs, catalogue, agent index. - Contribution steps: change a review step once in process.json → docs, CLI help and agent instructions regenerate. - Fewer copies to maintain; CI fails when a copy drifts. - CSS: ITCSS layers + BEMIT naming + shared --pds-* tokens — one architecture for every team. - Next slide: every source, what it feeds and what guards it. Source: Storybook › Docs / CSS architecture</a:t>
             </a:r>
-            <a:endParaRPr lang="en-US" dirty="0"/>
           </a:p>
         </p:txBody>
       </p:sp>
@@ -1487,7 +1345,6 @@
               <a:rPr lang="en-US" dirty="0"/>
               <a:t>KEY MESSAGE: each fact is written once; the rest is generated — and CI fails a second copy. - Component: .metadata.ts → docs page, Find a component row, index.json, toolkit catalogue. - Tokens: tokens.json is imported, never hand-edited; tokens:build is the only writer; Foundations read the compiled CSS. - Process: one contract → Storybook page, plectrum help, agent guidance. - CI: the gates table is read from ci.yml — it cannot drift. - Agents: written once in .ai/agents/; Cursor and VS Code files are generated. - Releases: What's new is generated from changesets. - CI fails on: a stale index, props that drift from the Angular class, docs that restate metadata, an undeclared token (the "Consumed" play test). - Result: effort goes into sources and gates, not into keeping pages in sync. Source: AI strategy · Writing stories · Process and contracts — https://solidaris-danielbodigil.github.io/solidaris-plectrum/storybook/?path=/docs/docs-ai-strategy--docs</a:t>
             </a:r>
-            <a:endParaRPr lang="en-US" dirty="0"/>
           </a:p>
         </p:txBody>
       </p:sp>
@@ -1575,7 +1432,6 @@
               <a:rPr lang="en-US" dirty="0"/>
               <a:t>KEY MESSAGE: one loop — tokens flow down to apps and back up to Figma; every direction ends in a human merge. - Diagram: Storybook's "Pipeline architecture". Orange = Figma, blue = repo, green = app; dashed = manual. - 1: plugin sync → staging branch design-tokens/sync → reviewed PR into tokens.json. - 2: tokens:build → CSS + Storybook manifest. 3–4: packages released → Renovate / Dependabot bump the apps. - 5: a token only one app needs stays in that app (local token file); a token other teams could use is proposed, and Core adds it to 01-settings. - 6–7: tokens:propose → agent (Figma MCP) or tokens plugin → proposals/{app} → a designer merges and publishes. - Every sync: three-way drift audit (Figma, preset, SCSS); report in the PR and as a Figma comment. Source: Token pipeline › Architecture · Figma sync — https://solidaris-danielbodigil.github.io/solidaris-plectrum/storybook/latest/?path=/docs/docs-token-pipeline--docs</a:t>
             </a:r>
-            <a:endParaRPr lang="en-US" dirty="0"/>
           </a:p>
         </p:txBody>
       </p:sp>
@@ -1663,7 +1519,6 @@
               <a:rPr lang="en-US" dirty="0"/>
               <a:t>KEY MESSAGE: agents read typed contracts, not the whole repo — Contract-Driven Development (CDD). - One flow = Storybook's "Contract layers" (index → metadata → protocols → component) + the pre-flight (PrimeNG, Figma, index, Storybook MCP). - index.json: generated map — what exists, where, status, owner. - {name}.metadata.ts: how and why to use it — use cases, anti-patterns, tokens, a11y, AI hints. - protocols/: decision trees for create, query, audit. - Steps 1–4 find what exists; steps 5–7 only run when something is really missing. - In an app, the scaffold creates the component, story, unit test, metadata and styles — no Core approval needed. In Plectrum, a Core component starts after Core's decision. - Example prompt: the pre-flight finds PrimeNG DatePicker (range mode) already covers the need → no new component. - Humans still own review, Storybook, CSS and Figma publication. - By hand: slide 9 — same scripts, tests, CI gates and reviews. Source: AI strategy — https://solidaris-danielbodigil.github.io/solidaris-plectrum/storybook/latest/?path=/docs/docs-ai-strategy--docs</a:t>
             </a:r>
-            <a:endParaRPr lang="en-US" dirty="0"/>
           </a:p>
         </p:txBody>
       </p:sp>
@@ -1751,7 +1606,6 @@
               <a:rPr lang="en-US" dirty="0"/>
               <a:t>KEY MESSAGE: the agent prepares, checks verify, people decide. - /plectrum is the only user-facing agent; it coordinates 6 specialists. - UX Researcher: Figma inspection, design brief (read-only). - UX Engineer: SCSS tokens, styles, stories. - Frontend Dev: Angular implementation, a11y, PrimeNG wiring. - Tester: unit tests, story coverage, WCAG 2.1 AA. - Token Auditor + Architect: drift, naming, boundaries (read-only). - Written once in .ai/agents/; npm install (plectrum bootstrap) generates them in each app repo. - Local components need no Core decision; sharing through Core still needs a proposal, a decision, a review and a release. - In an application, /plectrum is the team's first reviewer: before anything is built it checks PrimeNG and the catalogue, says when an existing component or composition already covers the need, and answers layout and UX questions. It names what a designer should decide and recommends showing new UX early to the core team or a designer — it does not replace them. Source: AI strategy › Subagents — https://solidaris-danielbodigil.github.io/solidaris-plectrum/storybook/latest/?path=/docs/docs-ai-strategy--docs</a:t>
             </a:r>
-            <a:endParaRPr lang="en-US" dirty="0"/>
           </a:p>
         </p:txBody>
       </p:sp>
@@ -1839,7 +1693,6 @@
               <a:rPr lang="en-US" dirty="0"/>
               <a:t>KEY MESSAGE: the agent is recommended — it answers most reuse, layout and UX questions without waiting for Core — but working by hand stays possible: same scripts, same CI, same reviews. - Find — agent: PrimeNG MCP → index.json → Storybook MCP (same order as the pre-flight on slide 7). - Find — by hand: themed PrimeNG first, then Find a component or plectrum catalogue (offline). - Create: npm run pds:component in an app (no approval needed), pds:component in the Plectrum repo. - Check: npm run pds:check:ci, then build and tests. - Figma to tokens: an agent reads variables via Figma MCP, or the designer runs the plugin sync; the CI drift audit runs and a developer merges the PR. - Tokens to Figma: tokens:propose + the Plectrum tokens plugin. - Figma components: a designer draws them; merge and publish stay human. - CI runs regardless — agent and human changes alike. Source: AI strategy · Token pipeline › Commands — https://solidaris-danielbodigil.github.io/solidaris-plectrum/storybook/latest/?path=/docs/docs-ai-strategy--docs</a:t>
             </a:r>
-            <a:endParaRPr lang="en-US" dirty="0"/>
           </a:p>
         </p:txBody>
       </p:sp>
@@ -1912,6 +1765,11 @@
 <file path=ppt/slideMasters/slideMaster1.xml><?xml version="1.0" encoding="utf-8"?>
 <p:sldMaster xmlns:a="http://schemas.openxmlformats.org/drawingml/2006/main" xmlns:r="http://schemas.openxmlformats.org/officeDocument/2006/relationships" xmlns:p="http://schemas.openxmlformats.org/presentationml/2006/main">
   <p:cSld>
+    <p:bg>
+      <p:bgRef idx="1001">
+        <a:schemeClr val="bg1"/>
+      </p:bgRef>
+    </p:bg>
     <p:spTree>
       <p:nvGrpSpPr>
         <p:cNvPr id="1" name=""/>
@@ -2194,6 +2052,7 @@
         <a:solidFill>
           <a:srgbClr val="FFEDF1"/>
         </a:solidFill>
+        <a:effectLst/>
       </p:bgPr>
     </p:bg>
     <p:spTree>
@@ -2212,15 +2071,15 @@
       </p:grpSpPr>
       <p:pic>
         <p:nvPicPr>
-          <p:cNvPr id="2" name="Image 0" descr="preencoded.png">    </p:cNvPr>
+          <p:cNvPr id="2" name="Image 0" descr="preencoded.png"/>
           <p:cNvPicPr>
             <a:picLocks noChangeAspect="1"/>
           </p:cNvPicPr>
           <p:nvPr/>
         </p:nvPicPr>
         <p:blipFill>
-          <a:blip r:embed="rId1"/>
-          <a:srcRect l="0" r="0" t="0" b="0"/>
+          <a:blip r:embed="rId3"/>
+          <a:srcRect/>
           <a:stretch/>
         </p:blipFill>
         <p:spPr>
@@ -2235,15 +2094,15 @@
       </p:pic>
       <p:pic>
         <p:nvPicPr>
-          <p:cNvPr id="3" name="Image 1" descr="Solidaris">    </p:cNvPr>
+          <p:cNvPr id="3" name="Image 1" descr="Solidaris"/>
           <p:cNvPicPr>
             <a:picLocks noChangeAspect="1"/>
           </p:cNvPicPr>
           <p:nvPr/>
         </p:nvPicPr>
         <p:blipFill>
-          <a:blip r:embed="rId2"/>
-          <a:srcRect l="0" r="0" t="-78" b="-78"/>
+          <a:blip r:embed="rId4"/>
+          <a:srcRect t="-78" b="-78"/>
           <a:stretch/>
         </p:blipFill>
         <p:spPr>
@@ -2279,7 +2138,7 @@
           </a:bodyPr>
           <a:lstStyle/>
           <a:p>
-            <a:pPr algn="l" indent="0" marL="0">
+            <a:pPr marL="0" indent="0" algn="l">
               <a:lnSpc>
                 <a:spcPts val="6324"/>
               </a:lnSpc>
@@ -2323,14 +2182,14 @@
           </a:bodyPr>
           <a:lstStyle/>
           <a:p>
-            <a:pPr algn="l" indent="0" marL="0">
+            <a:pPr marL="0" indent="0" algn="l">
               <a:lnSpc>
                 <a:spcPts val="3920"/>
               </a:lnSpc>
               <a:buNone/>
             </a:pPr>
             <a:r>
-              <a:rPr lang="en-US" sz="2800" b="1" spc="200" kern="0" dirty="0">
+              <a:rPr lang="en-US" sz="2800" b="1" kern="0" spc="200" dirty="0">
                 <a:solidFill>
                   <a:srgbClr val="333333"/>
                 </a:solidFill>
@@ -2367,7 +2226,7 @@
           </a:bodyPr>
           <a:lstStyle/>
           <a:p>
-            <a:pPr algn="l" indent="0" marL="0">
+            <a:pPr marL="0" indent="0" algn="l">
               <a:lnSpc>
                 <a:spcPts val="2240"/>
               </a:lnSpc>
@@ -2404,6 +2263,7 @@
         <a:solidFill>
           <a:srgbClr val="FFF9FA"/>
         </a:solidFill>
+        <a:effectLst/>
       </p:bgPr>
     </p:bg>
     <p:spTree>
@@ -2443,14 +2303,14 @@
           </a:bodyPr>
           <a:lstStyle/>
           <a:p>
-            <a:pPr algn="l" indent="0" marL="0">
+            <a:pPr marL="0" indent="0" algn="l">
               <a:lnSpc>
                 <a:spcPts val="1820"/>
               </a:lnSpc>
               <a:buNone/>
             </a:pPr>
             <a:r>
-              <a:rPr lang="en-US" sz="1300" b="1" spc="150" kern="0" dirty="0">
+              <a:rPr lang="en-US" sz="1300" b="1" kern="0" spc="150">
                 <a:solidFill>
                   <a:srgbClr val="333333"/>
                 </a:solidFill>
@@ -2458,7 +2318,7 @@
                 <a:ea typeface="Alegreya Sans" pitchFamily="34" charset="-122"/>
                 <a:cs typeface="Alegreya Sans" pitchFamily="34" charset="-120"/>
               </a:rPr>
-              <a:t>CI — THE GATES</a:t>
+              <a:t>AI-FIRST — MEASURED, NEVER GATED</a:t>
             </a:r>
             <a:endParaRPr lang="en-US" sz="1300" dirty="0"/>
           </a:p>
@@ -2487,14 +2347,14 @@
           </a:bodyPr>
           <a:lstStyle/>
           <a:p>
-            <a:pPr algn="l" indent="0" marL="0">
+            <a:pPr marL="0" indent="0" algn="l">
               <a:lnSpc>
                 <a:spcPts val="3360"/>
               </a:lnSpc>
               <a:buNone/>
             </a:pPr>
             <a:r>
-              <a:rPr lang="en-US" sz="3200" b="1" dirty="0">
+              <a:rPr lang="en-US" sz="3200" b="1">
                 <a:solidFill>
                   <a:srgbClr val="DA002F"/>
                 </a:solidFill>
@@ -2502,7 +2362,7 @@
                 <a:ea typeface="Alegreya Sans" pitchFamily="34" charset="-122"/>
                 <a:cs typeface="Alegreya Sans" pitchFamily="34" charset="-120"/>
               </a:rPr>
-              <a:t>Four gates, one rule: nothing merges on trust</a:t>
+              <a:t>We measure the agent. It never blocks your build.</a:t>
             </a:r>
             <a:endParaRPr lang="en-US" sz="3200" dirty="0"/>
           </a:p>
@@ -2529,7 +2389,7 @@
           </a:solidFill>
           <a:ln/>
           <a:effectLst>
-            <a:outerShdw sx="100000" sy="100000" kx="0" ky="0" algn="bl" rotWithShape="0" blurRad="203200" dist="76200" dir="5400000">
+            <a:outerShdw blurRad="203200" dist="76200" dir="5400000" algn="bl" rotWithShape="0">
               <a:srgbClr val="78142D">
                 <a:alpha val="7000"/>
               </a:srgbClr>
@@ -2562,19 +2422,19 @@
                 <a:lnTo>
                   <a:pt x="0" y="101600"/>
                 </a:lnTo>
-                <a:arcTo hR="101600" wR="101600" stAng="10800000" swAng="5400000"/>
+                <a:arcTo wR="101600" hR="101600" stAng="10800000" swAng="5400000"/>
                 <a:lnTo>
                   <a:pt x="2425700" y="0"/>
                 </a:lnTo>
-                <a:arcTo hR="101600" wR="101600" stAng="16200000" swAng="5400000"/>
+                <a:arcTo wR="101600" hR="101600" stAng="16200000" swAng="5400000"/>
                 <a:lnTo>
                   <a:pt x="2527300" y="101600"/>
                 </a:lnTo>
-                <a:arcTo hR="50800" wR="101600" stAng="0" swAng="-5400000"/>
+                <a:arcTo wR="101600" hR="50800" stAng="0" swAng="-5400000"/>
                 <a:lnTo>
                   <a:pt x="101600" y="50800"/>
                 </a:lnTo>
-                <a:arcTo hR="50800" wR="101600" stAng="16200000" swAng="-5400000"/>
+                <a:arcTo wR="101600" hR="50800" stAng="16200000" swAng="-5400000"/>
                 <a:close/>
               </a:path>
             </a:pathLst>
@@ -2608,14 +2468,14 @@
           </a:bodyPr>
           <a:lstStyle/>
           <a:p>
-            <a:pPr algn="l" indent="0" marL="0">
+            <a:pPr marL="0" indent="0" algn="l">
               <a:lnSpc>
                 <a:spcPts val="1680"/>
               </a:lnSpc>
               <a:buNone/>
             </a:pPr>
             <a:r>
-              <a:rPr lang="en-US" sz="1200" b="1" spc="100" kern="0" dirty="0">
+              <a:rPr lang="en-US" sz="1200" b="1" kern="0" spc="100">
                 <a:solidFill>
                   <a:srgbClr val="4A535B"/>
                 </a:solidFill>
@@ -2623,7 +2483,7 @@
                 <a:ea typeface="Nunito Sans" pitchFamily="34" charset="-122"/>
                 <a:cs typeface="Nunito Sans" pitchFamily="34" charset="-120"/>
               </a:rPr>
-              <a:t>BEFORE COMMIT</a:t>
+              <a:t>USAGE</a:t>
             </a:r>
             <a:endParaRPr lang="en-US" sz="1200" dirty="0"/>
           </a:p>
@@ -2652,14 +2512,14 @@
           </a:bodyPr>
           <a:lstStyle/>
           <a:p>
-            <a:pPr algn="l" indent="0" marL="0">
+            <a:pPr marL="0" indent="0" algn="l">
               <a:lnSpc>
                 <a:spcPts val="1680"/>
               </a:lnSpc>
               <a:buNone/>
             </a:pPr>
             <a:r>
-              <a:rPr lang="en-US" sz="1400" b="1" dirty="0">
+              <a:rPr lang="en-US" sz="1400" b="1">
                 <a:solidFill>
                   <a:srgbClr val="2B2B2E"/>
                 </a:solidFill>
@@ -2667,7 +2527,7 @@
                 <a:ea typeface="Nunito Sans" pitchFamily="34" charset="-122"/>
                 <a:cs typeface="Nunito Sans" pitchFamily="34" charset="-120"/>
               </a:rPr>
-              <a:t>A git hook</a:t>
+              <a:t>Counted locally</a:t>
             </a:r>
             <a:endParaRPr lang="en-US" sz="1400" dirty="0"/>
           </a:p>
@@ -2696,7 +2556,7 @@
           </a:bodyPr>
           <a:lstStyle/>
           <a:p>
-            <a:pPr algn="l" marL="182880" indent="-155194">
+            <a:pPr marL="182880" indent="-155194" algn="l">
               <a:lnSpc>
                 <a:spcPts val="1740"/>
               </a:lnSpc>
@@ -2704,7 +2564,7 @@
               <a:buChar char="•"/>
             </a:pPr>
             <a:r>
-              <a:rPr lang="en-US" sz="1200" dirty="0">
+              <a:rPr lang="en-US" sz="1200">
                 <a:solidFill>
                   <a:srgbClr val="55555C"/>
                 </a:solidFill>
@@ -2712,12 +2572,12 @@
                 <a:ea typeface="Nunito Sans" pitchFamily="34" charset="-122"/>
                 <a:cs typeface="Nunito Sans" pitchFamily="34" charset="-120"/>
               </a:rPr>
-              <a:t>docs and contracts</a:t>
+              <a:t>tool, component, outcome</a:t>
             </a:r>
             <a:endParaRPr lang="en-US" sz="1200" dirty="0"/>
           </a:p>
           <a:p>
-            <a:pPr algn="l" marL="182880" indent="-155194">
+            <a:pPr marL="182880" indent="-155194" algn="l">
               <a:lnSpc>
                 <a:spcPts val="1740"/>
               </a:lnSpc>
@@ -2725,7 +2585,7 @@
               <a:buChar char="•"/>
             </a:pPr>
             <a:r>
-              <a:rPr lang="en-US" sz="1200" dirty="0">
+              <a:rPr lang="en-US" sz="1200">
                 <a:solidFill>
                   <a:srgbClr val="55555C"/>
                 </a:solidFill>
@@ -2733,12 +2593,12 @@
                 <a:ea typeface="Nunito Sans" pitchFamily="34" charset="-122"/>
                 <a:cs typeface="Nunito Sans" pitchFamily="34" charset="-120"/>
               </a:rPr>
-              <a:t>token prefix and usage</a:t>
+              <a:t>never the request or code</a:t>
             </a:r>
             <a:endParaRPr lang="en-US" sz="1200" dirty="0"/>
           </a:p>
           <a:p>
-            <a:pPr algn="l" marL="182880" indent="-155194">
+            <a:pPr marL="182880" indent="-155194" algn="l">
               <a:lnSpc>
                 <a:spcPts val="1740"/>
               </a:lnSpc>
@@ -2746,7 +2606,7 @@
               <a:buChar char="•"/>
             </a:pPr>
             <a:r>
-              <a:rPr lang="en-US" sz="1200" dirty="0">
+              <a:rPr lang="en-US" sz="1200">
                 <a:solidFill>
                   <a:srgbClr val="55555C"/>
                 </a:solidFill>
@@ -2754,12 +2614,12 @@
                 <a:ea typeface="Nunito Sans" pitchFamily="34" charset="-122"/>
                 <a:cs typeface="Nunito Sans" pitchFamily="34" charset="-120"/>
               </a:rPr>
-              <a:t>style lint</a:t>
+              <a:t>ignored by git, can be off</a:t>
             </a:r>
             <a:endParaRPr lang="en-US" sz="1200" dirty="0"/>
           </a:p>
           <a:p>
-            <a:pPr algn="l" marL="182880" indent="-155194">
+            <a:pPr marL="182880" indent="-155194" algn="l">
               <a:lnSpc>
                 <a:spcPts val="1740"/>
               </a:lnSpc>
@@ -2767,7 +2627,7 @@
               <a:buChar char="•"/>
             </a:pPr>
             <a:r>
-              <a:rPr lang="en-US" sz="1200" dirty="0">
+              <a:rPr lang="en-US" sz="1200">
                 <a:solidFill>
                   <a:srgbClr val="55555C"/>
                 </a:solidFill>
@@ -2775,7 +2635,7 @@
                 <a:ea typeface="Nunito Sans" pitchFamily="34" charset="-122"/>
                 <a:cs typeface="Nunito Sans" pitchFamily="34" charset="-120"/>
               </a:rPr>
-              <a:t>generated files saved</a:t>
+              <a:t>30-day totals to Core</a:t>
             </a:r>
             <a:endParaRPr lang="en-US" sz="1200" dirty="0"/>
           </a:p>
@@ -2802,7 +2662,7 @@
           </a:solidFill>
           <a:ln/>
           <a:effectLst>
-            <a:outerShdw sx="100000" sy="100000" kx="0" ky="0" algn="bl" rotWithShape="0" blurRad="203200" dist="76200" dir="5400000">
+            <a:outerShdw blurRad="203200" dist="76200" dir="5400000" algn="bl" rotWithShape="0">
               <a:srgbClr val="78142D">
                 <a:alpha val="7000"/>
               </a:srgbClr>
@@ -2835,19 +2695,19 @@
                 <a:lnTo>
                   <a:pt x="0" y="101600"/>
                 </a:lnTo>
-                <a:arcTo hR="101600" wR="101600" stAng="10800000" swAng="5400000"/>
+                <a:arcTo wR="101600" hR="101600" stAng="10800000" swAng="5400000"/>
                 <a:lnTo>
                   <a:pt x="2425700" y="0"/>
                 </a:lnTo>
-                <a:arcTo hR="101600" wR="101600" stAng="16200000" swAng="5400000"/>
+                <a:arcTo wR="101600" hR="101600" stAng="16200000" swAng="5400000"/>
                 <a:lnTo>
                   <a:pt x="2527300" y="101600"/>
                 </a:lnTo>
-                <a:arcTo hR="50800" wR="101600" stAng="0" swAng="-5400000"/>
+                <a:arcTo wR="101600" hR="50800" stAng="0" swAng="-5400000"/>
                 <a:lnTo>
                   <a:pt x="101600" y="50800"/>
                 </a:lnTo>
-                <a:arcTo hR="50800" wR="101600" stAng="16200000" swAng="-5400000"/>
+                <a:arcTo wR="101600" hR="50800" stAng="16200000" swAng="-5400000"/>
                 <a:close/>
               </a:path>
             </a:pathLst>
@@ -2881,14 +2741,14 @@
           </a:bodyPr>
           <a:lstStyle/>
           <a:p>
-            <a:pPr algn="l" indent="0" marL="0">
+            <a:pPr marL="0" indent="0" algn="l">
               <a:lnSpc>
                 <a:spcPts val="1680"/>
               </a:lnSpc>
               <a:buNone/>
             </a:pPr>
             <a:r>
-              <a:rPr lang="en-US" sz="1200" b="1" spc="100" kern="0" dirty="0">
+              <a:rPr lang="en-US" sz="1200" b="1" kern="0" spc="100">
                 <a:solidFill>
                   <a:srgbClr val="2E526D"/>
                 </a:solidFill>
@@ -2896,7 +2756,7 @@
                 <a:ea typeface="Nunito Sans" pitchFamily="34" charset="-122"/>
                 <a:cs typeface="Nunito Sans" pitchFamily="34" charset="-120"/>
               </a:rPr>
-              <a:t>EVERY PLECTRUM PR</a:t>
+              <a:t>EFFECT</a:t>
             </a:r>
             <a:endParaRPr lang="en-US" sz="1200" dirty="0"/>
           </a:p>
@@ -2925,14 +2785,14 @@
           </a:bodyPr>
           <a:lstStyle/>
           <a:p>
-            <a:pPr algn="l" indent="0" marL="0">
+            <a:pPr marL="0" indent="0" algn="l">
               <a:lnSpc>
                 <a:spcPts val="1680"/>
               </a:lnSpc>
               <a:buNone/>
             </a:pPr>
             <a:r>
-              <a:rPr lang="en-US" sz="1400" b="1" dirty="0">
+              <a:rPr lang="en-US" sz="1400" b="1">
                 <a:solidFill>
                   <a:srgbClr val="2B2B2E"/>
                 </a:solidFill>
@@ -2940,7 +2800,7 @@
                 <a:ea typeface="Nunito Sans" pitchFamily="34" charset="-122"/>
                 <a:cs typeface="Nunito Sans" pitchFamily="34" charset="-120"/>
               </a:rPr>
-              <a:t>Seven CI jobs</a:t>
+              <a:t>Commit trailers</a:t>
             </a:r>
             <a:endParaRPr lang="en-US" sz="1400" dirty="0"/>
           </a:p>
@@ -2969,7 +2829,7 @@
           </a:bodyPr>
           <a:lstStyle/>
           <a:p>
-            <a:pPr algn="l" marL="182880" indent="-155194">
+            <a:pPr marL="182880" indent="-155194" algn="l">
               <a:lnSpc>
                 <a:spcPts val="1740"/>
               </a:lnSpc>
@@ -2977,7 +2837,7 @@
               <a:buChar char="•"/>
             </a:pPr>
             <a:r>
-              <a:rPr lang="en-US" sz="1200" dirty="0">
+              <a:rPr lang="en-US" sz="1200">
                 <a:solidFill>
                   <a:srgbClr val="55555C"/>
                 </a:solidFill>
@@ -2985,12 +2845,12 @@
                 <a:ea typeface="Nunito Sans" pitchFamily="34" charset="-122"/>
                 <a:cs typeface="Nunito Sans" pitchFamily="34" charset="-120"/>
               </a:rPr>
-              <a:t>token drift and lint</a:t>
+              <a:t>Plectrum-Agent: reuse=…</a:t>
             </a:r>
             <a:endParaRPr lang="en-US" sz="1200" dirty="0"/>
           </a:p>
           <a:p>
-            <a:pPr algn="l" marL="182880" indent="-155194">
+            <a:pPr marL="182880" indent="-155194" algn="l">
               <a:lnSpc>
                 <a:spcPts val="1740"/>
               </a:lnSpc>
@@ -2998,7 +2858,7 @@
               <a:buChar char="•"/>
             </a:pPr>
             <a:r>
-              <a:rPr lang="en-US" sz="1200" dirty="0">
+              <a:rPr lang="en-US" sz="1200">
                 <a:solidFill>
                   <a:srgbClr val="55555C"/>
                 </a:solidFill>
@@ -3006,12 +2866,12 @@
                 <a:ea typeface="Nunito Sans" pitchFamily="34" charset="-122"/>
                 <a:cs typeface="Nunito Sans" pitchFamily="34" charset="-120"/>
               </a:rPr>
-              <a:t>contracts, index, docs</a:t>
+              <a:t>scaffold=&lt;slug&gt; or advice</a:t>
             </a:r>
             <a:endParaRPr lang="en-US" sz="1200" dirty="0"/>
           </a:p>
           <a:p>
-            <a:pPr algn="l" marL="182880" indent="-155194">
+            <a:pPr marL="182880" indent="-155194" algn="l">
               <a:lnSpc>
                 <a:spcPts val="1740"/>
               </a:lnSpc>
@@ -3019,7 +2879,7 @@
               <a:buChar char="•"/>
             </a:pPr>
             <a:r>
-              <a:rPr lang="en-US" sz="1200" dirty="0">
+              <a:rPr lang="en-US" sz="1200">
                 <a:solidFill>
                   <a:srgbClr val="55555C"/>
                 </a:solidFill>
@@ -3027,12 +2887,12 @@
                 <a:ea typeface="Nunito Sans" pitchFamily="34" charset="-122"/>
                 <a:cs typeface="Nunito Sans" pitchFamily="34" charset="-120"/>
               </a:rPr>
-              <a:t>every story: render, play, a11y</a:t>
+              <a:t>reuse vs new components</a:t>
             </a:r>
             <a:endParaRPr lang="en-US" sz="1200" dirty="0"/>
           </a:p>
           <a:p>
-            <a:pPr algn="l" marL="182880" indent="-155194">
+            <a:pPr marL="182880" indent="-155194" algn="l">
               <a:lnSpc>
                 <a:spcPts val="1740"/>
               </a:lnSpc>
@@ -3040,7 +2900,7 @@
               <a:buChar char="•"/>
             </a:pPr>
             <a:r>
-              <a:rPr lang="en-US" sz="1200" dirty="0">
+              <a:rPr lang="en-US" sz="1200">
                 <a:solidFill>
                   <a:srgbClr val="55555C"/>
                 </a:solidFill>
@@ -3048,7 +2908,7 @@
                 <a:ea typeface="Nunito Sans" pitchFamily="34" charset="-122"/>
                 <a:cs typeface="Nunito Sans" pitchFamily="34" charset="-120"/>
               </a:rPr>
-              <a:t>packed consumer build</a:t>
+              <a:t>sent with the usage report</a:t>
             </a:r>
             <a:endParaRPr lang="en-US" sz="1200" dirty="0"/>
           </a:p>
@@ -3075,7 +2935,7 @@
           </a:solidFill>
           <a:ln/>
           <a:effectLst>
-            <a:outerShdw sx="100000" sy="100000" kx="0" ky="0" algn="bl" rotWithShape="0" blurRad="203200" dist="76200" dir="5400000">
+            <a:outerShdw blurRad="203200" dist="76200" dir="5400000" algn="bl" rotWithShape="0">
               <a:srgbClr val="78142D">
                 <a:alpha val="7000"/>
               </a:srgbClr>
@@ -3108,19 +2968,19 @@
                 <a:lnTo>
                   <a:pt x="0" y="101600"/>
                 </a:lnTo>
-                <a:arcTo hR="101600" wR="101600" stAng="10800000" swAng="5400000"/>
+                <a:arcTo wR="101600" hR="101600" stAng="10800000" swAng="5400000"/>
                 <a:lnTo>
                   <a:pt x="2425700" y="0"/>
                 </a:lnTo>
-                <a:arcTo hR="101600" wR="101600" stAng="16200000" swAng="5400000"/>
+                <a:arcTo wR="101600" hR="101600" stAng="16200000" swAng="5400000"/>
                 <a:lnTo>
                   <a:pt x="2527300" y="101600"/>
                 </a:lnTo>
-                <a:arcTo hR="50800" wR="101600" stAng="0" swAng="-5400000"/>
+                <a:arcTo wR="101600" hR="50800" stAng="0" swAng="-5400000"/>
                 <a:lnTo>
                   <a:pt x="101600" y="50800"/>
                 </a:lnTo>
-                <a:arcTo hR="50800" wR="101600" stAng="16200000" swAng="-5400000"/>
+                <a:arcTo wR="101600" hR="50800" stAng="16200000" swAng="-5400000"/>
                 <a:close/>
               </a:path>
             </a:pathLst>
@@ -3154,14 +3014,14 @@
           </a:bodyPr>
           <a:lstStyle/>
           <a:p>
-            <a:pPr algn="l" indent="0" marL="0">
+            <a:pPr marL="0" indent="0" algn="l">
               <a:lnSpc>
                 <a:spcPts val="1680"/>
               </a:lnSpc>
               <a:buNone/>
             </a:pPr>
             <a:r>
-              <a:rPr lang="en-US" sz="1200" b="1" spc="100" kern="0" dirty="0">
+              <a:rPr lang="en-US" sz="1200" b="1" kern="0" spc="100">
                 <a:solidFill>
                   <a:srgbClr val="8F4508"/>
                 </a:solidFill>
@@ -3169,7 +3029,7 @@
                 <a:ea typeface="Nunito Sans" pitchFamily="34" charset="-122"/>
                 <a:cs typeface="Nunito Sans" pitchFamily="34" charset="-120"/>
               </a:rPr>
-              <a:t>EVERY TOKEN SYNC</a:t>
+              <a:t>QUALITY</a:t>
             </a:r>
             <a:endParaRPr lang="en-US" sz="1200" dirty="0"/>
           </a:p>
@@ -3198,14 +3058,14 @@
           </a:bodyPr>
           <a:lstStyle/>
           <a:p>
-            <a:pPr algn="l" indent="0" marL="0">
+            <a:pPr marL="0" indent="0" algn="l">
               <a:lnSpc>
                 <a:spcPts val="1680"/>
               </a:lnSpc>
               <a:buNone/>
             </a:pPr>
             <a:r>
-              <a:rPr lang="en-US" sz="1400" b="1" dirty="0">
+              <a:rPr lang="en-US" sz="1400" b="1">
                 <a:solidFill>
                   <a:srgbClr val="2B2B2E"/>
                 </a:solidFill>
@@ -3213,7 +3073,7 @@
                 <a:ea typeface="Nunito Sans" pitchFamily="34" charset="-122"/>
                 <a:cs typeface="Nunito Sans" pitchFamily="34" charset="-120"/>
               </a:rPr>
-              <a:t>A sync workflow</a:t>
+              <a:t>Reference requests</a:t>
             </a:r>
             <a:endParaRPr lang="en-US" sz="1400" dirty="0"/>
           </a:p>
@@ -3242,7 +3102,7 @@
           </a:bodyPr>
           <a:lstStyle/>
           <a:p>
-            <a:pPr algn="l" marL="182880" indent="-155194">
+            <a:pPr marL="182880" indent="-155194" algn="l">
               <a:lnSpc>
                 <a:spcPts val="1740"/>
               </a:lnSpc>
@@ -3250,7 +3110,7 @@
               <a:buChar char="•"/>
             </a:pPr>
             <a:r>
-              <a:rPr lang="en-US" sz="1200" dirty="0">
+              <a:rPr lang="en-US" sz="1200">
                 <a:solidFill>
                   <a:srgbClr val="55555C"/>
                 </a:solidFill>
@@ -3258,12 +3118,12 @@
                 <a:ea typeface="Nunito Sans" pitchFamily="34" charset="-122"/>
                 <a:cs typeface="Nunito Sans" pitchFamily="34" charset="-120"/>
               </a:rPr>
-              <a:t>rebuild from the Figma dump</a:t>
+              <a:t>asked the way teams ask</a:t>
             </a:r>
             <a:endParaRPr lang="en-US" sz="1200" dirty="0"/>
           </a:p>
           <a:p>
-            <a:pPr algn="l" marL="182880" indent="-155194">
+            <a:pPr marL="182880" indent="-155194" algn="l">
               <a:lnSpc>
                 <a:spcPts val="1740"/>
               </a:lnSpc>
@@ -3271,7 +3131,7 @@
               <a:buChar char="•"/>
             </a:pPr>
             <a:r>
-              <a:rPr lang="en-US" sz="1200" dirty="0">
+              <a:rPr lang="en-US" sz="1200">
                 <a:solidFill>
                   <a:srgbClr val="55555C"/>
                 </a:solidFill>
@@ -3279,12 +3139,12 @@
                 <a:ea typeface="Nunito Sans" pitchFamily="34" charset="-122"/>
                 <a:cs typeface="Nunito Sans" pitchFamily="34" charset="-120"/>
               </a:rPr>
-              <a:t>three-way drift audit</a:t>
+              <a:t>replayed on Plectrum PRs</a:t>
             </a:r>
             <a:endParaRPr lang="en-US" sz="1200" dirty="0"/>
           </a:p>
           <a:p>
-            <a:pPr algn="l" marL="182880" indent="-155194">
+            <a:pPr marL="182880" indent="-155194" algn="l">
               <a:lnSpc>
                 <a:spcPts val="1740"/>
               </a:lnSpc>
@@ -3292,7 +3152,7 @@
               <a:buChar char="•"/>
             </a:pPr>
             <a:r>
-              <a:rPr lang="en-US" sz="1200" dirty="0">
+              <a:rPr lang="en-US" sz="1200">
                 <a:solidFill>
                   <a:srgbClr val="55555C"/>
                 </a:solidFill>
@@ -3300,12 +3160,12 @@
                 <a:ea typeface="Nunito Sans" pitchFamily="34" charset="-122"/>
                 <a:cs typeface="Nunito Sans" pitchFamily="34" charset="-120"/>
               </a:rPr>
-              <a:t>preset validation</a:t>
+              <a:t>blocks only a regression</a:t>
             </a:r>
             <a:endParaRPr lang="en-US" sz="1200" dirty="0"/>
           </a:p>
           <a:p>
-            <a:pPr algn="l" marL="182880" indent="-155194">
+            <a:pPr marL="182880" indent="-155194" algn="l">
               <a:lnSpc>
                 <a:spcPts val="1740"/>
               </a:lnSpc>
@@ -3313,7 +3173,7 @@
               <a:buChar char="•"/>
             </a:pPr>
             <a:r>
-              <a:rPr lang="en-US" sz="1200" dirty="0">
+              <a:rPr lang="en-US" sz="1200">
                 <a:solidFill>
                   <a:srgbClr val="55555C"/>
                 </a:solidFill>
@@ -3321,7 +3181,7 @@
                 <a:ea typeface="Nunito Sans" pitchFamily="34" charset="-122"/>
                 <a:cs typeface="Nunito Sans" pitchFamily="34" charset="-120"/>
               </a:rPr>
-              <a:t>report in the PR and in Figma</a:t>
+              <a:t>misses stay visible</a:t>
             </a:r>
             <a:endParaRPr lang="en-US" sz="1200" dirty="0"/>
           </a:p>
@@ -3348,7 +3208,7 @@
           </a:solidFill>
           <a:ln/>
           <a:effectLst>
-            <a:outerShdw sx="100000" sy="100000" kx="0" ky="0" algn="bl" rotWithShape="0" blurRad="203200" dist="76200" dir="5400000">
+            <a:outerShdw blurRad="203200" dist="76200" dir="5400000" algn="bl" rotWithShape="0">
               <a:srgbClr val="78142D">
                 <a:alpha val="7000"/>
               </a:srgbClr>
@@ -3381,19 +3241,19 @@
                 <a:lnTo>
                   <a:pt x="0" y="101600"/>
                 </a:lnTo>
-                <a:arcTo hR="101600" wR="101600" stAng="10800000" swAng="5400000"/>
+                <a:arcTo wR="101600" hR="101600" stAng="10800000" swAng="5400000"/>
                 <a:lnTo>
                   <a:pt x="2425700" y="0"/>
                 </a:lnTo>
-                <a:arcTo hR="101600" wR="101600" stAng="16200000" swAng="5400000"/>
+                <a:arcTo wR="101600" hR="101600" stAng="16200000" swAng="5400000"/>
                 <a:lnTo>
                   <a:pt x="2527300" y="101600"/>
                 </a:lnTo>
-                <a:arcTo hR="50800" wR="101600" stAng="0" swAng="-5400000"/>
+                <a:arcTo wR="101600" hR="50800" stAng="0" swAng="-5400000"/>
                 <a:lnTo>
                   <a:pt x="101600" y="50800"/>
                 </a:lnTo>
-                <a:arcTo hR="50800" wR="101600" stAng="16200000" swAng="-5400000"/>
+                <a:arcTo wR="101600" hR="50800" stAng="16200000" swAng="-5400000"/>
                 <a:close/>
               </a:path>
             </a:pathLst>
@@ -3427,14 +3287,14 @@
           </a:bodyPr>
           <a:lstStyle/>
           <a:p>
-            <a:pPr algn="l" indent="0" marL="0">
+            <a:pPr marL="0" indent="0" algn="l">
               <a:lnSpc>
                 <a:spcPts val="1680"/>
               </a:lnSpc>
               <a:buNone/>
             </a:pPr>
             <a:r>
-              <a:rPr lang="en-US" sz="1200" b="1" spc="100" kern="0" dirty="0">
+              <a:rPr lang="en-US" sz="1200" b="1" kern="0" spc="100">
                 <a:solidFill>
                   <a:srgbClr val="1F5A3A"/>
                 </a:solidFill>
@@ -3442,7 +3302,7 @@
                 <a:ea typeface="Nunito Sans" pitchFamily="34" charset="-122"/>
                 <a:cs typeface="Nunito Sans" pitchFamily="34" charset="-120"/>
               </a:rPr>
-              <a:t>EVERY APP REPO</a:t>
+              <a:t>YOUR APPLICATION</a:t>
             </a:r>
             <a:endParaRPr lang="en-US" sz="1200" dirty="0"/>
           </a:p>
@@ -3471,14 +3331,14 @@
           </a:bodyPr>
           <a:lstStyle/>
           <a:p>
-            <a:pPr algn="l" indent="0" marL="0">
+            <a:pPr marL="0" indent="0" algn="l">
               <a:lnSpc>
                 <a:spcPts val="1680"/>
               </a:lnSpc>
               <a:buNone/>
             </a:pPr>
             <a:r>
-              <a:rPr lang="en-US" sz="1400" b="1" dirty="0">
+              <a:rPr lang="en-US" sz="1400" b="1">
                 <a:solidFill>
                   <a:srgbClr val="2B2B2E"/>
                 </a:solidFill>
@@ -3486,7 +3346,7 @@
                 <a:ea typeface="Nunito Sans" pitchFamily="34" charset="-122"/>
                 <a:cs typeface="Nunito Sans" pitchFamily="34" charset="-120"/>
               </a:rPr>
-              <a:t>The generated workflow</a:t>
+              <a:t>Never blocked by it</a:t>
             </a:r>
             <a:endParaRPr lang="en-US" sz="1400" dirty="0"/>
           </a:p>
@@ -3515,7 +3375,7 @@
           </a:bodyPr>
           <a:lstStyle/>
           <a:p>
-            <a:pPr algn="l" marL="182880" indent="-155194">
+            <a:pPr marL="182880" indent="-155194" algn="l">
               <a:lnSpc>
                 <a:spcPts val="1740"/>
               </a:lnSpc>
@@ -3523,7 +3383,7 @@
               <a:buChar char="•"/>
             </a:pPr>
             <a:r>
-              <a:rPr lang="en-US" sz="1200" dirty="0">
+              <a:rPr lang="en-US" sz="1200">
                 <a:solidFill>
                   <a:srgbClr val="55555C"/>
                 </a:solidFill>
@@ -3531,12 +3391,12 @@
                 <a:ea typeface="Nunito Sans" pitchFamily="34" charset="-122"/>
                 <a:cs typeface="Nunito Sans" pitchFamily="34" charset="-120"/>
               </a:rPr>
-              <a:t>token and contract checks</a:t>
+              <a:t>no score, no threshold</a:t>
             </a:r>
             <a:endParaRPr lang="en-US" sz="1200" dirty="0"/>
           </a:p>
           <a:p>
-            <a:pPr algn="l" marL="182880" indent="-155194">
+            <a:pPr marL="182880" indent="-155194" algn="l">
               <a:lnSpc>
                 <a:spcPts val="1740"/>
               </a:lnSpc>
@@ -3544,7 +3404,7 @@
               <a:buChar char="•"/>
             </a:pPr>
             <a:r>
-              <a:rPr lang="en-US" sz="1200" dirty="0">
+              <a:rPr lang="en-US" sz="1200">
                 <a:solidFill>
                   <a:srgbClr val="55555C"/>
                 </a:solidFill>
@@ -3552,12 +3412,12 @@
                 <a:ea typeface="Nunito Sans" pitchFamily="34" charset="-122"/>
                 <a:cs typeface="Nunito Sans" pitchFamily="34" charset="-120"/>
               </a:rPr>
-              <a:t>build + unit tests</a:t>
+              <a:t>using the agent is optional</a:t>
             </a:r>
             <a:endParaRPr lang="en-US" sz="1200" dirty="0"/>
           </a:p>
           <a:p>
-            <a:pPr algn="l" marL="182880" indent="-155194">
+            <a:pPr marL="182880" indent="-155194" algn="l">
               <a:lnSpc>
                 <a:spcPts val="1740"/>
               </a:lnSpc>
@@ -3565,7 +3425,7 @@
               <a:buChar char="•"/>
             </a:pPr>
             <a:r>
-              <a:rPr lang="en-US" sz="1200" dirty="0">
+              <a:rPr lang="en-US" sz="1200">
                 <a:solidFill>
                   <a:srgbClr val="55555C"/>
                 </a:solidFill>
@@ -3573,12 +3433,12 @@
                 <a:ea typeface="Nunito Sans" pitchFamily="34" charset="-122"/>
                 <a:cs typeface="Nunito Sans" pitchFamily="34" charset="-120"/>
               </a:rPr>
-              <a:t>stories + accessibility</a:t>
+              <a:t>same checks, AI or not</a:t>
             </a:r>
             <a:endParaRPr lang="en-US" sz="1200" dirty="0"/>
           </a:p>
           <a:p>
-            <a:pPr algn="l" marL="182880" indent="-155194">
+            <a:pPr marL="182880" indent="-155194" algn="l">
               <a:lnSpc>
                 <a:spcPts val="1740"/>
               </a:lnSpc>
@@ -3586,7 +3446,7 @@
               <a:buChar char="•"/>
             </a:pPr>
             <a:r>
-              <a:rPr lang="en-US" sz="1200" dirty="0">
+              <a:rPr lang="en-US" sz="1200">
                 <a:solidFill>
                   <a:srgbClr val="55555C"/>
                 </a:solidFill>
@@ -3594,7 +3454,7 @@
                 <a:ea typeface="Nunito Sans" pitchFamily="34" charset="-122"/>
                 <a:cs typeface="Nunito Sans" pitchFamily="34" charset="-120"/>
               </a:rPr>
-              <a:t>usage report to Core</a:t>
+              <a:t>counts only, reviewed PR</a:t>
             </a:r>
             <a:endParaRPr lang="en-US" sz="1200" dirty="0"/>
           </a:p>
@@ -3624,15 +3484,15 @@
       </p:sp>
       <p:pic>
         <p:nvPicPr>
-          <p:cNvPr id="25" name="Image 0" descr="Verified">    </p:cNvPr>
+          <p:cNvPr id="25" name="Image 0" descr="Verified"/>
           <p:cNvPicPr>
             <a:picLocks noChangeAspect="1"/>
           </p:cNvPicPr>
           <p:nvPr/>
         </p:nvPicPr>
         <p:blipFill>
-          <a:blip r:embed="rId1"/>
-          <a:srcRect l="0" r="0" t="0" b="0"/>
+          <a:blip r:embed="rId3"/>
+          <a:srcRect/>
           <a:stretch/>
         </p:blipFill>
         <p:spPr>
@@ -3668,14 +3528,14 @@
           </a:bodyPr>
           <a:lstStyle/>
           <a:p>
-            <a:pPr algn="l" indent="0" marL="0">
+            <a:pPr marL="0" indent="0" algn="l">
               <a:lnSpc>
                 <a:spcPts val="1820"/>
               </a:lnSpc>
               <a:buNone/>
             </a:pPr>
             <a:r>
-              <a:rPr lang="en-US" sz="1300" dirty="0">
+              <a:rPr lang="en-US" sz="1300">
                 <a:solidFill>
                   <a:srgbClr val="46464C"/>
                 </a:solidFill>
@@ -3683,7 +3543,7 @@
                 <a:ea typeface="Nunito Sans" pitchFamily="34" charset="-122"/>
                 <a:cs typeface="Nunito Sans" pitchFamily="34" charset="-120"/>
               </a:rPr>
-              <a:t>Then the release: same commit's CI, clean install, release manifest</a:t>
+              <a:t>Storybook › Use the Plectrum agent</a:t>
             </a:r>
             <a:endParaRPr lang="en-US" sz="1300" dirty="0"/>
           </a:p>
@@ -3712,7 +3572,7 @@
           </a:bodyPr>
           <a:lstStyle/>
           <a:p>
-            <a:pPr algn="l" indent="0" marL="0">
+            <a:pPr marL="0" indent="0" algn="l">
               <a:lnSpc>
                 <a:spcPts val="1680"/>
               </a:lnSpc>
@@ -3756,14 +3616,14 @@
           </a:bodyPr>
           <a:lstStyle/>
           <a:p>
-            <a:pPr algn="r" indent="0" marL="0">
+            <a:pPr marL="0" indent="0" algn="r">
               <a:lnSpc>
                 <a:spcPts val="1680"/>
               </a:lnSpc>
               <a:buNone/>
             </a:pPr>
             <a:r>
-              <a:rPr lang="en-US" sz="1200" dirty="0">
+              <a:rPr lang="en-US" sz="1200">
                 <a:solidFill>
                   <a:srgbClr val="6E6E75"/>
                 </a:solidFill>
@@ -3771,13 +3631,18 @@
                 <a:ea typeface="Nunito Sans" pitchFamily="34" charset="-122"/>
                 <a:cs typeface="Nunito Sans" pitchFamily="34" charset="-120"/>
               </a:rPr>
-              <a:t>10 / 16</a:t>
+              <a:t>10 / 17</a:t>
             </a:r>
             <a:endParaRPr lang="en-US" sz="1200" dirty="0"/>
           </a:p>
         </p:txBody>
       </p:sp>
     </p:spTree>
+    <p:extLst>
+      <p:ext uri="{BB962C8B-B14F-4D97-AF65-F5344CB8AC3E}">
+        <p14:creationId xmlns:p14="http://schemas.microsoft.com/office/powerpoint/2010/main" val="1321770459"/>
+      </p:ext>
+    </p:extLst>
   </p:cSld>
   <p:clrMapOvr>
     <a:masterClrMapping/>
@@ -3787,12 +3652,13 @@
 
 <file path=ppt/slides/slide11.xml><?xml version="1.0" encoding="utf-8"?>
 <p:sld xmlns:a="http://schemas.openxmlformats.org/drawingml/2006/main" xmlns:r="http://schemas.openxmlformats.org/officeDocument/2006/relationships" xmlns:p="http://schemas.openxmlformats.org/presentationml/2006/main">
-  <p:cSld name="Slide 11">
+  <p:cSld name="Slide 10">
     <p:bg>
       <p:bgPr>
         <a:solidFill>
           <a:srgbClr val="FFF9FA"/>
         </a:solidFill>
+        <a:effectLst/>
       </p:bgPr>
     </p:bg>
     <p:spTree>
@@ -3818,28 +3684,28 @@
         <p:spPr>
           <a:xfrm>
             <a:off x="812800" y="812800"/>
-            <a:ext cx="10883392" cy="250329"/>
-          </a:xfrm>
-          <a:prstGeom prst="rect">
-            <a:avLst/>
-          </a:prstGeom>
-          <a:noFill/>
-          <a:ln/>
-        </p:spPr>
-        <p:txBody>
-          <a:bodyPr wrap="square" lIns="0" tIns="0" rIns="0" bIns="0" rtlCol="0" anchor="t">
-            <a:normAutofit/>
-          </a:bodyPr>
-          <a:lstStyle/>
-          <a:p>
-            <a:pPr algn="l" indent="0" marL="0">
-              <a:lnSpc>
-                <a:spcPts val="1774"/>
-              </a:lnSpc>
-              <a:buNone/>
-            </a:pPr>
-            <a:r>
-              <a:rPr lang="en-US" sz="1268" b="1" spc="150" kern="0" dirty="0">
+            <a:ext cx="10883392" cy="256480"/>
+          </a:xfrm>
+          <a:prstGeom prst="rect">
+            <a:avLst/>
+          </a:prstGeom>
+          <a:noFill/>
+          <a:ln/>
+        </p:spPr>
+        <p:txBody>
+          <a:bodyPr wrap="square" lIns="0" tIns="0" rIns="0" bIns="0" rtlCol="0" anchor="t">
+            <a:normAutofit/>
+          </a:bodyPr>
+          <a:lstStyle/>
+          <a:p>
+            <a:pPr marL="0" indent="0" algn="l">
+              <a:lnSpc>
+                <a:spcPts val="1820"/>
+              </a:lnSpc>
+              <a:buNone/>
+            </a:pPr>
+            <a:r>
+              <a:rPr lang="en-US" sz="1300" b="1" kern="0" spc="150" dirty="0">
                 <a:solidFill>
                   <a:srgbClr val="333333"/>
                 </a:solidFill>
@@ -3847,9 +3713,9 @@
                 <a:ea typeface="Alegreya Sans" pitchFamily="34" charset="-122"/>
                 <a:cs typeface="Alegreya Sans" pitchFamily="34" charset="-120"/>
               </a:rPr>
-              <a:t>CI AND PRS — EVIDENCE</a:t>
-            </a:r>
-            <a:endParaRPr lang="en-US" sz="1268" dirty="0"/>
+              <a:t>CI — THE GATES</a:t>
+            </a:r>
+            <a:endParaRPr lang="en-US" sz="1300" dirty="0"/>
           </a:p>
         </p:txBody>
       </p:sp>
@@ -3861,29 +3727,29 @@
         </p:nvSpPr>
         <p:spPr>
           <a:xfrm>
-            <a:off x="812800" y="1088529"/>
-            <a:ext cx="10883392" cy="440928"/>
-          </a:xfrm>
-          <a:prstGeom prst="rect">
-            <a:avLst/>
-          </a:prstGeom>
-          <a:noFill/>
-          <a:ln/>
-        </p:spPr>
-        <p:txBody>
-          <a:bodyPr wrap="square" lIns="0" tIns="0" rIns="0" bIns="0" rtlCol="0" anchor="t">
-            <a:normAutofit/>
-          </a:bodyPr>
-          <a:lstStyle/>
-          <a:p>
-            <a:pPr algn="l" indent="0" marL="0">
-              <a:lnSpc>
-                <a:spcPts val="3266"/>
-              </a:lnSpc>
-              <a:buNone/>
-            </a:pPr>
-            <a:r>
-              <a:rPr lang="en-US" sz="3110" b="1" dirty="0">
+            <a:off x="812800" y="1094680"/>
+            <a:ext cx="10883392" cy="452041"/>
+          </a:xfrm>
+          <a:prstGeom prst="rect">
+            <a:avLst/>
+          </a:prstGeom>
+          <a:noFill/>
+          <a:ln/>
+        </p:spPr>
+        <p:txBody>
+          <a:bodyPr wrap="square" lIns="0" tIns="0" rIns="0" bIns="0" rtlCol="0" anchor="t">
+            <a:normAutofit/>
+          </a:bodyPr>
+          <a:lstStyle/>
+          <a:p>
+            <a:pPr marL="0" indent="0" algn="l">
+              <a:lnSpc>
+                <a:spcPts val="3360"/>
+              </a:lnSpc>
+              <a:buNone/>
+            </a:pPr>
+            <a:r>
+              <a:rPr lang="en-US" sz="3200" b="1" dirty="0">
                 <a:solidFill>
                   <a:srgbClr val="DA002F"/>
                 </a:solidFill>
@@ -3891,9 +3757,9 @@
                 <a:ea typeface="Alegreya Sans" pitchFamily="34" charset="-122"/>
                 <a:cs typeface="Alegreya Sans" pitchFamily="34" charset="-120"/>
               </a:rPr>
-              <a:t>Tests and CI provide the PR evidence</a:t>
-            </a:r>
-            <a:endParaRPr lang="en-US" sz="3110" dirty="0"/>
+              <a:t>Four gates, one rule: nothing merges on trust</a:t>
+            </a:r>
+            <a:endParaRPr lang="en-US" sz="3200" dirty="0"/>
           </a:p>
         </p:txBody>
       </p:sp>
@@ -3905,23 +3771,25 @@
         </p:nvSpPr>
         <p:spPr>
           <a:xfrm>
-            <a:off x="815975" y="1685032"/>
-            <a:ext cx="10560050" cy="3155652"/>
+            <a:off x="812800" y="1749921"/>
+            <a:ext cx="2527300" cy="2090241"/>
           </a:xfrm>
           <a:prstGeom prst="roundRect">
             <a:avLst>
-              <a:gd name="adj" fmla="val 3119"/>
+              <a:gd name="adj" fmla="val 4861"/>
             </a:avLst>
           </a:prstGeom>
           <a:solidFill>
             <a:srgbClr val="FFFFFF"/>
           </a:solidFill>
-          <a:ln w="6350">
-            <a:solidFill>
-              <a:srgbClr val="EBD3D9"/>
-            </a:solidFill>
-            <a:prstDash val="solid"/>
-          </a:ln>
+          <a:ln/>
+          <a:effectLst>
+            <a:outerShdw blurRad="203200" dist="76200" dir="5400000" algn="bl" rotWithShape="0">
+              <a:srgbClr val="78142D">
+                <a:alpha val="7000"/>
+              </a:srgbClr>
+            </a:outerShdw>
+          </a:effectLst>
         </p:spPr>
       </p:sp>
       <p:sp>
@@ -3932,19 +3800,44 @@
         </p:nvSpPr>
         <p:spPr>
           <a:xfrm>
-            <a:off x="1022350" y="2339082"/>
-            <a:ext cx="10147300" cy="0"/>
-          </a:xfrm>
-          <a:prstGeom prst="line">
-            <a:avLst/>
-          </a:prstGeom>
-          <a:noFill/>
-          <a:ln w="6350">
-            <a:solidFill>
-              <a:srgbClr val="EBD3D9"/>
-            </a:solidFill>
-            <a:prstDash val="solid"/>
-          </a:ln>
+            <a:off x="812800" y="1749921"/>
+            <a:ext cx="2527300" cy="2090241"/>
+          </a:xfrm>
+          <a:custGeom>
+            <a:avLst/>
+            <a:gdLst/>
+            <a:ahLst/>
+            <a:cxnLst/>
+            <a:rect l="l" t="t" r="r" b="b"/>
+            <a:pathLst>
+              <a:path w="2527300" h="2090241">
+                <a:moveTo>
+                  <a:pt x="0" y="101600"/>
+                </a:moveTo>
+                <a:lnTo>
+                  <a:pt x="0" y="101600"/>
+                </a:lnTo>
+                <a:arcTo wR="101600" hR="101600" stAng="10800000" swAng="5400000"/>
+                <a:lnTo>
+                  <a:pt x="2425700" y="0"/>
+                </a:lnTo>
+                <a:arcTo wR="101600" hR="101600" stAng="16200000" swAng="5400000"/>
+                <a:lnTo>
+                  <a:pt x="2527300" y="101600"/>
+                </a:lnTo>
+                <a:arcTo wR="101600" hR="50800" stAng="0" swAng="-5400000"/>
+                <a:lnTo>
+                  <a:pt x="101600" y="50800"/>
+                </a:lnTo>
+                <a:arcTo wR="101600" hR="50800" stAng="16200000" swAng="-5400000"/>
+                <a:close/>
+              </a:path>
+            </a:pathLst>
+          </a:custGeom>
+          <a:solidFill>
+            <a:srgbClr val="7A838C"/>
+          </a:solidFill>
+          <a:ln/>
         </p:spPr>
       </p:sp>
       <p:sp>
@@ -3955,39 +3848,39 @@
         </p:nvSpPr>
         <p:spPr>
           <a:xfrm>
-            <a:off x="1022350" y="1871166"/>
-            <a:ext cx="3401060" cy="345380"/>
-          </a:xfrm>
-          <a:prstGeom prst="rect">
-            <a:avLst/>
-          </a:prstGeom>
-          <a:noFill/>
-          <a:ln/>
-        </p:spPr>
-        <p:txBody>
-          <a:bodyPr wrap="square" lIns="0" tIns="0" rIns="0" bIns="0" rtlCol="0" anchor="t">
-            <a:normAutofit/>
-          </a:bodyPr>
-          <a:lstStyle/>
-          <a:p>
-            <a:pPr algn="l" indent="0" marL="0">
-              <a:lnSpc>
-                <a:spcPts val="2520"/>
-              </a:lnSpc>
-              <a:buNone/>
-            </a:pPr>
-            <a:r>
-              <a:rPr lang="en-US" sz="1800" b="1" dirty="0">
-                <a:solidFill>
-                  <a:srgbClr val="2E526D"/>
-                </a:solidFill>
-                <a:latin typeface="Nunito Sans" pitchFamily="34" charset="0"/>
-                <a:ea typeface="Nunito Sans" pitchFamily="34" charset="-122"/>
-                <a:cs typeface="Nunito Sans" pitchFamily="34" charset="-120"/>
-              </a:rPr>
-              <a:t>Unit tests</a:t>
-            </a:r>
-            <a:endParaRPr lang="en-US" sz="1800" dirty="0"/>
+            <a:off x="990600" y="1978521"/>
+            <a:ext cx="2236851" cy="238720"/>
+          </a:xfrm>
+          <a:prstGeom prst="rect">
+            <a:avLst/>
+          </a:prstGeom>
+          <a:noFill/>
+          <a:ln/>
+        </p:spPr>
+        <p:txBody>
+          <a:bodyPr wrap="square" lIns="0" tIns="0" rIns="0" bIns="0" rtlCol="0" anchor="t">
+            <a:normAutofit/>
+          </a:bodyPr>
+          <a:lstStyle/>
+          <a:p>
+            <a:pPr marL="0" indent="0" algn="l">
+              <a:lnSpc>
+                <a:spcPts val="1680"/>
+              </a:lnSpc>
+              <a:buNone/>
+            </a:pPr>
+            <a:r>
+              <a:rPr lang="en-US" sz="1200" b="1" kern="0" spc="100" dirty="0">
+                <a:solidFill>
+                  <a:srgbClr val="4A535B"/>
+                </a:solidFill>
+                <a:latin typeface="Nunito Sans" pitchFamily="34" charset="0"/>
+                <a:ea typeface="Nunito Sans" pitchFamily="34" charset="-122"/>
+                <a:cs typeface="Nunito Sans" pitchFamily="34" charset="-120"/>
+              </a:rPr>
+              <a:t>BEFORE COMMIT</a:t>
+            </a:r>
+            <a:endParaRPr lang="en-US" sz="1200" dirty="0"/>
           </a:p>
         </p:txBody>
       </p:sp>
@@ -3999,29 +3892,29 @@
         </p:nvSpPr>
         <p:spPr>
           <a:xfrm>
-            <a:off x="4324350" y="1888827"/>
-            <a:ext cx="7024497" cy="309860"/>
-          </a:xfrm>
-          <a:prstGeom prst="rect">
-            <a:avLst/>
-          </a:prstGeom>
-          <a:noFill/>
-          <a:ln/>
-        </p:spPr>
-        <p:txBody>
-          <a:bodyPr wrap="square" lIns="0" tIns="0" rIns="0" bIns="0" rtlCol="0" anchor="t">
-            <a:normAutofit/>
-          </a:bodyPr>
-          <a:lstStyle/>
-          <a:p>
-            <a:pPr algn="l" indent="0" marL="0">
-              <a:lnSpc>
-                <a:spcPts val="2240"/>
-              </a:lnSpc>
-              <a:buNone/>
-            </a:pPr>
-            <a:r>
-              <a:rPr lang="en-US" sz="1600" dirty="0">
+            <a:off x="990600" y="2268041"/>
+            <a:ext cx="2236851" cy="238720"/>
+          </a:xfrm>
+          <a:prstGeom prst="rect">
+            <a:avLst/>
+          </a:prstGeom>
+          <a:noFill/>
+          <a:ln/>
+        </p:spPr>
+        <p:txBody>
+          <a:bodyPr wrap="square" lIns="0" tIns="0" rIns="0" bIns="0" rtlCol="0" anchor="t">
+            <a:normAutofit/>
+          </a:bodyPr>
+          <a:lstStyle/>
+          <a:p>
+            <a:pPr marL="0" indent="0" algn="l">
+              <a:lnSpc>
+                <a:spcPts val="1680"/>
+              </a:lnSpc>
+              <a:buNone/>
+            </a:pPr>
+            <a:r>
+              <a:rPr lang="en-US" sz="1400" b="1" dirty="0">
                 <a:solidFill>
                   <a:srgbClr val="2B2B2E"/>
                 </a:solidFill>
@@ -4029,472 +3922,978 @@
                 <a:ea typeface="Nunito Sans" pitchFamily="34" charset="-122"/>
                 <a:cs typeface="Nunito Sans" pitchFamily="34" charset="-120"/>
               </a:rPr>
-              <a:t>Vitest logic + coverage</a:t>
-            </a:r>
-            <a:endParaRPr lang="en-US" sz="1600" dirty="0"/>
-          </a:p>
-        </p:txBody>
-      </p:sp>
-      <p:sp>
-        <p:nvSpPr>
-          <p:cNvPr id="8" name="Shape 6"/>
-          <p:cNvSpPr/>
-          <p:nvPr/>
-        </p:nvSpPr>
-        <p:spPr>
-          <a:xfrm>
-            <a:off x="1022350" y="2954933"/>
-            <a:ext cx="10147300" cy="0"/>
-          </a:xfrm>
-          <a:prstGeom prst="line">
-            <a:avLst/>
-          </a:prstGeom>
-          <a:noFill/>
-          <a:ln w="6350">
-            <a:solidFill>
-              <a:srgbClr val="EBD3D9"/>
-            </a:solidFill>
-            <a:prstDash val="solid"/>
-          </a:ln>
-        </p:spPr>
-      </p:sp>
-      <p:sp>
-        <p:nvSpPr>
-          <p:cNvPr id="9" name="Text 7"/>
-          <p:cNvSpPr/>
-          <p:nvPr/>
-        </p:nvSpPr>
-        <p:spPr>
-          <a:xfrm>
-            <a:off x="1022350" y="2487017"/>
-            <a:ext cx="3401060" cy="345380"/>
-          </a:xfrm>
-          <a:prstGeom prst="rect">
-            <a:avLst/>
-          </a:prstGeom>
-          <a:noFill/>
-          <a:ln/>
-        </p:spPr>
-        <p:txBody>
-          <a:bodyPr wrap="square" lIns="0" tIns="0" rIns="0" bIns="0" rtlCol="0" anchor="t">
-            <a:normAutofit/>
-          </a:bodyPr>
-          <a:lstStyle/>
-          <a:p>
-            <a:pPr algn="l" indent="0" marL="0">
-              <a:lnSpc>
-                <a:spcPts val="2520"/>
-              </a:lnSpc>
-              <a:buNone/>
-            </a:pPr>
-            <a:r>
-              <a:rPr lang="en-US" sz="1800" b="1" dirty="0">
-                <a:solidFill>
-                  <a:srgbClr val="2E526D"/>
-                </a:solidFill>
-                <a:latin typeface="Nunito Sans" pitchFamily="34" charset="0"/>
-                <a:ea typeface="Nunito Sans" pitchFamily="34" charset="-122"/>
-                <a:cs typeface="Nunito Sans" pitchFamily="34" charset="-120"/>
-              </a:rPr>
-              <a:t>Story tests</a:t>
-            </a:r>
-            <a:endParaRPr lang="en-US" sz="1800" dirty="0"/>
-          </a:p>
-        </p:txBody>
-      </p:sp>
-      <p:sp>
-        <p:nvSpPr>
-          <p:cNvPr id="10" name="Text 8"/>
-          <p:cNvSpPr/>
-          <p:nvPr/>
-        </p:nvSpPr>
-        <p:spPr>
-          <a:xfrm>
-            <a:off x="4324350" y="2504777"/>
-            <a:ext cx="7024497" cy="309860"/>
-          </a:xfrm>
-          <a:prstGeom prst="rect">
-            <a:avLst/>
-          </a:prstGeom>
-          <a:noFill/>
-          <a:ln/>
-        </p:spPr>
-        <p:txBody>
-          <a:bodyPr wrap="square" lIns="0" tIns="0" rIns="0" bIns="0" rtlCol="0" anchor="t">
-            <a:normAutofit/>
-          </a:bodyPr>
-          <a:lstStyle/>
-          <a:p>
-            <a:pPr algn="l" indent="0" marL="0">
-              <a:lnSpc>
-                <a:spcPts val="2240"/>
-              </a:lnSpc>
-              <a:buNone/>
-            </a:pPr>
-            <a:r>
-              <a:rPr lang="en-US" sz="1600" dirty="0">
-                <a:solidFill>
-                  <a:srgbClr val="2B2B2E"/>
-                </a:solidFill>
-                <a:latin typeface="Nunito Sans" pitchFamily="34" charset="0"/>
-                <a:ea typeface="Nunito Sans" pitchFamily="34" charset="-122"/>
-                <a:cs typeface="Nunito Sans" pitchFamily="34" charset="-120"/>
-              </a:rPr>
-              <a:t>Rendering, interactions + accessibility</a:t>
-            </a:r>
-            <a:endParaRPr lang="en-US" sz="1600" dirty="0"/>
-          </a:p>
-        </p:txBody>
-      </p:sp>
-      <p:sp>
-        <p:nvSpPr>
-          <p:cNvPr id="11" name="Shape 9"/>
-          <p:cNvSpPr/>
-          <p:nvPr/>
-        </p:nvSpPr>
-        <p:spPr>
-          <a:xfrm>
-            <a:off x="1022350" y="3570883"/>
-            <a:ext cx="10147300" cy="0"/>
-          </a:xfrm>
-          <a:prstGeom prst="line">
-            <a:avLst/>
-          </a:prstGeom>
-          <a:noFill/>
-          <a:ln w="6350">
-            <a:solidFill>
-              <a:srgbClr val="EBD3D9"/>
-            </a:solidFill>
-            <a:prstDash val="solid"/>
-          </a:ln>
-        </p:spPr>
-      </p:sp>
-      <p:sp>
-        <p:nvSpPr>
-          <p:cNvPr id="12" name="Text 10"/>
-          <p:cNvSpPr/>
-          <p:nvPr/>
-        </p:nvSpPr>
-        <p:spPr>
-          <a:xfrm>
-            <a:off x="1022350" y="3102967"/>
-            <a:ext cx="3401060" cy="345380"/>
-          </a:xfrm>
-          <a:prstGeom prst="rect">
-            <a:avLst/>
-          </a:prstGeom>
-          <a:noFill/>
-          <a:ln/>
-        </p:spPr>
-        <p:txBody>
-          <a:bodyPr wrap="square" lIns="0" tIns="0" rIns="0" bIns="0" rtlCol="0" anchor="t">
-            <a:normAutofit/>
-          </a:bodyPr>
-          <a:lstStyle/>
-          <a:p>
-            <a:pPr algn="l" indent="0" marL="0">
-              <a:lnSpc>
-                <a:spcPts val="2520"/>
-              </a:lnSpc>
-              <a:buNone/>
-            </a:pPr>
-            <a:r>
-              <a:rPr lang="en-US" sz="1800" b="1" dirty="0">
-                <a:solidFill>
-                  <a:srgbClr val="2E526D"/>
-                </a:solidFill>
-                <a:latin typeface="Nunito Sans" pitchFamily="34" charset="0"/>
-                <a:ea typeface="Nunito Sans" pitchFamily="34" charset="-122"/>
-                <a:cs typeface="Nunito Sans" pitchFamily="34" charset="-120"/>
-              </a:rPr>
-              <a:t>Contracts + tokens</a:t>
-            </a:r>
-            <a:endParaRPr lang="en-US" sz="1800" dirty="0"/>
-          </a:p>
-        </p:txBody>
-      </p:sp>
-      <p:sp>
-        <p:nvSpPr>
-          <p:cNvPr id="13" name="Text 11"/>
-          <p:cNvSpPr/>
-          <p:nvPr/>
-        </p:nvSpPr>
-        <p:spPr>
-          <a:xfrm>
-            <a:off x="4324350" y="3120628"/>
-            <a:ext cx="7024497" cy="309860"/>
-          </a:xfrm>
-          <a:prstGeom prst="rect">
-            <a:avLst/>
-          </a:prstGeom>
-          <a:noFill/>
-          <a:ln/>
-        </p:spPr>
-        <p:txBody>
-          <a:bodyPr wrap="square" lIns="0" tIns="0" rIns="0" bIns="0" rtlCol="0" anchor="t">
-            <a:normAutofit/>
-          </a:bodyPr>
-          <a:lstStyle/>
-          <a:p>
-            <a:pPr algn="l" indent="0" marL="0">
-              <a:lnSpc>
-                <a:spcPts val="2240"/>
-              </a:lnSpc>
-              <a:buNone/>
-            </a:pPr>
-            <a:r>
-              <a:rPr lang="en-US" sz="1600" dirty="0">
-                <a:solidFill>
-                  <a:srgbClr val="2B2B2E"/>
-                </a:solidFill>
-                <a:latin typeface="Nunito Sans" pitchFamily="34" charset="0"/>
-                <a:ea typeface="Nunito Sans" pitchFamily="34" charset="-122"/>
-                <a:cs typeface="Nunito Sans" pitchFamily="34" charset="-120"/>
-              </a:rPr>
-              <a:t>API, docs and generated-file consistency</a:t>
-            </a:r>
-            <a:endParaRPr lang="en-US" sz="1600" dirty="0"/>
-          </a:p>
-        </p:txBody>
-      </p:sp>
-      <p:sp>
-        <p:nvSpPr>
-          <p:cNvPr id="14" name="Shape 12"/>
-          <p:cNvSpPr/>
-          <p:nvPr/>
-        </p:nvSpPr>
-        <p:spPr>
-          <a:xfrm>
-            <a:off x="1022350" y="4186734"/>
-            <a:ext cx="10147300" cy="0"/>
-          </a:xfrm>
-          <a:prstGeom prst="line">
-            <a:avLst/>
-          </a:prstGeom>
-          <a:noFill/>
-          <a:ln w="6350">
-            <a:solidFill>
-              <a:srgbClr val="EBD3D9"/>
-            </a:solidFill>
-            <a:prstDash val="solid"/>
-          </a:ln>
-        </p:spPr>
-      </p:sp>
-      <p:sp>
-        <p:nvSpPr>
-          <p:cNvPr id="15" name="Text 13"/>
-          <p:cNvSpPr/>
-          <p:nvPr/>
-        </p:nvSpPr>
-        <p:spPr>
-          <a:xfrm>
-            <a:off x="1022350" y="3718818"/>
-            <a:ext cx="3401060" cy="345380"/>
-          </a:xfrm>
-          <a:prstGeom prst="rect">
-            <a:avLst/>
-          </a:prstGeom>
-          <a:noFill/>
-          <a:ln/>
-        </p:spPr>
-        <p:txBody>
-          <a:bodyPr wrap="square" lIns="0" tIns="0" rIns="0" bIns="0" rtlCol="0" anchor="t">
-            <a:normAutofit/>
-          </a:bodyPr>
-          <a:lstStyle/>
-          <a:p>
-            <a:pPr algn="l" indent="0" marL="0">
-              <a:lnSpc>
-                <a:spcPts val="2520"/>
-              </a:lnSpc>
-              <a:buNone/>
-            </a:pPr>
-            <a:r>
-              <a:rPr lang="en-US" sz="1800" b="1" dirty="0">
-                <a:solidFill>
-                  <a:srgbClr val="2E526D"/>
-                </a:solidFill>
-                <a:latin typeface="Nunito Sans" pitchFamily="34" charset="0"/>
-                <a:ea typeface="Nunito Sans" pitchFamily="34" charset="-122"/>
-                <a:cs typeface="Nunito Sans" pitchFamily="34" charset="-120"/>
-              </a:rPr>
-              <a:t>Package smoke</a:t>
-            </a:r>
-            <a:endParaRPr lang="en-US" sz="1800" dirty="0"/>
-          </a:p>
-        </p:txBody>
-      </p:sp>
-      <p:sp>
-        <p:nvSpPr>
-          <p:cNvPr id="16" name="Text 14"/>
-          <p:cNvSpPr/>
-          <p:nvPr/>
-        </p:nvSpPr>
-        <p:spPr>
-          <a:xfrm>
-            <a:off x="4324350" y="3736578"/>
-            <a:ext cx="7024497" cy="309860"/>
-          </a:xfrm>
-          <a:prstGeom prst="rect">
-            <a:avLst/>
-          </a:prstGeom>
-          <a:noFill/>
-          <a:ln/>
-        </p:spPr>
-        <p:txBody>
-          <a:bodyPr wrap="square" lIns="0" tIns="0" rIns="0" bIns="0" rtlCol="0" anchor="t">
-            <a:normAutofit/>
-          </a:bodyPr>
-          <a:lstStyle/>
-          <a:p>
-            <a:pPr algn="l" indent="0" marL="0">
-              <a:lnSpc>
-                <a:spcPts val="2240"/>
-              </a:lnSpc>
-              <a:buNone/>
-            </a:pPr>
-            <a:r>
-              <a:rPr lang="en-US" sz="1600" dirty="0">
-                <a:solidFill>
-                  <a:srgbClr val="2B2B2E"/>
-                </a:solidFill>
-                <a:latin typeface="Nunito Sans" pitchFamily="34" charset="0"/>
-                <a:ea typeface="Nunito Sans" pitchFamily="34" charset="-122"/>
-                <a:cs typeface="Nunito Sans" pitchFamily="34" charset="-120"/>
-              </a:rPr>
-              <a:t>Install + build in a clean app, like a team repo</a:t>
-            </a:r>
-            <a:endParaRPr lang="en-US" sz="1600" dirty="0"/>
-          </a:p>
-        </p:txBody>
-      </p:sp>
-      <p:sp>
-        <p:nvSpPr>
-          <p:cNvPr id="17" name="Text 15"/>
-          <p:cNvSpPr/>
-          <p:nvPr/>
-        </p:nvSpPr>
-        <p:spPr>
-          <a:xfrm>
-            <a:off x="1022350" y="4334669"/>
-            <a:ext cx="3401060" cy="345380"/>
-          </a:xfrm>
-          <a:prstGeom prst="rect">
-            <a:avLst/>
-          </a:prstGeom>
-          <a:noFill/>
-          <a:ln/>
-        </p:spPr>
-        <p:txBody>
-          <a:bodyPr wrap="square" lIns="0" tIns="0" rIns="0" bIns="0" rtlCol="0" anchor="t">
-            <a:normAutofit/>
-          </a:bodyPr>
-          <a:lstStyle/>
-          <a:p>
-            <a:pPr algn="l" indent="0" marL="0">
-              <a:lnSpc>
-                <a:spcPts val="2520"/>
-              </a:lnSpc>
-              <a:buNone/>
-            </a:pPr>
-            <a:r>
-              <a:rPr lang="en-US" sz="1800" b="1" dirty="0">
-                <a:solidFill>
-                  <a:srgbClr val="2E526D"/>
-                </a:solidFill>
-                <a:latin typeface="Nunito Sans" pitchFamily="34" charset="0"/>
-                <a:ea typeface="Nunito Sans" pitchFamily="34" charset="-122"/>
-                <a:cs typeface="Nunito Sans" pitchFamily="34" charset="-120"/>
-              </a:rPr>
-              <a:t>Application CI</a:t>
-            </a:r>
-            <a:endParaRPr lang="en-US" sz="1800" dirty="0"/>
-          </a:p>
-        </p:txBody>
-      </p:sp>
-      <p:sp>
-        <p:nvSpPr>
-          <p:cNvPr id="18" name="Text 16"/>
-          <p:cNvSpPr/>
-          <p:nvPr/>
-        </p:nvSpPr>
-        <p:spPr>
-          <a:xfrm>
-            <a:off x="4324350" y="4352429"/>
-            <a:ext cx="7024497" cy="309860"/>
-          </a:xfrm>
-          <a:prstGeom prst="rect">
-            <a:avLst/>
-          </a:prstGeom>
-          <a:noFill/>
-          <a:ln/>
-        </p:spPr>
-        <p:txBody>
-          <a:bodyPr wrap="square" lIns="0" tIns="0" rIns="0" bIns="0" rtlCol="0" anchor="t">
-            <a:normAutofit/>
-          </a:bodyPr>
-          <a:lstStyle/>
-          <a:p>
-            <a:pPr algn="l" indent="0" marL="0">
-              <a:lnSpc>
-                <a:spcPts val="2240"/>
-              </a:lnSpc>
-              <a:buNone/>
-            </a:pPr>
-            <a:r>
-              <a:rPr lang="en-US" sz="1600" dirty="0">
-                <a:solidFill>
-                  <a:srgbClr val="2B2B2E"/>
-                </a:solidFill>
-                <a:latin typeface="Nunito Sans" pitchFamily="34" charset="0"/>
-                <a:ea typeface="Nunito Sans" pitchFamily="34" charset="-122"/>
-                <a:cs typeface="Nunito Sans" pitchFamily="34" charset="-120"/>
-              </a:rPr>
-              <a:t>Checks, build, unit + story tests</a:t>
-            </a:r>
-            <a:endParaRPr lang="en-US" sz="1600" dirty="0"/>
-          </a:p>
-        </p:txBody>
-      </p:sp>
-      <p:sp>
-        <p:nvSpPr>
-          <p:cNvPr id="19" name="Shape 17"/>
-          <p:cNvSpPr/>
-          <p:nvPr/>
-        </p:nvSpPr>
-        <p:spPr>
-          <a:xfrm>
-            <a:off x="812800" y="5021659"/>
-            <a:ext cx="10566400" cy="526852"/>
+              <a:t>A git hook</a:t>
+            </a:r>
+            <a:endParaRPr lang="en-US" sz="1400" dirty="0"/>
+          </a:p>
+        </p:txBody>
+      </p:sp>
+      <p:sp>
+        <p:nvSpPr>
+          <p:cNvPr id="8" name="Text 6"/>
+          <p:cNvSpPr/>
+          <p:nvPr/>
+        </p:nvSpPr>
+        <p:spPr>
+          <a:xfrm>
+            <a:off x="990600" y="2557562"/>
+            <a:ext cx="2236851" cy="909241"/>
+          </a:xfrm>
+          <a:prstGeom prst="rect">
+            <a:avLst/>
+          </a:prstGeom>
+          <a:noFill/>
+          <a:ln/>
+        </p:spPr>
+        <p:txBody>
+          <a:bodyPr wrap="square" lIns="0" tIns="0" rIns="0" bIns="0" rtlCol="0" anchor="t">
+            <a:normAutofit/>
+          </a:bodyPr>
+          <a:lstStyle/>
+          <a:p>
+            <a:pPr marL="182880" indent="-155194" algn="l">
+              <a:lnSpc>
+                <a:spcPts val="1740"/>
+              </a:lnSpc>
+              <a:buSzPct val="100000"/>
+              <a:buChar char="•"/>
+            </a:pPr>
+            <a:r>
+              <a:rPr lang="en-US" sz="1200" dirty="0">
+                <a:solidFill>
+                  <a:srgbClr val="55555C"/>
+                </a:solidFill>
+                <a:latin typeface="Nunito Sans" pitchFamily="34" charset="0"/>
+                <a:ea typeface="Nunito Sans" pitchFamily="34" charset="-122"/>
+                <a:cs typeface="Nunito Sans" pitchFamily="34" charset="-120"/>
+              </a:rPr>
+              <a:t>docs and contracts</a:t>
+            </a:r>
+            <a:endParaRPr lang="en-US" sz="1200" dirty="0"/>
+          </a:p>
+          <a:p>
+            <a:pPr marL="182880" indent="-155194" algn="l">
+              <a:lnSpc>
+                <a:spcPts val="1740"/>
+              </a:lnSpc>
+              <a:buSzPct val="100000"/>
+              <a:buChar char="•"/>
+            </a:pPr>
+            <a:r>
+              <a:rPr lang="en-US" sz="1200" dirty="0">
+                <a:solidFill>
+                  <a:srgbClr val="55555C"/>
+                </a:solidFill>
+                <a:latin typeface="Nunito Sans" pitchFamily="34" charset="0"/>
+                <a:ea typeface="Nunito Sans" pitchFamily="34" charset="-122"/>
+                <a:cs typeface="Nunito Sans" pitchFamily="34" charset="-120"/>
+              </a:rPr>
+              <a:t>token prefix and usage</a:t>
+            </a:r>
+            <a:endParaRPr lang="en-US" sz="1200" dirty="0"/>
+          </a:p>
+          <a:p>
+            <a:pPr marL="182880" indent="-155194" algn="l">
+              <a:lnSpc>
+                <a:spcPts val="1740"/>
+              </a:lnSpc>
+              <a:buSzPct val="100000"/>
+              <a:buChar char="•"/>
+            </a:pPr>
+            <a:r>
+              <a:rPr lang="en-US" sz="1200" dirty="0">
+                <a:solidFill>
+                  <a:srgbClr val="55555C"/>
+                </a:solidFill>
+                <a:latin typeface="Nunito Sans" pitchFamily="34" charset="0"/>
+                <a:ea typeface="Nunito Sans" pitchFamily="34" charset="-122"/>
+                <a:cs typeface="Nunito Sans" pitchFamily="34" charset="-120"/>
+              </a:rPr>
+              <a:t>style lint</a:t>
+            </a:r>
+            <a:endParaRPr lang="en-US" sz="1200" dirty="0"/>
+          </a:p>
+          <a:p>
+            <a:pPr marL="182880" indent="-155194" algn="l">
+              <a:lnSpc>
+                <a:spcPts val="1740"/>
+              </a:lnSpc>
+              <a:buSzPct val="100000"/>
+              <a:buChar char="•"/>
+            </a:pPr>
+            <a:r>
+              <a:rPr lang="en-US" sz="1200" dirty="0">
+                <a:solidFill>
+                  <a:srgbClr val="55555C"/>
+                </a:solidFill>
+                <a:latin typeface="Nunito Sans" pitchFamily="34" charset="0"/>
+                <a:ea typeface="Nunito Sans" pitchFamily="34" charset="-122"/>
+                <a:cs typeface="Nunito Sans" pitchFamily="34" charset="-120"/>
+              </a:rPr>
+              <a:t>generated files saved</a:t>
+            </a:r>
+            <a:endParaRPr lang="en-US" sz="1200" dirty="0"/>
+          </a:p>
+        </p:txBody>
+      </p:sp>
+      <p:sp>
+        <p:nvSpPr>
+          <p:cNvPr id="9" name="Shape 7"/>
+          <p:cNvSpPr/>
+          <p:nvPr/>
+        </p:nvSpPr>
+        <p:spPr>
+          <a:xfrm>
+            <a:off x="3492500" y="1749921"/>
+            <a:ext cx="2527300" cy="2090241"/>
           </a:xfrm>
           <a:prstGeom prst="roundRect">
             <a:avLst>
-              <a:gd name="adj" fmla="val 19284"/>
+              <a:gd name="adj" fmla="val 4861"/>
             </a:avLst>
           </a:prstGeom>
           <a:solidFill>
-            <a:srgbClr val="2B2B2E"/>
+            <a:srgbClr val="FFFFFF"/>
+          </a:solidFill>
+          <a:ln/>
+          <a:effectLst>
+            <a:outerShdw blurRad="203200" dist="76200" dir="5400000" algn="bl" rotWithShape="0">
+              <a:srgbClr val="78142D">
+                <a:alpha val="7000"/>
+              </a:srgbClr>
+            </a:outerShdw>
+          </a:effectLst>
+        </p:spPr>
+      </p:sp>
+      <p:sp>
+        <p:nvSpPr>
+          <p:cNvPr id="10" name="Shape 8"/>
+          <p:cNvSpPr/>
+          <p:nvPr/>
+        </p:nvSpPr>
+        <p:spPr>
+          <a:xfrm>
+            <a:off x="3492500" y="1749921"/>
+            <a:ext cx="2527300" cy="2090241"/>
+          </a:xfrm>
+          <a:custGeom>
+            <a:avLst/>
+            <a:gdLst/>
+            <a:ahLst/>
+            <a:cxnLst/>
+            <a:rect l="l" t="t" r="r" b="b"/>
+            <a:pathLst>
+              <a:path w="2527300" h="2090241">
+                <a:moveTo>
+                  <a:pt x="0" y="101600"/>
+                </a:moveTo>
+                <a:lnTo>
+                  <a:pt x="0" y="101600"/>
+                </a:lnTo>
+                <a:arcTo wR="101600" hR="101600" stAng="10800000" swAng="5400000"/>
+                <a:lnTo>
+                  <a:pt x="2425700" y="0"/>
+                </a:lnTo>
+                <a:arcTo wR="101600" hR="101600" stAng="16200000" swAng="5400000"/>
+                <a:lnTo>
+                  <a:pt x="2527300" y="101600"/>
+                </a:lnTo>
+                <a:arcTo wR="101600" hR="50800" stAng="0" swAng="-5400000"/>
+                <a:lnTo>
+                  <a:pt x="101600" y="50800"/>
+                </a:lnTo>
+                <a:arcTo wR="101600" hR="50800" stAng="16200000" swAng="-5400000"/>
+                <a:close/>
+              </a:path>
+            </a:pathLst>
+          </a:custGeom>
+          <a:solidFill>
+            <a:srgbClr val="487395"/>
+          </a:solidFill>
+          <a:ln/>
+        </p:spPr>
+      </p:sp>
+      <p:sp>
+        <p:nvSpPr>
+          <p:cNvPr id="11" name="Text 9"/>
+          <p:cNvSpPr/>
+          <p:nvPr/>
+        </p:nvSpPr>
+        <p:spPr>
+          <a:xfrm>
+            <a:off x="3670300" y="1978521"/>
+            <a:ext cx="2236851" cy="238720"/>
+          </a:xfrm>
+          <a:prstGeom prst="rect">
+            <a:avLst/>
+          </a:prstGeom>
+          <a:noFill/>
+          <a:ln/>
+        </p:spPr>
+        <p:txBody>
+          <a:bodyPr wrap="square" lIns="0" tIns="0" rIns="0" bIns="0" rtlCol="0" anchor="t">
+            <a:normAutofit/>
+          </a:bodyPr>
+          <a:lstStyle/>
+          <a:p>
+            <a:pPr marL="0" indent="0" algn="l">
+              <a:lnSpc>
+                <a:spcPts val="1680"/>
+              </a:lnSpc>
+              <a:buNone/>
+            </a:pPr>
+            <a:r>
+              <a:rPr lang="en-US" sz="1200" b="1" kern="0" spc="100" dirty="0">
+                <a:solidFill>
+                  <a:srgbClr val="2E526D"/>
+                </a:solidFill>
+                <a:latin typeface="Nunito Sans" pitchFamily="34" charset="0"/>
+                <a:ea typeface="Nunito Sans" pitchFamily="34" charset="-122"/>
+                <a:cs typeface="Nunito Sans" pitchFamily="34" charset="-120"/>
+              </a:rPr>
+              <a:t>EVERY PLECTRUM PR</a:t>
+            </a:r>
+            <a:endParaRPr lang="en-US" sz="1200" dirty="0"/>
+          </a:p>
+        </p:txBody>
+      </p:sp>
+      <p:sp>
+        <p:nvSpPr>
+          <p:cNvPr id="12" name="Text 10"/>
+          <p:cNvSpPr/>
+          <p:nvPr/>
+        </p:nvSpPr>
+        <p:spPr>
+          <a:xfrm>
+            <a:off x="3670300" y="2268041"/>
+            <a:ext cx="2236851" cy="238720"/>
+          </a:xfrm>
+          <a:prstGeom prst="rect">
+            <a:avLst/>
+          </a:prstGeom>
+          <a:noFill/>
+          <a:ln/>
+        </p:spPr>
+        <p:txBody>
+          <a:bodyPr wrap="square" lIns="0" tIns="0" rIns="0" bIns="0" rtlCol="0" anchor="t">
+            <a:normAutofit/>
+          </a:bodyPr>
+          <a:lstStyle/>
+          <a:p>
+            <a:pPr marL="0" indent="0" algn="l">
+              <a:lnSpc>
+                <a:spcPts val="1680"/>
+              </a:lnSpc>
+              <a:buNone/>
+            </a:pPr>
+            <a:r>
+              <a:rPr lang="en-US" sz="1400" b="1" dirty="0">
+                <a:solidFill>
+                  <a:srgbClr val="2B2B2E"/>
+                </a:solidFill>
+                <a:latin typeface="Nunito Sans" pitchFamily="34" charset="0"/>
+                <a:ea typeface="Nunito Sans" pitchFamily="34" charset="-122"/>
+                <a:cs typeface="Nunito Sans" pitchFamily="34" charset="-120"/>
+              </a:rPr>
+              <a:t>Seven CI jobs</a:t>
+            </a:r>
+            <a:endParaRPr lang="en-US" sz="1400" dirty="0"/>
+          </a:p>
+        </p:txBody>
+      </p:sp>
+      <p:sp>
+        <p:nvSpPr>
+          <p:cNvPr id="13" name="Text 11"/>
+          <p:cNvSpPr/>
+          <p:nvPr/>
+        </p:nvSpPr>
+        <p:spPr>
+          <a:xfrm>
+            <a:off x="3670300" y="2557562"/>
+            <a:ext cx="2236851" cy="1130201"/>
+          </a:xfrm>
+          <a:prstGeom prst="rect">
+            <a:avLst/>
+          </a:prstGeom>
+          <a:noFill/>
+          <a:ln/>
+        </p:spPr>
+        <p:txBody>
+          <a:bodyPr wrap="square" lIns="0" tIns="0" rIns="0" bIns="0" rtlCol="0" anchor="t">
+            <a:normAutofit/>
+          </a:bodyPr>
+          <a:lstStyle/>
+          <a:p>
+            <a:pPr marL="182880" indent="-155194" algn="l">
+              <a:lnSpc>
+                <a:spcPts val="1740"/>
+              </a:lnSpc>
+              <a:buSzPct val="100000"/>
+              <a:buChar char="•"/>
+            </a:pPr>
+            <a:r>
+              <a:rPr lang="en-US" sz="1200" dirty="0">
+                <a:solidFill>
+                  <a:srgbClr val="55555C"/>
+                </a:solidFill>
+                <a:latin typeface="Nunito Sans" pitchFamily="34" charset="0"/>
+                <a:ea typeface="Nunito Sans" pitchFamily="34" charset="-122"/>
+                <a:cs typeface="Nunito Sans" pitchFamily="34" charset="-120"/>
+              </a:rPr>
+              <a:t>token drift and lint</a:t>
+            </a:r>
+            <a:endParaRPr lang="en-US" sz="1200" dirty="0"/>
+          </a:p>
+          <a:p>
+            <a:pPr marL="182880" indent="-155194" algn="l">
+              <a:lnSpc>
+                <a:spcPts val="1740"/>
+              </a:lnSpc>
+              <a:buSzPct val="100000"/>
+              <a:buChar char="•"/>
+            </a:pPr>
+            <a:r>
+              <a:rPr lang="en-US" sz="1200">
+                <a:solidFill>
+                  <a:srgbClr val="55555C"/>
+                </a:solidFill>
+                <a:latin typeface="Nunito Sans" pitchFamily="34" charset="0"/>
+                <a:ea typeface="Nunito Sans" pitchFamily="34" charset="-122"/>
+                <a:cs typeface="Nunito Sans" pitchFamily="34" charset="-120"/>
+              </a:rPr>
+              <a:t>contracts, docs, keyboard</a:t>
+            </a:r>
+            <a:endParaRPr lang="en-US" sz="1200" dirty="0"/>
+          </a:p>
+          <a:p>
+            <a:pPr marL="182880" indent="-155194" algn="l">
+              <a:lnSpc>
+                <a:spcPts val="1740"/>
+              </a:lnSpc>
+              <a:buSzPct val="100000"/>
+              <a:buChar char="•"/>
+            </a:pPr>
+            <a:r>
+              <a:rPr lang="en-US" sz="1200" dirty="0">
+                <a:solidFill>
+                  <a:srgbClr val="55555C"/>
+                </a:solidFill>
+                <a:latin typeface="Nunito Sans" pitchFamily="34" charset="0"/>
+                <a:ea typeface="Nunito Sans" pitchFamily="34" charset="-122"/>
+                <a:cs typeface="Nunito Sans" pitchFamily="34" charset="-120"/>
+              </a:rPr>
+              <a:t>every story: render, play, a11y</a:t>
+            </a:r>
+            <a:endParaRPr lang="en-US" sz="1200" dirty="0"/>
+          </a:p>
+          <a:p>
+            <a:pPr marL="182880" indent="-155194" algn="l">
+              <a:lnSpc>
+                <a:spcPts val="1740"/>
+              </a:lnSpc>
+              <a:buSzPct val="100000"/>
+              <a:buChar char="•"/>
+            </a:pPr>
+            <a:r>
+              <a:rPr lang="en-US" sz="1200" dirty="0">
+                <a:solidFill>
+                  <a:srgbClr val="55555C"/>
+                </a:solidFill>
+                <a:latin typeface="Nunito Sans" pitchFamily="34" charset="0"/>
+                <a:ea typeface="Nunito Sans" pitchFamily="34" charset="-122"/>
+                <a:cs typeface="Nunito Sans" pitchFamily="34" charset="-120"/>
+              </a:rPr>
+              <a:t>packed consumer build</a:t>
+            </a:r>
+            <a:endParaRPr lang="en-US" sz="1200" dirty="0"/>
+          </a:p>
+        </p:txBody>
+      </p:sp>
+      <p:sp>
+        <p:nvSpPr>
+          <p:cNvPr id="14" name="Shape 12"/>
+          <p:cNvSpPr/>
+          <p:nvPr/>
+        </p:nvSpPr>
+        <p:spPr>
+          <a:xfrm>
+            <a:off x="6172200" y="1749921"/>
+            <a:ext cx="2527300" cy="2090241"/>
+          </a:xfrm>
+          <a:prstGeom prst="roundRect">
+            <a:avLst>
+              <a:gd name="adj" fmla="val 4861"/>
+            </a:avLst>
+          </a:prstGeom>
+          <a:solidFill>
+            <a:srgbClr val="FFFFFF"/>
+          </a:solidFill>
+          <a:ln/>
+          <a:effectLst>
+            <a:outerShdw blurRad="203200" dist="76200" dir="5400000" algn="bl" rotWithShape="0">
+              <a:srgbClr val="78142D">
+                <a:alpha val="7000"/>
+              </a:srgbClr>
+            </a:outerShdw>
+          </a:effectLst>
+        </p:spPr>
+      </p:sp>
+      <p:sp>
+        <p:nvSpPr>
+          <p:cNvPr id="15" name="Shape 13"/>
+          <p:cNvSpPr/>
+          <p:nvPr/>
+        </p:nvSpPr>
+        <p:spPr>
+          <a:xfrm>
+            <a:off x="6172200" y="1749921"/>
+            <a:ext cx="2527300" cy="2090241"/>
+          </a:xfrm>
+          <a:custGeom>
+            <a:avLst/>
+            <a:gdLst/>
+            <a:ahLst/>
+            <a:cxnLst/>
+            <a:rect l="l" t="t" r="r" b="b"/>
+            <a:pathLst>
+              <a:path w="2527300" h="2090241">
+                <a:moveTo>
+                  <a:pt x="0" y="101600"/>
+                </a:moveTo>
+                <a:lnTo>
+                  <a:pt x="0" y="101600"/>
+                </a:lnTo>
+                <a:arcTo wR="101600" hR="101600" stAng="10800000" swAng="5400000"/>
+                <a:lnTo>
+                  <a:pt x="2425700" y="0"/>
+                </a:lnTo>
+                <a:arcTo wR="101600" hR="101600" stAng="16200000" swAng="5400000"/>
+                <a:lnTo>
+                  <a:pt x="2527300" y="101600"/>
+                </a:lnTo>
+                <a:arcTo wR="101600" hR="50800" stAng="0" swAng="-5400000"/>
+                <a:lnTo>
+                  <a:pt x="101600" y="50800"/>
+                </a:lnTo>
+                <a:arcTo wR="101600" hR="50800" stAng="16200000" swAng="-5400000"/>
+                <a:close/>
+              </a:path>
+            </a:pathLst>
+          </a:custGeom>
+          <a:solidFill>
+            <a:srgbClr val="D0680F"/>
+          </a:solidFill>
+          <a:ln/>
+        </p:spPr>
+      </p:sp>
+      <p:sp>
+        <p:nvSpPr>
+          <p:cNvPr id="16" name="Text 14"/>
+          <p:cNvSpPr/>
+          <p:nvPr/>
+        </p:nvSpPr>
+        <p:spPr>
+          <a:xfrm>
+            <a:off x="6350000" y="1978521"/>
+            <a:ext cx="2236851" cy="238720"/>
+          </a:xfrm>
+          <a:prstGeom prst="rect">
+            <a:avLst/>
+          </a:prstGeom>
+          <a:noFill/>
+          <a:ln/>
+        </p:spPr>
+        <p:txBody>
+          <a:bodyPr wrap="square" lIns="0" tIns="0" rIns="0" bIns="0" rtlCol="0" anchor="t">
+            <a:normAutofit/>
+          </a:bodyPr>
+          <a:lstStyle/>
+          <a:p>
+            <a:pPr marL="0" indent="0" algn="l">
+              <a:lnSpc>
+                <a:spcPts val="1680"/>
+              </a:lnSpc>
+              <a:buNone/>
+            </a:pPr>
+            <a:r>
+              <a:rPr lang="en-US" sz="1200" b="1" kern="0" spc="100" dirty="0">
+                <a:solidFill>
+                  <a:srgbClr val="8F4508"/>
+                </a:solidFill>
+                <a:latin typeface="Nunito Sans" pitchFamily="34" charset="0"/>
+                <a:ea typeface="Nunito Sans" pitchFamily="34" charset="-122"/>
+                <a:cs typeface="Nunito Sans" pitchFamily="34" charset="-120"/>
+              </a:rPr>
+              <a:t>EVERY TOKEN SYNC</a:t>
+            </a:r>
+            <a:endParaRPr lang="en-US" sz="1200" dirty="0"/>
+          </a:p>
+        </p:txBody>
+      </p:sp>
+      <p:sp>
+        <p:nvSpPr>
+          <p:cNvPr id="17" name="Text 15"/>
+          <p:cNvSpPr/>
+          <p:nvPr/>
+        </p:nvSpPr>
+        <p:spPr>
+          <a:xfrm>
+            <a:off x="6350000" y="2268041"/>
+            <a:ext cx="2236851" cy="238720"/>
+          </a:xfrm>
+          <a:prstGeom prst="rect">
+            <a:avLst/>
+          </a:prstGeom>
+          <a:noFill/>
+          <a:ln/>
+        </p:spPr>
+        <p:txBody>
+          <a:bodyPr wrap="square" lIns="0" tIns="0" rIns="0" bIns="0" rtlCol="0" anchor="t">
+            <a:normAutofit/>
+          </a:bodyPr>
+          <a:lstStyle/>
+          <a:p>
+            <a:pPr marL="0" indent="0" algn="l">
+              <a:lnSpc>
+                <a:spcPts val="1680"/>
+              </a:lnSpc>
+              <a:buNone/>
+            </a:pPr>
+            <a:r>
+              <a:rPr lang="en-US" sz="1400" b="1" dirty="0">
+                <a:solidFill>
+                  <a:srgbClr val="2B2B2E"/>
+                </a:solidFill>
+                <a:latin typeface="Nunito Sans" pitchFamily="34" charset="0"/>
+                <a:ea typeface="Nunito Sans" pitchFamily="34" charset="-122"/>
+                <a:cs typeface="Nunito Sans" pitchFamily="34" charset="-120"/>
+              </a:rPr>
+              <a:t>A sync workflow</a:t>
+            </a:r>
+            <a:endParaRPr lang="en-US" sz="1400" dirty="0"/>
+          </a:p>
+        </p:txBody>
+      </p:sp>
+      <p:sp>
+        <p:nvSpPr>
+          <p:cNvPr id="18" name="Text 16"/>
+          <p:cNvSpPr/>
+          <p:nvPr/>
+        </p:nvSpPr>
+        <p:spPr>
+          <a:xfrm>
+            <a:off x="6350000" y="2557562"/>
+            <a:ext cx="2236851" cy="1130201"/>
+          </a:xfrm>
+          <a:prstGeom prst="rect">
+            <a:avLst/>
+          </a:prstGeom>
+          <a:noFill/>
+          <a:ln/>
+        </p:spPr>
+        <p:txBody>
+          <a:bodyPr wrap="square" lIns="0" tIns="0" rIns="0" bIns="0" rtlCol="0" anchor="t">
+            <a:normAutofit/>
+          </a:bodyPr>
+          <a:lstStyle/>
+          <a:p>
+            <a:pPr marL="182880" indent="-155194" algn="l">
+              <a:lnSpc>
+                <a:spcPts val="1740"/>
+              </a:lnSpc>
+              <a:buSzPct val="100000"/>
+              <a:buChar char="•"/>
+            </a:pPr>
+            <a:r>
+              <a:rPr lang="en-US" sz="1200" dirty="0">
+                <a:solidFill>
+                  <a:srgbClr val="55555C"/>
+                </a:solidFill>
+                <a:latin typeface="Nunito Sans" pitchFamily="34" charset="0"/>
+                <a:ea typeface="Nunito Sans" pitchFamily="34" charset="-122"/>
+                <a:cs typeface="Nunito Sans" pitchFamily="34" charset="-120"/>
+              </a:rPr>
+              <a:t>rebuild from the Figma dump</a:t>
+            </a:r>
+            <a:endParaRPr lang="en-US" sz="1200" dirty="0"/>
+          </a:p>
+          <a:p>
+            <a:pPr marL="182880" indent="-155194" algn="l">
+              <a:lnSpc>
+                <a:spcPts val="1740"/>
+              </a:lnSpc>
+              <a:buSzPct val="100000"/>
+              <a:buChar char="•"/>
+            </a:pPr>
+            <a:r>
+              <a:rPr lang="en-US" sz="1200" dirty="0">
+                <a:solidFill>
+                  <a:srgbClr val="55555C"/>
+                </a:solidFill>
+                <a:latin typeface="Nunito Sans" pitchFamily="34" charset="0"/>
+                <a:ea typeface="Nunito Sans" pitchFamily="34" charset="-122"/>
+                <a:cs typeface="Nunito Sans" pitchFamily="34" charset="-120"/>
+              </a:rPr>
+              <a:t>three-way drift audit</a:t>
+            </a:r>
+            <a:endParaRPr lang="en-US" sz="1200" dirty="0"/>
+          </a:p>
+          <a:p>
+            <a:pPr marL="182880" indent="-155194" algn="l">
+              <a:lnSpc>
+                <a:spcPts val="1740"/>
+              </a:lnSpc>
+              <a:buSzPct val="100000"/>
+              <a:buChar char="•"/>
+            </a:pPr>
+            <a:r>
+              <a:rPr lang="en-US" sz="1200" dirty="0">
+                <a:solidFill>
+                  <a:srgbClr val="55555C"/>
+                </a:solidFill>
+                <a:latin typeface="Nunito Sans" pitchFamily="34" charset="0"/>
+                <a:ea typeface="Nunito Sans" pitchFamily="34" charset="-122"/>
+                <a:cs typeface="Nunito Sans" pitchFamily="34" charset="-120"/>
+              </a:rPr>
+              <a:t>preset validation</a:t>
+            </a:r>
+            <a:endParaRPr lang="en-US" sz="1200" dirty="0"/>
+          </a:p>
+          <a:p>
+            <a:pPr marL="182880" indent="-155194" algn="l">
+              <a:lnSpc>
+                <a:spcPts val="1740"/>
+              </a:lnSpc>
+              <a:buSzPct val="100000"/>
+              <a:buChar char="•"/>
+            </a:pPr>
+            <a:r>
+              <a:rPr lang="en-US" sz="1200" dirty="0">
+                <a:solidFill>
+                  <a:srgbClr val="55555C"/>
+                </a:solidFill>
+                <a:latin typeface="Nunito Sans" pitchFamily="34" charset="0"/>
+                <a:ea typeface="Nunito Sans" pitchFamily="34" charset="-122"/>
+                <a:cs typeface="Nunito Sans" pitchFamily="34" charset="-120"/>
+              </a:rPr>
+              <a:t>report in the PR and in Figma</a:t>
+            </a:r>
+            <a:endParaRPr lang="en-US" sz="1200" dirty="0"/>
+          </a:p>
+        </p:txBody>
+      </p:sp>
+      <p:sp>
+        <p:nvSpPr>
+          <p:cNvPr id="19" name="Shape 17"/>
+          <p:cNvSpPr/>
+          <p:nvPr/>
+        </p:nvSpPr>
+        <p:spPr>
+          <a:xfrm>
+            <a:off x="8851900" y="1749921"/>
+            <a:ext cx="2527300" cy="2090241"/>
+          </a:xfrm>
+          <a:prstGeom prst="roundRect">
+            <a:avLst>
+              <a:gd name="adj" fmla="val 4861"/>
+            </a:avLst>
+          </a:prstGeom>
+          <a:solidFill>
+            <a:srgbClr val="FFFFFF"/>
+          </a:solidFill>
+          <a:ln/>
+          <a:effectLst>
+            <a:outerShdw blurRad="203200" dist="76200" dir="5400000" algn="bl" rotWithShape="0">
+              <a:srgbClr val="78142D">
+                <a:alpha val="7000"/>
+              </a:srgbClr>
+            </a:outerShdw>
+          </a:effectLst>
+        </p:spPr>
+      </p:sp>
+      <p:sp>
+        <p:nvSpPr>
+          <p:cNvPr id="20" name="Shape 18"/>
+          <p:cNvSpPr/>
+          <p:nvPr/>
+        </p:nvSpPr>
+        <p:spPr>
+          <a:xfrm>
+            <a:off x="8851900" y="1749921"/>
+            <a:ext cx="2527300" cy="2090241"/>
+          </a:xfrm>
+          <a:custGeom>
+            <a:avLst/>
+            <a:gdLst/>
+            <a:ahLst/>
+            <a:cxnLst/>
+            <a:rect l="l" t="t" r="r" b="b"/>
+            <a:pathLst>
+              <a:path w="2527300" h="2090241">
+                <a:moveTo>
+                  <a:pt x="0" y="101600"/>
+                </a:moveTo>
+                <a:lnTo>
+                  <a:pt x="0" y="101600"/>
+                </a:lnTo>
+                <a:arcTo wR="101600" hR="101600" stAng="10800000" swAng="5400000"/>
+                <a:lnTo>
+                  <a:pt x="2425700" y="0"/>
+                </a:lnTo>
+                <a:arcTo wR="101600" hR="101600" stAng="16200000" swAng="5400000"/>
+                <a:lnTo>
+                  <a:pt x="2527300" y="101600"/>
+                </a:lnTo>
+                <a:arcTo wR="101600" hR="50800" stAng="0" swAng="-5400000"/>
+                <a:lnTo>
+                  <a:pt x="101600" y="50800"/>
+                </a:lnTo>
+                <a:arcTo wR="101600" hR="50800" stAng="16200000" swAng="-5400000"/>
+                <a:close/>
+              </a:path>
+            </a:pathLst>
+          </a:custGeom>
+          <a:solidFill>
+            <a:srgbClr val="2F7D52"/>
+          </a:solidFill>
+          <a:ln/>
+        </p:spPr>
+      </p:sp>
+      <p:sp>
+        <p:nvSpPr>
+          <p:cNvPr id="21" name="Text 19"/>
+          <p:cNvSpPr/>
+          <p:nvPr/>
+        </p:nvSpPr>
+        <p:spPr>
+          <a:xfrm>
+            <a:off x="9029700" y="1978521"/>
+            <a:ext cx="2236851" cy="238720"/>
+          </a:xfrm>
+          <a:prstGeom prst="rect">
+            <a:avLst/>
+          </a:prstGeom>
+          <a:noFill/>
+          <a:ln/>
+        </p:spPr>
+        <p:txBody>
+          <a:bodyPr wrap="square" lIns="0" tIns="0" rIns="0" bIns="0" rtlCol="0" anchor="t">
+            <a:normAutofit/>
+          </a:bodyPr>
+          <a:lstStyle/>
+          <a:p>
+            <a:pPr marL="0" indent="0" algn="l">
+              <a:lnSpc>
+                <a:spcPts val="1680"/>
+              </a:lnSpc>
+              <a:buNone/>
+            </a:pPr>
+            <a:r>
+              <a:rPr lang="en-US" sz="1200" b="1" kern="0" spc="100" dirty="0">
+                <a:solidFill>
+                  <a:srgbClr val="1F5A3A"/>
+                </a:solidFill>
+                <a:latin typeface="Nunito Sans" pitchFamily="34" charset="0"/>
+                <a:ea typeface="Nunito Sans" pitchFamily="34" charset="-122"/>
+                <a:cs typeface="Nunito Sans" pitchFamily="34" charset="-120"/>
+              </a:rPr>
+              <a:t>EVERY APP REPO</a:t>
+            </a:r>
+            <a:endParaRPr lang="en-US" sz="1200" dirty="0"/>
+          </a:p>
+        </p:txBody>
+      </p:sp>
+      <p:sp>
+        <p:nvSpPr>
+          <p:cNvPr id="22" name="Text 20"/>
+          <p:cNvSpPr/>
+          <p:nvPr/>
+        </p:nvSpPr>
+        <p:spPr>
+          <a:xfrm>
+            <a:off x="9029700" y="2268041"/>
+            <a:ext cx="2236851" cy="238720"/>
+          </a:xfrm>
+          <a:prstGeom prst="rect">
+            <a:avLst/>
+          </a:prstGeom>
+          <a:noFill/>
+          <a:ln/>
+        </p:spPr>
+        <p:txBody>
+          <a:bodyPr wrap="square" lIns="0" tIns="0" rIns="0" bIns="0" rtlCol="0" anchor="t">
+            <a:normAutofit/>
+          </a:bodyPr>
+          <a:lstStyle/>
+          <a:p>
+            <a:pPr marL="0" indent="0" algn="l">
+              <a:lnSpc>
+                <a:spcPts val="1680"/>
+              </a:lnSpc>
+              <a:buNone/>
+            </a:pPr>
+            <a:r>
+              <a:rPr lang="en-US" sz="1400" b="1" dirty="0">
+                <a:solidFill>
+                  <a:srgbClr val="2B2B2E"/>
+                </a:solidFill>
+                <a:latin typeface="Nunito Sans" pitchFamily="34" charset="0"/>
+                <a:ea typeface="Nunito Sans" pitchFamily="34" charset="-122"/>
+                <a:cs typeface="Nunito Sans" pitchFamily="34" charset="-120"/>
+              </a:rPr>
+              <a:t>The generated workflow</a:t>
+            </a:r>
+            <a:endParaRPr lang="en-US" sz="1400" dirty="0"/>
+          </a:p>
+        </p:txBody>
+      </p:sp>
+      <p:sp>
+        <p:nvSpPr>
+          <p:cNvPr id="23" name="Text 21"/>
+          <p:cNvSpPr/>
+          <p:nvPr/>
+        </p:nvSpPr>
+        <p:spPr>
+          <a:xfrm>
+            <a:off x="9029700" y="2557562"/>
+            <a:ext cx="2236851" cy="909241"/>
+          </a:xfrm>
+          <a:prstGeom prst="rect">
+            <a:avLst/>
+          </a:prstGeom>
+          <a:noFill/>
+          <a:ln/>
+        </p:spPr>
+        <p:txBody>
+          <a:bodyPr wrap="square" lIns="0" tIns="0" rIns="0" bIns="0" rtlCol="0" anchor="t">
+            <a:normAutofit/>
+          </a:bodyPr>
+          <a:lstStyle/>
+          <a:p>
+            <a:pPr marL="182880" indent="-155194" algn="l">
+              <a:lnSpc>
+                <a:spcPts val="1740"/>
+              </a:lnSpc>
+              <a:buSzPct val="100000"/>
+              <a:buChar char="•"/>
+            </a:pPr>
+            <a:r>
+              <a:rPr lang="en-US" sz="1200" dirty="0">
+                <a:solidFill>
+                  <a:srgbClr val="55555C"/>
+                </a:solidFill>
+                <a:latin typeface="Nunito Sans" pitchFamily="34" charset="0"/>
+                <a:ea typeface="Nunito Sans" pitchFamily="34" charset="-122"/>
+                <a:cs typeface="Nunito Sans" pitchFamily="34" charset="-120"/>
+              </a:rPr>
+              <a:t>token and contract checks</a:t>
+            </a:r>
+            <a:endParaRPr lang="en-US" sz="1200" dirty="0"/>
+          </a:p>
+          <a:p>
+            <a:pPr marL="182880" indent="-155194" algn="l">
+              <a:lnSpc>
+                <a:spcPts val="1740"/>
+              </a:lnSpc>
+              <a:buSzPct val="100000"/>
+              <a:buChar char="•"/>
+            </a:pPr>
+            <a:r>
+              <a:rPr lang="en-US" sz="1200" dirty="0">
+                <a:solidFill>
+                  <a:srgbClr val="55555C"/>
+                </a:solidFill>
+                <a:latin typeface="Nunito Sans" pitchFamily="34" charset="0"/>
+                <a:ea typeface="Nunito Sans" pitchFamily="34" charset="-122"/>
+                <a:cs typeface="Nunito Sans" pitchFamily="34" charset="-120"/>
+              </a:rPr>
+              <a:t>build + unit tests</a:t>
+            </a:r>
+            <a:endParaRPr lang="en-US" sz="1200" dirty="0"/>
+          </a:p>
+          <a:p>
+            <a:pPr marL="182880" indent="-155194" algn="l">
+              <a:lnSpc>
+                <a:spcPts val="1740"/>
+              </a:lnSpc>
+              <a:buSzPct val="100000"/>
+              <a:buChar char="•"/>
+            </a:pPr>
+            <a:r>
+              <a:rPr lang="en-US" sz="1200" dirty="0">
+                <a:solidFill>
+                  <a:srgbClr val="55555C"/>
+                </a:solidFill>
+                <a:latin typeface="Nunito Sans" pitchFamily="34" charset="0"/>
+                <a:ea typeface="Nunito Sans" pitchFamily="34" charset="-122"/>
+                <a:cs typeface="Nunito Sans" pitchFamily="34" charset="-120"/>
+              </a:rPr>
+              <a:t>stories + accessibility</a:t>
+            </a:r>
+            <a:endParaRPr lang="en-US" sz="1200" dirty="0"/>
+          </a:p>
+          <a:p>
+            <a:pPr marL="182880" indent="-155194" algn="l">
+              <a:lnSpc>
+                <a:spcPts val="1740"/>
+              </a:lnSpc>
+              <a:buSzPct val="100000"/>
+              <a:buChar char="•"/>
+            </a:pPr>
+            <a:r>
+              <a:rPr lang="en-US" sz="1200" dirty="0">
+                <a:solidFill>
+                  <a:srgbClr val="55555C"/>
+                </a:solidFill>
+                <a:latin typeface="Nunito Sans" pitchFamily="34" charset="0"/>
+                <a:ea typeface="Nunito Sans" pitchFamily="34" charset="-122"/>
+                <a:cs typeface="Nunito Sans" pitchFamily="34" charset="-120"/>
+              </a:rPr>
+              <a:t>usage report to Core</a:t>
+            </a:r>
+            <a:endParaRPr lang="en-US" sz="1200" dirty="0"/>
+          </a:p>
+        </p:txBody>
+      </p:sp>
+      <p:sp>
+        <p:nvSpPr>
+          <p:cNvPr id="24" name="Shape 22"/>
+          <p:cNvSpPr/>
+          <p:nvPr/>
+        </p:nvSpPr>
+        <p:spPr>
+          <a:xfrm>
+            <a:off x="812800" y="4068763"/>
+            <a:ext cx="5514479" cy="358080"/>
+          </a:xfrm>
+          <a:prstGeom prst="roundRect">
+            <a:avLst>
+              <a:gd name="adj" fmla="val 50000"/>
+            </a:avLst>
+          </a:prstGeom>
+          <a:solidFill>
+            <a:srgbClr val="F3E6E9"/>
           </a:solidFill>
           <a:ln/>
         </p:spPr>
       </p:sp>
       <p:pic>
         <p:nvPicPr>
-          <p:cNvPr id="20" name="Image 0" descr="Lock">    </p:cNvPr>
+          <p:cNvPr id="25" name="Image 0" descr="Verified"/>
           <p:cNvPicPr>
             <a:picLocks noChangeAspect="1"/>
           </p:cNvPicPr>
           <p:nvPr/>
         </p:nvPicPr>
         <p:blipFill>
-          <a:blip r:embed="rId1"/>
-          <a:srcRect l="0" r="0" t="0" b="0"/>
+          <a:blip r:embed="rId3"/>
+          <a:srcRect/>
           <a:stretch/>
         </p:blipFill>
         <p:spPr>
           <a:xfrm>
-            <a:off x="1016000" y="5170785"/>
-            <a:ext cx="228600" cy="228600"/>
+            <a:off x="990600" y="4146153"/>
+            <a:ext cx="203200" cy="203200"/>
           </a:xfrm>
           <a:prstGeom prst="rect">
             <a:avLst/>
@@ -4503,139 +4902,51 @@
       </p:pic>
       <p:sp>
         <p:nvSpPr>
-          <p:cNvPr id="21" name="Text 18"/>
-          <p:cNvSpPr/>
-          <p:nvPr/>
-        </p:nvSpPr>
-        <p:spPr>
-          <a:xfrm>
-            <a:off x="1333500" y="5142905"/>
-            <a:ext cx="3989296" cy="309860"/>
-          </a:xfrm>
-          <a:prstGeom prst="rect">
-            <a:avLst/>
-          </a:prstGeom>
-          <a:noFill/>
-          <a:ln/>
-        </p:spPr>
-        <p:txBody>
-          <a:bodyPr wrap="square" lIns="0" tIns="0" rIns="0" bIns="0" rtlCol="0" anchor="t">
-            <a:normAutofit/>
-          </a:bodyPr>
-          <a:lstStyle/>
-          <a:p>
-            <a:pPr algn="l" indent="0" marL="0">
-              <a:lnSpc>
-                <a:spcPts val="2240"/>
-              </a:lnSpc>
-              <a:buNone/>
-            </a:pPr>
-            <a:r>
-              <a:rPr lang="en-US" sz="1600" b="1" dirty="0">
-                <a:solidFill>
-                  <a:srgbClr val="FFFFFF"/>
-                </a:solidFill>
-                <a:latin typeface="Nunito Sans" pitchFamily="34" charset="0"/>
-                <a:ea typeface="Nunito Sans" pitchFamily="34" charset="-122"/>
-                <a:cs typeface="Nunito Sans" pitchFamily="34" charset="-120"/>
-              </a:rPr>
-              <a:t>Required gates apply with or without AI</a:t>
-            </a:r>
-            <a:endParaRPr lang="en-US" sz="1600" dirty="0"/>
-          </a:p>
-        </p:txBody>
-      </p:sp>
-      <p:sp>
-        <p:nvSpPr>
-          <p:cNvPr id="22" name="Text 19"/>
-          <p:cNvSpPr/>
-          <p:nvPr/>
-        </p:nvSpPr>
-        <p:spPr>
-          <a:xfrm>
-            <a:off x="812800" y="5637411"/>
-            <a:ext cx="3124519" cy="229989"/>
-          </a:xfrm>
-          <a:prstGeom prst="rect">
-            <a:avLst/>
-          </a:prstGeom>
-          <a:noFill/>
-          <a:ln/>
-        </p:spPr>
-        <p:txBody>
-          <a:bodyPr wrap="square" lIns="0" tIns="0" rIns="0" bIns="0" rtlCol="0" anchor="t">
-            <a:normAutofit/>
-          </a:bodyPr>
-          <a:lstStyle/>
-          <a:p>
-            <a:pPr algn="l" indent="0" marL="0">
-              <a:lnSpc>
-                <a:spcPts val="1680"/>
-              </a:lnSpc>
-              <a:buNone/>
-            </a:pPr>
-            <a:r>
-              <a:rPr lang="en-US" sz="1200" dirty="0">
-                <a:solidFill>
-                  <a:srgbClr val="55555C"/>
-                </a:solidFill>
-                <a:latin typeface="Nunito Sans" pitchFamily="34" charset="0"/>
-                <a:ea typeface="Nunito Sans" pitchFamily="34" charset="-122"/>
-                <a:cs typeface="Nunito Sans" pitchFamily="34" charset="-120"/>
-              </a:rPr>
-              <a:t>Visual regressions: Chromatic when enabled</a:t>
-            </a:r>
-            <a:endParaRPr lang="en-US" sz="1200" dirty="0"/>
-          </a:p>
-        </p:txBody>
-      </p:sp>
-      <p:sp>
-        <p:nvSpPr>
-          <p:cNvPr id="23" name="Text 20"/>
-          <p:cNvSpPr/>
-          <p:nvPr/>
-        </p:nvSpPr>
-        <p:spPr>
-          <a:xfrm>
-            <a:off x="4151114" y="5637411"/>
-            <a:ext cx="4066045" cy="229989"/>
-          </a:xfrm>
-          <a:prstGeom prst="rect">
-            <a:avLst/>
-          </a:prstGeom>
-          <a:noFill/>
-          <a:ln/>
-        </p:spPr>
-        <p:txBody>
-          <a:bodyPr wrap="square" lIns="0" tIns="0" rIns="0" bIns="0" rtlCol="0" anchor="t">
-            <a:normAutofit/>
-          </a:bodyPr>
-          <a:lstStyle/>
-          <a:p>
-            <a:pPr algn="l" indent="0" marL="0">
-              <a:lnSpc>
-                <a:spcPts val="1680"/>
-              </a:lnSpc>
-              <a:buNone/>
-            </a:pPr>
-            <a:r>
-              <a:rPr lang="en-US" sz="1200" dirty="0">
-                <a:solidFill>
-                  <a:srgbClr val="6E6E75"/>
-                </a:solidFill>
-                <a:latin typeface="Nunito Sans" pitchFamily="34" charset="0"/>
-                <a:ea typeface="Nunito Sans" pitchFamily="34" charset="-122"/>
-                <a:cs typeface="Nunito Sans" pitchFamily="34" charset="-120"/>
-              </a:rPr>
-              <a:t>Storybook reference: Docs / Maintainer workflow / Testing</a:t>
-            </a:r>
-            <a:endParaRPr lang="en-US" sz="1200" dirty="0"/>
-          </a:p>
-        </p:txBody>
-      </p:sp>
-      <p:sp>
-        <p:nvSpPr>
-          <p:cNvPr id="24" name="Text 21"/>
+          <p:cNvPr id="26" name="Text 23"/>
+          <p:cNvSpPr/>
+          <p:nvPr/>
+        </p:nvSpPr>
+        <p:spPr>
+          <a:xfrm>
+            <a:off x="1270000" y="4132263"/>
+            <a:ext cx="5025863" cy="256480"/>
+          </a:xfrm>
+          <a:prstGeom prst="rect">
+            <a:avLst/>
+          </a:prstGeom>
+          <a:noFill/>
+          <a:ln/>
+        </p:spPr>
+        <p:txBody>
+          <a:bodyPr wrap="square" lIns="0" tIns="0" rIns="0" bIns="0" rtlCol="0" anchor="t">
+            <a:normAutofit/>
+          </a:bodyPr>
+          <a:lstStyle/>
+          <a:p>
+            <a:pPr marL="0" indent="0" algn="l">
+              <a:lnSpc>
+                <a:spcPts val="1820"/>
+              </a:lnSpc>
+              <a:buNone/>
+            </a:pPr>
+            <a:r>
+              <a:rPr lang="en-US" sz="1300" dirty="0">
+                <a:solidFill>
+                  <a:srgbClr val="46464C"/>
+                </a:solidFill>
+                <a:latin typeface="Nunito Sans" pitchFamily="34" charset="0"/>
+                <a:ea typeface="Nunito Sans" pitchFamily="34" charset="-122"/>
+                <a:cs typeface="Nunito Sans" pitchFamily="34" charset="-120"/>
+              </a:rPr>
+              <a:t>Then the release: same commit's CI, clean install, release manifest</a:t>
+            </a:r>
+            <a:endParaRPr lang="en-US" sz="1300" dirty="0"/>
+          </a:p>
+        </p:txBody>
+      </p:sp>
+      <p:sp>
+        <p:nvSpPr>
+          <p:cNvPr id="27" name="Text 24"/>
           <p:cNvSpPr/>
           <p:nvPr/>
         </p:nvSpPr>
@@ -4656,7 +4967,7 @@
           </a:bodyPr>
           <a:lstStyle/>
           <a:p>
-            <a:pPr algn="l" indent="0" marL="0">
+            <a:pPr marL="0" indent="0" algn="l">
               <a:lnSpc>
                 <a:spcPts val="1680"/>
               </a:lnSpc>
@@ -4679,7 +4990,7 @@
       </p:sp>
       <p:sp>
         <p:nvSpPr>
-          <p:cNvPr id="25" name="Text 22"/>
+          <p:cNvPr id="28" name="Text 25"/>
           <p:cNvSpPr/>
           <p:nvPr/>
         </p:nvSpPr>
@@ -4700,14 +5011,14 @@
           </a:bodyPr>
           <a:lstStyle/>
           <a:p>
-            <a:pPr algn="r" indent="0" marL="0">
+            <a:pPr marL="0" indent="0" algn="r">
               <a:lnSpc>
                 <a:spcPts val="1680"/>
               </a:lnSpc>
               <a:buNone/>
             </a:pPr>
             <a:r>
-              <a:rPr lang="en-US" sz="1200" dirty="0">
+              <a:rPr lang="en-US" sz="1200">
                 <a:solidFill>
                   <a:srgbClr val="6E6E75"/>
                 </a:solidFill>
@@ -4715,7 +5026,7 @@
                 <a:ea typeface="Nunito Sans" pitchFamily="34" charset="-122"/>
                 <a:cs typeface="Nunito Sans" pitchFamily="34" charset="-120"/>
               </a:rPr>
-              <a:t>11 / 16</a:t>
+              <a:t>11 / 17</a:t>
             </a:r>
             <a:endParaRPr lang="en-US" sz="1200" dirty="0"/>
           </a:p>
@@ -4731,12 +5042,13 @@
 
 <file path=ppt/slides/slide12.xml><?xml version="1.0" encoding="utf-8"?>
 <p:sld xmlns:a="http://schemas.openxmlformats.org/drawingml/2006/main" xmlns:r="http://schemas.openxmlformats.org/officeDocument/2006/relationships" xmlns:p="http://schemas.openxmlformats.org/presentationml/2006/main">
-  <p:cSld name="Slide 12">
+  <p:cSld name="Slide 11">
     <p:bg>
       <p:bgPr>
         <a:solidFill>
           <a:srgbClr val="FFF9FA"/>
         </a:solidFill>
+        <a:effectLst/>
       </p:bgPr>
     </p:bg>
     <p:spTree>
@@ -4762,28 +5074,28 @@
         <p:spPr>
           <a:xfrm>
             <a:off x="812800" y="812800"/>
-            <a:ext cx="10883392" cy="256480"/>
-          </a:xfrm>
-          <a:prstGeom prst="rect">
-            <a:avLst/>
-          </a:prstGeom>
-          <a:noFill/>
-          <a:ln/>
-        </p:spPr>
-        <p:txBody>
-          <a:bodyPr wrap="square" lIns="0" tIns="0" rIns="0" bIns="0" rtlCol="0" anchor="t">
-            <a:normAutofit/>
-          </a:bodyPr>
-          <a:lstStyle/>
-          <a:p>
-            <a:pPr algn="l" indent="0" marL="0">
-              <a:lnSpc>
-                <a:spcPts val="1820"/>
-              </a:lnSpc>
-              <a:buNone/>
-            </a:pPr>
-            <a:r>
-              <a:rPr lang="en-US" sz="1300" b="1" spc="150" kern="0" dirty="0">
+            <a:ext cx="10883392" cy="250329"/>
+          </a:xfrm>
+          <a:prstGeom prst="rect">
+            <a:avLst/>
+          </a:prstGeom>
+          <a:noFill/>
+          <a:ln/>
+        </p:spPr>
+        <p:txBody>
+          <a:bodyPr wrap="square" lIns="0" tIns="0" rIns="0" bIns="0" rtlCol="0" anchor="t">
+            <a:normAutofit/>
+          </a:bodyPr>
+          <a:lstStyle/>
+          <a:p>
+            <a:pPr marL="0" indent="0" algn="l">
+              <a:lnSpc>
+                <a:spcPts val="1774"/>
+              </a:lnSpc>
+              <a:buNone/>
+            </a:pPr>
+            <a:r>
+              <a:rPr lang="en-US" sz="1268" b="1" kern="0" spc="150" dirty="0">
                 <a:solidFill>
                   <a:srgbClr val="333333"/>
                 </a:solidFill>
@@ -4791,6 +5103,962 @@
                 <a:ea typeface="Alegreya Sans" pitchFamily="34" charset="-122"/>
                 <a:cs typeface="Alegreya Sans" pitchFamily="34" charset="-120"/>
               </a:rPr>
+              <a:t>CI AND PRS — EVIDENCE</a:t>
+            </a:r>
+            <a:endParaRPr lang="en-US" sz="1268" dirty="0"/>
+          </a:p>
+        </p:txBody>
+      </p:sp>
+      <p:sp>
+        <p:nvSpPr>
+          <p:cNvPr id="3" name="Text 1"/>
+          <p:cNvSpPr/>
+          <p:nvPr/>
+        </p:nvSpPr>
+        <p:spPr>
+          <a:xfrm>
+            <a:off x="812800" y="1088529"/>
+            <a:ext cx="10883392" cy="440928"/>
+          </a:xfrm>
+          <a:prstGeom prst="rect">
+            <a:avLst/>
+          </a:prstGeom>
+          <a:noFill/>
+          <a:ln/>
+        </p:spPr>
+        <p:txBody>
+          <a:bodyPr wrap="square" lIns="0" tIns="0" rIns="0" bIns="0" rtlCol="0" anchor="t">
+            <a:normAutofit/>
+          </a:bodyPr>
+          <a:lstStyle/>
+          <a:p>
+            <a:pPr marL="0" indent="0" algn="l">
+              <a:lnSpc>
+                <a:spcPts val="3266"/>
+              </a:lnSpc>
+              <a:buNone/>
+            </a:pPr>
+            <a:r>
+              <a:rPr lang="en-US" sz="3110" b="1" dirty="0">
+                <a:solidFill>
+                  <a:srgbClr val="DA002F"/>
+                </a:solidFill>
+                <a:latin typeface="Alegreya Sans" pitchFamily="34" charset="0"/>
+                <a:ea typeface="Alegreya Sans" pitchFamily="34" charset="-122"/>
+                <a:cs typeface="Alegreya Sans" pitchFamily="34" charset="-120"/>
+              </a:rPr>
+              <a:t>Tests and CI provide the PR evidence</a:t>
+            </a:r>
+            <a:endParaRPr lang="en-US" sz="3110" dirty="0"/>
+          </a:p>
+        </p:txBody>
+      </p:sp>
+      <p:sp>
+        <p:nvSpPr>
+          <p:cNvPr id="4" name="Shape 2"/>
+          <p:cNvSpPr/>
+          <p:nvPr/>
+        </p:nvSpPr>
+        <p:spPr>
+          <a:xfrm>
+            <a:off x="815975" y="1685032"/>
+            <a:ext cx="10560050" cy="3155652"/>
+          </a:xfrm>
+          <a:prstGeom prst="roundRect">
+            <a:avLst>
+              <a:gd name="adj" fmla="val 3119"/>
+            </a:avLst>
+          </a:prstGeom>
+          <a:solidFill>
+            <a:srgbClr val="FFFFFF"/>
+          </a:solidFill>
+          <a:ln w="6350">
+            <a:solidFill>
+              <a:srgbClr val="EBD3D9"/>
+            </a:solidFill>
+            <a:prstDash val="solid"/>
+          </a:ln>
+        </p:spPr>
+      </p:sp>
+      <p:sp>
+        <p:nvSpPr>
+          <p:cNvPr id="5" name="Shape 3"/>
+          <p:cNvSpPr/>
+          <p:nvPr/>
+        </p:nvSpPr>
+        <p:spPr>
+          <a:xfrm>
+            <a:off x="1022350" y="2339082"/>
+            <a:ext cx="10147300" cy="0"/>
+          </a:xfrm>
+          <a:prstGeom prst="line">
+            <a:avLst/>
+          </a:prstGeom>
+          <a:noFill/>
+          <a:ln w="6350">
+            <a:solidFill>
+              <a:srgbClr val="EBD3D9"/>
+            </a:solidFill>
+            <a:prstDash val="solid"/>
+          </a:ln>
+        </p:spPr>
+      </p:sp>
+      <p:sp>
+        <p:nvSpPr>
+          <p:cNvPr id="6" name="Text 4"/>
+          <p:cNvSpPr/>
+          <p:nvPr/>
+        </p:nvSpPr>
+        <p:spPr>
+          <a:xfrm>
+            <a:off x="1022350" y="1871166"/>
+            <a:ext cx="3401060" cy="345380"/>
+          </a:xfrm>
+          <a:prstGeom prst="rect">
+            <a:avLst/>
+          </a:prstGeom>
+          <a:noFill/>
+          <a:ln/>
+        </p:spPr>
+        <p:txBody>
+          <a:bodyPr wrap="square" lIns="0" tIns="0" rIns="0" bIns="0" rtlCol="0" anchor="t">
+            <a:normAutofit/>
+          </a:bodyPr>
+          <a:lstStyle/>
+          <a:p>
+            <a:pPr marL="0" indent="0" algn="l">
+              <a:lnSpc>
+                <a:spcPts val="2520"/>
+              </a:lnSpc>
+              <a:buNone/>
+            </a:pPr>
+            <a:r>
+              <a:rPr lang="en-US" sz="1800" b="1" dirty="0">
+                <a:solidFill>
+                  <a:srgbClr val="2E526D"/>
+                </a:solidFill>
+                <a:latin typeface="Nunito Sans" pitchFamily="34" charset="0"/>
+                <a:ea typeface="Nunito Sans" pitchFamily="34" charset="-122"/>
+                <a:cs typeface="Nunito Sans" pitchFamily="34" charset="-120"/>
+              </a:rPr>
+              <a:t>Unit tests</a:t>
+            </a:r>
+            <a:endParaRPr lang="en-US" sz="1800" dirty="0"/>
+          </a:p>
+        </p:txBody>
+      </p:sp>
+      <p:sp>
+        <p:nvSpPr>
+          <p:cNvPr id="7" name="Text 5"/>
+          <p:cNvSpPr/>
+          <p:nvPr/>
+        </p:nvSpPr>
+        <p:spPr>
+          <a:xfrm>
+            <a:off x="4324350" y="1888827"/>
+            <a:ext cx="7024497" cy="309860"/>
+          </a:xfrm>
+          <a:prstGeom prst="rect">
+            <a:avLst/>
+          </a:prstGeom>
+          <a:noFill/>
+          <a:ln/>
+        </p:spPr>
+        <p:txBody>
+          <a:bodyPr wrap="square" lIns="0" tIns="0" rIns="0" bIns="0" rtlCol="0" anchor="t">
+            <a:normAutofit/>
+          </a:bodyPr>
+          <a:lstStyle/>
+          <a:p>
+            <a:pPr marL="0" indent="0" algn="l">
+              <a:lnSpc>
+                <a:spcPts val="2240"/>
+              </a:lnSpc>
+              <a:buNone/>
+            </a:pPr>
+            <a:r>
+              <a:rPr lang="en-US" sz="1600" dirty="0">
+                <a:solidFill>
+                  <a:srgbClr val="2B2B2E"/>
+                </a:solidFill>
+                <a:latin typeface="Nunito Sans" pitchFamily="34" charset="0"/>
+                <a:ea typeface="Nunito Sans" pitchFamily="34" charset="-122"/>
+                <a:cs typeface="Nunito Sans" pitchFamily="34" charset="-120"/>
+              </a:rPr>
+              <a:t>Vitest logic + coverage</a:t>
+            </a:r>
+            <a:endParaRPr lang="en-US" sz="1600" dirty="0"/>
+          </a:p>
+        </p:txBody>
+      </p:sp>
+      <p:sp>
+        <p:nvSpPr>
+          <p:cNvPr id="8" name="Shape 6"/>
+          <p:cNvSpPr/>
+          <p:nvPr/>
+        </p:nvSpPr>
+        <p:spPr>
+          <a:xfrm>
+            <a:off x="1022350" y="2954933"/>
+            <a:ext cx="10147300" cy="0"/>
+          </a:xfrm>
+          <a:prstGeom prst="line">
+            <a:avLst/>
+          </a:prstGeom>
+          <a:noFill/>
+          <a:ln w="6350">
+            <a:solidFill>
+              <a:srgbClr val="EBD3D9"/>
+            </a:solidFill>
+            <a:prstDash val="solid"/>
+          </a:ln>
+        </p:spPr>
+      </p:sp>
+      <p:sp>
+        <p:nvSpPr>
+          <p:cNvPr id="9" name="Text 7"/>
+          <p:cNvSpPr/>
+          <p:nvPr/>
+        </p:nvSpPr>
+        <p:spPr>
+          <a:xfrm>
+            <a:off x="1022350" y="2487017"/>
+            <a:ext cx="3401060" cy="345380"/>
+          </a:xfrm>
+          <a:prstGeom prst="rect">
+            <a:avLst/>
+          </a:prstGeom>
+          <a:noFill/>
+          <a:ln/>
+        </p:spPr>
+        <p:txBody>
+          <a:bodyPr wrap="square" lIns="0" tIns="0" rIns="0" bIns="0" rtlCol="0" anchor="t">
+            <a:normAutofit/>
+          </a:bodyPr>
+          <a:lstStyle/>
+          <a:p>
+            <a:pPr marL="0" indent="0" algn="l">
+              <a:lnSpc>
+                <a:spcPts val="2520"/>
+              </a:lnSpc>
+              <a:buNone/>
+            </a:pPr>
+            <a:r>
+              <a:rPr lang="en-US" sz="1800" b="1" dirty="0">
+                <a:solidFill>
+                  <a:srgbClr val="2E526D"/>
+                </a:solidFill>
+                <a:latin typeface="Nunito Sans" pitchFamily="34" charset="0"/>
+                <a:ea typeface="Nunito Sans" pitchFamily="34" charset="-122"/>
+                <a:cs typeface="Nunito Sans" pitchFamily="34" charset="-120"/>
+              </a:rPr>
+              <a:t>Story tests</a:t>
+            </a:r>
+            <a:endParaRPr lang="en-US" sz="1800" dirty="0"/>
+          </a:p>
+        </p:txBody>
+      </p:sp>
+      <p:sp>
+        <p:nvSpPr>
+          <p:cNvPr id="10" name="Text 8"/>
+          <p:cNvSpPr/>
+          <p:nvPr/>
+        </p:nvSpPr>
+        <p:spPr>
+          <a:xfrm>
+            <a:off x="4324350" y="2504777"/>
+            <a:ext cx="7024497" cy="309860"/>
+          </a:xfrm>
+          <a:prstGeom prst="rect">
+            <a:avLst/>
+          </a:prstGeom>
+          <a:noFill/>
+          <a:ln/>
+        </p:spPr>
+        <p:txBody>
+          <a:bodyPr wrap="square" lIns="0" tIns="0" rIns="0" bIns="0" rtlCol="0" anchor="t">
+            <a:normAutofit/>
+          </a:bodyPr>
+          <a:lstStyle/>
+          <a:p>
+            <a:pPr marL="0" indent="0" algn="l">
+              <a:lnSpc>
+                <a:spcPts val="2240"/>
+              </a:lnSpc>
+              <a:buNone/>
+            </a:pPr>
+            <a:r>
+              <a:rPr lang="en-US" sz="1600">
+                <a:solidFill>
+                  <a:srgbClr val="2B2B2E"/>
+                </a:solidFill>
+                <a:latin typeface="Nunito Sans" pitchFamily="34" charset="0"/>
+                <a:ea typeface="Nunito Sans" pitchFamily="34" charset="-122"/>
+                <a:cs typeface="Nunito Sans" pitchFamily="34" charset="-120"/>
+              </a:rPr>
+              <a:t>Rendering, interactions, keyboard + accessibility</a:t>
+            </a:r>
+            <a:endParaRPr lang="en-US" sz="1600" dirty="0"/>
+          </a:p>
+        </p:txBody>
+      </p:sp>
+      <p:sp>
+        <p:nvSpPr>
+          <p:cNvPr id="11" name="Shape 9"/>
+          <p:cNvSpPr/>
+          <p:nvPr/>
+        </p:nvSpPr>
+        <p:spPr>
+          <a:xfrm>
+            <a:off x="1022350" y="3570883"/>
+            <a:ext cx="10147300" cy="0"/>
+          </a:xfrm>
+          <a:prstGeom prst="line">
+            <a:avLst/>
+          </a:prstGeom>
+          <a:noFill/>
+          <a:ln w="6350">
+            <a:solidFill>
+              <a:srgbClr val="EBD3D9"/>
+            </a:solidFill>
+            <a:prstDash val="solid"/>
+          </a:ln>
+        </p:spPr>
+      </p:sp>
+      <p:sp>
+        <p:nvSpPr>
+          <p:cNvPr id="12" name="Text 10"/>
+          <p:cNvSpPr/>
+          <p:nvPr/>
+        </p:nvSpPr>
+        <p:spPr>
+          <a:xfrm>
+            <a:off x="1022350" y="3102967"/>
+            <a:ext cx="3401060" cy="345380"/>
+          </a:xfrm>
+          <a:prstGeom prst="rect">
+            <a:avLst/>
+          </a:prstGeom>
+          <a:noFill/>
+          <a:ln/>
+        </p:spPr>
+        <p:txBody>
+          <a:bodyPr wrap="square" lIns="0" tIns="0" rIns="0" bIns="0" rtlCol="0" anchor="t">
+            <a:normAutofit/>
+          </a:bodyPr>
+          <a:lstStyle/>
+          <a:p>
+            <a:pPr marL="0" indent="0" algn="l">
+              <a:lnSpc>
+                <a:spcPts val="2520"/>
+              </a:lnSpc>
+              <a:buNone/>
+            </a:pPr>
+            <a:r>
+              <a:rPr lang="en-US" sz="1800" b="1" dirty="0">
+                <a:solidFill>
+                  <a:srgbClr val="2E526D"/>
+                </a:solidFill>
+                <a:latin typeface="Nunito Sans" pitchFamily="34" charset="0"/>
+                <a:ea typeface="Nunito Sans" pitchFamily="34" charset="-122"/>
+                <a:cs typeface="Nunito Sans" pitchFamily="34" charset="-120"/>
+              </a:rPr>
+              <a:t>Contracts + tokens</a:t>
+            </a:r>
+            <a:endParaRPr lang="en-US" sz="1800" dirty="0"/>
+          </a:p>
+        </p:txBody>
+      </p:sp>
+      <p:sp>
+        <p:nvSpPr>
+          <p:cNvPr id="13" name="Text 11"/>
+          <p:cNvSpPr/>
+          <p:nvPr/>
+        </p:nvSpPr>
+        <p:spPr>
+          <a:xfrm>
+            <a:off x="4324350" y="3120628"/>
+            <a:ext cx="7024497" cy="309860"/>
+          </a:xfrm>
+          <a:prstGeom prst="rect">
+            <a:avLst/>
+          </a:prstGeom>
+          <a:noFill/>
+          <a:ln/>
+        </p:spPr>
+        <p:txBody>
+          <a:bodyPr wrap="square" lIns="0" tIns="0" rIns="0" bIns="0" rtlCol="0" anchor="t">
+            <a:normAutofit/>
+          </a:bodyPr>
+          <a:lstStyle/>
+          <a:p>
+            <a:pPr marL="0" indent="0" algn="l">
+              <a:lnSpc>
+                <a:spcPts val="2240"/>
+              </a:lnSpc>
+              <a:buNone/>
+            </a:pPr>
+            <a:r>
+              <a:rPr lang="en-US" sz="1600" dirty="0">
+                <a:solidFill>
+                  <a:srgbClr val="2B2B2E"/>
+                </a:solidFill>
+                <a:latin typeface="Nunito Sans" pitchFamily="34" charset="0"/>
+                <a:ea typeface="Nunito Sans" pitchFamily="34" charset="-122"/>
+                <a:cs typeface="Nunito Sans" pitchFamily="34" charset="-120"/>
+              </a:rPr>
+              <a:t>API, docs and generated-file consistency</a:t>
+            </a:r>
+            <a:endParaRPr lang="en-US" sz="1600" dirty="0"/>
+          </a:p>
+        </p:txBody>
+      </p:sp>
+      <p:sp>
+        <p:nvSpPr>
+          <p:cNvPr id="14" name="Shape 12"/>
+          <p:cNvSpPr/>
+          <p:nvPr/>
+        </p:nvSpPr>
+        <p:spPr>
+          <a:xfrm>
+            <a:off x="1022350" y="4186734"/>
+            <a:ext cx="10147300" cy="0"/>
+          </a:xfrm>
+          <a:prstGeom prst="line">
+            <a:avLst/>
+          </a:prstGeom>
+          <a:noFill/>
+          <a:ln w="6350">
+            <a:solidFill>
+              <a:srgbClr val="EBD3D9"/>
+            </a:solidFill>
+            <a:prstDash val="solid"/>
+          </a:ln>
+        </p:spPr>
+      </p:sp>
+      <p:sp>
+        <p:nvSpPr>
+          <p:cNvPr id="15" name="Text 13"/>
+          <p:cNvSpPr/>
+          <p:nvPr/>
+        </p:nvSpPr>
+        <p:spPr>
+          <a:xfrm>
+            <a:off x="1022350" y="3718818"/>
+            <a:ext cx="3401060" cy="345380"/>
+          </a:xfrm>
+          <a:prstGeom prst="rect">
+            <a:avLst/>
+          </a:prstGeom>
+          <a:noFill/>
+          <a:ln/>
+        </p:spPr>
+        <p:txBody>
+          <a:bodyPr wrap="square" lIns="0" tIns="0" rIns="0" bIns="0" rtlCol="0" anchor="t">
+            <a:normAutofit/>
+          </a:bodyPr>
+          <a:lstStyle/>
+          <a:p>
+            <a:pPr marL="0" indent="0" algn="l">
+              <a:lnSpc>
+                <a:spcPts val="2520"/>
+              </a:lnSpc>
+              <a:buNone/>
+            </a:pPr>
+            <a:r>
+              <a:rPr lang="en-US" sz="1800" b="1" dirty="0">
+                <a:solidFill>
+                  <a:srgbClr val="2E526D"/>
+                </a:solidFill>
+                <a:latin typeface="Nunito Sans" pitchFamily="34" charset="0"/>
+                <a:ea typeface="Nunito Sans" pitchFamily="34" charset="-122"/>
+                <a:cs typeface="Nunito Sans" pitchFamily="34" charset="-120"/>
+              </a:rPr>
+              <a:t>Package smoke</a:t>
+            </a:r>
+            <a:endParaRPr lang="en-US" sz="1800" dirty="0"/>
+          </a:p>
+        </p:txBody>
+      </p:sp>
+      <p:sp>
+        <p:nvSpPr>
+          <p:cNvPr id="16" name="Text 14"/>
+          <p:cNvSpPr/>
+          <p:nvPr/>
+        </p:nvSpPr>
+        <p:spPr>
+          <a:xfrm>
+            <a:off x="4324350" y="3736578"/>
+            <a:ext cx="7024497" cy="309860"/>
+          </a:xfrm>
+          <a:prstGeom prst="rect">
+            <a:avLst/>
+          </a:prstGeom>
+          <a:noFill/>
+          <a:ln/>
+        </p:spPr>
+        <p:txBody>
+          <a:bodyPr wrap="square" lIns="0" tIns="0" rIns="0" bIns="0" rtlCol="0" anchor="t">
+            <a:normAutofit/>
+          </a:bodyPr>
+          <a:lstStyle/>
+          <a:p>
+            <a:pPr marL="0" indent="0" algn="l">
+              <a:lnSpc>
+                <a:spcPts val="2240"/>
+              </a:lnSpc>
+              <a:buNone/>
+            </a:pPr>
+            <a:r>
+              <a:rPr lang="en-US" sz="1600" dirty="0">
+                <a:solidFill>
+                  <a:srgbClr val="2B2B2E"/>
+                </a:solidFill>
+                <a:latin typeface="Nunito Sans" pitchFamily="34" charset="0"/>
+                <a:ea typeface="Nunito Sans" pitchFamily="34" charset="-122"/>
+                <a:cs typeface="Nunito Sans" pitchFamily="34" charset="-120"/>
+              </a:rPr>
+              <a:t>Install + build in a clean app, like a team repo</a:t>
+            </a:r>
+            <a:endParaRPr lang="en-US" sz="1600" dirty="0"/>
+          </a:p>
+        </p:txBody>
+      </p:sp>
+      <p:sp>
+        <p:nvSpPr>
+          <p:cNvPr id="17" name="Text 15"/>
+          <p:cNvSpPr/>
+          <p:nvPr/>
+        </p:nvSpPr>
+        <p:spPr>
+          <a:xfrm>
+            <a:off x="1022350" y="4334669"/>
+            <a:ext cx="3401060" cy="345380"/>
+          </a:xfrm>
+          <a:prstGeom prst="rect">
+            <a:avLst/>
+          </a:prstGeom>
+          <a:noFill/>
+          <a:ln/>
+        </p:spPr>
+        <p:txBody>
+          <a:bodyPr wrap="square" lIns="0" tIns="0" rIns="0" bIns="0" rtlCol="0" anchor="t">
+            <a:normAutofit/>
+          </a:bodyPr>
+          <a:lstStyle/>
+          <a:p>
+            <a:pPr marL="0" indent="0" algn="l">
+              <a:lnSpc>
+                <a:spcPts val="2520"/>
+              </a:lnSpc>
+              <a:buNone/>
+            </a:pPr>
+            <a:r>
+              <a:rPr lang="en-US" sz="1800" b="1" dirty="0">
+                <a:solidFill>
+                  <a:srgbClr val="2E526D"/>
+                </a:solidFill>
+                <a:latin typeface="Nunito Sans" pitchFamily="34" charset="0"/>
+                <a:ea typeface="Nunito Sans" pitchFamily="34" charset="-122"/>
+                <a:cs typeface="Nunito Sans" pitchFamily="34" charset="-120"/>
+              </a:rPr>
+              <a:t>Application CI</a:t>
+            </a:r>
+            <a:endParaRPr lang="en-US" sz="1800" dirty="0"/>
+          </a:p>
+        </p:txBody>
+      </p:sp>
+      <p:sp>
+        <p:nvSpPr>
+          <p:cNvPr id="18" name="Text 16"/>
+          <p:cNvSpPr/>
+          <p:nvPr/>
+        </p:nvSpPr>
+        <p:spPr>
+          <a:xfrm>
+            <a:off x="4324350" y="4352429"/>
+            <a:ext cx="7024497" cy="309860"/>
+          </a:xfrm>
+          <a:prstGeom prst="rect">
+            <a:avLst/>
+          </a:prstGeom>
+          <a:noFill/>
+          <a:ln/>
+        </p:spPr>
+        <p:txBody>
+          <a:bodyPr wrap="square" lIns="0" tIns="0" rIns="0" bIns="0" rtlCol="0" anchor="t">
+            <a:normAutofit/>
+          </a:bodyPr>
+          <a:lstStyle/>
+          <a:p>
+            <a:pPr marL="0" indent="0" algn="l">
+              <a:lnSpc>
+                <a:spcPts val="2240"/>
+              </a:lnSpc>
+              <a:buNone/>
+            </a:pPr>
+            <a:r>
+              <a:rPr lang="en-US" sz="1600" dirty="0">
+                <a:solidFill>
+                  <a:srgbClr val="2B2B2E"/>
+                </a:solidFill>
+                <a:latin typeface="Nunito Sans" pitchFamily="34" charset="0"/>
+                <a:ea typeface="Nunito Sans" pitchFamily="34" charset="-122"/>
+                <a:cs typeface="Nunito Sans" pitchFamily="34" charset="-120"/>
+              </a:rPr>
+              <a:t>Checks, build, unit + story tests</a:t>
+            </a:r>
+            <a:endParaRPr lang="en-US" sz="1600" dirty="0"/>
+          </a:p>
+        </p:txBody>
+      </p:sp>
+      <p:sp>
+        <p:nvSpPr>
+          <p:cNvPr id="19" name="Shape 17"/>
+          <p:cNvSpPr/>
+          <p:nvPr/>
+        </p:nvSpPr>
+        <p:spPr>
+          <a:xfrm>
+            <a:off x="812800" y="5021659"/>
+            <a:ext cx="10566400" cy="526852"/>
+          </a:xfrm>
+          <a:prstGeom prst="roundRect">
+            <a:avLst>
+              <a:gd name="adj" fmla="val 19284"/>
+            </a:avLst>
+          </a:prstGeom>
+          <a:solidFill>
+            <a:srgbClr val="2B2B2E"/>
+          </a:solidFill>
+          <a:ln/>
+        </p:spPr>
+      </p:sp>
+      <p:pic>
+        <p:nvPicPr>
+          <p:cNvPr id="20" name="Image 0" descr="Lock"/>
+          <p:cNvPicPr>
+            <a:picLocks noChangeAspect="1"/>
+          </p:cNvPicPr>
+          <p:nvPr/>
+        </p:nvPicPr>
+        <p:blipFill>
+          <a:blip r:embed="rId3"/>
+          <a:srcRect/>
+          <a:stretch/>
+        </p:blipFill>
+        <p:spPr>
+          <a:xfrm>
+            <a:off x="1016000" y="5170785"/>
+            <a:ext cx="228600" cy="228600"/>
+          </a:xfrm>
+          <a:prstGeom prst="rect">
+            <a:avLst/>
+          </a:prstGeom>
+        </p:spPr>
+      </p:pic>
+      <p:sp>
+        <p:nvSpPr>
+          <p:cNvPr id="21" name="Text 18"/>
+          <p:cNvSpPr/>
+          <p:nvPr/>
+        </p:nvSpPr>
+        <p:spPr>
+          <a:xfrm>
+            <a:off x="1333500" y="5142905"/>
+            <a:ext cx="3989296" cy="309860"/>
+          </a:xfrm>
+          <a:prstGeom prst="rect">
+            <a:avLst/>
+          </a:prstGeom>
+          <a:noFill/>
+          <a:ln/>
+        </p:spPr>
+        <p:txBody>
+          <a:bodyPr wrap="square" lIns="0" tIns="0" rIns="0" bIns="0" rtlCol="0" anchor="t">
+            <a:normAutofit/>
+          </a:bodyPr>
+          <a:lstStyle/>
+          <a:p>
+            <a:pPr marL="0" indent="0" algn="l">
+              <a:lnSpc>
+                <a:spcPts val="2240"/>
+              </a:lnSpc>
+              <a:buNone/>
+            </a:pPr>
+            <a:r>
+              <a:rPr lang="en-US" sz="1600" b="1" dirty="0">
+                <a:solidFill>
+                  <a:srgbClr val="FFFFFF"/>
+                </a:solidFill>
+                <a:latin typeface="Nunito Sans" pitchFamily="34" charset="0"/>
+                <a:ea typeface="Nunito Sans" pitchFamily="34" charset="-122"/>
+                <a:cs typeface="Nunito Sans" pitchFamily="34" charset="-120"/>
+              </a:rPr>
+              <a:t>Required gates apply with or without AI</a:t>
+            </a:r>
+            <a:endParaRPr lang="en-US" sz="1600" dirty="0"/>
+          </a:p>
+        </p:txBody>
+      </p:sp>
+      <p:sp>
+        <p:nvSpPr>
+          <p:cNvPr id="22" name="Text 19"/>
+          <p:cNvSpPr/>
+          <p:nvPr/>
+        </p:nvSpPr>
+        <p:spPr>
+          <a:xfrm>
+            <a:off x="812800" y="5637411"/>
+            <a:ext cx="3124519" cy="229989"/>
+          </a:xfrm>
+          <a:prstGeom prst="rect">
+            <a:avLst/>
+          </a:prstGeom>
+          <a:noFill/>
+          <a:ln/>
+        </p:spPr>
+        <p:txBody>
+          <a:bodyPr wrap="square" lIns="0" tIns="0" rIns="0" bIns="0" rtlCol="0" anchor="t">
+            <a:normAutofit/>
+          </a:bodyPr>
+          <a:lstStyle/>
+          <a:p>
+            <a:pPr marL="0" indent="0" algn="l">
+              <a:lnSpc>
+                <a:spcPts val="1680"/>
+              </a:lnSpc>
+              <a:buNone/>
+            </a:pPr>
+            <a:r>
+              <a:rPr lang="en-US" sz="1200" dirty="0">
+                <a:solidFill>
+                  <a:srgbClr val="55555C"/>
+                </a:solidFill>
+                <a:latin typeface="Nunito Sans" pitchFamily="34" charset="0"/>
+                <a:ea typeface="Nunito Sans" pitchFamily="34" charset="-122"/>
+                <a:cs typeface="Nunito Sans" pitchFamily="34" charset="-120"/>
+              </a:rPr>
+              <a:t>Visual regressions: Chromatic when enabled</a:t>
+            </a:r>
+            <a:endParaRPr lang="en-US" sz="1200" dirty="0"/>
+          </a:p>
+        </p:txBody>
+      </p:sp>
+      <p:sp>
+        <p:nvSpPr>
+          <p:cNvPr id="23" name="Text 20"/>
+          <p:cNvSpPr/>
+          <p:nvPr/>
+        </p:nvSpPr>
+        <p:spPr>
+          <a:xfrm>
+            <a:off x="4151113" y="5637411"/>
+            <a:ext cx="7225546" cy="229989"/>
+          </a:xfrm>
+          <a:prstGeom prst="rect">
+            <a:avLst/>
+          </a:prstGeom>
+          <a:noFill/>
+          <a:ln/>
+        </p:spPr>
+        <p:txBody>
+          <a:bodyPr wrap="square" lIns="0" tIns="0" rIns="0" bIns="0" rtlCol="0" anchor="t">
+            <a:normAutofit/>
+          </a:bodyPr>
+          <a:lstStyle/>
+          <a:p>
+            <a:pPr marL="0" indent="0" algn="l">
+              <a:lnSpc>
+                <a:spcPts val="1680"/>
+              </a:lnSpc>
+              <a:buNone/>
+            </a:pPr>
+            <a:r>
+              <a:rPr lang="en-US" sz="1200" dirty="0">
+                <a:solidFill>
+                  <a:srgbClr val="6E6E75"/>
+                </a:solidFill>
+                <a:latin typeface="Nunito Sans" pitchFamily="34" charset="0"/>
+                <a:ea typeface="Nunito Sans" pitchFamily="34" charset="-122"/>
+                <a:cs typeface="Nunito Sans" pitchFamily="34" charset="-120"/>
+              </a:rPr>
+              <a:t>Storybook reference</a:t>
+            </a:r>
+            <a:r>
+              <a:rPr lang="en-US" sz="1200">
+                <a:solidFill>
+                  <a:srgbClr val="6E6E75"/>
+                </a:solidFill>
+                <a:latin typeface="Nunito Sans" pitchFamily="34" charset="0"/>
+                <a:ea typeface="Nunito Sans" pitchFamily="34" charset="-122"/>
+                <a:cs typeface="Nunito Sans" pitchFamily="34" charset="-120"/>
+              </a:rPr>
+              <a:t>: Maintainers / Maintainer workflow / Testing</a:t>
+            </a:r>
+            <a:endParaRPr lang="en-US" sz="1200" dirty="0"/>
+          </a:p>
+        </p:txBody>
+      </p:sp>
+      <p:sp>
+        <p:nvSpPr>
+          <p:cNvPr id="24" name="Text 21"/>
+          <p:cNvSpPr/>
+          <p:nvPr/>
+        </p:nvSpPr>
+        <p:spPr>
+          <a:xfrm>
+            <a:off x="812800" y="6238280"/>
+            <a:ext cx="7848600" cy="238720"/>
+          </a:xfrm>
+          <a:prstGeom prst="rect">
+            <a:avLst/>
+          </a:prstGeom>
+          <a:noFill/>
+          <a:ln/>
+        </p:spPr>
+        <p:txBody>
+          <a:bodyPr wrap="square" lIns="0" tIns="0" rIns="0" bIns="0" rtlCol="0" anchor="t">
+            <a:normAutofit/>
+          </a:bodyPr>
+          <a:lstStyle/>
+          <a:p>
+            <a:pPr marL="0" indent="0" algn="l">
+              <a:lnSpc>
+                <a:spcPts val="1680"/>
+              </a:lnSpc>
+              <a:buNone/>
+            </a:pPr>
+            <a:r>
+              <a:rPr lang="en-US" sz="1200" dirty="0">
+                <a:solidFill>
+                  <a:srgbClr val="6E6E75"/>
+                </a:solidFill>
+                <a:latin typeface="Nunito Sans" pitchFamily="34" charset="0"/>
+                <a:ea typeface="Nunito Sans" pitchFamily="34" charset="-122"/>
+                <a:cs typeface="Nunito Sans" pitchFamily="34" charset="-120"/>
+              </a:rPr>
+              <a:t>Plectrum · Storybook for application teams</a:t>
+            </a:r>
+            <a:endParaRPr lang="en-US" sz="1200" dirty="0"/>
+          </a:p>
+        </p:txBody>
+      </p:sp>
+      <p:sp>
+        <p:nvSpPr>
+          <p:cNvPr id="25" name="Text 22"/>
+          <p:cNvSpPr/>
+          <p:nvPr/>
+        </p:nvSpPr>
+        <p:spPr>
+          <a:xfrm>
+            <a:off x="10312400" y="6238280"/>
+            <a:ext cx="1066800" cy="238720"/>
+          </a:xfrm>
+          <a:prstGeom prst="rect">
+            <a:avLst/>
+          </a:prstGeom>
+          <a:noFill/>
+          <a:ln/>
+        </p:spPr>
+        <p:txBody>
+          <a:bodyPr wrap="square" lIns="0" tIns="0" rIns="0" bIns="0" rtlCol="0" anchor="t">
+            <a:normAutofit/>
+          </a:bodyPr>
+          <a:lstStyle/>
+          <a:p>
+            <a:pPr marL="0" indent="0" algn="r">
+              <a:lnSpc>
+                <a:spcPts val="1680"/>
+              </a:lnSpc>
+              <a:buNone/>
+            </a:pPr>
+            <a:r>
+              <a:rPr lang="en-US" sz="1200">
+                <a:solidFill>
+                  <a:srgbClr val="6E6E75"/>
+                </a:solidFill>
+                <a:latin typeface="Nunito Sans" pitchFamily="34" charset="0"/>
+                <a:ea typeface="Nunito Sans" pitchFamily="34" charset="-122"/>
+                <a:cs typeface="Nunito Sans" pitchFamily="34" charset="-120"/>
+              </a:rPr>
+              <a:t>12 / 17</a:t>
+            </a:r>
+            <a:endParaRPr lang="en-US" sz="1200" dirty="0"/>
+          </a:p>
+        </p:txBody>
+      </p:sp>
+    </p:spTree>
+  </p:cSld>
+  <p:clrMapOvr>
+    <a:masterClrMapping/>
+  </p:clrMapOvr>
+</p:sld>
+</file>
+
+<file path=ppt/slides/slide13.xml><?xml version="1.0" encoding="utf-8"?>
+<p:sld xmlns:a="http://schemas.openxmlformats.org/drawingml/2006/main" xmlns:r="http://schemas.openxmlformats.org/officeDocument/2006/relationships" xmlns:p="http://schemas.openxmlformats.org/presentationml/2006/main">
+  <p:cSld name="Slide 12">
+    <p:bg>
+      <p:bgPr>
+        <a:solidFill>
+          <a:srgbClr val="FFF9FA"/>
+        </a:solidFill>
+        <a:effectLst/>
+      </p:bgPr>
+    </p:bg>
+    <p:spTree>
+      <p:nvGrpSpPr>
+        <p:cNvPr id="1" name=""/>
+        <p:cNvGrpSpPr/>
+        <p:nvPr/>
+      </p:nvGrpSpPr>
+      <p:grpSpPr>
+        <a:xfrm>
+          <a:off x="0" y="0"/>
+          <a:ext cx="0" cy="0"/>
+          <a:chOff x="0" y="0"/>
+          <a:chExt cx="0" cy="0"/>
+        </a:xfrm>
+      </p:grpSpPr>
+      <p:sp>
+        <p:nvSpPr>
+          <p:cNvPr id="2" name="Text 0"/>
+          <p:cNvSpPr/>
+          <p:nvPr/>
+        </p:nvSpPr>
+        <p:spPr>
+          <a:xfrm>
+            <a:off x="812800" y="812800"/>
+            <a:ext cx="10883392" cy="256480"/>
+          </a:xfrm>
+          <a:prstGeom prst="rect">
+            <a:avLst/>
+          </a:prstGeom>
+          <a:noFill/>
+          <a:ln/>
+        </p:spPr>
+        <p:txBody>
+          <a:bodyPr wrap="square" lIns="0" tIns="0" rIns="0" bIns="0" rtlCol="0" anchor="t">
+            <a:normAutofit/>
+          </a:bodyPr>
+          <a:lstStyle/>
+          <a:p>
+            <a:pPr marL="0" indent="0" algn="l">
+              <a:lnSpc>
+                <a:spcPts val="1820"/>
+              </a:lnSpc>
+              <a:buNone/>
+            </a:pPr>
+            <a:r>
+              <a:rPr lang="en-US" sz="1300" b="1" kern="0" spc="150" dirty="0">
+                <a:solidFill>
+                  <a:srgbClr val="333333"/>
+                </a:solidFill>
+                <a:latin typeface="Alegreya Sans" pitchFamily="34" charset="0"/>
+                <a:ea typeface="Alegreya Sans" pitchFamily="34" charset="-122"/>
+                <a:cs typeface="Alegreya Sans" pitchFamily="34" charset="-120"/>
+              </a:rPr>
               <a:t>PULL REQUESTS — THE REVIEW APPROACH</a:t>
             </a:r>
             <a:endParaRPr lang="en-US" sz="1300" dirty="0"/>
@@ -4820,7 +6088,7 @@
           </a:bodyPr>
           <a:lstStyle/>
           <a:p>
-            <a:pPr algn="l" indent="0" marL="0">
+            <a:pPr marL="0" indent="0" algn="l">
               <a:lnSpc>
                 <a:spcPts val="3360"/>
               </a:lnSpc>
@@ -4864,9 +6132,27 @@
             <a:tbl>
               <a:tblPr/>
               <a:tblGrid>
-                <a:gridCol w="3588258"/>
-                <a:gridCol w="3377184"/>
-                <a:gridCol w="3588258"/>
+                <a:gridCol w="3588258">
+                  <a:extLst>
+                    <a:ext uri="{9D8B030D-6E8A-4147-A177-3AD203B41FA5}">
+                      <a16:colId xmlns:a16="http://schemas.microsoft.com/office/drawing/2014/main" val="20000"/>
+                    </a:ext>
+                  </a:extLst>
+                </a:gridCol>
+                <a:gridCol w="3377184">
+                  <a:extLst>
+                    <a:ext uri="{9D8B030D-6E8A-4147-A177-3AD203B41FA5}">
+                      <a16:colId xmlns:a16="http://schemas.microsoft.com/office/drawing/2014/main" val="20001"/>
+                    </a:ext>
+                  </a:extLst>
+                </a:gridCol>
+                <a:gridCol w="3588258">
+                  <a:extLst>
+                    <a:ext uri="{9D8B030D-6E8A-4147-A177-3AD203B41FA5}">
+                      <a16:colId xmlns:a16="http://schemas.microsoft.com/office/drawing/2014/main" val="20002"/>
+                    </a:ext>
+                  </a:extLst>
+                </a:gridCol>
               </a:tblGrid>
               <a:tr h="332581">
                 <a:tc>
@@ -4874,7 +6160,7 @@
                     <a:bodyPr/>
                     <a:lstStyle/>
                     <a:p>
-                      <a:pPr indent="0" marL="0">
+                      <a:pPr marL="0" indent="0">
                         <a:lnSpc>
                           <a:spcPts val="1680"/>
                         </a:lnSpc>
@@ -4898,7 +6184,7 @@
                       </a:endParaRPr>
                     </a:p>
                   </a:txBody>
-                  <a:tcPr marL="53340" marR="53340" marT="53340" marB="53340" anchor="t">
+                  <a:tcPr marL="53340" marR="53340" marT="53340" marB="53340">
                     <a:lnL w="12700" cap="flat" cmpd="sng" algn="ctr">
                       <a:solidFill>
                         <a:srgbClr val="CBC7C7"/>
@@ -4945,7 +6231,7 @@
                     <a:bodyPr/>
                     <a:lstStyle/>
                     <a:p>
-                      <a:pPr indent="0" marL="0">
+                      <a:pPr marL="0" indent="0">
                         <a:lnSpc>
                           <a:spcPts val="1680"/>
                         </a:lnSpc>
@@ -4969,7 +6255,7 @@
                       </a:endParaRPr>
                     </a:p>
                   </a:txBody>
-                  <a:tcPr marL="53340" marR="53340" marT="53340" marB="53340" anchor="t">
+                  <a:tcPr marL="53340" marR="53340" marT="53340" marB="53340">
                     <a:lnL w="12700" cap="flat" cmpd="sng" algn="ctr">
                       <a:solidFill>
                         <a:srgbClr val="CBBDC0"/>
@@ -5016,7 +6302,7 @@
                     <a:bodyPr/>
                     <a:lstStyle/>
                     <a:p>
-                      <a:pPr indent="0" marL="0">
+                      <a:pPr marL="0" indent="0">
                         <a:lnSpc>
                           <a:spcPts val="1680"/>
                         </a:lnSpc>
@@ -5040,7 +6326,7 @@
                       </a:endParaRPr>
                     </a:p>
                   </a:txBody>
-                  <a:tcPr marL="53340" marR="53340" marT="53340" marB="53340" anchor="t">
+                  <a:tcPr marL="53340" marR="53340" marT="53340" marB="53340">
                     <a:lnL w="12700" cap="flat" cmpd="sng" algn="ctr">
                       <a:solidFill>
                         <a:srgbClr val="CBBDC0"/>
@@ -5082,6 +6368,11 @@
                     </a:solidFill>
                   </a:tcPr>
                 </a:tc>
+                <a:extLst>
+                  <a:ext uri="{0D108BD9-81ED-4DB2-BD59-A6C34878D82A}">
+                    <a16:rowId xmlns:a16="http://schemas.microsoft.com/office/drawing/2014/main" val="10000"/>
+                  </a:ext>
+                </a:extLst>
               </a:tr>
               <a:tr h="332581">
                 <a:tc>
@@ -5089,7 +6380,7 @@
                     <a:bodyPr/>
                     <a:lstStyle/>
                     <a:p>
-                      <a:pPr indent="0" marL="0">
+                      <a:pPr marL="0" indent="0">
                         <a:lnSpc>
                           <a:spcPts val="1680"/>
                         </a:lnSpc>
@@ -5113,7 +6404,7 @@
                       </a:endParaRPr>
                     </a:p>
                   </a:txBody>
-                  <a:tcPr marL="53340" marR="53340" marT="53340" marB="53340" anchor="t">
+                  <a:tcPr marL="53340" marR="53340" marT="53340" marB="53340">
                     <a:lnL w="12700" cap="flat" cmpd="sng" algn="ctr">
                       <a:solidFill>
                         <a:srgbClr val="CBC7C7"/>
@@ -5157,7 +6448,7 @@
                     <a:bodyPr/>
                     <a:lstStyle/>
                     <a:p>
-                      <a:pPr indent="0" marL="0">
+                      <a:pPr marL="0" indent="0">
                         <a:lnSpc>
                           <a:spcPts val="1680"/>
                         </a:lnSpc>
@@ -5181,7 +6472,7 @@
                       </a:endParaRPr>
                     </a:p>
                   </a:txBody>
-                  <a:tcPr marL="53340" marR="53340" marT="53340" marB="53340" anchor="t">
+                  <a:tcPr marL="53340" marR="53340" marT="53340" marB="53340">
                     <a:lnL w="12700" cap="flat" cmpd="sng" algn="ctr">
                       <a:solidFill>
                         <a:srgbClr val="CBC7C7"/>
@@ -5225,7 +6516,7 @@
                     <a:bodyPr/>
                     <a:lstStyle/>
                     <a:p>
-                      <a:pPr indent="0" marL="0">
+                      <a:pPr marL="0" indent="0">
                         <a:lnSpc>
                           <a:spcPts val="1680"/>
                         </a:lnSpc>
@@ -5249,7 +6540,7 @@
                       </a:endParaRPr>
                     </a:p>
                   </a:txBody>
-                  <a:tcPr marL="53340" marR="53340" marT="53340" marB="53340" anchor="t">
+                  <a:tcPr marL="53340" marR="53340" marT="53340" marB="53340">
                     <a:lnL w="12700" cap="flat" cmpd="sng" algn="ctr">
                       <a:solidFill>
                         <a:srgbClr val="CBC7C7"/>
@@ -5288,6 +6579,11 @@
                     </a:lnB>
                   </a:tcPr>
                 </a:tc>
+                <a:extLst>
+                  <a:ext uri="{0D108BD9-81ED-4DB2-BD59-A6C34878D82A}">
+                    <a16:rowId xmlns:a16="http://schemas.microsoft.com/office/drawing/2014/main" val="10001"/>
+                  </a:ext>
+                </a:extLst>
               </a:tr>
               <a:tr h="332581">
                 <a:tc>
@@ -5295,7 +6591,7 @@
                     <a:bodyPr/>
                     <a:lstStyle/>
                     <a:p>
-                      <a:pPr indent="0" marL="0">
+                      <a:pPr marL="0" indent="0">
                         <a:lnSpc>
                           <a:spcPts val="1680"/>
                         </a:lnSpc>
@@ -5319,7 +6615,7 @@
                       </a:endParaRPr>
                     </a:p>
                   </a:txBody>
-                  <a:tcPr marL="53340" marR="53340" marT="53340" marB="53340" anchor="t">
+                  <a:tcPr marL="53340" marR="53340" marT="53340" marB="53340">
                     <a:lnL w="12700" cap="flat" cmpd="sng" algn="ctr">
                       <a:solidFill>
                         <a:srgbClr val="CBC7C7"/>
@@ -5366,7 +6662,7 @@
                     <a:bodyPr/>
                     <a:lstStyle/>
                     <a:p>
-                      <a:pPr indent="0" marL="0">
+                      <a:pPr marL="0" indent="0">
                         <a:lnSpc>
                           <a:spcPts val="1680"/>
                         </a:lnSpc>
@@ -5390,7 +6686,7 @@
                       </a:endParaRPr>
                     </a:p>
                   </a:txBody>
-                  <a:tcPr marL="53340" marR="53340" marT="53340" marB="53340" anchor="t">
+                  <a:tcPr marL="53340" marR="53340" marT="53340" marB="53340">
                     <a:lnL w="12700" cap="flat" cmpd="sng" algn="ctr">
                       <a:solidFill>
                         <a:srgbClr val="CBCBCB"/>
@@ -5437,7 +6733,7 @@
                     <a:bodyPr/>
                     <a:lstStyle/>
                     <a:p>
-                      <a:pPr indent="0" marL="0">
+                      <a:pPr marL="0" indent="0">
                         <a:lnSpc>
                           <a:spcPts val="1680"/>
                         </a:lnSpc>
@@ -5461,7 +6757,7 @@
                       </a:endParaRPr>
                     </a:p>
                   </a:txBody>
-                  <a:tcPr marL="53340" marR="53340" marT="53340" marB="53340" anchor="t">
+                  <a:tcPr marL="53340" marR="53340" marT="53340" marB="53340">
                     <a:lnL w="12700" cap="flat" cmpd="sng" algn="ctr">
                       <a:solidFill>
                         <a:srgbClr val="CBCBCB"/>
@@ -5503,6 +6799,11 @@
                     </a:solidFill>
                   </a:tcPr>
                 </a:tc>
+                <a:extLst>
+                  <a:ext uri="{0D108BD9-81ED-4DB2-BD59-A6C34878D82A}">
+                    <a16:rowId xmlns:a16="http://schemas.microsoft.com/office/drawing/2014/main" val="10002"/>
+                  </a:ext>
+                </a:extLst>
               </a:tr>
               <a:tr h="332581">
                 <a:tc>
@@ -5510,7 +6811,7 @@
                     <a:bodyPr/>
                     <a:lstStyle/>
                     <a:p>
-                      <a:pPr indent="0" marL="0">
+                      <a:pPr marL="0" indent="0">
                         <a:lnSpc>
                           <a:spcPts val="1680"/>
                         </a:lnSpc>
@@ -5534,7 +6835,7 @@
                       </a:endParaRPr>
                     </a:p>
                   </a:txBody>
-                  <a:tcPr marL="53340" marR="53340" marT="53340" marB="53340" anchor="t">
+                  <a:tcPr marL="53340" marR="53340" marT="53340" marB="53340">
                     <a:lnL w="12700" cap="flat" cmpd="sng" algn="ctr">
                       <a:solidFill>
                         <a:srgbClr val="CBC7C7"/>
@@ -5578,7 +6879,7 @@
                     <a:bodyPr/>
                     <a:lstStyle/>
                     <a:p>
-                      <a:pPr indent="0" marL="0">
+                      <a:pPr marL="0" indent="0">
                         <a:lnSpc>
                           <a:spcPts val="1680"/>
                         </a:lnSpc>
@@ -5602,7 +6903,7 @@
                       </a:endParaRPr>
                     </a:p>
                   </a:txBody>
-                  <a:tcPr marL="53340" marR="53340" marT="53340" marB="53340" anchor="t">
+                  <a:tcPr marL="53340" marR="53340" marT="53340" marB="53340">
                     <a:lnL w="12700" cap="flat" cmpd="sng" algn="ctr">
                       <a:solidFill>
                         <a:srgbClr val="CBC7C7"/>
@@ -5646,7 +6947,7 @@
                     <a:bodyPr/>
                     <a:lstStyle/>
                     <a:p>
-                      <a:pPr indent="0" marL="0">
+                      <a:pPr marL="0" indent="0">
                         <a:lnSpc>
                           <a:spcPts val="1680"/>
                         </a:lnSpc>
@@ -5670,7 +6971,7 @@
                       </a:endParaRPr>
                     </a:p>
                   </a:txBody>
-                  <a:tcPr marL="53340" marR="53340" marT="53340" marB="53340" anchor="t">
+                  <a:tcPr marL="53340" marR="53340" marT="53340" marB="53340">
                     <a:lnL w="12700" cap="flat" cmpd="sng" algn="ctr">
                       <a:solidFill>
                         <a:srgbClr val="CBC7C7"/>
@@ -5709,6 +7010,11 @@
                     </a:lnB>
                   </a:tcPr>
                 </a:tc>
+                <a:extLst>
+                  <a:ext uri="{0D108BD9-81ED-4DB2-BD59-A6C34878D82A}">
+                    <a16:rowId xmlns:a16="http://schemas.microsoft.com/office/drawing/2014/main" val="10003"/>
+                  </a:ext>
+                </a:extLst>
               </a:tr>
               <a:tr h="332581">
                 <a:tc>
@@ -5716,7 +7022,7 @@
                     <a:bodyPr/>
                     <a:lstStyle/>
                     <a:p>
-                      <a:pPr indent="0" marL="0">
+                      <a:pPr marL="0" indent="0">
                         <a:lnSpc>
                           <a:spcPts val="1680"/>
                         </a:lnSpc>
@@ -5740,7 +7046,7 @@
                       </a:endParaRPr>
                     </a:p>
                   </a:txBody>
-                  <a:tcPr marL="53340" marR="53340" marT="53340" marB="53340" anchor="t">
+                  <a:tcPr marL="53340" marR="53340" marT="53340" marB="53340">
                     <a:lnL w="12700" cap="flat" cmpd="sng" algn="ctr">
                       <a:solidFill>
                         <a:srgbClr val="CBC7C7"/>
@@ -5787,7 +7093,7 @@
                     <a:bodyPr/>
                     <a:lstStyle/>
                     <a:p>
-                      <a:pPr indent="0" marL="0">
+                      <a:pPr marL="0" indent="0">
                         <a:lnSpc>
                           <a:spcPts val="1680"/>
                         </a:lnSpc>
@@ -5811,7 +7117,7 @@
                       </a:endParaRPr>
                     </a:p>
                   </a:txBody>
-                  <a:tcPr marL="53340" marR="53340" marT="53340" marB="53340" anchor="t">
+                  <a:tcPr marL="53340" marR="53340" marT="53340" marB="53340">
                     <a:lnL w="12700" cap="flat" cmpd="sng" algn="ctr">
                       <a:solidFill>
                         <a:srgbClr val="CBCBCB"/>
@@ -5858,7 +7164,7 @@
                     <a:bodyPr/>
                     <a:lstStyle/>
                     <a:p>
-                      <a:pPr indent="0" marL="0">
+                      <a:pPr marL="0" indent="0">
                         <a:lnSpc>
                           <a:spcPts val="1680"/>
                         </a:lnSpc>
@@ -5882,7 +7188,7 @@
                       </a:endParaRPr>
                     </a:p>
                   </a:txBody>
-                  <a:tcPr marL="53340" marR="53340" marT="53340" marB="53340" anchor="t">
+                  <a:tcPr marL="53340" marR="53340" marT="53340" marB="53340">
                     <a:lnL w="12700" cap="flat" cmpd="sng" algn="ctr">
                       <a:solidFill>
                         <a:srgbClr val="CBCBCB"/>
@@ -5924,6 +7230,11 @@
                     </a:solidFill>
                   </a:tcPr>
                 </a:tc>
+                <a:extLst>
+                  <a:ext uri="{0D108BD9-81ED-4DB2-BD59-A6C34878D82A}">
+                    <a16:rowId xmlns:a16="http://schemas.microsoft.com/office/drawing/2014/main" val="10004"/>
+                  </a:ext>
+                </a:extLst>
               </a:tr>
               <a:tr h="332581">
                 <a:tc>
@@ -5931,7 +7242,7 @@
                     <a:bodyPr/>
                     <a:lstStyle/>
                     <a:p>
-                      <a:pPr indent="0" marL="0">
+                      <a:pPr marL="0" indent="0">
                         <a:lnSpc>
                           <a:spcPts val="1680"/>
                         </a:lnSpc>
@@ -5955,7 +7266,7 @@
                       </a:endParaRPr>
                     </a:p>
                   </a:txBody>
-                  <a:tcPr marL="53340" marR="53340" marT="53340" marB="53340" anchor="t">
+                  <a:tcPr marL="53340" marR="53340" marT="53340" marB="53340">
                     <a:lnL w="12700" cap="flat" cmpd="sng" algn="ctr">
                       <a:solidFill>
                         <a:srgbClr val="CBC7C7"/>
@@ -5999,7 +7310,7 @@
                     <a:bodyPr/>
                     <a:lstStyle/>
                     <a:p>
-                      <a:pPr indent="0" marL="0">
+                      <a:pPr marL="0" indent="0">
                         <a:lnSpc>
                           <a:spcPts val="1680"/>
                         </a:lnSpc>
@@ -6023,7 +7334,7 @@
                       </a:endParaRPr>
                     </a:p>
                   </a:txBody>
-                  <a:tcPr marL="53340" marR="53340" marT="53340" marB="53340" anchor="t">
+                  <a:tcPr marL="53340" marR="53340" marT="53340" marB="53340">
                     <a:lnL w="12700" cap="flat" cmpd="sng" algn="ctr">
                       <a:solidFill>
                         <a:srgbClr val="CBC7C7"/>
@@ -6067,7 +7378,7 @@
                     <a:bodyPr/>
                     <a:lstStyle/>
                     <a:p>
-                      <a:pPr indent="0" marL="0">
+                      <a:pPr marL="0" indent="0">
                         <a:lnSpc>
                           <a:spcPts val="1680"/>
                         </a:lnSpc>
@@ -6091,7 +7402,7 @@
                       </a:endParaRPr>
                     </a:p>
                   </a:txBody>
-                  <a:tcPr marL="53340" marR="53340" marT="53340" marB="53340" anchor="t">
+                  <a:tcPr marL="53340" marR="53340" marT="53340" marB="53340">
                     <a:lnL w="12700" cap="flat" cmpd="sng" algn="ctr">
                       <a:solidFill>
                         <a:srgbClr val="CBC7C7"/>
@@ -6130,6 +7441,11 @@
                     </a:lnB>
                   </a:tcPr>
                 </a:tc>
+                <a:extLst>
+                  <a:ext uri="{0D108BD9-81ED-4DB2-BD59-A6C34878D82A}">
+                    <a16:rowId xmlns:a16="http://schemas.microsoft.com/office/drawing/2014/main" val="10005"/>
+                  </a:ext>
+                </a:extLst>
               </a:tr>
               <a:tr h="332581">
                 <a:tc>
@@ -6137,7 +7453,7 @@
                     <a:bodyPr/>
                     <a:lstStyle/>
                     <a:p>
-                      <a:pPr indent="0" marL="0">
+                      <a:pPr marL="0" indent="0">
                         <a:lnSpc>
                           <a:spcPts val="1680"/>
                         </a:lnSpc>
@@ -6161,7 +7477,7 @@
                       </a:endParaRPr>
                     </a:p>
                   </a:txBody>
-                  <a:tcPr marL="53340" marR="53340" marT="53340" marB="53340" anchor="t">
+                  <a:tcPr marL="53340" marR="53340" marT="53340" marB="53340">
                     <a:lnL w="12700" cap="flat" cmpd="sng" algn="ctr">
                       <a:solidFill>
                         <a:srgbClr val="CBC7C7"/>
@@ -6208,7 +7524,7 @@
                     <a:bodyPr/>
                     <a:lstStyle/>
                     <a:p>
-                      <a:pPr indent="0" marL="0">
+                      <a:pPr marL="0" indent="0">
                         <a:lnSpc>
                           <a:spcPts val="1680"/>
                         </a:lnSpc>
@@ -6232,7 +7548,7 @@
                       </a:endParaRPr>
                     </a:p>
                   </a:txBody>
-                  <a:tcPr marL="53340" marR="53340" marT="53340" marB="53340" anchor="t">
+                  <a:tcPr marL="53340" marR="53340" marT="53340" marB="53340">
                     <a:lnL w="12700" cap="flat" cmpd="sng" algn="ctr">
                       <a:solidFill>
                         <a:srgbClr val="CBCBCB"/>
@@ -6279,7 +7595,7 @@
                     <a:bodyPr/>
                     <a:lstStyle/>
                     <a:p>
-                      <a:pPr indent="0" marL="0">
+                      <a:pPr marL="0" indent="0">
                         <a:lnSpc>
                           <a:spcPts val="1680"/>
                         </a:lnSpc>
@@ -6303,7 +7619,7 @@
                       </a:endParaRPr>
                     </a:p>
                   </a:txBody>
-                  <a:tcPr marL="53340" marR="53340" marT="53340" marB="53340" anchor="t">
+                  <a:tcPr marL="53340" marR="53340" marT="53340" marB="53340">
                     <a:lnL w="12700" cap="flat" cmpd="sng" algn="ctr">
                       <a:solidFill>
                         <a:srgbClr val="CBCBCB"/>
@@ -6345,6 +7661,11 @@
                     </a:solidFill>
                   </a:tcPr>
                 </a:tc>
+                <a:extLst>
+                  <a:ext uri="{0D108BD9-81ED-4DB2-BD59-A6C34878D82A}">
+                    <a16:rowId xmlns:a16="http://schemas.microsoft.com/office/drawing/2014/main" val="10006"/>
+                  </a:ext>
+                </a:extLst>
               </a:tr>
               <a:tr h="332581">
                 <a:tc>
@@ -6352,7 +7673,7 @@
                     <a:bodyPr/>
                     <a:lstStyle/>
                     <a:p>
-                      <a:pPr indent="0" marL="0">
+                      <a:pPr marL="0" indent="0">
                         <a:lnSpc>
                           <a:spcPts val="1680"/>
                         </a:lnSpc>
@@ -6376,7 +7697,7 @@
                       </a:endParaRPr>
                     </a:p>
                   </a:txBody>
-                  <a:tcPr marL="53340" marR="53340" marT="53340" marB="53340" anchor="t">
+                  <a:tcPr marL="53340" marR="53340" marT="53340" marB="53340">
                     <a:lnL w="12700" cap="flat" cmpd="sng" algn="ctr">
                       <a:solidFill>
                         <a:srgbClr val="CBC7C7"/>
@@ -6420,7 +7741,7 @@
                     <a:bodyPr/>
                     <a:lstStyle/>
                     <a:p>
-                      <a:pPr indent="0" marL="0">
+                      <a:pPr marL="0" indent="0">
                         <a:lnSpc>
                           <a:spcPts val="1680"/>
                         </a:lnSpc>
@@ -6444,7 +7765,7 @@
                       </a:endParaRPr>
                     </a:p>
                   </a:txBody>
-                  <a:tcPr marL="53340" marR="53340" marT="53340" marB="53340" anchor="t">
+                  <a:tcPr marL="53340" marR="53340" marT="53340" marB="53340">
                     <a:lnL w="12700" cap="flat" cmpd="sng" algn="ctr">
                       <a:solidFill>
                         <a:srgbClr val="CBC7C7"/>
@@ -6488,7 +7809,7 @@
                     <a:bodyPr/>
                     <a:lstStyle/>
                     <a:p>
-                      <a:pPr indent="0" marL="0">
+                      <a:pPr marL="0" indent="0">
                         <a:lnSpc>
                           <a:spcPts val="1680"/>
                         </a:lnSpc>
@@ -6512,7 +7833,7 @@
                       </a:endParaRPr>
                     </a:p>
                   </a:txBody>
-                  <a:tcPr marL="53340" marR="53340" marT="53340" marB="53340" anchor="t">
+                  <a:tcPr marL="53340" marR="53340" marT="53340" marB="53340">
                     <a:lnL w="12700" cap="flat" cmpd="sng" algn="ctr">
                       <a:solidFill>
                         <a:srgbClr val="CBC7C7"/>
@@ -6551,6 +7872,11 @@
                     </a:lnB>
                   </a:tcPr>
                 </a:tc>
+                <a:extLst>
+                  <a:ext uri="{0D108BD9-81ED-4DB2-BD59-A6C34878D82A}">
+                    <a16:rowId xmlns:a16="http://schemas.microsoft.com/office/drawing/2014/main" val="10007"/>
+                  </a:ext>
+                </a:extLst>
               </a:tr>
             </a:tbl>
           </a:graphicData>
@@ -6579,7 +7905,7 @@
           </a:bodyPr>
           <a:lstStyle/>
           <a:p>
-            <a:pPr algn="l" indent="0" marL="0">
+            <a:pPr marL="0" indent="0" algn="l">
               <a:lnSpc>
                 <a:spcPts val="1680"/>
               </a:lnSpc>
@@ -6623,7 +7949,7 @@
           </a:bodyPr>
           <a:lstStyle/>
           <a:p>
-            <a:pPr algn="l" indent="0" marL="0">
+            <a:pPr marL="0" indent="0" algn="l">
               <a:lnSpc>
                 <a:spcPts val="1680"/>
               </a:lnSpc>
@@ -6667,14 +7993,14 @@
           </a:bodyPr>
           <a:lstStyle/>
           <a:p>
-            <a:pPr algn="r" indent="0" marL="0">
+            <a:pPr marL="0" indent="0" algn="r">
               <a:lnSpc>
                 <a:spcPts val="1680"/>
               </a:lnSpc>
               <a:buNone/>
             </a:pPr>
             <a:r>
-              <a:rPr lang="en-US" sz="1200" dirty="0">
+              <a:rPr lang="en-US" sz="1200">
                 <a:solidFill>
                   <a:srgbClr val="6E6E75"/>
                 </a:solidFill>
@@ -6682,7 +8008,7 @@
                 <a:ea typeface="Nunito Sans" pitchFamily="34" charset="-122"/>
                 <a:cs typeface="Nunito Sans" pitchFamily="34" charset="-120"/>
               </a:rPr>
-              <a:t>12 / 16</a:t>
+              <a:t>13 / 17</a:t>
             </a:r>
             <a:endParaRPr lang="en-US" sz="1200" dirty="0"/>
           </a:p>
@@ -6696,7 +8022,7 @@
 </p:sld>
 </file>
 
-<file path=ppt/slides/slide13.xml><?xml version="1.0" encoding="utf-8"?>
+<file path=ppt/slides/slide14.xml><?xml version="1.0" encoding="utf-8"?>
 <p:sld xmlns:a="http://schemas.openxmlformats.org/drawingml/2006/main" xmlns:r="http://schemas.openxmlformats.org/officeDocument/2006/relationships" xmlns:p="http://schemas.openxmlformats.org/presentationml/2006/main">
   <p:cSld name="Slide 13">
     <p:bg>
@@ -6704,6 +8030,7 @@
         <a:solidFill>
           <a:srgbClr val="FFF9FA"/>
         </a:solidFill>
+        <a:effectLst/>
       </p:bgPr>
     </p:bg>
     <p:spTree>
@@ -6743,14 +8070,14 @@
           </a:bodyPr>
           <a:lstStyle/>
           <a:p>
-            <a:pPr algn="l" indent="0" marL="0">
+            <a:pPr marL="0" indent="0" algn="l">
               <a:lnSpc>
                 <a:spcPts val="1820"/>
               </a:lnSpc>
               <a:buNone/>
             </a:pPr>
             <a:r>
-              <a:rPr lang="en-US" sz="1300" b="1" spc="150" kern="0" dirty="0">
+              <a:rPr lang="en-US" sz="1300" b="1" kern="0" spc="150" dirty="0">
                 <a:solidFill>
                   <a:srgbClr val="333333"/>
                 </a:solidFill>
@@ -6787,7 +8114,7 @@
           </a:bodyPr>
           <a:lstStyle/>
           <a:p>
-            <a:pPr algn="l" indent="0" marL="0">
+            <a:pPr marL="0" indent="0" algn="l">
               <a:lnSpc>
                 <a:spcPts val="3360"/>
               </a:lnSpc>
@@ -6858,7 +8185,7 @@
           </a:bodyPr>
           <a:lstStyle/>
           <a:p>
-            <a:pPr algn="l" indent="0" marL="0">
+            <a:pPr marL="0" indent="0" algn="l">
               <a:lnSpc>
                 <a:spcPts val="1750"/>
               </a:lnSpc>
@@ -6929,7 +8256,7 @@
           </a:bodyPr>
           <a:lstStyle/>
           <a:p>
-            <a:pPr algn="l" indent="0" marL="0">
+            <a:pPr marL="0" indent="0" algn="l">
               <a:lnSpc>
                 <a:spcPts val="1750"/>
               </a:lnSpc>
@@ -7000,7 +8327,7 @@
           </a:bodyPr>
           <a:lstStyle/>
           <a:p>
-            <a:pPr algn="l" indent="0" marL="0">
+            <a:pPr marL="0" indent="0" algn="l">
               <a:lnSpc>
                 <a:spcPts val="1750"/>
               </a:lnSpc>
@@ -7071,7 +8398,7 @@
           </a:bodyPr>
           <a:lstStyle/>
           <a:p>
-            <a:pPr algn="l" indent="0" marL="0">
+            <a:pPr marL="0" indent="0" algn="l">
               <a:lnSpc>
                 <a:spcPts val="1750"/>
               </a:lnSpc>
@@ -7115,7 +8442,7 @@
           </a:bodyPr>
           <a:lstStyle/>
           <a:p>
-            <a:pPr algn="l" indent="0" marL="0">
+            <a:pPr marL="0" indent="0" algn="l">
               <a:lnSpc>
                 <a:spcPts val="1680"/>
               </a:lnSpc>
@@ -7186,7 +8513,7 @@
           </a:bodyPr>
           <a:lstStyle/>
           <a:p>
-            <a:pPr algn="l" indent="0" marL="0">
+            <a:pPr marL="0" indent="0" algn="l">
               <a:lnSpc>
                 <a:spcPts val="1750"/>
               </a:lnSpc>
@@ -7230,7 +8557,7 @@
           </a:bodyPr>
           <a:lstStyle/>
           <a:p>
-            <a:pPr algn="l" indent="0" marL="0">
+            <a:pPr marL="0" indent="0" algn="l">
               <a:lnSpc>
                 <a:spcPts val="1680"/>
               </a:lnSpc>
@@ -7301,7 +8628,7 @@
           </a:bodyPr>
           <a:lstStyle/>
           <a:p>
-            <a:pPr algn="l" indent="0" marL="0">
+            <a:pPr marL="0" indent="0" algn="l">
               <a:lnSpc>
                 <a:spcPts val="1680"/>
               </a:lnSpc>
@@ -7345,7 +8672,7 @@
           </a:bodyPr>
           <a:lstStyle/>
           <a:p>
-            <a:pPr algn="l" indent="0" marL="0">
+            <a:pPr marL="0" indent="0" algn="l">
               <a:lnSpc>
                 <a:spcPts val="1680"/>
               </a:lnSpc>
@@ -7416,7 +8743,7 @@
           </a:bodyPr>
           <a:lstStyle/>
           <a:p>
-            <a:pPr algn="l" indent="0" marL="0">
+            <a:pPr marL="0" indent="0" algn="l">
               <a:lnSpc>
                 <a:spcPts val="1680"/>
               </a:lnSpc>
@@ -7460,7 +8787,7 @@
           </a:bodyPr>
           <a:lstStyle/>
           <a:p>
-            <a:pPr algn="l" indent="0" marL="0">
+            <a:pPr marL="0" indent="0" algn="l">
               <a:lnSpc>
                 <a:spcPts val="1680"/>
               </a:lnSpc>
@@ -7531,7 +8858,7 @@
           </a:bodyPr>
           <a:lstStyle/>
           <a:p>
-            <a:pPr algn="l" indent="0" marL="0">
+            <a:pPr marL="0" indent="0" algn="l">
               <a:lnSpc>
                 <a:spcPts val="1675"/>
               </a:lnSpc>
@@ -7575,7 +8902,7 @@
           </a:bodyPr>
           <a:lstStyle/>
           <a:p>
-            <a:pPr algn="l" indent="0" marL="0">
+            <a:pPr marL="0" indent="0" algn="l">
               <a:lnSpc>
                 <a:spcPts val="1675"/>
               </a:lnSpc>
@@ -7598,15 +8925,15 @@
       </p:sp>
       <p:pic>
         <p:nvPicPr>
-          <p:cNvPr id="28" name="Image 0" descr="connector">    </p:cNvPr>
+          <p:cNvPr id="28" name="Image 0" descr="connector"/>
           <p:cNvPicPr>
             <a:picLocks noChangeAspect="1"/>
           </p:cNvPicPr>
           <p:nvPr/>
         </p:nvPicPr>
         <p:blipFill>
-          <a:blip r:embed="rId1"/>
-          <a:srcRect l="0" r="0" t="0" b="0"/>
+          <a:blip r:embed="rId3"/>
+          <a:srcRect/>
           <a:stretch/>
         </p:blipFill>
         <p:spPr>
@@ -7621,15 +8948,15 @@
       </p:pic>
       <p:pic>
         <p:nvPicPr>
-          <p:cNvPr id="29" name="Image 1" descr="connector">    </p:cNvPr>
+          <p:cNvPr id="29" name="Image 1" descr="connector"/>
           <p:cNvPicPr>
             <a:picLocks noChangeAspect="1"/>
           </p:cNvPicPr>
           <p:nvPr/>
         </p:nvPicPr>
         <p:blipFill>
-          <a:blip r:embed="rId2"/>
-          <a:srcRect l="0" r="0" t="0" b="0"/>
+          <a:blip r:embed="rId4"/>
+          <a:srcRect/>
           <a:stretch/>
         </p:blipFill>
         <p:spPr>
@@ -7644,15 +8971,15 @@
       </p:pic>
       <p:pic>
         <p:nvPicPr>
-          <p:cNvPr id="30" name="Image 2" descr="connector">    </p:cNvPr>
+          <p:cNvPr id="30" name="Image 2" descr="connector"/>
           <p:cNvPicPr>
             <a:picLocks noChangeAspect="1"/>
           </p:cNvPicPr>
           <p:nvPr/>
         </p:nvPicPr>
         <p:blipFill>
-          <a:blip r:embed="rId3"/>
-          <a:srcRect l="0" r="0" t="0" b="0"/>
+          <a:blip r:embed="rId5"/>
+          <a:srcRect/>
           <a:stretch/>
         </p:blipFill>
         <p:spPr>
@@ -7667,15 +8994,15 @@
       </p:pic>
       <p:pic>
         <p:nvPicPr>
-          <p:cNvPr id="31" name="Image 3" descr="connector">    </p:cNvPr>
+          <p:cNvPr id="31" name="Image 3" descr="connector"/>
           <p:cNvPicPr>
             <a:picLocks noChangeAspect="1"/>
           </p:cNvPicPr>
           <p:nvPr/>
         </p:nvPicPr>
         <p:blipFill>
-          <a:blip r:embed="rId4"/>
-          <a:srcRect l="0" r="0" t="0" b="0"/>
+          <a:blip r:embed="rId5"/>
+          <a:srcRect/>
           <a:stretch/>
         </p:blipFill>
         <p:spPr>
@@ -7690,15 +9017,15 @@
       </p:pic>
       <p:pic>
         <p:nvPicPr>
-          <p:cNvPr id="32" name="Image 4" descr="connector">    </p:cNvPr>
+          <p:cNvPr id="32" name="Image 4" descr="connector"/>
           <p:cNvPicPr>
             <a:picLocks noChangeAspect="1"/>
           </p:cNvPicPr>
           <p:nvPr/>
         </p:nvPicPr>
         <p:blipFill>
-          <a:blip r:embed="rId5"/>
-          <a:srcRect l="0" r="0" t="0" b="0"/>
+          <a:blip r:embed="rId6"/>
+          <a:srcRect/>
           <a:stretch/>
         </p:blipFill>
         <p:spPr>
@@ -7713,7 +9040,7 @@
       </p:pic>
       <p:pic>
         <p:nvPicPr>
-          <p:cNvPr id="33" name="Image 5" descr="connector">    </p:cNvPr>
+          <p:cNvPr id="33" name="Image 5" descr="connector"/>
           <p:cNvPicPr>
             <a:picLocks noChangeAspect="1"/>
           </p:cNvPicPr>
@@ -7721,7 +9048,7 @@
         </p:nvPicPr>
         <p:blipFill>
           <a:blip r:embed="rId6"/>
-          <a:srcRect l="0" r="0" t="0" b="0"/>
+          <a:srcRect/>
           <a:stretch/>
         </p:blipFill>
         <p:spPr>
@@ -7736,7 +9063,7 @@
       </p:pic>
       <p:pic>
         <p:nvPicPr>
-          <p:cNvPr id="34" name="Image 6" descr="connector">    </p:cNvPr>
+          <p:cNvPr id="34" name="Image 6" descr="connector"/>
           <p:cNvPicPr>
             <a:picLocks noChangeAspect="1"/>
           </p:cNvPicPr>
@@ -7744,7 +9071,7 @@
         </p:nvPicPr>
         <p:blipFill>
           <a:blip r:embed="rId7"/>
-          <a:srcRect l="0" r="0" t="0" b="0"/>
+          <a:srcRect/>
           <a:stretch/>
         </p:blipFill>
         <p:spPr>
@@ -7759,7 +9086,7 @@
       </p:pic>
       <p:pic>
         <p:nvPicPr>
-          <p:cNvPr id="35" name="Image 7" descr="connector">    </p:cNvPr>
+          <p:cNvPr id="35" name="Image 7" descr="connector"/>
           <p:cNvPicPr>
             <a:picLocks noChangeAspect="1"/>
           </p:cNvPicPr>
@@ -7767,7 +9094,7 @@
         </p:nvPicPr>
         <p:blipFill>
           <a:blip r:embed="rId8"/>
-          <a:srcRect l="0" r="0" t="0" b="0"/>
+          <a:srcRect/>
           <a:stretch/>
         </p:blipFill>
         <p:spPr>
@@ -7782,15 +9109,15 @@
       </p:pic>
       <p:pic>
         <p:nvPicPr>
-          <p:cNvPr id="36" name="Image 8" descr="connector">    </p:cNvPr>
+          <p:cNvPr id="36" name="Image 8" descr="connector"/>
           <p:cNvPicPr>
             <a:picLocks noChangeAspect="1"/>
           </p:cNvPicPr>
           <p:nvPr/>
         </p:nvPicPr>
         <p:blipFill>
-          <a:blip r:embed="rId9"/>
-          <a:srcRect l="0" r="0" t="0" b="0"/>
+          <a:blip r:embed="rId7"/>
+          <a:srcRect/>
           <a:stretch/>
         </p:blipFill>
         <p:spPr>
@@ -7805,15 +9132,15 @@
       </p:pic>
       <p:pic>
         <p:nvPicPr>
-          <p:cNvPr id="37" name="Image 9" descr="connector">    </p:cNvPr>
+          <p:cNvPr id="37" name="Image 9" descr="connector"/>
           <p:cNvPicPr>
             <a:picLocks noChangeAspect="1"/>
           </p:cNvPicPr>
           <p:nvPr/>
         </p:nvPicPr>
         <p:blipFill>
-          <a:blip r:embed="rId10"/>
-          <a:srcRect l="0" r="0" t="0" b="0"/>
+          <a:blip r:embed="rId7"/>
+          <a:srcRect/>
           <a:stretch/>
         </p:blipFill>
         <p:spPr>
@@ -7828,15 +9155,15 @@
       </p:pic>
       <p:pic>
         <p:nvPicPr>
-          <p:cNvPr id="39" name="Image 11" descr="connector">    </p:cNvPr>
+          <p:cNvPr id="39" name="Image 11" descr="connector"/>
           <p:cNvPicPr>
             <a:picLocks noChangeAspect="1"/>
           </p:cNvPicPr>
           <p:nvPr/>
         </p:nvPicPr>
         <p:blipFill>
-          <a:blip r:embed="rId12"/>
-          <a:srcRect l="0" r="0" t="0" b="0"/>
+          <a:blip r:embed="rId7"/>
+          <a:srcRect/>
           <a:stretch/>
         </p:blipFill>
         <p:spPr>
@@ -7872,7 +9199,7 @@
           </a:bodyPr>
           <a:lstStyle/>
           <a:p>
-            <a:pPr algn="l" indent="0" marL="0">
+            <a:pPr marL="0" indent="0" algn="l">
               <a:lnSpc>
                 <a:spcPts val="1680"/>
               </a:lnSpc>
@@ -7916,14 +9243,14 @@
           </a:bodyPr>
           <a:lstStyle/>
           <a:p>
-            <a:pPr algn="r" indent="0" marL="0">
+            <a:pPr marL="0" indent="0" algn="r">
               <a:lnSpc>
                 <a:spcPts val="1680"/>
               </a:lnSpc>
               <a:buNone/>
             </a:pPr>
             <a:r>
-              <a:rPr lang="en-US" sz="1200" dirty="0">
+              <a:rPr lang="en-US" sz="1200">
                 <a:solidFill>
                   <a:srgbClr val="6E6E75"/>
                 </a:solidFill>
@@ -7931,7 +9258,7 @@
                 <a:ea typeface="Nunito Sans" pitchFamily="34" charset="-122"/>
                 <a:cs typeface="Nunito Sans" pitchFamily="34" charset="-120"/>
               </a:rPr>
-              <a:t>13 / 16</a:t>
+              <a:t>14 / 17</a:t>
             </a:r>
             <a:endParaRPr lang="en-US" sz="1200" dirty="0"/>
           </a:p>
@@ -7945,7 +9272,7 @@
 </p:sld>
 </file>
 
-<file path=ppt/slides/slide14.xml><?xml version="1.0" encoding="utf-8"?>
+<file path=ppt/slides/slide15.xml><?xml version="1.0" encoding="utf-8"?>
 <p:sld xmlns:a="http://schemas.openxmlformats.org/drawingml/2006/main" xmlns:r="http://schemas.openxmlformats.org/officeDocument/2006/relationships" xmlns:p="http://schemas.openxmlformats.org/presentationml/2006/main">
   <p:cSld name="Slide 14">
     <p:bg>
@@ -7953,6 +9280,7 @@
         <a:solidFill>
           <a:srgbClr val="FFF9FA"/>
         </a:solidFill>
+        <a:effectLst/>
       </p:bgPr>
     </p:bg>
     <p:spTree>
@@ -7992,14 +9320,14 @@
           </a:bodyPr>
           <a:lstStyle/>
           <a:p>
-            <a:pPr algn="l" indent="0" marL="0">
+            <a:pPr marL="0" indent="0" algn="l">
               <a:lnSpc>
                 <a:spcPts val="1774"/>
               </a:lnSpc>
               <a:buNone/>
             </a:pPr>
             <a:r>
-              <a:rPr lang="en-US" sz="1268" b="1" spc="150" kern="0" dirty="0">
+              <a:rPr lang="en-US" sz="1268" b="1" kern="0" spc="150" dirty="0">
                 <a:solidFill>
                   <a:srgbClr val="333333"/>
                 </a:solidFill>
@@ -8036,7 +9364,7 @@
           </a:bodyPr>
           <a:lstStyle/>
           <a:p>
-            <a:pPr algn="l" indent="0" marL="0">
+            <a:pPr marL="0" indent="0" algn="l">
               <a:lnSpc>
                 <a:spcPts val="3224"/>
               </a:lnSpc>
@@ -8080,7 +9408,7 @@
           </a:bodyPr>
           <a:lstStyle/>
           <a:p>
-            <a:pPr algn="l" indent="0" marL="0">
+            <a:pPr marL="0" indent="0" algn="l">
               <a:lnSpc>
                 <a:spcPts val="1874"/>
               </a:lnSpc>
@@ -8184,7 +9512,7 @@
           </a:bodyPr>
           <a:lstStyle/>
           <a:p>
-            <a:pPr algn="l" indent="0" marL="0">
+            <a:pPr marL="0" indent="0" algn="l">
               <a:lnSpc>
                 <a:spcPts val="1680"/>
               </a:lnSpc>
@@ -8228,7 +9556,7 @@
           </a:bodyPr>
           <a:lstStyle/>
           <a:p>
-            <a:pPr algn="l" indent="0" marL="0">
+            <a:pPr marL="0" indent="0" algn="l">
               <a:lnSpc>
                 <a:spcPts val="1820"/>
               </a:lnSpc>
@@ -8283,7 +9611,7 @@
           </a:bodyPr>
           <a:lstStyle/>
           <a:p>
-            <a:pPr algn="l" indent="0" marL="0">
+            <a:pPr marL="0" indent="0" algn="l">
               <a:lnSpc>
                 <a:spcPts val="1680"/>
               </a:lnSpc>
@@ -8376,7 +9704,7 @@
           </a:bodyPr>
           <a:lstStyle/>
           <a:p>
-            <a:pPr algn="l" indent="0" marL="0">
+            <a:pPr marL="0" indent="0" algn="l">
               <a:lnSpc>
                 <a:spcPts val="1680"/>
               </a:lnSpc>
@@ -8420,7 +9748,7 @@
           </a:bodyPr>
           <a:lstStyle/>
           <a:p>
-            <a:pPr algn="l" indent="0" marL="0">
+            <a:pPr marL="0" indent="0" algn="l">
               <a:lnSpc>
                 <a:spcPts val="1820"/>
               </a:lnSpc>
@@ -8475,7 +9803,7 @@
           </a:bodyPr>
           <a:lstStyle/>
           <a:p>
-            <a:pPr algn="l" indent="0" marL="0">
+            <a:pPr marL="0" indent="0" algn="l">
               <a:lnSpc>
                 <a:spcPts val="1680"/>
               </a:lnSpc>
@@ -8568,7 +9896,7 @@
           </a:bodyPr>
           <a:lstStyle/>
           <a:p>
-            <a:pPr algn="l" indent="0" marL="0">
+            <a:pPr marL="0" indent="0" algn="l">
               <a:lnSpc>
                 <a:spcPts val="1680"/>
               </a:lnSpc>
@@ -8612,7 +9940,7 @@
           </a:bodyPr>
           <a:lstStyle/>
           <a:p>
-            <a:pPr algn="l" indent="0" marL="0">
+            <a:pPr marL="0" indent="0" algn="l">
               <a:lnSpc>
                 <a:spcPts val="1820"/>
               </a:lnSpc>
@@ -8667,7 +9995,7 @@
           </a:bodyPr>
           <a:lstStyle/>
           <a:p>
-            <a:pPr algn="l" indent="0" marL="0">
+            <a:pPr marL="0" indent="0" algn="l">
               <a:lnSpc>
                 <a:spcPts val="1680"/>
               </a:lnSpc>
@@ -8760,7 +10088,7 @@
           </a:bodyPr>
           <a:lstStyle/>
           <a:p>
-            <a:pPr algn="l" indent="0" marL="0">
+            <a:pPr marL="0" indent="0" algn="l">
               <a:lnSpc>
                 <a:spcPts val="1680"/>
               </a:lnSpc>
@@ -8804,7 +10132,7 @@
           </a:bodyPr>
           <a:lstStyle/>
           <a:p>
-            <a:pPr algn="l" indent="0" marL="0">
+            <a:pPr marL="0" indent="0" algn="l">
               <a:lnSpc>
                 <a:spcPts val="1820"/>
               </a:lnSpc>
@@ -8859,7 +10187,7 @@
           </a:bodyPr>
           <a:lstStyle/>
           <a:p>
-            <a:pPr algn="l" indent="0" marL="0">
+            <a:pPr marL="0" indent="0" algn="l">
               <a:lnSpc>
                 <a:spcPts val="1680"/>
               </a:lnSpc>
@@ -8952,7 +10280,7 @@
           </a:bodyPr>
           <a:lstStyle/>
           <a:p>
-            <a:pPr algn="l" indent="0" marL="0">
+            <a:pPr marL="0" indent="0" algn="l">
               <a:lnSpc>
                 <a:spcPts val="1680"/>
               </a:lnSpc>
@@ -8996,7 +10324,7 @@
           </a:bodyPr>
           <a:lstStyle/>
           <a:p>
-            <a:pPr algn="l" indent="0" marL="0">
+            <a:pPr marL="0" indent="0" algn="l">
               <a:lnSpc>
                 <a:spcPts val="1820"/>
               </a:lnSpc>
@@ -9051,7 +10379,7 @@
           </a:bodyPr>
           <a:lstStyle/>
           <a:p>
-            <a:pPr algn="l" indent="0" marL="0">
+            <a:pPr marL="0" indent="0" algn="l">
               <a:lnSpc>
                 <a:spcPts val="1680"/>
               </a:lnSpc>
@@ -9144,7 +10472,7 @@
           </a:bodyPr>
           <a:lstStyle/>
           <a:p>
-            <a:pPr algn="l" indent="0" marL="0">
+            <a:pPr marL="0" indent="0" algn="l">
               <a:lnSpc>
                 <a:spcPts val="1680"/>
               </a:lnSpc>
@@ -9188,7 +10516,7 @@
           </a:bodyPr>
           <a:lstStyle/>
           <a:p>
-            <a:pPr algn="l" indent="0" marL="0">
+            <a:pPr marL="0" indent="0" algn="l">
               <a:lnSpc>
                 <a:spcPts val="1820"/>
               </a:lnSpc>
@@ -9243,7 +10571,7 @@
           </a:bodyPr>
           <a:lstStyle/>
           <a:p>
-            <a:pPr algn="l" indent="0" marL="0">
+            <a:pPr marL="0" indent="0" algn="l">
               <a:lnSpc>
                 <a:spcPts val="1680"/>
               </a:lnSpc>
@@ -9336,7 +10664,7 @@
           </a:bodyPr>
           <a:lstStyle/>
           <a:p>
-            <a:pPr algn="l" indent="0" marL="0">
+            <a:pPr marL="0" indent="0" algn="l">
               <a:lnSpc>
                 <a:spcPts val="1680"/>
               </a:lnSpc>
@@ -9380,7 +10708,7 @@
           </a:bodyPr>
           <a:lstStyle/>
           <a:p>
-            <a:pPr algn="l" indent="0" marL="0">
+            <a:pPr marL="0" indent="0" algn="l">
               <a:lnSpc>
                 <a:spcPts val="1820"/>
               </a:lnSpc>
@@ -9435,7 +10763,7 @@
           </a:bodyPr>
           <a:lstStyle/>
           <a:p>
-            <a:pPr algn="l" indent="0" marL="0">
+            <a:pPr marL="0" indent="0" algn="l">
               <a:lnSpc>
                 <a:spcPts val="1680"/>
               </a:lnSpc>
@@ -9528,7 +10856,7 @@
           </a:bodyPr>
           <a:lstStyle/>
           <a:p>
-            <a:pPr algn="l" indent="0" marL="0">
+            <a:pPr marL="0" indent="0" algn="l">
               <a:lnSpc>
                 <a:spcPts val="1680"/>
               </a:lnSpc>
@@ -9572,7 +10900,7 @@
           </a:bodyPr>
           <a:lstStyle/>
           <a:p>
-            <a:pPr algn="l" indent="0" marL="0">
+            <a:pPr marL="0" indent="0" algn="l">
               <a:lnSpc>
                 <a:spcPts val="1820"/>
               </a:lnSpc>
@@ -9627,7 +10955,7 @@
           </a:bodyPr>
           <a:lstStyle/>
           <a:p>
-            <a:pPr algn="l" indent="0" marL="0">
+            <a:pPr marL="0" indent="0" algn="l">
               <a:lnSpc>
                 <a:spcPts val="1680"/>
               </a:lnSpc>
@@ -9671,7 +10999,7 @@
           </a:bodyPr>
           <a:lstStyle/>
           <a:p>
-            <a:pPr algn="l" indent="0" marL="0">
+            <a:pPr marL="0" indent="0" algn="l">
               <a:lnSpc>
                 <a:spcPts val="1874"/>
               </a:lnSpc>
@@ -9753,7 +11081,7 @@
           </a:bodyPr>
           <a:lstStyle/>
           <a:p>
-            <a:pPr algn="l" indent="0" marL="0">
+            <a:pPr marL="0" indent="0" algn="l">
               <a:lnSpc>
                 <a:spcPts val="1723"/>
               </a:lnSpc>
@@ -9808,7 +11136,7 @@
           </a:bodyPr>
           <a:lstStyle/>
           <a:p>
-            <a:pPr algn="l" indent="0" marL="0">
+            <a:pPr marL="0" indent="0" algn="l">
               <a:lnSpc>
                 <a:spcPts val="1570"/>
               </a:lnSpc>
@@ -9831,15 +11159,15 @@
       </p:sp>
       <p:pic>
         <p:nvPicPr>
-          <p:cNvPr id="49" name="Image 0" descr="arrow-right">    </p:cNvPr>
+          <p:cNvPr id="49" name="Image 0" descr="arrow-right"/>
           <p:cNvPicPr>
             <a:picLocks noChangeAspect="1"/>
           </p:cNvPicPr>
           <p:nvPr/>
         </p:nvPicPr>
         <p:blipFill>
-          <a:blip r:embed="rId1"/>
-          <a:srcRect l="0" r="0" t="0" b="0"/>
+          <a:blip r:embed="rId3"/>
+          <a:srcRect/>
           <a:stretch/>
         </p:blipFill>
         <p:spPr>
@@ -9902,7 +11230,7 @@
           </a:bodyPr>
           <a:lstStyle/>
           <a:p>
-            <a:pPr algn="l" indent="0" marL="0">
+            <a:pPr marL="0" indent="0" algn="l">
               <a:lnSpc>
                 <a:spcPts val="1723"/>
               </a:lnSpc>
@@ -9957,7 +11285,7 @@
           </a:bodyPr>
           <a:lstStyle/>
           <a:p>
-            <a:pPr algn="l" indent="0" marL="0">
+            <a:pPr marL="0" indent="0" algn="l">
               <a:lnSpc>
                 <a:spcPts val="1570"/>
               </a:lnSpc>
@@ -9980,15 +11308,15 @@
       </p:sp>
       <p:pic>
         <p:nvPicPr>
-          <p:cNvPr id="53" name="Image 1" descr="arrow-right">    </p:cNvPr>
+          <p:cNvPr id="53" name="Image 1" descr="arrow-right"/>
           <p:cNvPicPr>
             <a:picLocks noChangeAspect="1"/>
           </p:cNvPicPr>
           <p:nvPr/>
         </p:nvPicPr>
         <p:blipFill>
-          <a:blip r:embed="rId2"/>
-          <a:srcRect l="0" r="0" t="0" b="0"/>
+          <a:blip r:embed="rId3"/>
+          <a:srcRect/>
           <a:stretch/>
         </p:blipFill>
         <p:spPr>
@@ -10051,7 +11379,7 @@
           </a:bodyPr>
           <a:lstStyle/>
           <a:p>
-            <a:pPr algn="l" indent="0" marL="0">
+            <a:pPr marL="0" indent="0" algn="l">
               <a:lnSpc>
                 <a:spcPts val="1723"/>
               </a:lnSpc>
@@ -10106,7 +11434,7 @@
           </a:bodyPr>
           <a:lstStyle/>
           <a:p>
-            <a:pPr algn="l" indent="0" marL="0">
+            <a:pPr marL="0" indent="0" algn="l">
               <a:lnSpc>
                 <a:spcPts val="1570"/>
               </a:lnSpc>
@@ -10129,7 +11457,7 @@
       </p:sp>
       <p:pic>
         <p:nvPicPr>
-          <p:cNvPr id="57" name="Image 2" descr="arrow-right">    </p:cNvPr>
+          <p:cNvPr id="57" name="Image 2" descr="arrow-right"/>
           <p:cNvPicPr>
             <a:picLocks noChangeAspect="1"/>
           </p:cNvPicPr>
@@ -10137,7 +11465,7 @@
         </p:nvPicPr>
         <p:blipFill>
           <a:blip r:embed="rId3"/>
-          <a:srcRect l="0" r="0" t="0" b="0"/>
+          <a:srcRect/>
           <a:stretch/>
         </p:blipFill>
         <p:spPr>
@@ -10200,7 +11528,7 @@
           </a:bodyPr>
           <a:lstStyle/>
           <a:p>
-            <a:pPr algn="l" indent="0" marL="0">
+            <a:pPr marL="0" indent="0" algn="l">
               <a:lnSpc>
                 <a:spcPts val="1723"/>
               </a:lnSpc>
@@ -10255,7 +11583,7 @@
           </a:bodyPr>
           <a:lstStyle/>
           <a:p>
-            <a:pPr algn="l" indent="0" marL="0">
+            <a:pPr marL="0" indent="0" algn="l">
               <a:lnSpc>
                 <a:spcPts val="1570"/>
               </a:lnSpc>
@@ -10278,15 +11606,15 @@
       </p:sp>
       <p:pic>
         <p:nvPicPr>
-          <p:cNvPr id="61" name="Image 3" descr="arrow-right">    </p:cNvPr>
+          <p:cNvPr id="61" name="Image 3" descr="arrow-right"/>
           <p:cNvPicPr>
             <a:picLocks noChangeAspect="1"/>
           </p:cNvPicPr>
           <p:nvPr/>
         </p:nvPicPr>
         <p:blipFill>
-          <a:blip r:embed="rId4"/>
-          <a:srcRect l="0" r="0" t="0" b="0"/>
+          <a:blip r:embed="rId3"/>
+          <a:srcRect/>
           <a:stretch/>
         </p:blipFill>
         <p:spPr>
@@ -10349,7 +11677,7 @@
           </a:bodyPr>
           <a:lstStyle/>
           <a:p>
-            <a:pPr algn="l" indent="0" marL="0">
+            <a:pPr marL="0" indent="0" algn="l">
               <a:lnSpc>
                 <a:spcPts val="1723"/>
               </a:lnSpc>
@@ -10404,7 +11732,7 @@
           </a:bodyPr>
           <a:lstStyle/>
           <a:p>
-            <a:pPr algn="l" indent="0" marL="0">
+            <a:pPr marL="0" indent="0" algn="l">
               <a:lnSpc>
                 <a:spcPts val="1570"/>
               </a:lnSpc>
@@ -10449,15 +11777,15 @@
       </p:sp>
       <p:pic>
         <p:nvPicPr>
-          <p:cNvPr id="66" name="Image 4" descr="Lightning">    </p:cNvPr>
+          <p:cNvPr id="66" name="Image 4" descr="Lightning"/>
           <p:cNvPicPr>
             <a:picLocks noChangeAspect="1"/>
           </p:cNvPicPr>
           <p:nvPr/>
         </p:nvPicPr>
         <p:blipFill>
-          <a:blip r:embed="rId5"/>
-          <a:srcRect l="0" r="0" t="0" b="0"/>
+          <a:blip r:embed="rId4"/>
+          <a:srcRect/>
           <a:stretch/>
         </p:blipFill>
         <p:spPr>
@@ -10493,7 +11821,7 @@
           </a:bodyPr>
           <a:lstStyle/>
           <a:p>
-            <a:pPr algn="l" indent="0" marL="0">
+            <a:pPr marL="0" indent="0" algn="l">
               <a:lnSpc>
                 <a:spcPts val="1960"/>
               </a:lnSpc>
@@ -10548,7 +11876,7 @@
           </a:bodyPr>
           <a:lstStyle/>
           <a:p>
-            <a:pPr algn="l" indent="0" marL="0">
+            <a:pPr marL="0" indent="0" algn="l">
               <a:lnSpc>
                 <a:spcPts val="1680"/>
               </a:lnSpc>
@@ -10592,14 +11920,14 @@
           </a:bodyPr>
           <a:lstStyle/>
           <a:p>
-            <a:pPr algn="r" indent="0" marL="0">
+            <a:pPr marL="0" indent="0" algn="r">
               <a:lnSpc>
                 <a:spcPts val="1680"/>
               </a:lnSpc>
               <a:buNone/>
             </a:pPr>
             <a:r>
-              <a:rPr lang="en-US" sz="1200" dirty="0">
+              <a:rPr lang="en-US" sz="1200">
                 <a:solidFill>
                   <a:srgbClr val="6E6E75"/>
                 </a:solidFill>
@@ -10607,7 +11935,7 @@
                 <a:ea typeface="Nunito Sans" pitchFamily="34" charset="-122"/>
                 <a:cs typeface="Nunito Sans" pitchFamily="34" charset="-120"/>
               </a:rPr>
-              <a:t>14 / 16</a:t>
+              <a:t>15 / 17</a:t>
             </a:r>
             <a:endParaRPr lang="en-US" sz="1200" dirty="0"/>
           </a:p>
@@ -10621,7 +11949,7 @@
 </p:sld>
 </file>
 
-<file path=ppt/slides/slide15.xml><?xml version="1.0" encoding="utf-8"?>
+<file path=ppt/slides/slide16.xml><?xml version="1.0" encoding="utf-8"?>
 <p:sld xmlns:a="http://schemas.openxmlformats.org/drawingml/2006/main" xmlns:r="http://schemas.openxmlformats.org/officeDocument/2006/relationships" xmlns:p="http://schemas.openxmlformats.org/presentationml/2006/main">
   <p:cSld name="Slide 15">
     <p:bg>
@@ -10629,6 +11957,7 @@
         <a:solidFill>
           <a:srgbClr val="FFF9FA"/>
         </a:solidFill>
+        <a:effectLst/>
       </p:bgPr>
     </p:bg>
     <p:spTree>
@@ -10668,14 +11997,14 @@
           </a:bodyPr>
           <a:lstStyle/>
           <a:p>
-            <a:pPr algn="l" indent="0" marL="0">
+            <a:pPr marL="0" indent="0" algn="l">
               <a:lnSpc>
                 <a:spcPts val="1820"/>
               </a:lnSpc>
               <a:buNone/>
             </a:pPr>
             <a:r>
-              <a:rPr lang="en-US" sz="1300" b="1" spc="150" kern="0" dirty="0">
+              <a:rPr lang="en-US" sz="1300" b="1" kern="0" spc="150" dirty="0">
                 <a:solidFill>
                   <a:srgbClr val="333333"/>
                 </a:solidFill>
@@ -10712,7 +12041,7 @@
           </a:bodyPr>
           <a:lstStyle/>
           <a:p>
-            <a:pPr algn="l" indent="0" marL="0">
+            <a:pPr marL="0" indent="0" algn="l">
               <a:lnSpc>
                 <a:spcPts val="3360"/>
               </a:lnSpc>
@@ -10779,7 +12108,7 @@
           </a:bodyPr>
           <a:lstStyle/>
           <a:p>
-            <a:pPr algn="l" indent="0" marL="0">
+            <a:pPr marL="0" indent="0" algn="l">
               <a:lnSpc>
                 <a:spcPts val="2800"/>
               </a:lnSpc>
@@ -10823,7 +12152,7 @@
           </a:bodyPr>
           <a:lstStyle/>
           <a:p>
-            <a:pPr algn="l" indent="0" marL="0">
+            <a:pPr marL="0" indent="0" algn="l">
               <a:lnSpc>
                 <a:spcPts val="1680"/>
               </a:lnSpc>
@@ -10900,7 +12229,7 @@
           </a:bodyPr>
           <a:lstStyle/>
           <a:p>
-            <a:pPr algn="l" indent="0" marL="0">
+            <a:pPr marL="0" indent="0" algn="l">
               <a:lnSpc>
                 <a:spcPts val="1680"/>
               </a:lnSpc>
@@ -10966,7 +12295,7 @@
           </a:bodyPr>
           <a:lstStyle/>
           <a:p>
-            <a:pPr algn="l" indent="0" marL="0">
+            <a:pPr marL="0" indent="0" algn="l">
               <a:lnSpc>
                 <a:spcPts val="1680"/>
               </a:lnSpc>
@@ -11033,7 +12362,7 @@
           </a:bodyPr>
           <a:lstStyle/>
           <a:p>
-            <a:pPr algn="l" indent="0" marL="0">
+            <a:pPr marL="0" indent="0" algn="l">
               <a:lnSpc>
                 <a:spcPts val="2800"/>
               </a:lnSpc>
@@ -11077,7 +12406,7 @@
           </a:bodyPr>
           <a:lstStyle/>
           <a:p>
-            <a:pPr algn="l" indent="0" marL="0">
+            <a:pPr marL="0" indent="0" algn="l">
               <a:lnSpc>
                 <a:spcPts val="1680"/>
               </a:lnSpc>
@@ -11154,7 +12483,7 @@
           </a:bodyPr>
           <a:lstStyle/>
           <a:p>
-            <a:pPr algn="l" indent="0" marL="0">
+            <a:pPr marL="0" indent="0" algn="l">
               <a:lnSpc>
                 <a:spcPts val="1680"/>
               </a:lnSpc>
@@ -11220,7 +12549,7 @@
           </a:bodyPr>
           <a:lstStyle/>
           <a:p>
-            <a:pPr algn="l" indent="0" marL="0">
+            <a:pPr marL="0" indent="0" algn="l">
               <a:lnSpc>
                 <a:spcPts val="1680"/>
               </a:lnSpc>
@@ -11287,7 +12616,7 @@
           </a:bodyPr>
           <a:lstStyle/>
           <a:p>
-            <a:pPr algn="l" indent="0" marL="0">
+            <a:pPr marL="0" indent="0" algn="l">
               <a:lnSpc>
                 <a:spcPts val="2800"/>
               </a:lnSpc>
@@ -11331,7 +12660,7 @@
           </a:bodyPr>
           <a:lstStyle/>
           <a:p>
-            <a:pPr algn="l" indent="0" marL="0">
+            <a:pPr marL="0" indent="0" algn="l">
               <a:lnSpc>
                 <a:spcPts val="1680"/>
               </a:lnSpc>
@@ -11408,7 +12737,7 @@
           </a:bodyPr>
           <a:lstStyle/>
           <a:p>
-            <a:pPr algn="l" indent="0" marL="0">
+            <a:pPr marL="0" indent="0" algn="l">
               <a:lnSpc>
                 <a:spcPts val="1680"/>
               </a:lnSpc>
@@ -11474,7 +12803,7 @@
           </a:bodyPr>
           <a:lstStyle/>
           <a:p>
-            <a:pPr algn="l" indent="0" marL="0">
+            <a:pPr marL="0" indent="0" algn="l">
               <a:lnSpc>
                 <a:spcPts val="1680"/>
               </a:lnSpc>
@@ -11518,7 +12847,7 @@
           </a:bodyPr>
           <a:lstStyle/>
           <a:p>
-            <a:pPr algn="l" indent="0" marL="0">
+            <a:pPr marL="0" indent="0" algn="l">
               <a:lnSpc>
                 <a:spcPts val="2800"/>
               </a:lnSpc>
@@ -11562,7 +12891,7 @@
           </a:bodyPr>
           <a:lstStyle/>
           <a:p>
-            <a:pPr algn="l" indent="0" marL="0">
+            <a:pPr marL="0" indent="0" algn="l">
               <a:lnSpc>
                 <a:spcPts val="1680"/>
               </a:lnSpc>
@@ -11639,7 +12968,7 @@
           </a:bodyPr>
           <a:lstStyle/>
           <a:p>
-            <a:pPr algn="l" indent="0" marL="0">
+            <a:pPr marL="0" indent="0" algn="l">
               <a:lnSpc>
                 <a:spcPts val="1680"/>
               </a:lnSpc>
@@ -11705,7 +13034,7 @@
           </a:bodyPr>
           <a:lstStyle/>
           <a:p>
-            <a:pPr algn="l" indent="0" marL="0">
+            <a:pPr marL="0" indent="0" algn="l">
               <a:lnSpc>
                 <a:spcPts val="1680"/>
               </a:lnSpc>
@@ -11771,7 +13100,7 @@
           </a:bodyPr>
           <a:lstStyle/>
           <a:p>
-            <a:pPr algn="ctr" indent="0" marL="0">
+            <a:pPr marL="0" indent="0" algn="ctr">
               <a:lnSpc>
                 <a:spcPts val="2800"/>
               </a:lnSpc>
@@ -11815,7 +13144,7 @@
           </a:bodyPr>
           <a:lstStyle/>
           <a:p>
-            <a:pPr algn="l" indent="0" marL="0">
+            <a:pPr marL="0" indent="0" algn="l">
               <a:lnSpc>
                 <a:spcPts val="1680"/>
               </a:lnSpc>
@@ -11859,14 +13188,14 @@
           </a:bodyPr>
           <a:lstStyle/>
           <a:p>
-            <a:pPr algn="r" indent="0" marL="0">
+            <a:pPr marL="0" indent="0" algn="r">
               <a:lnSpc>
                 <a:spcPts val="1680"/>
               </a:lnSpc>
               <a:buNone/>
             </a:pPr>
             <a:r>
-              <a:rPr lang="en-US" sz="1200" dirty="0">
+              <a:rPr lang="en-US" sz="1200">
                 <a:solidFill>
                   <a:srgbClr val="6E6E75"/>
                 </a:solidFill>
@@ -11874,7 +13203,7 @@
                 <a:ea typeface="Nunito Sans" pitchFamily="34" charset="-122"/>
                 <a:cs typeface="Nunito Sans" pitchFamily="34" charset="-120"/>
               </a:rPr>
-              <a:t>15 / 16</a:t>
+              <a:t>16 / 17</a:t>
             </a:r>
             <a:endParaRPr lang="en-US" sz="1200" dirty="0"/>
           </a:p>
@@ -11888,7 +13217,7 @@
 </p:sld>
 </file>
 
-<file path=ppt/slides/slide16.xml><?xml version="1.0" encoding="utf-8"?>
+<file path=ppt/slides/slide17.xml><?xml version="1.0" encoding="utf-8"?>
 <p:sld xmlns:a="http://schemas.openxmlformats.org/drawingml/2006/main" xmlns:r="http://schemas.openxmlformats.org/officeDocument/2006/relationships" xmlns:p="http://schemas.openxmlformats.org/presentationml/2006/main">
   <p:cSld name="Slide 16">
     <p:bg>
@@ -11896,6 +13225,7 @@
         <a:solidFill>
           <a:srgbClr val="FFEDF1"/>
         </a:solidFill>
+        <a:effectLst/>
       </p:bgPr>
     </p:bg>
     <p:spTree>
@@ -11914,15 +13244,15 @@
       </p:grpSpPr>
       <p:pic>
         <p:nvPicPr>
-          <p:cNvPr id="2" name="Image 0" descr="preencoded.png">    </p:cNvPr>
+          <p:cNvPr id="2" name="Image 0" descr="preencoded.png"/>
           <p:cNvPicPr>
             <a:picLocks noChangeAspect="1"/>
           </p:cNvPicPr>
           <p:nvPr/>
         </p:nvPicPr>
         <p:blipFill>
-          <a:blip r:embed="rId1"/>
-          <a:srcRect l="0" r="0" t="0" b="0"/>
+          <a:blip r:embed="rId3"/>
+          <a:srcRect/>
           <a:stretch/>
         </p:blipFill>
         <p:spPr>
@@ -11958,14 +13288,14 @@
           </a:bodyPr>
           <a:lstStyle/>
           <a:p>
-            <a:pPr algn="l" indent="0" marL="0">
+            <a:pPr marL="0" indent="0" algn="l">
               <a:lnSpc>
                 <a:spcPts val="2800"/>
               </a:lnSpc>
               <a:buNone/>
             </a:pPr>
             <a:r>
-              <a:rPr lang="en-US" sz="2000" b="1" spc="200" kern="0" dirty="0">
+              <a:rPr lang="en-US" sz="2000" b="1" kern="0" spc="200" dirty="0">
                 <a:solidFill>
                   <a:srgbClr val="333333"/>
                 </a:solidFill>
@@ -12002,7 +13332,7 @@
           </a:bodyPr>
           <a:lstStyle/>
           <a:p>
-            <a:pPr algn="l" indent="0" marL="0">
+            <a:pPr marL="0" indent="0" algn="l">
               <a:lnSpc>
                 <a:spcPts val="5880"/>
               </a:lnSpc>
@@ -12039,6 +13369,7 @@
         <a:solidFill>
           <a:srgbClr val="FFF9FA"/>
         </a:solidFill>
+        <a:effectLst/>
       </p:bgPr>
     </p:bg>
     <p:spTree>
@@ -12078,14 +13409,14 @@
           </a:bodyPr>
           <a:lstStyle/>
           <a:p>
-            <a:pPr algn="l" indent="0" marL="0">
+            <a:pPr marL="0" indent="0" algn="l">
               <a:lnSpc>
                 <a:spcPts val="1820"/>
               </a:lnSpc>
               <a:buNone/>
             </a:pPr>
             <a:r>
-              <a:rPr lang="en-US" sz="1300" b="1" spc="150" kern="0" dirty="0">
+              <a:rPr lang="en-US" sz="1300" b="1" kern="0" spc="150" dirty="0">
                 <a:solidFill>
                   <a:srgbClr val="333333"/>
                 </a:solidFill>
@@ -12122,7 +13453,7 @@
           </a:bodyPr>
           <a:lstStyle/>
           <a:p>
-            <a:pPr algn="l" indent="0" marL="0">
+            <a:pPr marL="0" indent="0" algn="l">
               <a:lnSpc>
                 <a:spcPts val="3360"/>
               </a:lnSpc>
@@ -12189,14 +13520,14 @@
           </a:bodyPr>
           <a:lstStyle/>
           <a:p>
-            <a:pPr algn="ctr" indent="0" marL="0">
+            <a:pPr marL="0" indent="0" algn="ctr">
               <a:lnSpc>
                 <a:spcPts val="1680"/>
               </a:lnSpc>
               <a:buNone/>
             </a:pPr>
             <a:r>
-              <a:rPr lang="en-US" sz="1200" b="1" spc="100" kern="0" dirty="0">
+              <a:rPr lang="en-US" sz="1200" b="1" kern="0" spc="100" dirty="0">
                 <a:solidFill>
                   <a:srgbClr val="6E6E75"/>
                 </a:solidFill>
@@ -12256,14 +13587,14 @@
           </a:bodyPr>
           <a:lstStyle/>
           <a:p>
-            <a:pPr algn="ctr" indent="0" marL="0">
+            <a:pPr marL="0" indent="0" algn="ctr">
               <a:lnSpc>
                 <a:spcPts val="1680"/>
               </a:lnSpc>
               <a:buNone/>
             </a:pPr>
             <a:r>
-              <a:rPr lang="en-US" sz="1200" b="1" spc="100" kern="0" dirty="0">
+              <a:rPr lang="en-US" sz="1200" b="1" kern="0" spc="100" dirty="0">
                 <a:solidFill>
                   <a:srgbClr val="1F5A3A"/>
                 </a:solidFill>
@@ -12327,7 +13658,7 @@
           </a:bodyPr>
           <a:lstStyle/>
           <a:p>
-            <a:pPr algn="l" indent="0" marL="0">
+            <a:pPr marL="0" indent="0" algn="l">
               <a:lnSpc>
                 <a:spcPts val="3360"/>
               </a:lnSpc>
@@ -12350,15 +13681,15 @@
       </p:sp>
       <p:pic>
         <p:nvPicPr>
-          <p:cNvPr id="10" name="Image 0" descr="arrow-right">    </p:cNvPr>
+          <p:cNvPr id="10" name="Image 0" descr="arrow-right"/>
           <p:cNvPicPr>
             <a:picLocks noChangeAspect="1"/>
           </p:cNvPicPr>
           <p:nvPr/>
         </p:nvPicPr>
         <p:blipFill>
-          <a:blip r:embed="rId1"/>
-          <a:srcRect l="0" r="0" t="0" b="0"/>
+          <a:blip r:embed="rId3"/>
+          <a:srcRect/>
           <a:stretch/>
         </p:blipFill>
         <p:spPr>
@@ -12421,7 +13752,7 @@
           </a:bodyPr>
           <a:lstStyle/>
           <a:p>
-            <a:pPr algn="l" indent="0" marL="0">
+            <a:pPr marL="0" indent="0" algn="l">
               <a:lnSpc>
                 <a:spcPts val="3360"/>
               </a:lnSpc>
@@ -12444,15 +13775,15 @@
       </p:sp>
       <p:pic>
         <p:nvPicPr>
-          <p:cNvPr id="13" name="Image 1" descr="arrow-right">    </p:cNvPr>
+          <p:cNvPr id="13" name="Image 1" descr="arrow-right"/>
           <p:cNvPicPr>
             <a:picLocks noChangeAspect="1"/>
           </p:cNvPicPr>
           <p:nvPr/>
         </p:nvPicPr>
         <p:blipFill>
-          <a:blip r:embed="rId2"/>
-          <a:srcRect l="0" r="0" t="0" b="0"/>
+          <a:blip r:embed="rId3"/>
+          <a:srcRect/>
           <a:stretch/>
         </p:blipFill>
         <p:spPr>
@@ -12515,7 +13846,7 @@
           </a:bodyPr>
           <a:lstStyle/>
           <a:p>
-            <a:pPr algn="l" indent="0" marL="0">
+            <a:pPr marL="0" indent="0" algn="l">
               <a:lnSpc>
                 <a:spcPts val="3360"/>
               </a:lnSpc>
@@ -12559,7 +13890,7 @@
           </a:bodyPr>
           <a:lstStyle/>
           <a:p>
-            <a:pPr algn="ctr" indent="0" marL="0">
+            <a:pPr marL="0" indent="0" algn="ctr">
               <a:lnSpc>
                 <a:spcPts val="1960"/>
               </a:lnSpc>
@@ -12603,7 +13934,7 @@
           </a:bodyPr>
           <a:lstStyle/>
           <a:p>
-            <a:pPr algn="ctr" indent="0" marL="0">
+            <a:pPr marL="0" indent="0" algn="ctr">
               <a:lnSpc>
                 <a:spcPts val="1960"/>
               </a:lnSpc>
@@ -12623,7 +13954,7 @@
             <a:endParaRPr lang="en-US" sz="1400" dirty="0"/>
           </a:p>
           <a:p>
-            <a:pPr algn="ctr" indent="0" marL="0">
+            <a:pPr marL="0" indent="0" algn="ctr">
               <a:lnSpc>
                 <a:spcPts val="1960"/>
               </a:lnSpc>
@@ -12667,7 +13998,7 @@
           </a:bodyPr>
           <a:lstStyle/>
           <a:p>
-            <a:pPr algn="ctr" indent="0" marL="0">
+            <a:pPr marL="0" indent="0" algn="ctr">
               <a:lnSpc>
                 <a:spcPts val="1960"/>
               </a:lnSpc>
@@ -12687,7 +14018,7 @@
             <a:endParaRPr lang="en-US" sz="1400" dirty="0"/>
           </a:p>
           <a:p>
-            <a:pPr algn="ctr" indent="0" marL="0">
+            <a:pPr marL="0" indent="0" algn="ctr">
               <a:lnSpc>
                 <a:spcPts val="1960"/>
               </a:lnSpc>
@@ -12753,7 +14084,7 @@
           </a:bodyPr>
           <a:lstStyle/>
           <a:p>
-            <a:pPr algn="ctr" indent="0" marL="0">
+            <a:pPr marL="0" indent="0" algn="ctr">
               <a:lnSpc>
                 <a:spcPts val="2800"/>
               </a:lnSpc>
@@ -12797,7 +14128,7 @@
           </a:bodyPr>
           <a:lstStyle/>
           <a:p>
-            <a:pPr algn="l" indent="0" marL="0">
+            <a:pPr marL="0" indent="0" algn="l">
               <a:lnSpc>
                 <a:spcPts val="1680"/>
               </a:lnSpc>
@@ -12841,14 +14172,14 @@
           </a:bodyPr>
           <a:lstStyle/>
           <a:p>
-            <a:pPr algn="r" indent="0" marL="0">
+            <a:pPr marL="0" indent="0" algn="r">
               <a:lnSpc>
                 <a:spcPts val="1680"/>
               </a:lnSpc>
               <a:buNone/>
             </a:pPr>
             <a:r>
-              <a:rPr lang="en-US" sz="1200" dirty="0">
+              <a:rPr lang="en-US" sz="1200">
                 <a:solidFill>
                   <a:srgbClr val="6E6E75"/>
                 </a:solidFill>
@@ -12856,7 +14187,7 @@
                 <a:ea typeface="Nunito Sans" pitchFamily="34" charset="-122"/>
                 <a:cs typeface="Nunito Sans" pitchFamily="34" charset="-120"/>
               </a:rPr>
-              <a:t>02 / 16</a:t>
+              <a:t>02 / 17</a:t>
             </a:r>
             <a:endParaRPr lang="en-US" sz="1200" dirty="0"/>
           </a:p>
@@ -12878,6 +14209,7 @@
         <a:solidFill>
           <a:srgbClr val="FFF9FA"/>
         </a:solidFill>
+        <a:effectLst/>
       </p:bgPr>
     </p:bg>
     <p:spTree>
@@ -12917,14 +14249,14 @@
           </a:bodyPr>
           <a:lstStyle/>
           <a:p>
-            <a:pPr algn="l" indent="0" marL="0">
+            <a:pPr marL="0" indent="0" algn="l">
               <a:lnSpc>
                 <a:spcPts val="1820"/>
               </a:lnSpc>
               <a:buNone/>
             </a:pPr>
             <a:r>
-              <a:rPr lang="en-US" sz="1300" b="1" spc="150" kern="0" dirty="0">
+              <a:rPr lang="en-US" sz="1300" b="1" kern="0" spc="150" dirty="0">
                 <a:solidFill>
                   <a:srgbClr val="333333"/>
                 </a:solidFill>
@@ -12961,7 +14293,7 @@
           </a:bodyPr>
           <a:lstStyle/>
           <a:p>
-            <a:pPr algn="l" indent="0" marL="0">
+            <a:pPr marL="0" indent="0" algn="l">
               <a:lnSpc>
                 <a:spcPts val="3360"/>
               </a:lnSpc>
@@ -13032,14 +14364,14 @@
           </a:bodyPr>
           <a:lstStyle/>
           <a:p>
-            <a:pPr algn="l" indent="0" marL="0">
+            <a:pPr marL="0" indent="0" algn="l">
               <a:lnSpc>
                 <a:spcPts val="1680"/>
               </a:lnSpc>
               <a:buNone/>
             </a:pPr>
             <a:r>
-              <a:rPr lang="en-US" sz="1200" b="1" spc="100" kern="0" dirty="0">
+              <a:rPr lang="en-US" sz="1200" b="1" kern="0" spc="100" dirty="0">
                 <a:solidFill>
                   <a:srgbClr val="2E526D"/>
                 </a:solidFill>
@@ -13098,7 +14430,7 @@
           </a:bodyPr>
           <a:lstStyle/>
           <a:p>
-            <a:pPr algn="l" indent="0" marL="0">
+            <a:pPr marL="0" indent="0" algn="l">
               <a:lnSpc>
                 <a:spcPts val="1820"/>
               </a:lnSpc>
@@ -13142,7 +14474,7 @@
           </a:bodyPr>
           <a:lstStyle/>
           <a:p>
-            <a:pPr algn="l" indent="0" marL="0">
+            <a:pPr marL="0" indent="0" algn="l">
               <a:lnSpc>
                 <a:spcPts val="1560"/>
               </a:lnSpc>
@@ -13208,7 +14540,7 @@
           </a:bodyPr>
           <a:lstStyle/>
           <a:p>
-            <a:pPr algn="l" indent="0" marL="0">
+            <a:pPr marL="0" indent="0" algn="l">
               <a:lnSpc>
                 <a:spcPts val="1820"/>
               </a:lnSpc>
@@ -13252,7 +14584,7 @@
           </a:bodyPr>
           <a:lstStyle/>
           <a:p>
-            <a:pPr algn="l" indent="0" marL="0">
+            <a:pPr marL="0" indent="0" algn="l">
               <a:lnSpc>
                 <a:spcPts val="1560"/>
               </a:lnSpc>
@@ -13318,7 +14650,7 @@
           </a:bodyPr>
           <a:lstStyle/>
           <a:p>
-            <a:pPr algn="l" indent="0" marL="0">
+            <a:pPr marL="0" indent="0" algn="l">
               <a:lnSpc>
                 <a:spcPts val="1820"/>
               </a:lnSpc>
@@ -13362,7 +14694,7 @@
           </a:bodyPr>
           <a:lstStyle/>
           <a:p>
-            <a:pPr algn="l" indent="0" marL="0">
+            <a:pPr marL="0" indent="0" algn="l">
               <a:lnSpc>
                 <a:spcPts val="1560"/>
               </a:lnSpc>
@@ -13428,7 +14760,7 @@
           </a:bodyPr>
           <a:lstStyle/>
           <a:p>
-            <a:pPr algn="l" indent="0" marL="0">
+            <a:pPr marL="0" indent="0" algn="l">
               <a:lnSpc>
                 <a:spcPts val="1820"/>
               </a:lnSpc>
@@ -13472,7 +14804,7 @@
           </a:bodyPr>
           <a:lstStyle/>
           <a:p>
-            <a:pPr algn="l" indent="0" marL="0">
+            <a:pPr marL="0" indent="0" algn="l">
               <a:lnSpc>
                 <a:spcPts val="1560"/>
               </a:lnSpc>
@@ -13516,7 +14848,7 @@
           </a:bodyPr>
           <a:lstStyle/>
           <a:p>
-            <a:pPr algn="l" indent="0" marL="0">
+            <a:pPr marL="0" indent="0" algn="l">
               <a:lnSpc>
                 <a:spcPts val="1680"/>
               </a:lnSpc>
@@ -13560,14 +14892,14 @@
           </a:bodyPr>
           <a:lstStyle/>
           <a:p>
-            <a:pPr algn="l" indent="0" marL="0">
+            <a:pPr marL="0" indent="0" algn="l">
               <a:lnSpc>
                 <a:spcPts val="1680"/>
               </a:lnSpc>
               <a:buNone/>
             </a:pPr>
             <a:r>
-              <a:rPr lang="en-US" sz="1200" b="1" spc="100" kern="0" dirty="0">
+              <a:rPr lang="en-US" sz="1200" b="1" kern="0" spc="100" dirty="0">
                 <a:solidFill>
                   <a:srgbClr val="1F5A3A"/>
                 </a:solidFill>
@@ -13653,7 +14985,7 @@
           </a:bodyPr>
           <a:lstStyle/>
           <a:p>
-            <a:pPr algn="l" indent="0" marL="0">
+            <a:pPr marL="0" indent="0" algn="l">
               <a:lnSpc>
                 <a:spcPts val="1680"/>
               </a:lnSpc>
@@ -13697,7 +15029,7 @@
           </a:bodyPr>
           <a:lstStyle/>
           <a:p>
-            <a:pPr algn="l" indent="0" marL="0">
+            <a:pPr marL="0" indent="0" algn="l">
               <a:lnSpc>
                 <a:spcPts val="1820"/>
               </a:lnSpc>
@@ -13801,7 +15133,7 @@
           </a:bodyPr>
           <a:lstStyle/>
           <a:p>
-            <a:pPr algn="l" indent="0" marL="0">
+            <a:pPr marL="0" indent="0" algn="l">
               <a:lnSpc>
                 <a:spcPts val="1680"/>
               </a:lnSpc>
@@ -13845,7 +15177,7 @@
           </a:bodyPr>
           <a:lstStyle/>
           <a:p>
-            <a:pPr algn="l" indent="0" marL="0">
+            <a:pPr marL="0" indent="0" algn="l">
               <a:lnSpc>
                 <a:spcPts val="1820"/>
               </a:lnSpc>
@@ -13949,7 +15281,7 @@
           </a:bodyPr>
           <a:lstStyle/>
           <a:p>
-            <a:pPr algn="l" indent="0" marL="0">
+            <a:pPr marL="0" indent="0" algn="l">
               <a:lnSpc>
                 <a:spcPts val="1680"/>
               </a:lnSpc>
@@ -13993,7 +15325,7 @@
           </a:bodyPr>
           <a:lstStyle/>
           <a:p>
-            <a:pPr algn="l" indent="0" marL="0">
+            <a:pPr marL="0" indent="0" algn="l">
               <a:lnSpc>
                 <a:spcPts val="1820"/>
               </a:lnSpc>
@@ -14097,7 +15429,7 @@
           </a:bodyPr>
           <a:lstStyle/>
           <a:p>
-            <a:pPr algn="l" indent="0" marL="0">
+            <a:pPr marL="0" indent="0" algn="l">
               <a:lnSpc>
                 <a:spcPts val="1680"/>
               </a:lnSpc>
@@ -14141,7 +15473,7 @@
           </a:bodyPr>
           <a:lstStyle/>
           <a:p>
-            <a:pPr algn="l" indent="0" marL="0">
+            <a:pPr marL="0" indent="0" algn="l">
               <a:lnSpc>
                 <a:spcPts val="1820"/>
               </a:lnSpc>
@@ -14245,7 +15577,7 @@
           </a:bodyPr>
           <a:lstStyle/>
           <a:p>
-            <a:pPr algn="l" indent="0" marL="0">
+            <a:pPr marL="0" indent="0" algn="l">
               <a:lnSpc>
                 <a:spcPts val="1680"/>
               </a:lnSpc>
@@ -14289,7 +15621,7 @@
           </a:bodyPr>
           <a:lstStyle/>
           <a:p>
-            <a:pPr algn="l" indent="0" marL="0">
+            <a:pPr marL="0" indent="0" algn="l">
               <a:lnSpc>
                 <a:spcPts val="1820"/>
               </a:lnSpc>
@@ -14393,7 +15725,7 @@
           </a:bodyPr>
           <a:lstStyle/>
           <a:p>
-            <a:pPr algn="l" indent="0" marL="0">
+            <a:pPr marL="0" indent="0" algn="l">
               <a:lnSpc>
                 <a:spcPts val="1680"/>
               </a:lnSpc>
@@ -14437,7 +15769,7 @@
           </a:bodyPr>
           <a:lstStyle/>
           <a:p>
-            <a:pPr algn="l" indent="0" marL="0">
+            <a:pPr marL="0" indent="0" algn="l">
               <a:lnSpc>
                 <a:spcPts val="1820"/>
               </a:lnSpc>
@@ -14493,15 +15825,15 @@
       </p:sp>
       <p:pic>
         <p:nvPicPr>
-          <p:cNvPr id="45" name="Image 0" descr="Lock">    </p:cNvPr>
+          <p:cNvPr id="45" name="Image 0" descr="Lock"/>
           <p:cNvPicPr>
             <a:picLocks noChangeAspect="1"/>
           </p:cNvPicPr>
           <p:nvPr/>
         </p:nvPicPr>
         <p:blipFill>
-          <a:blip r:embed="rId1"/>
-          <a:srcRect l="0" r="0" t="0" b="0"/>
+          <a:blip r:embed="rId3"/>
+          <a:srcRect/>
           <a:stretch/>
         </p:blipFill>
         <p:spPr>
@@ -14537,7 +15869,7 @@
           </a:bodyPr>
           <a:lstStyle/>
           <a:p>
-            <a:pPr algn="l" indent="0" marL="0">
+            <a:pPr marL="0" indent="0" algn="l">
               <a:lnSpc>
                 <a:spcPts val="1960"/>
               </a:lnSpc>
@@ -14581,7 +15913,7 @@
           </a:bodyPr>
           <a:lstStyle/>
           <a:p>
-            <a:pPr algn="l" indent="0" marL="0">
+            <a:pPr marL="0" indent="0" algn="l">
               <a:lnSpc>
                 <a:spcPts val="1680"/>
               </a:lnSpc>
@@ -14625,14 +15957,14 @@
           </a:bodyPr>
           <a:lstStyle/>
           <a:p>
-            <a:pPr algn="r" indent="0" marL="0">
+            <a:pPr marL="0" indent="0" algn="r">
               <a:lnSpc>
                 <a:spcPts val="1680"/>
               </a:lnSpc>
               <a:buNone/>
             </a:pPr>
             <a:r>
-              <a:rPr lang="en-US" sz="1200" dirty="0">
+              <a:rPr lang="en-US" sz="1200">
                 <a:solidFill>
                   <a:srgbClr val="6E6E75"/>
                 </a:solidFill>
@@ -14640,7 +15972,7 @@
                 <a:ea typeface="Nunito Sans" pitchFamily="34" charset="-122"/>
                 <a:cs typeface="Nunito Sans" pitchFamily="34" charset="-120"/>
               </a:rPr>
-              <a:t>03 / 16</a:t>
+              <a:t>03 / 17</a:t>
             </a:r>
             <a:endParaRPr lang="en-US" sz="1200" dirty="0"/>
           </a:p>
@@ -14662,6 +15994,7 @@
         <a:solidFill>
           <a:srgbClr val="FFF9FA"/>
         </a:solidFill>
+        <a:effectLst/>
       </p:bgPr>
     </p:bg>
     <p:spTree>
@@ -14701,14 +16034,14 @@
           </a:bodyPr>
           <a:lstStyle/>
           <a:p>
-            <a:pPr algn="l" indent="0" marL="0">
+            <a:pPr marL="0" indent="0" algn="l">
               <a:lnSpc>
                 <a:spcPts val="1820"/>
               </a:lnSpc>
               <a:buNone/>
             </a:pPr>
             <a:r>
-              <a:rPr lang="en-US" sz="1300" b="1" spc="150" kern="0" dirty="0">
+              <a:rPr lang="en-US" sz="1300" b="1" kern="0" spc="150" dirty="0">
                 <a:solidFill>
                   <a:srgbClr val="333333"/>
                 </a:solidFill>
@@ -14745,7 +16078,7 @@
           </a:bodyPr>
           <a:lstStyle/>
           <a:p>
-            <a:pPr algn="l" indent="0" marL="0">
+            <a:pPr marL="0" indent="0" algn="l">
               <a:lnSpc>
                 <a:spcPts val="3360"/>
               </a:lnSpc>
@@ -14812,14 +16145,14 @@
           </a:bodyPr>
           <a:lstStyle/>
           <a:p>
-            <a:pPr algn="l" indent="0" marL="0">
+            <a:pPr marL="0" indent="0" algn="l">
               <a:lnSpc>
                 <a:spcPts val="1680"/>
               </a:lnSpc>
               <a:buNone/>
             </a:pPr>
             <a:r>
-              <a:rPr lang="en-US" sz="1200" b="1" spc="100" kern="0" dirty="0">
+              <a:rPr lang="en-US" sz="1200" b="1" kern="0" spc="100" dirty="0">
                 <a:solidFill>
                   <a:srgbClr val="6E6E75"/>
                 </a:solidFill>
@@ -14856,14 +16189,14 @@
           </a:bodyPr>
           <a:lstStyle/>
           <a:p>
-            <a:pPr algn="l" indent="0" marL="0">
+            <a:pPr marL="0" indent="0" algn="l">
               <a:lnSpc>
                 <a:spcPts val="1680"/>
               </a:lnSpc>
               <a:buNone/>
             </a:pPr>
             <a:r>
-              <a:rPr lang="en-US" sz="1200" b="1" spc="100" kern="0" dirty="0">
+              <a:rPr lang="en-US" sz="1200" b="1" kern="0" spc="100" dirty="0">
                 <a:solidFill>
                   <a:srgbClr val="6E6E75"/>
                 </a:solidFill>
@@ -14923,7 +16256,7 @@
           </a:bodyPr>
           <a:lstStyle/>
           <a:p>
-            <a:pPr algn="l" indent="0" marL="0">
+            <a:pPr marL="0" indent="0" algn="l">
               <a:lnSpc>
                 <a:spcPts val="2520"/>
               </a:lnSpc>
@@ -14967,7 +16300,7 @@
           </a:bodyPr>
           <a:lstStyle/>
           <a:p>
-            <a:pPr algn="l" indent="0" marL="0">
+            <a:pPr marL="0" indent="0" algn="l">
               <a:lnSpc>
                 <a:spcPts val="1680"/>
               </a:lnSpc>
@@ -14990,15 +16323,15 @@
       </p:sp>
       <p:pic>
         <p:nvPicPr>
-          <p:cNvPr id="10" name="Image 0" descr="arrow-right">    </p:cNvPr>
+          <p:cNvPr id="10" name="Image 0" descr="arrow-right"/>
           <p:cNvPicPr>
             <a:picLocks noChangeAspect="1"/>
           </p:cNvPicPr>
           <p:nvPr/>
         </p:nvPicPr>
         <p:blipFill>
-          <a:blip r:embed="rId1"/>
-          <a:srcRect l="0" r="0" t="0" b="0"/>
+          <a:blip r:embed="rId3"/>
+          <a:srcRect/>
           <a:stretch/>
         </p:blipFill>
         <p:spPr>
@@ -15034,7 +16367,7 @@
           </a:bodyPr>
           <a:lstStyle/>
           <a:p>
-            <a:pPr algn="l" indent="0" marL="0">
+            <a:pPr marL="0" indent="0" algn="l">
               <a:lnSpc>
                 <a:spcPts val="2800"/>
               </a:lnSpc>
@@ -15101,7 +16434,7 @@
           </a:bodyPr>
           <a:lstStyle/>
           <a:p>
-            <a:pPr algn="l" indent="0" marL="0">
+            <a:pPr marL="0" indent="0" algn="l">
               <a:lnSpc>
                 <a:spcPts val="2520"/>
               </a:lnSpc>
@@ -15145,7 +16478,7 @@
           </a:bodyPr>
           <a:lstStyle/>
           <a:p>
-            <a:pPr algn="l" indent="0" marL="0">
+            <a:pPr marL="0" indent="0" algn="l">
               <a:lnSpc>
                 <a:spcPts val="1680"/>
               </a:lnSpc>
@@ -15168,15 +16501,15 @@
       </p:sp>
       <p:pic>
         <p:nvPicPr>
-          <p:cNvPr id="15" name="Image 1" descr="arrow-right">    </p:cNvPr>
+          <p:cNvPr id="15" name="Image 1" descr="arrow-right"/>
           <p:cNvPicPr>
             <a:picLocks noChangeAspect="1"/>
           </p:cNvPicPr>
           <p:nvPr/>
         </p:nvPicPr>
         <p:blipFill>
-          <a:blip r:embed="rId2"/>
-          <a:srcRect l="0" r="0" t="0" b="0"/>
+          <a:blip r:embed="rId3"/>
+          <a:srcRect/>
           <a:stretch/>
         </p:blipFill>
         <p:spPr>
@@ -15212,7 +16545,7 @@
           </a:bodyPr>
           <a:lstStyle/>
           <a:p>
-            <a:pPr algn="l" indent="0" marL="0">
+            <a:pPr marL="0" indent="0" algn="l">
               <a:lnSpc>
                 <a:spcPts val="2800"/>
               </a:lnSpc>
@@ -15279,7 +16612,7 @@
           </a:bodyPr>
           <a:lstStyle/>
           <a:p>
-            <a:pPr algn="l" indent="0" marL="0">
+            <a:pPr marL="0" indent="0" algn="l">
               <a:lnSpc>
                 <a:spcPts val="2520"/>
               </a:lnSpc>
@@ -15323,7 +16656,7 @@
           </a:bodyPr>
           <a:lstStyle/>
           <a:p>
-            <a:pPr algn="l" indent="0" marL="0">
+            <a:pPr marL="0" indent="0" algn="l">
               <a:lnSpc>
                 <a:spcPts val="1680"/>
               </a:lnSpc>
@@ -15346,7 +16679,7 @@
       </p:sp>
       <p:pic>
         <p:nvPicPr>
-          <p:cNvPr id="20" name="Image 2" descr="arrow-right">    </p:cNvPr>
+          <p:cNvPr id="20" name="Image 2" descr="arrow-right"/>
           <p:cNvPicPr>
             <a:picLocks noChangeAspect="1"/>
           </p:cNvPicPr>
@@ -15354,7 +16687,7 @@
         </p:nvPicPr>
         <p:blipFill>
           <a:blip r:embed="rId3"/>
-          <a:srcRect l="0" r="0" t="0" b="0"/>
+          <a:srcRect/>
           <a:stretch/>
         </p:blipFill>
         <p:spPr>
@@ -15390,7 +16723,7 @@
           </a:bodyPr>
           <a:lstStyle/>
           <a:p>
-            <a:pPr algn="l" indent="0" marL="0">
+            <a:pPr marL="0" indent="0" algn="l">
               <a:lnSpc>
                 <a:spcPts val="2800"/>
               </a:lnSpc>
@@ -15434,7 +16767,7 @@
           </a:bodyPr>
           <a:lstStyle/>
           <a:p>
-            <a:pPr algn="ctr" indent="0" marL="0">
+            <a:pPr marL="0" indent="0" algn="ctr">
               <a:lnSpc>
                 <a:spcPts val="2223"/>
               </a:lnSpc>
@@ -15500,7 +16833,7 @@
           </a:bodyPr>
           <a:lstStyle/>
           <a:p>
-            <a:pPr algn="l" indent="0" marL="0">
+            <a:pPr marL="0" indent="0" algn="l">
               <a:lnSpc>
                 <a:spcPts val="1421"/>
               </a:lnSpc>
@@ -15529,22 +16862,22 @@
         </p:nvSpPr>
         <p:spPr>
           <a:xfrm>
-            <a:off x="4987131" y="5689203"/>
-            <a:ext cx="2284167" cy="178197"/>
-          </a:xfrm>
-          <a:prstGeom prst="rect">
-            <a:avLst/>
-          </a:prstGeom>
-          <a:noFill/>
-          <a:ln/>
-        </p:spPr>
-        <p:txBody>
-          <a:bodyPr wrap="square" lIns="0" tIns="0" rIns="0" bIns="0" rtlCol="0" anchor="t">
-            <a:normAutofit/>
-          </a:bodyPr>
-          <a:lstStyle/>
-          <a:p>
-            <a:pPr algn="l" indent="0" marL="0">
+            <a:off x="4097214" y="5689203"/>
+            <a:ext cx="4064000" cy="178197"/>
+          </a:xfrm>
+          <a:prstGeom prst="rect">
+            <a:avLst/>
+          </a:prstGeom>
+          <a:noFill/>
+          <a:ln/>
+        </p:spPr>
+        <p:txBody>
+          <a:bodyPr wrap="square" lIns="0" tIns="0" rIns="0" bIns="0" rtlCol="0" anchor="t">
+            <a:normAutofit/>
+          </a:bodyPr>
+          <a:lstStyle/>
+          <a:p>
+            <a:pPr marL="0" indent="0" algn="ctr">
               <a:lnSpc>
                 <a:spcPts val="1223"/>
               </a:lnSpc>
@@ -15559,7 +16892,18 @@
                 <a:ea typeface="Nunito Sans" pitchFamily="34" charset="-122"/>
                 <a:cs typeface="Nunito Sans" pitchFamily="34" charset="-120"/>
               </a:rPr>
-              <a:t>Storybook reference: Docs / CSS architecture</a:t>
+              <a:t>Storybook reference</a:t>
+            </a:r>
+            <a:r>
+              <a:rPr lang="en-US" sz="874">
+                <a:solidFill>
+                  <a:srgbClr val="6E6E75"/>
+                </a:solidFill>
+                <a:latin typeface="Nunito Sans" pitchFamily="34" charset="0"/>
+                <a:ea typeface="Nunito Sans" pitchFamily="34" charset="-122"/>
+                <a:cs typeface="Nunito Sans" pitchFamily="34" charset="-120"/>
+              </a:rPr>
+              <a:t>: Maintainers / CSS architecture</a:t>
             </a:r>
             <a:endParaRPr lang="en-US" sz="874" dirty="0"/>
           </a:p>
@@ -15588,7 +16932,7 @@
           </a:bodyPr>
           <a:lstStyle/>
           <a:p>
-            <a:pPr algn="l" indent="0" marL="0">
+            <a:pPr marL="0" indent="0" algn="l">
               <a:lnSpc>
                 <a:spcPts val="1680"/>
               </a:lnSpc>
@@ -15632,14 +16976,14 @@
           </a:bodyPr>
           <a:lstStyle/>
           <a:p>
-            <a:pPr algn="r" indent="0" marL="0">
+            <a:pPr marL="0" indent="0" algn="r">
               <a:lnSpc>
                 <a:spcPts val="1680"/>
               </a:lnSpc>
               <a:buNone/>
             </a:pPr>
             <a:r>
-              <a:rPr lang="en-US" sz="1200" dirty="0">
+              <a:rPr lang="en-US" sz="1200">
                 <a:solidFill>
                   <a:srgbClr val="6E6E75"/>
                 </a:solidFill>
@@ -15647,7 +16991,7 @@
                 <a:ea typeface="Nunito Sans" pitchFamily="34" charset="-122"/>
                 <a:cs typeface="Nunito Sans" pitchFamily="34" charset="-120"/>
               </a:rPr>
-              <a:t>04 / 16</a:t>
+              <a:t>04 / 17</a:t>
             </a:r>
             <a:endParaRPr lang="en-US" sz="1200" dirty="0"/>
           </a:p>
@@ -15669,6 +17013,7 @@
         <a:solidFill>
           <a:srgbClr val="FFF9FA"/>
         </a:solidFill>
+        <a:effectLst/>
       </p:bgPr>
     </p:bg>
     <p:spTree>
@@ -15708,14 +17053,14 @@
           </a:bodyPr>
           <a:lstStyle/>
           <a:p>
-            <a:pPr algn="l" indent="0" marL="0">
+            <a:pPr marL="0" indent="0" algn="l">
               <a:lnSpc>
                 <a:spcPts val="1820"/>
               </a:lnSpc>
               <a:buNone/>
             </a:pPr>
             <a:r>
-              <a:rPr lang="en-US" sz="1300" b="1" spc="150" kern="0" dirty="0">
+              <a:rPr lang="en-US" sz="1300" b="1" kern="0" spc="150" dirty="0">
                 <a:solidFill>
                   <a:srgbClr val="333333"/>
                 </a:solidFill>
@@ -15752,7 +17097,7 @@
           </a:bodyPr>
           <a:lstStyle/>
           <a:p>
-            <a:pPr algn="l" indent="0" marL="0">
+            <a:pPr marL="0" indent="0" algn="l">
               <a:lnSpc>
                 <a:spcPts val="3360"/>
               </a:lnSpc>
@@ -15796,9 +17141,27 @@
             <a:tbl>
               <a:tblPr/>
               <a:tblGrid>
-                <a:gridCol w="2849499"/>
-                <a:gridCol w="4960239"/>
-                <a:gridCol w="2743962"/>
+                <a:gridCol w="2849499">
+                  <a:extLst>
+                    <a:ext uri="{9D8B030D-6E8A-4147-A177-3AD203B41FA5}">
+                      <a16:colId xmlns:a16="http://schemas.microsoft.com/office/drawing/2014/main" val="20000"/>
+                    </a:ext>
+                  </a:extLst>
+                </a:gridCol>
+                <a:gridCol w="4960239">
+                  <a:extLst>
+                    <a:ext uri="{9D8B030D-6E8A-4147-A177-3AD203B41FA5}">
+                      <a16:colId xmlns:a16="http://schemas.microsoft.com/office/drawing/2014/main" val="20001"/>
+                    </a:ext>
+                  </a:extLst>
+                </a:gridCol>
+                <a:gridCol w="2743962">
+                  <a:extLst>
+                    <a:ext uri="{9D8B030D-6E8A-4147-A177-3AD203B41FA5}">
+                      <a16:colId xmlns:a16="http://schemas.microsoft.com/office/drawing/2014/main" val="20002"/>
+                    </a:ext>
+                  </a:extLst>
+                </a:gridCol>
               </a:tblGrid>
               <a:tr h="332581">
                 <a:tc>
@@ -15806,7 +17169,7 @@
                     <a:bodyPr/>
                     <a:lstStyle/>
                     <a:p>
-                      <a:pPr indent="0" marL="0">
+                      <a:pPr marL="0" indent="0">
                         <a:lnSpc>
                           <a:spcPts val="1680"/>
                         </a:lnSpc>
@@ -15830,7 +17193,7 @@
                       </a:endParaRPr>
                     </a:p>
                   </a:txBody>
-                  <a:tcPr marL="53340" marR="53340" marT="53340" marB="53340" anchor="t">
+                  <a:tcPr marL="53340" marR="53340" marT="53340" marB="53340">
                     <a:lnL w="12700" cap="flat" cmpd="sng" algn="ctr">
                       <a:solidFill>
                         <a:srgbClr val="CBC7C7"/>
@@ -15877,7 +17240,7 @@
                     <a:bodyPr/>
                     <a:lstStyle/>
                     <a:p>
-                      <a:pPr indent="0" marL="0">
+                      <a:pPr marL="0" indent="0">
                         <a:lnSpc>
                           <a:spcPts val="1680"/>
                         </a:lnSpc>
@@ -15901,7 +17264,7 @@
                       </a:endParaRPr>
                     </a:p>
                   </a:txBody>
-                  <a:tcPr marL="53340" marR="53340" marT="53340" marB="53340" anchor="t">
+                  <a:tcPr marL="53340" marR="53340" marT="53340" marB="53340">
                     <a:lnL w="12700" cap="flat" cmpd="sng" algn="ctr">
                       <a:solidFill>
                         <a:srgbClr val="CBBDC0"/>
@@ -15948,7 +17311,7 @@
                     <a:bodyPr/>
                     <a:lstStyle/>
                     <a:p>
-                      <a:pPr indent="0" marL="0">
+                      <a:pPr marL="0" indent="0">
                         <a:lnSpc>
                           <a:spcPts val="1680"/>
                         </a:lnSpc>
@@ -15972,7 +17335,7 @@
                       </a:endParaRPr>
                     </a:p>
                   </a:txBody>
-                  <a:tcPr marL="53340" marR="53340" marT="53340" marB="53340" anchor="t">
+                  <a:tcPr marL="53340" marR="53340" marT="53340" marB="53340">
                     <a:lnL w="12700" cap="flat" cmpd="sng" algn="ctr">
                       <a:solidFill>
                         <a:srgbClr val="CBBDC0"/>
@@ -16014,6 +17377,11 @@
                     </a:solidFill>
                   </a:tcPr>
                 </a:tc>
+                <a:extLst>
+                  <a:ext uri="{0D108BD9-81ED-4DB2-BD59-A6C34878D82A}">
+                    <a16:rowId xmlns:a16="http://schemas.microsoft.com/office/drawing/2014/main" val="10000"/>
+                  </a:ext>
+                </a:extLst>
               </a:tr>
               <a:tr h="332581">
                 <a:tc>
@@ -16021,7 +17389,7 @@
                     <a:bodyPr/>
                     <a:lstStyle/>
                     <a:p>
-                      <a:pPr indent="0" marL="0">
+                      <a:pPr marL="0" indent="0">
                         <a:lnSpc>
                           <a:spcPts val="1680"/>
                         </a:lnSpc>
@@ -16045,7 +17413,7 @@
                       </a:endParaRPr>
                     </a:p>
                   </a:txBody>
-                  <a:tcPr marL="53340" marR="53340" marT="53340" marB="53340" anchor="t">
+                  <a:tcPr marL="53340" marR="53340" marT="53340" marB="53340">
                     <a:lnL w="12700" cap="flat" cmpd="sng" algn="ctr">
                       <a:solidFill>
                         <a:srgbClr val="CBC7C7"/>
@@ -16089,7 +17457,7 @@
                     <a:bodyPr/>
                     <a:lstStyle/>
                     <a:p>
-                      <a:pPr indent="0" marL="0">
+                      <a:pPr marL="0" indent="0">
                         <a:lnSpc>
                           <a:spcPts val="1680"/>
                         </a:lnSpc>
@@ -16113,7 +17481,7 @@
                       </a:endParaRPr>
                     </a:p>
                   </a:txBody>
-                  <a:tcPr marL="53340" marR="53340" marT="53340" marB="53340" anchor="t">
+                  <a:tcPr marL="53340" marR="53340" marT="53340" marB="53340">
                     <a:lnL w="12700" cap="flat" cmpd="sng" algn="ctr">
                       <a:solidFill>
                         <a:srgbClr val="CBC7C7"/>
@@ -16157,7 +17525,7 @@
                     <a:bodyPr/>
                     <a:lstStyle/>
                     <a:p>
-                      <a:pPr indent="0" marL="0">
+                      <a:pPr marL="0" indent="0">
                         <a:lnSpc>
                           <a:spcPts val="1680"/>
                         </a:lnSpc>
@@ -16181,7 +17549,7 @@
                       </a:endParaRPr>
                     </a:p>
                   </a:txBody>
-                  <a:tcPr marL="53340" marR="53340" marT="53340" marB="53340" anchor="t">
+                  <a:tcPr marL="53340" marR="53340" marT="53340" marB="53340">
                     <a:lnL w="12700" cap="flat" cmpd="sng" algn="ctr">
                       <a:solidFill>
                         <a:srgbClr val="CBC7C7"/>
@@ -16220,6 +17588,11 @@
                     </a:lnB>
                   </a:tcPr>
                 </a:tc>
+                <a:extLst>
+                  <a:ext uri="{0D108BD9-81ED-4DB2-BD59-A6C34878D82A}">
+                    <a16:rowId xmlns:a16="http://schemas.microsoft.com/office/drawing/2014/main" val="10001"/>
+                  </a:ext>
+                </a:extLst>
               </a:tr>
               <a:tr h="332581">
                 <a:tc>
@@ -16227,7 +17600,7 @@
                     <a:bodyPr/>
                     <a:lstStyle/>
                     <a:p>
-                      <a:pPr indent="0" marL="0">
+                      <a:pPr marL="0" indent="0">
                         <a:lnSpc>
                           <a:spcPts val="1680"/>
                         </a:lnSpc>
@@ -16251,7 +17624,7 @@
                       </a:endParaRPr>
                     </a:p>
                   </a:txBody>
-                  <a:tcPr marL="53340" marR="53340" marT="53340" marB="53340" anchor="t">
+                  <a:tcPr marL="53340" marR="53340" marT="53340" marB="53340">
                     <a:lnL w="12700" cap="flat" cmpd="sng" algn="ctr">
                       <a:solidFill>
                         <a:srgbClr val="CBC7C7"/>
@@ -16298,7 +17671,7 @@
                     <a:bodyPr/>
                     <a:lstStyle/>
                     <a:p>
-                      <a:pPr indent="0" marL="0">
+                      <a:pPr marL="0" indent="0">
                         <a:lnSpc>
                           <a:spcPts val="1680"/>
                         </a:lnSpc>
@@ -16322,7 +17695,7 @@
                       </a:endParaRPr>
                     </a:p>
                   </a:txBody>
-                  <a:tcPr marL="53340" marR="53340" marT="53340" marB="53340" anchor="t">
+                  <a:tcPr marL="53340" marR="53340" marT="53340" marB="53340">
                     <a:lnL w="12700" cap="flat" cmpd="sng" algn="ctr">
                       <a:solidFill>
                         <a:srgbClr val="CBCBCB"/>
@@ -16369,7 +17742,7 @@
                     <a:bodyPr/>
                     <a:lstStyle/>
                     <a:p>
-                      <a:pPr indent="0" marL="0">
+                      <a:pPr marL="0" indent="0">
                         <a:lnSpc>
                           <a:spcPts val="1680"/>
                         </a:lnSpc>
@@ -16393,7 +17766,7 @@
                       </a:endParaRPr>
                     </a:p>
                   </a:txBody>
-                  <a:tcPr marL="53340" marR="53340" marT="53340" marB="53340" anchor="t">
+                  <a:tcPr marL="53340" marR="53340" marT="53340" marB="53340">
                     <a:lnL w="12700" cap="flat" cmpd="sng" algn="ctr">
                       <a:solidFill>
                         <a:srgbClr val="CBCBCB"/>
@@ -16435,6 +17808,11 @@
                     </a:solidFill>
                   </a:tcPr>
                 </a:tc>
+                <a:extLst>
+                  <a:ext uri="{0D108BD9-81ED-4DB2-BD59-A6C34878D82A}">
+                    <a16:rowId xmlns:a16="http://schemas.microsoft.com/office/drawing/2014/main" val="10002"/>
+                  </a:ext>
+                </a:extLst>
               </a:tr>
               <a:tr h="332581">
                 <a:tc>
@@ -16442,7 +17820,7 @@
                     <a:bodyPr/>
                     <a:lstStyle/>
                     <a:p>
-                      <a:pPr indent="0" marL="0">
+                      <a:pPr marL="0" indent="0">
                         <a:lnSpc>
                           <a:spcPts val="1680"/>
                         </a:lnSpc>
@@ -16466,7 +17844,7 @@
                       </a:endParaRPr>
                     </a:p>
                   </a:txBody>
-                  <a:tcPr marL="53340" marR="53340" marT="53340" marB="53340" anchor="t">
+                  <a:tcPr marL="53340" marR="53340" marT="53340" marB="53340">
                     <a:lnL w="12700" cap="flat" cmpd="sng" algn="ctr">
                       <a:solidFill>
                         <a:srgbClr val="CBC7C7"/>
@@ -16510,7 +17888,7 @@
                     <a:bodyPr/>
                     <a:lstStyle/>
                     <a:p>
-                      <a:pPr indent="0" marL="0">
+                      <a:pPr marL="0" indent="0">
                         <a:lnSpc>
                           <a:spcPts val="1680"/>
                         </a:lnSpc>
@@ -16534,7 +17912,7 @@
                       </a:endParaRPr>
                     </a:p>
                   </a:txBody>
-                  <a:tcPr marL="53340" marR="53340" marT="53340" marB="53340" anchor="t">
+                  <a:tcPr marL="53340" marR="53340" marT="53340" marB="53340">
                     <a:lnL w="12700" cap="flat" cmpd="sng" algn="ctr">
                       <a:solidFill>
                         <a:srgbClr val="CBC7C7"/>
@@ -16578,7 +17956,7 @@
                     <a:bodyPr/>
                     <a:lstStyle/>
                     <a:p>
-                      <a:pPr indent="0" marL="0">
+                      <a:pPr marL="0" indent="0">
                         <a:lnSpc>
                           <a:spcPts val="1680"/>
                         </a:lnSpc>
@@ -16602,7 +17980,7 @@
                       </a:endParaRPr>
                     </a:p>
                   </a:txBody>
-                  <a:tcPr marL="53340" marR="53340" marT="53340" marB="53340" anchor="t">
+                  <a:tcPr marL="53340" marR="53340" marT="53340" marB="53340">
                     <a:lnL w="12700" cap="flat" cmpd="sng" algn="ctr">
                       <a:solidFill>
                         <a:srgbClr val="CBC7C7"/>
@@ -16641,6 +18019,11 @@
                     </a:lnB>
                   </a:tcPr>
                 </a:tc>
+                <a:extLst>
+                  <a:ext uri="{0D108BD9-81ED-4DB2-BD59-A6C34878D82A}">
+                    <a16:rowId xmlns:a16="http://schemas.microsoft.com/office/drawing/2014/main" val="10003"/>
+                  </a:ext>
+                </a:extLst>
               </a:tr>
               <a:tr h="332581">
                 <a:tc>
@@ -16648,7 +18031,7 @@
                     <a:bodyPr/>
                     <a:lstStyle/>
                     <a:p>
-                      <a:pPr indent="0" marL="0">
+                      <a:pPr marL="0" indent="0">
                         <a:lnSpc>
                           <a:spcPts val="1680"/>
                         </a:lnSpc>
@@ -16672,7 +18055,7 @@
                       </a:endParaRPr>
                     </a:p>
                   </a:txBody>
-                  <a:tcPr marL="53340" marR="53340" marT="53340" marB="53340" anchor="t">
+                  <a:tcPr marL="53340" marR="53340" marT="53340" marB="53340">
                     <a:lnL w="12700" cap="flat" cmpd="sng" algn="ctr">
                       <a:solidFill>
                         <a:srgbClr val="CBC7C7"/>
@@ -16719,7 +18102,7 @@
                     <a:bodyPr/>
                     <a:lstStyle/>
                     <a:p>
-                      <a:pPr indent="0" marL="0">
+                      <a:pPr marL="0" indent="0">
                         <a:lnSpc>
                           <a:spcPts val="1680"/>
                         </a:lnSpc>
@@ -16743,7 +18126,7 @@
                       </a:endParaRPr>
                     </a:p>
                   </a:txBody>
-                  <a:tcPr marL="53340" marR="53340" marT="53340" marB="53340" anchor="t">
+                  <a:tcPr marL="53340" marR="53340" marT="53340" marB="53340">
                     <a:lnL w="12700" cap="flat" cmpd="sng" algn="ctr">
                       <a:solidFill>
                         <a:srgbClr val="CBCBCB"/>
@@ -16790,7 +18173,7 @@
                     <a:bodyPr/>
                     <a:lstStyle/>
                     <a:p>
-                      <a:pPr indent="0" marL="0">
+                      <a:pPr marL="0" indent="0">
                         <a:lnSpc>
                           <a:spcPts val="1680"/>
                         </a:lnSpc>
@@ -16814,7 +18197,7 @@
                       </a:endParaRPr>
                     </a:p>
                   </a:txBody>
-                  <a:tcPr marL="53340" marR="53340" marT="53340" marB="53340" anchor="t">
+                  <a:tcPr marL="53340" marR="53340" marT="53340" marB="53340">
                     <a:lnL w="12700" cap="flat" cmpd="sng" algn="ctr">
                       <a:solidFill>
                         <a:srgbClr val="CBCBCB"/>
@@ -16856,6 +18239,11 @@
                     </a:solidFill>
                   </a:tcPr>
                 </a:tc>
+                <a:extLst>
+                  <a:ext uri="{0D108BD9-81ED-4DB2-BD59-A6C34878D82A}">
+                    <a16:rowId xmlns:a16="http://schemas.microsoft.com/office/drawing/2014/main" val="10004"/>
+                  </a:ext>
+                </a:extLst>
               </a:tr>
               <a:tr h="332581">
                 <a:tc>
@@ -16863,7 +18251,7 @@
                     <a:bodyPr/>
                     <a:lstStyle/>
                     <a:p>
-                      <a:pPr indent="0" marL="0">
+                      <a:pPr marL="0" indent="0">
                         <a:lnSpc>
                           <a:spcPts val="1680"/>
                         </a:lnSpc>
@@ -16887,7 +18275,7 @@
                       </a:endParaRPr>
                     </a:p>
                   </a:txBody>
-                  <a:tcPr marL="53340" marR="53340" marT="53340" marB="53340" anchor="t">
+                  <a:tcPr marL="53340" marR="53340" marT="53340" marB="53340">
                     <a:lnL w="12700" cap="flat" cmpd="sng" algn="ctr">
                       <a:solidFill>
                         <a:srgbClr val="CBC7C7"/>
@@ -16931,7 +18319,7 @@
                     <a:bodyPr/>
                     <a:lstStyle/>
                     <a:p>
-                      <a:pPr indent="0" marL="0">
+                      <a:pPr marL="0" indent="0">
                         <a:lnSpc>
                           <a:spcPts val="1680"/>
                         </a:lnSpc>
@@ -16955,7 +18343,7 @@
                       </a:endParaRPr>
                     </a:p>
                   </a:txBody>
-                  <a:tcPr marL="53340" marR="53340" marT="53340" marB="53340" anchor="t">
+                  <a:tcPr marL="53340" marR="53340" marT="53340" marB="53340">
                     <a:lnL w="12700" cap="flat" cmpd="sng" algn="ctr">
                       <a:solidFill>
                         <a:srgbClr val="CBC7C7"/>
@@ -16999,7 +18387,7 @@
                     <a:bodyPr/>
                     <a:lstStyle/>
                     <a:p>
-                      <a:pPr indent="0" marL="0">
+                      <a:pPr marL="0" indent="0">
                         <a:lnSpc>
                           <a:spcPts val="1680"/>
                         </a:lnSpc>
@@ -17023,7 +18411,7 @@
                       </a:endParaRPr>
                     </a:p>
                   </a:txBody>
-                  <a:tcPr marL="53340" marR="53340" marT="53340" marB="53340" anchor="t">
+                  <a:tcPr marL="53340" marR="53340" marT="53340" marB="53340">
                     <a:lnL w="12700" cap="flat" cmpd="sng" algn="ctr">
                       <a:solidFill>
                         <a:srgbClr val="CBC7C7"/>
@@ -17062,6 +18450,11 @@
                     </a:lnB>
                   </a:tcPr>
                 </a:tc>
+                <a:extLst>
+                  <a:ext uri="{0D108BD9-81ED-4DB2-BD59-A6C34878D82A}">
+                    <a16:rowId xmlns:a16="http://schemas.microsoft.com/office/drawing/2014/main" val="10005"/>
+                  </a:ext>
+                </a:extLst>
               </a:tr>
               <a:tr h="332581">
                 <a:tc>
@@ -17069,7 +18462,7 @@
                     <a:bodyPr/>
                     <a:lstStyle/>
                     <a:p>
-                      <a:pPr indent="0" marL="0">
+                      <a:pPr marL="0" indent="0">
                         <a:lnSpc>
                           <a:spcPts val="1680"/>
                         </a:lnSpc>
@@ -17093,7 +18486,7 @@
                       </a:endParaRPr>
                     </a:p>
                   </a:txBody>
-                  <a:tcPr marL="53340" marR="53340" marT="53340" marB="53340" anchor="t">
+                  <a:tcPr marL="53340" marR="53340" marT="53340" marB="53340">
                     <a:lnL w="12700" cap="flat" cmpd="sng" algn="ctr">
                       <a:solidFill>
                         <a:srgbClr val="CBC7C7"/>
@@ -17140,7 +18533,7 @@
                     <a:bodyPr/>
                     <a:lstStyle/>
                     <a:p>
-                      <a:pPr indent="0" marL="0">
+                      <a:pPr marL="0" indent="0">
                         <a:lnSpc>
                           <a:spcPts val="1680"/>
                         </a:lnSpc>
@@ -17164,7 +18557,7 @@
                       </a:endParaRPr>
                     </a:p>
                   </a:txBody>
-                  <a:tcPr marL="53340" marR="53340" marT="53340" marB="53340" anchor="t">
+                  <a:tcPr marL="53340" marR="53340" marT="53340" marB="53340">
                     <a:lnL w="12700" cap="flat" cmpd="sng" algn="ctr">
                       <a:solidFill>
                         <a:srgbClr val="CBCBCB"/>
@@ -17211,7 +18604,7 @@
                     <a:bodyPr/>
                     <a:lstStyle/>
                     <a:p>
-                      <a:pPr indent="0" marL="0">
+                      <a:pPr marL="0" indent="0">
                         <a:lnSpc>
                           <a:spcPts val="1680"/>
                         </a:lnSpc>
@@ -17235,7 +18628,7 @@
                       </a:endParaRPr>
                     </a:p>
                   </a:txBody>
-                  <a:tcPr marL="53340" marR="53340" marT="53340" marB="53340" anchor="t">
+                  <a:tcPr marL="53340" marR="53340" marT="53340" marB="53340">
                     <a:lnL w="12700" cap="flat" cmpd="sng" algn="ctr">
                       <a:solidFill>
                         <a:srgbClr val="CBCBCB"/>
@@ -17277,6 +18670,11 @@
                     </a:solidFill>
                   </a:tcPr>
                 </a:tc>
+                <a:extLst>
+                  <a:ext uri="{0D108BD9-81ED-4DB2-BD59-A6C34878D82A}">
+                    <a16:rowId xmlns:a16="http://schemas.microsoft.com/office/drawing/2014/main" val="10006"/>
+                  </a:ext>
+                </a:extLst>
               </a:tr>
             </a:tbl>
           </a:graphicData>
@@ -17306,15 +18704,15 @@
       </p:sp>
       <p:pic>
         <p:nvPicPr>
-          <p:cNvPr id="6" name="Image 0" descr="Lightning">    </p:cNvPr>
+          <p:cNvPr id="6" name="Image 0" descr="Lightning"/>
           <p:cNvPicPr>
             <a:picLocks noChangeAspect="1"/>
           </p:cNvPicPr>
           <p:nvPr/>
         </p:nvPicPr>
         <p:blipFill>
-          <a:blip r:embed="rId1"/>
-          <a:srcRect l="0" r="0" t="0" b="0"/>
+          <a:blip r:embed="rId3"/>
+          <a:srcRect/>
           <a:stretch/>
         </p:blipFill>
         <p:spPr>
@@ -17350,7 +18748,7 @@
           </a:bodyPr>
           <a:lstStyle/>
           <a:p>
-            <a:pPr algn="l" indent="0" marL="0">
+            <a:pPr marL="0" indent="0" algn="l">
               <a:lnSpc>
                 <a:spcPts val="1960"/>
               </a:lnSpc>
@@ -17394,7 +18792,7 @@
           </a:bodyPr>
           <a:lstStyle/>
           <a:p>
-            <a:pPr algn="l" indent="0" marL="0">
+            <a:pPr marL="0" indent="0" algn="l">
               <a:lnSpc>
                 <a:spcPts val="1680"/>
               </a:lnSpc>
@@ -17438,14 +18836,14 @@
           </a:bodyPr>
           <a:lstStyle/>
           <a:p>
-            <a:pPr algn="r" indent="0" marL="0">
+            <a:pPr marL="0" indent="0" algn="r">
               <a:lnSpc>
                 <a:spcPts val="1680"/>
               </a:lnSpc>
               <a:buNone/>
             </a:pPr>
             <a:r>
-              <a:rPr lang="en-US" sz="1200" dirty="0">
+              <a:rPr lang="en-US" sz="1200">
                 <a:solidFill>
                   <a:srgbClr val="6E6E75"/>
                 </a:solidFill>
@@ -17453,7 +18851,7 @@
                 <a:ea typeface="Nunito Sans" pitchFamily="34" charset="-122"/>
                 <a:cs typeface="Nunito Sans" pitchFamily="34" charset="-120"/>
               </a:rPr>
-              <a:t>05 / 16</a:t>
+              <a:t>05 / 17</a:t>
             </a:r>
             <a:endParaRPr lang="en-US" sz="1200" dirty="0"/>
           </a:p>
@@ -17475,6 +18873,7 @@
         <a:solidFill>
           <a:srgbClr val="FFF9FA"/>
         </a:solidFill>
+        <a:effectLst/>
       </p:bgPr>
     </p:bg>
     <p:spTree>
@@ -17514,14 +18913,14 @@
           </a:bodyPr>
           <a:lstStyle/>
           <a:p>
-            <a:pPr algn="l" indent="0" marL="0">
+            <a:pPr marL="0" indent="0" algn="l">
               <a:lnSpc>
                 <a:spcPts val="1820"/>
               </a:lnSpc>
               <a:buNone/>
             </a:pPr>
             <a:r>
-              <a:rPr lang="en-US" sz="1300" b="1" spc="150" kern="0" dirty="0">
+              <a:rPr lang="en-US" sz="1300" b="1" kern="0" spc="150" dirty="0">
                 <a:solidFill>
                   <a:srgbClr val="333333"/>
                 </a:solidFill>
@@ -17558,7 +18957,7 @@
           </a:bodyPr>
           <a:lstStyle/>
           <a:p>
-            <a:pPr algn="l" indent="0" marL="0">
+            <a:pPr marL="0" indent="0" algn="l">
               <a:lnSpc>
                 <a:spcPts val="3360"/>
               </a:lnSpc>
@@ -17608,15 +19007,15 @@
       </p:sp>
       <p:pic>
         <p:nvPicPr>
-          <p:cNvPr id="5" name="Image 0" descr="Storybook diagram, Pipeline architecture: 1 plugin sync from the PrimeNG 21 token file to tokens.json, 2 build to generated CSS and Storybook, 3 publish to packages, 4 install in team repositories, 5 candidate PR to code-owned tokens, 6 propose to a Figma branch proposals/{app}, 7 merge and publish by a designer">    </p:cNvPr>
+          <p:cNvPr id="5" name="Image 0" descr="Storybook diagram, Pipeline architecture: 1 plugin sync from the PrimeNG 21 token file to tokens.json, 2 build to generated CSS and Storybook, 3 publish to packages, 4 install in team repositories, 5 candidate PR to code-owned tokens, 6 propose to a Figma branch proposals/{app}, 7 merge and publish by a designer"/>
           <p:cNvPicPr>
             <a:picLocks noChangeAspect="1"/>
           </p:cNvPicPr>
           <p:nvPr/>
         </p:nvPicPr>
         <p:blipFill>
-          <a:blip r:embed="rId1"/>
-          <a:srcRect l="-12" r="-12" t="0" b="0"/>
+          <a:blip r:embed="rId3"/>
+          <a:srcRect l="-12" r="-12"/>
           <a:stretch/>
         </p:blipFill>
         <p:spPr>
@@ -17652,14 +19051,14 @@
           </a:bodyPr>
           <a:lstStyle/>
           <a:p>
-            <a:pPr algn="l" indent="0" marL="0">
+            <a:pPr marL="0" indent="0" algn="l">
               <a:lnSpc>
                 <a:spcPts val="1680"/>
               </a:lnSpc>
               <a:buNone/>
             </a:pPr>
             <a:r>
-              <a:rPr lang="en-US" sz="1200" b="1" spc="100" kern="0" dirty="0">
+              <a:rPr lang="en-US" sz="1200" b="1" kern="0" spc="100" dirty="0">
                 <a:solidFill>
                   <a:srgbClr val="6E6E75"/>
                 </a:solidFill>
@@ -17702,15 +19101,15 @@
       </p:sp>
       <p:pic>
         <p:nvPicPr>
-          <p:cNvPr id="8" name="Image 1" descr="Lock">    </p:cNvPr>
+          <p:cNvPr id="8" name="Image 1" descr="Lock"/>
           <p:cNvPicPr>
             <a:picLocks noChangeAspect="1"/>
           </p:cNvPicPr>
           <p:nvPr/>
         </p:nvPicPr>
         <p:blipFill>
-          <a:blip r:embed="rId2"/>
-          <a:srcRect l="0" r="0" t="0" b="0"/>
+          <a:blip r:embed="rId4"/>
+          <a:srcRect/>
           <a:stretch/>
         </p:blipFill>
         <p:spPr>
@@ -17746,7 +19145,7 @@
           </a:bodyPr>
           <a:lstStyle/>
           <a:p>
-            <a:pPr algn="l" indent="0" marL="0">
+            <a:pPr marL="0" indent="0" algn="l">
               <a:lnSpc>
                 <a:spcPts val="1620"/>
               </a:lnSpc>
@@ -17796,15 +19195,15 @@
       </p:sp>
       <p:pic>
         <p:nvPicPr>
-          <p:cNvPr id="11" name="Image 2" descr="Warning">    </p:cNvPr>
+          <p:cNvPr id="11" name="Image 2" descr="Warning"/>
           <p:cNvPicPr>
             <a:picLocks noChangeAspect="1"/>
           </p:cNvPicPr>
           <p:nvPr/>
         </p:nvPicPr>
         <p:blipFill>
-          <a:blip r:embed="rId3"/>
-          <a:srcRect l="0" r="0" t="0" b="0"/>
+          <a:blip r:embed="rId5"/>
+          <a:srcRect/>
           <a:stretch/>
         </p:blipFill>
         <p:spPr>
@@ -17840,7 +19239,7 @@
           </a:bodyPr>
           <a:lstStyle/>
           <a:p>
-            <a:pPr algn="l" indent="0" marL="0">
+            <a:pPr marL="0" indent="0" algn="l">
               <a:lnSpc>
                 <a:spcPts val="1620"/>
               </a:lnSpc>
@@ -17890,15 +19289,15 @@
       </p:sp>
       <p:pic>
         <p:nvPicPr>
-          <p:cNvPr id="14" name="Image 3" descr="Chat">    </p:cNvPr>
+          <p:cNvPr id="14" name="Image 3" descr="Chat"/>
           <p:cNvPicPr>
             <a:picLocks noChangeAspect="1"/>
           </p:cNvPicPr>
           <p:nvPr/>
         </p:nvPicPr>
         <p:blipFill>
-          <a:blip r:embed="rId4"/>
-          <a:srcRect l="0" r="0" t="0" b="0"/>
+          <a:blip r:embed="rId6"/>
+          <a:srcRect/>
           <a:stretch/>
         </p:blipFill>
         <p:spPr>
@@ -17934,7 +19333,7 @@
           </a:bodyPr>
           <a:lstStyle/>
           <a:p>
-            <a:pPr algn="l" indent="0" marL="0">
+            <a:pPr marL="0" indent="0" algn="l">
               <a:lnSpc>
                 <a:spcPts val="1620"/>
               </a:lnSpc>
@@ -17978,7 +19377,7 @@
           </a:bodyPr>
           <a:lstStyle/>
           <a:p>
-            <a:pPr algn="l" indent="0" marL="0">
+            <a:pPr marL="0" indent="0" algn="l">
               <a:lnSpc>
                 <a:spcPts val="1680"/>
               </a:lnSpc>
@@ -18022,7 +19421,7 @@
           </a:bodyPr>
           <a:lstStyle/>
           <a:p>
-            <a:pPr algn="l" indent="0" marL="0">
+            <a:pPr marL="0" indent="0" algn="l">
               <a:lnSpc>
                 <a:spcPts val="1680"/>
               </a:lnSpc>
@@ -18066,14 +19465,14 @@
           </a:bodyPr>
           <a:lstStyle/>
           <a:p>
-            <a:pPr algn="r" indent="0" marL="0">
+            <a:pPr marL="0" indent="0" algn="r">
               <a:lnSpc>
                 <a:spcPts val="1680"/>
               </a:lnSpc>
               <a:buNone/>
             </a:pPr>
             <a:r>
-              <a:rPr lang="en-US" sz="1200" dirty="0">
+              <a:rPr lang="en-US" sz="1200">
                 <a:solidFill>
                   <a:srgbClr val="6E6E75"/>
                 </a:solidFill>
@@ -18081,7 +19480,7 @@
                 <a:ea typeface="Nunito Sans" pitchFamily="34" charset="-122"/>
                 <a:cs typeface="Nunito Sans" pitchFamily="34" charset="-120"/>
               </a:rPr>
-              <a:t>06 / 16</a:t>
+              <a:t>06 / 17</a:t>
             </a:r>
             <a:endParaRPr lang="en-US" sz="1200" dirty="0"/>
           </a:p>
@@ -18103,6 +19502,7 @@
         <a:solidFill>
           <a:srgbClr val="FFF9FA"/>
         </a:solidFill>
+        <a:effectLst/>
       </p:bgPr>
     </p:bg>
     <p:spTree>
@@ -18142,14 +19542,14 @@
           </a:bodyPr>
           <a:lstStyle/>
           <a:p>
-            <a:pPr algn="l" indent="0" marL="0">
+            <a:pPr marL="0" indent="0" algn="l">
               <a:lnSpc>
                 <a:spcPts val="1820"/>
               </a:lnSpc>
               <a:buNone/>
             </a:pPr>
             <a:r>
-              <a:rPr lang="en-US" sz="1300" b="1" spc="150" kern="0" dirty="0">
+              <a:rPr lang="en-US" sz="1300" b="1" kern="0" spc="150" dirty="0">
                 <a:solidFill>
                   <a:srgbClr val="333333"/>
                 </a:solidFill>
@@ -18186,7 +19586,7 @@
           </a:bodyPr>
           <a:lstStyle/>
           <a:p>
-            <a:pPr algn="l" indent="0" marL="0">
+            <a:pPr marL="0" indent="0" algn="l">
               <a:lnSpc>
                 <a:spcPts val="3360"/>
               </a:lnSpc>
@@ -18230,14 +19630,14 @@
           </a:bodyPr>
           <a:lstStyle/>
           <a:p>
-            <a:pPr algn="l" indent="0" marL="0">
+            <a:pPr marL="0" indent="0" algn="l">
               <a:lnSpc>
                 <a:spcPts val="1680"/>
               </a:lnSpc>
               <a:buNone/>
             </a:pPr>
             <a:r>
-              <a:rPr lang="en-US" sz="1200" b="1" spc="100" kern="0" dirty="0">
+              <a:rPr lang="en-US" sz="1200" b="1" kern="0" spc="100" dirty="0">
                 <a:solidFill>
                   <a:srgbClr val="6E6E75"/>
                 </a:solidFill>
@@ -18323,7 +19723,7 @@
           </a:bodyPr>
           <a:lstStyle/>
           <a:p>
-            <a:pPr algn="l" indent="0" marL="0">
+            <a:pPr marL="0" indent="0" algn="l">
               <a:lnSpc>
                 <a:spcPts val="1680"/>
               </a:lnSpc>
@@ -18367,7 +19767,7 @@
           </a:bodyPr>
           <a:lstStyle/>
           <a:p>
-            <a:pPr algn="l" indent="0" marL="0">
+            <a:pPr marL="0" indent="0" algn="l">
               <a:lnSpc>
                 <a:spcPts val="1820"/>
               </a:lnSpc>
@@ -18411,7 +19811,7 @@
           </a:bodyPr>
           <a:lstStyle/>
           <a:p>
-            <a:pPr algn="l" indent="0" marL="0">
+            <a:pPr marL="0" indent="0" algn="l">
               <a:lnSpc>
                 <a:spcPts val="1500"/>
               </a:lnSpc>
@@ -18434,15 +19834,15 @@
       </p:sp>
       <p:pic>
         <p:nvPicPr>
-          <p:cNvPr id="10" name="Image 0" descr="arrow-right">    </p:cNvPr>
+          <p:cNvPr id="10" name="Image 0" descr="arrow-right"/>
           <p:cNvPicPr>
             <a:picLocks noChangeAspect="1"/>
           </p:cNvPicPr>
           <p:nvPr/>
         </p:nvPicPr>
         <p:blipFill>
-          <a:blip r:embed="rId1"/>
-          <a:srcRect l="0" r="0" t="0" b="0"/>
+          <a:blip r:embed="rId3"/>
+          <a:srcRect/>
           <a:stretch/>
         </p:blipFill>
         <p:spPr>
@@ -18527,7 +19927,7 @@
           </a:bodyPr>
           <a:lstStyle/>
           <a:p>
-            <a:pPr algn="l" indent="0" marL="0">
+            <a:pPr marL="0" indent="0" algn="l">
               <a:lnSpc>
                 <a:spcPts val="1680"/>
               </a:lnSpc>
@@ -18571,7 +19971,7 @@
           </a:bodyPr>
           <a:lstStyle/>
           <a:p>
-            <a:pPr algn="l" indent="0" marL="0">
+            <a:pPr marL="0" indent="0" algn="l">
               <a:lnSpc>
                 <a:spcPts val="1820"/>
               </a:lnSpc>
@@ -18615,7 +20015,7 @@
           </a:bodyPr>
           <a:lstStyle/>
           <a:p>
-            <a:pPr algn="l" indent="0" marL="0">
+            <a:pPr marL="0" indent="0" algn="l">
               <a:lnSpc>
                 <a:spcPts val="1500"/>
               </a:lnSpc>
@@ -18638,15 +20038,15 @@
       </p:sp>
       <p:pic>
         <p:nvPicPr>
-          <p:cNvPr id="16" name="Image 1" descr="arrow-right">    </p:cNvPr>
+          <p:cNvPr id="16" name="Image 1" descr="arrow-right"/>
           <p:cNvPicPr>
             <a:picLocks noChangeAspect="1"/>
           </p:cNvPicPr>
           <p:nvPr/>
         </p:nvPicPr>
         <p:blipFill>
-          <a:blip r:embed="rId2"/>
-          <a:srcRect l="0" r="0" t="0" b="0"/>
+          <a:blip r:embed="rId3"/>
+          <a:srcRect/>
           <a:stretch/>
         </p:blipFill>
         <p:spPr>
@@ -18731,7 +20131,7 @@
           </a:bodyPr>
           <a:lstStyle/>
           <a:p>
-            <a:pPr algn="l" indent="0" marL="0">
+            <a:pPr marL="0" indent="0" algn="l">
               <a:lnSpc>
                 <a:spcPts val="1680"/>
               </a:lnSpc>
@@ -18775,14 +20175,14 @@
           </a:bodyPr>
           <a:lstStyle/>
           <a:p>
-            <a:pPr algn="l" indent="0" marL="0">
+            <a:pPr marL="0" indent="0" algn="l">
               <a:lnSpc>
                 <a:spcPts val="1820"/>
               </a:lnSpc>
               <a:buNone/>
             </a:pPr>
             <a:r>
-              <a:rPr lang="en-US" sz="1300" b="1" dirty="0">
+              <a:rPr lang="en-US" sz="1300" b="1">
                 <a:solidFill>
                   <a:srgbClr val="2B2B2E"/>
                 </a:solidFill>
@@ -18790,7 +20190,7 @@
                 <a:ea typeface="Nunito Sans" pitchFamily="34" charset="-122"/>
                 <a:cs typeface="Nunito Sans" pitchFamily="34" charset="-120"/>
               </a:rPr>
-              <a:t>index.json</a:t>
+              <a:t>plectrum MCP</a:t>
             </a:r>
             <a:endParaRPr lang="en-US" sz="1300" dirty="0"/>
           </a:p>
@@ -18819,14 +20219,14 @@
           </a:bodyPr>
           <a:lstStyle/>
           <a:p>
-            <a:pPr algn="l" indent="0" marL="0">
+            <a:pPr marL="0" indent="0" algn="l">
               <a:lnSpc>
                 <a:spcPts val="1500"/>
               </a:lnSpc>
               <a:buNone/>
             </a:pPr>
             <a:r>
-              <a:rPr lang="en-US" sz="1200" dirty="0">
+              <a:rPr lang="en-US" sz="1200">
                 <a:solidFill>
                   <a:srgbClr val="55555C"/>
                 </a:solidFill>
@@ -18834,7 +20234,7 @@
                 <a:ea typeface="Nunito Sans" pitchFamily="34" charset="-122"/>
                 <a:cs typeface="Nunito Sans" pitchFamily="34" charset="-120"/>
               </a:rPr>
-              <a:t>lists every Plectrum component</a:t>
+              <a:t>searches the installed catalogue, offline</a:t>
             </a:r>
             <a:endParaRPr lang="en-US" sz="1200" dirty="0"/>
           </a:p>
@@ -18842,7 +20242,7 @@
       </p:sp>
       <p:pic>
         <p:nvPicPr>
-          <p:cNvPr id="22" name="Image 2" descr="arrow-right">    </p:cNvPr>
+          <p:cNvPr id="22" name="Image 2" descr="arrow-right"/>
           <p:cNvPicPr>
             <a:picLocks noChangeAspect="1"/>
           </p:cNvPicPr>
@@ -18850,7 +20250,7 @@
         </p:nvPicPr>
         <p:blipFill>
           <a:blip r:embed="rId3"/>
-          <a:srcRect l="0" r="0" t="0" b="0"/>
+          <a:srcRect/>
           <a:stretch/>
         </p:blipFill>
         <p:spPr>
@@ -18935,7 +20335,7 @@
           </a:bodyPr>
           <a:lstStyle/>
           <a:p>
-            <a:pPr algn="l" indent="0" marL="0">
+            <a:pPr marL="0" indent="0" algn="l">
               <a:lnSpc>
                 <a:spcPts val="1680"/>
               </a:lnSpc>
@@ -18979,7 +20379,7 @@
           </a:bodyPr>
           <a:lstStyle/>
           <a:p>
-            <a:pPr algn="l" indent="0" marL="0">
+            <a:pPr marL="0" indent="0" algn="l">
               <a:lnSpc>
                 <a:spcPts val="1820"/>
               </a:lnSpc>
@@ -19023,14 +20423,14 @@
           </a:bodyPr>
           <a:lstStyle/>
           <a:p>
-            <a:pPr algn="l" indent="0" marL="0">
+            <a:pPr marL="0" indent="0" algn="l">
               <a:lnSpc>
                 <a:spcPts val="1500"/>
               </a:lnSpc>
               <a:buNone/>
             </a:pPr>
             <a:r>
-              <a:rPr lang="en-US" sz="1200" dirty="0">
+              <a:rPr lang="en-US" sz="1200">
                 <a:solidFill>
                   <a:srgbClr val="55555C"/>
                 </a:solidFill>
@@ -19038,7 +20438,7 @@
                 <a:ea typeface="Nunito Sans" pitchFamily="34" charset="-122"/>
                 <a:cs typeface="Nunito Sans" pitchFamily="34" charset="-120"/>
               </a:rPr>
-              <a:t>reads the live docs and stories</a:t>
+              <a:t>reads your app's own stories</a:t>
             </a:r>
             <a:endParaRPr lang="en-US" sz="1200" dirty="0"/>
           </a:p>
@@ -19067,14 +20467,14 @@
           </a:bodyPr>
           <a:lstStyle/>
           <a:p>
-            <a:pPr algn="l" indent="0" marL="0">
+            <a:pPr marL="0" indent="0" algn="l">
               <a:lnSpc>
                 <a:spcPts val="1680"/>
               </a:lnSpc>
               <a:buNone/>
             </a:pPr>
             <a:r>
-              <a:rPr lang="en-US" sz="1200" b="1" spc="100" kern="0" dirty="0">
+              <a:rPr lang="en-US" sz="1200" b="1" kern="0" spc="100" dirty="0">
                 <a:solidFill>
                   <a:srgbClr val="6E6E75"/>
                 </a:solidFill>
@@ -19160,7 +20560,7 @@
           </a:bodyPr>
           <a:lstStyle/>
           <a:p>
-            <a:pPr algn="l" indent="0" marL="0">
+            <a:pPr marL="0" indent="0" algn="l">
               <a:lnSpc>
                 <a:spcPts val="1680"/>
               </a:lnSpc>
@@ -19204,7 +20604,7 @@
           </a:bodyPr>
           <a:lstStyle/>
           <a:p>
-            <a:pPr algn="l" indent="0" marL="0">
+            <a:pPr marL="0" indent="0" algn="l">
               <a:lnSpc>
                 <a:spcPts val="1680"/>
               </a:lnSpc>
@@ -19248,7 +20648,7 @@
           </a:bodyPr>
           <a:lstStyle/>
           <a:p>
-            <a:pPr algn="l" indent="0" marL="0">
+            <a:pPr marL="0" indent="0" algn="l">
               <a:lnSpc>
                 <a:spcPts val="1500"/>
               </a:lnSpc>
@@ -19271,15 +20671,15 @@
       </p:sp>
       <p:pic>
         <p:nvPicPr>
-          <p:cNvPr id="34" name="Image 3" descr="arrow-right">    </p:cNvPr>
+          <p:cNvPr id="34" name="Image 3" descr="arrow-right"/>
           <p:cNvPicPr>
             <a:picLocks noChangeAspect="1"/>
           </p:cNvPicPr>
           <p:nvPr/>
         </p:nvPicPr>
         <p:blipFill>
-          <a:blip r:embed="rId4"/>
-          <a:srcRect l="0" r="0" t="0" b="0"/>
+          <a:blip r:embed="rId3"/>
+          <a:srcRect/>
           <a:stretch/>
         </p:blipFill>
         <p:spPr>
@@ -19364,7 +20764,7 @@
           </a:bodyPr>
           <a:lstStyle/>
           <a:p>
-            <a:pPr algn="l" indent="0" marL="0">
+            <a:pPr marL="0" indent="0" algn="l">
               <a:lnSpc>
                 <a:spcPts val="1680"/>
               </a:lnSpc>
@@ -19408,7 +20808,7 @@
           </a:bodyPr>
           <a:lstStyle/>
           <a:p>
-            <a:pPr algn="l" indent="0" marL="0">
+            <a:pPr marL="0" indent="0" algn="l">
               <a:lnSpc>
                 <a:spcPts val="1820"/>
               </a:lnSpc>
@@ -19452,7 +20852,7 @@
           </a:bodyPr>
           <a:lstStyle/>
           <a:p>
-            <a:pPr algn="l" indent="0" marL="0">
+            <a:pPr marL="0" indent="0" algn="l">
               <a:lnSpc>
                 <a:spcPts val="1500"/>
               </a:lnSpc>
@@ -19475,15 +20875,15 @@
       </p:sp>
       <p:pic>
         <p:nvPicPr>
-          <p:cNvPr id="40" name="Image 4" descr="arrow-right">    </p:cNvPr>
+          <p:cNvPr id="40" name="Image 4" descr="arrow-right"/>
           <p:cNvPicPr>
             <a:picLocks noChangeAspect="1"/>
           </p:cNvPicPr>
           <p:nvPr/>
         </p:nvPicPr>
         <p:blipFill>
-          <a:blip r:embed="rId5"/>
-          <a:srcRect l="0" r="0" t="0" b="0"/>
+          <a:blip r:embed="rId3"/>
+          <a:srcRect/>
           <a:stretch/>
         </p:blipFill>
         <p:spPr>
@@ -19568,7 +20968,7 @@
           </a:bodyPr>
           <a:lstStyle/>
           <a:p>
-            <a:pPr algn="l" indent="0" marL="0">
+            <a:pPr marL="0" indent="0" algn="l">
               <a:lnSpc>
                 <a:spcPts val="1680"/>
               </a:lnSpc>
@@ -19612,7 +21012,7 @@
           </a:bodyPr>
           <a:lstStyle/>
           <a:p>
-            <a:pPr algn="l" indent="0" marL="0">
+            <a:pPr marL="0" indent="0" algn="l">
               <a:lnSpc>
                 <a:spcPts val="1820"/>
               </a:lnSpc>
@@ -19656,7 +21056,7 @@
           </a:bodyPr>
           <a:lstStyle/>
           <a:p>
-            <a:pPr algn="l" indent="0" marL="0">
+            <a:pPr marL="0" indent="0" algn="l">
               <a:lnSpc>
                 <a:spcPts val="1500"/>
               </a:lnSpc>
@@ -19722,14 +21122,14 @@
           </a:bodyPr>
           <a:lstStyle/>
           <a:p>
-            <a:pPr algn="l" indent="0" marL="0">
+            <a:pPr marL="0" indent="0" algn="l">
               <a:lnSpc>
                 <a:spcPts val="1680"/>
               </a:lnSpc>
               <a:buNone/>
             </a:pPr>
             <a:r>
-              <a:rPr lang="en-US" sz="1200" b="1" spc="100" kern="0" dirty="0">
+              <a:rPr lang="en-US" sz="1200" b="1" kern="0" spc="100" dirty="0">
                 <a:solidFill>
                   <a:srgbClr val="A9A9B2"/>
                 </a:solidFill>
@@ -19766,7 +21166,7 @@
           </a:bodyPr>
           <a:lstStyle/>
           <a:p>
-            <a:pPr algn="l" indent="0" marL="0">
+            <a:pPr marL="0" indent="0" algn="l">
               <a:lnSpc>
                 <a:spcPts val="1800"/>
               </a:lnSpc>
@@ -19797,7 +21197,7 @@
             <a:endParaRPr lang="en-US" sz="1200" dirty="0"/>
           </a:p>
           <a:p>
-            <a:pPr algn="l" indent="0" marL="0">
+            <a:pPr marL="0" indent="0" algn="l">
               <a:lnSpc>
                 <a:spcPts val="1800"/>
               </a:lnSpc>
@@ -19841,7 +21241,7 @@
           </a:bodyPr>
           <a:lstStyle/>
           <a:p>
-            <a:pPr algn="l" indent="0" marL="0">
+            <a:pPr marL="0" indent="0" algn="l">
               <a:lnSpc>
                 <a:spcPts val="1800"/>
               </a:lnSpc>
@@ -19885,7 +21285,7 @@
           </a:bodyPr>
           <a:lstStyle/>
           <a:p>
-            <a:pPr algn="l" indent="0" marL="0">
+            <a:pPr marL="0" indent="0" algn="l">
               <a:lnSpc>
                 <a:spcPts val="1680"/>
               </a:lnSpc>
@@ -19929,14 +21329,14 @@
           </a:bodyPr>
           <a:lstStyle/>
           <a:p>
-            <a:pPr algn="r" indent="0" marL="0">
+            <a:pPr marL="0" indent="0" algn="r">
               <a:lnSpc>
                 <a:spcPts val="1680"/>
               </a:lnSpc>
               <a:buNone/>
             </a:pPr>
             <a:r>
-              <a:rPr lang="en-US" sz="1200" dirty="0">
+              <a:rPr lang="en-US" sz="1200">
                 <a:solidFill>
                   <a:srgbClr val="6E6E75"/>
                 </a:solidFill>
@@ -19944,7 +21344,7 @@
                 <a:ea typeface="Nunito Sans" pitchFamily="34" charset="-122"/>
                 <a:cs typeface="Nunito Sans" pitchFamily="34" charset="-120"/>
               </a:rPr>
-              <a:t>07 / 16</a:t>
+              <a:t>07 / 17</a:t>
             </a:r>
             <a:endParaRPr lang="en-US" sz="1200" dirty="0"/>
           </a:p>
@@ -19966,6 +21366,7 @@
         <a:solidFill>
           <a:srgbClr val="FFEDF1"/>
         </a:solidFill>
+        <a:effectLst/>
       </p:bgPr>
     </p:bg>
     <p:spTree>
@@ -20005,14 +21406,14 @@
           </a:bodyPr>
           <a:lstStyle/>
           <a:p>
-            <a:pPr algn="l" indent="0" marL="0">
+            <a:pPr marL="0" indent="0" algn="l">
               <a:lnSpc>
                 <a:spcPts val="1820"/>
               </a:lnSpc>
               <a:buNone/>
             </a:pPr>
             <a:r>
-              <a:rPr lang="en-US" sz="1300" b="1" spc="150" kern="0" dirty="0">
+              <a:rPr lang="en-US" sz="1300" b="1" kern="0" spc="150" dirty="0">
                 <a:solidFill>
                   <a:srgbClr val="333333"/>
                 </a:solidFill>
@@ -20049,7 +21450,7 @@
           </a:bodyPr>
           <a:lstStyle/>
           <a:p>
-            <a:pPr algn="l" indent="0" marL="0">
+            <a:pPr marL="0" indent="0" algn="l">
               <a:lnSpc>
                 <a:spcPts val="3360"/>
               </a:lnSpc>
@@ -20091,7 +21492,7 @@
           </a:solidFill>
           <a:ln/>
           <a:effectLst>
-            <a:outerShdw sx="100000" sy="100000" kx="0" ky="0" algn="bl" rotWithShape="0" blurRad="203200" dist="76200" dir="5400000">
+            <a:outerShdw blurRad="203200" dist="76200" dir="5400000" algn="bl" rotWithShape="0">
               <a:srgbClr val="78142D">
                 <a:alpha val="8000"/>
               </a:srgbClr>
@@ -20124,19 +21525,19 @@
                 <a:lnTo>
                   <a:pt x="0" y="101600"/>
                 </a:lnTo>
-                <a:arcTo hR="101600" wR="101600" stAng="10800000" swAng="5400000"/>
+                <a:arcTo wR="101600" hR="101600" stAng="10800000" swAng="5400000"/>
                 <a:lnTo>
                   <a:pt x="2692400" y="0"/>
                 </a:lnTo>
-                <a:arcTo hR="101600" wR="101600" stAng="16200000" swAng="5400000"/>
+                <a:arcTo wR="101600" hR="101600" stAng="16200000" swAng="5400000"/>
                 <a:lnTo>
                   <a:pt x="2794000" y="101600"/>
                 </a:lnTo>
-                <a:arcTo hR="50800" wR="101600" stAng="0" swAng="-5400000"/>
+                <a:arcTo wR="101600" hR="50800" stAng="0" swAng="-5400000"/>
                 <a:lnTo>
                   <a:pt x="101600" y="50800"/>
                 </a:lnTo>
-                <a:arcTo hR="50800" wR="101600" stAng="16200000" swAng="-5400000"/>
+                <a:arcTo wR="101600" hR="50800" stAng="16200000" swAng="-5400000"/>
                 <a:close/>
               </a:path>
             </a:pathLst>
@@ -20149,15 +21550,15 @@
       </p:sp>
       <p:pic>
         <p:nvPicPr>
-          <p:cNvPr id="6" name="Image 0" descr="Lightning">    </p:cNvPr>
+          <p:cNvPr id="6" name="Image 0" descr="Lightning"/>
           <p:cNvPicPr>
             <a:picLocks noChangeAspect="1"/>
           </p:cNvPicPr>
           <p:nvPr/>
         </p:nvPicPr>
         <p:blipFill>
-          <a:blip r:embed="rId1"/>
-          <a:srcRect l="0" r="0" t="0" b="0"/>
+          <a:blip r:embed="rId3"/>
+          <a:srcRect/>
           <a:stretch/>
         </p:blipFill>
         <p:spPr>
@@ -20193,7 +21594,7 @@
           </a:bodyPr>
           <a:lstStyle/>
           <a:p>
-            <a:pPr algn="l" indent="0" marL="0">
+            <a:pPr marL="0" indent="0" algn="l">
               <a:lnSpc>
                 <a:spcPts val="2240"/>
               </a:lnSpc>
@@ -20237,7 +21638,7 @@
           </a:bodyPr>
           <a:lstStyle/>
           <a:p>
-            <a:pPr algn="l" indent="0" marL="0">
+            <a:pPr marL="0" indent="0" algn="l">
               <a:lnSpc>
                 <a:spcPts val="1680"/>
               </a:lnSpc>
@@ -20281,7 +21682,7 @@
           </a:bodyPr>
           <a:lstStyle/>
           <a:p>
-            <a:pPr algn="l" indent="0" marL="0">
+            <a:pPr marL="0" indent="0" algn="l">
               <a:lnSpc>
                 <a:spcPts val="1680"/>
               </a:lnSpc>
@@ -20347,7 +21748,7 @@
           </a:bodyPr>
           <a:lstStyle/>
           <a:p>
-            <a:pPr algn="l" indent="0" marL="0">
+            <a:pPr marL="0" indent="0" algn="l">
               <a:lnSpc>
                 <a:spcPts val="1820"/>
               </a:lnSpc>
@@ -20391,7 +21792,7 @@
           </a:bodyPr>
           <a:lstStyle/>
           <a:p>
-            <a:pPr algn="l" indent="0" marL="0">
+            <a:pPr marL="0" indent="0" algn="l">
               <a:lnSpc>
                 <a:spcPts val="1620"/>
               </a:lnSpc>
@@ -20457,7 +21858,7 @@
           </a:bodyPr>
           <a:lstStyle/>
           <a:p>
-            <a:pPr algn="l" indent="0" marL="0">
+            <a:pPr marL="0" indent="0" algn="l">
               <a:lnSpc>
                 <a:spcPts val="1820"/>
               </a:lnSpc>
@@ -20501,7 +21902,7 @@
           </a:bodyPr>
           <a:lstStyle/>
           <a:p>
-            <a:pPr algn="l" indent="0" marL="0">
+            <a:pPr marL="0" indent="0" algn="l">
               <a:lnSpc>
                 <a:spcPts val="1620"/>
               </a:lnSpc>
@@ -20567,7 +21968,7 @@
           </a:bodyPr>
           <a:lstStyle/>
           <a:p>
-            <a:pPr algn="l" indent="0" marL="0">
+            <a:pPr marL="0" indent="0" algn="l">
               <a:lnSpc>
                 <a:spcPts val="1820"/>
               </a:lnSpc>
@@ -20611,7 +22012,7 @@
           </a:bodyPr>
           <a:lstStyle/>
           <a:p>
-            <a:pPr algn="l" indent="0" marL="0">
+            <a:pPr marL="0" indent="0" algn="l">
               <a:lnSpc>
                 <a:spcPts val="1620"/>
               </a:lnSpc>
@@ -20677,7 +22078,7 @@
           </a:bodyPr>
           <a:lstStyle/>
           <a:p>
-            <a:pPr algn="l" indent="0" marL="0">
+            <a:pPr marL="0" indent="0" algn="l">
               <a:lnSpc>
                 <a:spcPts val="1820"/>
               </a:lnSpc>
@@ -20721,13 +22122,24 @@
           </a:bodyPr>
           <a:lstStyle/>
           <a:p>
-            <a:pPr algn="l" indent="0" marL="0">
+            <a:pPr marL="0" indent="0" algn="l">
               <a:lnSpc>
                 <a:spcPts val="1620"/>
               </a:lnSpc>
               <a:buNone/>
             </a:pPr>
             <a:r>
+              <a:rPr lang="en-US" sz="1200">
+                <a:solidFill>
+                  <a:srgbClr val="55555C"/>
+                </a:solidFill>
+                <a:latin typeface="Nunito Sans" pitchFamily="34" charset="0"/>
+                <a:ea typeface="Nunito Sans" pitchFamily="34" charset="-122"/>
+                <a:cs typeface="Nunito Sans" pitchFamily="34" charset="-120"/>
+              </a:rPr>
+              <a:t>unit, story and keyboard tests, </a:t>
+            </a:r>
+            <a:r>
               <a:rPr lang="en-US" sz="1200" dirty="0">
                 <a:solidFill>
                   <a:srgbClr val="55555C"/>
@@ -20736,7 +22148,7 @@
                 <a:ea typeface="Nunito Sans" pitchFamily="34" charset="-122"/>
                 <a:cs typeface="Nunito Sans" pitchFamily="34" charset="-120"/>
               </a:rPr>
-              <a:t>unit tests, story coverage, WCAG 2.1 AA</a:t>
+              <a:t>WCAG 2.1 AA</a:t>
             </a:r>
             <a:endParaRPr lang="en-US" sz="1200" dirty="0"/>
           </a:p>
@@ -20787,7 +22199,7 @@
           </a:bodyPr>
           <a:lstStyle/>
           <a:p>
-            <a:pPr algn="l" indent="0" marL="0">
+            <a:pPr marL="0" indent="0" algn="l">
               <a:lnSpc>
                 <a:spcPts val="1820"/>
               </a:lnSpc>
@@ -20831,7 +22243,7 @@
           </a:bodyPr>
           <a:lstStyle/>
           <a:p>
-            <a:pPr algn="l" indent="0" marL="0">
+            <a:pPr marL="0" indent="0" algn="l">
               <a:lnSpc>
                 <a:spcPts val="1620"/>
               </a:lnSpc>
@@ -20897,7 +22309,7 @@
           </a:bodyPr>
           <a:lstStyle/>
           <a:p>
-            <a:pPr algn="l" indent="0" marL="0">
+            <a:pPr marL="0" indent="0" algn="l">
               <a:lnSpc>
                 <a:spcPts val="1820"/>
               </a:lnSpc>
@@ -20941,7 +22353,7 @@
           </a:bodyPr>
           <a:lstStyle/>
           <a:p>
-            <a:pPr algn="l" indent="0" marL="0">
+            <a:pPr marL="0" indent="0" algn="l">
               <a:lnSpc>
                 <a:spcPts val="1620"/>
               </a:lnSpc>
@@ -21007,7 +22419,7 @@
           </a:bodyPr>
           <a:lstStyle/>
           <a:p>
-            <a:pPr algn="l" indent="0" marL="0">
+            <a:pPr marL="0" indent="0" algn="l">
               <a:lnSpc>
                 <a:spcPts val="1800"/>
               </a:lnSpc>
@@ -21038,7 +22450,7 @@
             <a:endParaRPr lang="en-US" sz="1200" dirty="0"/>
           </a:p>
           <a:p>
-            <a:pPr algn="l" indent="0" marL="0">
+            <a:pPr marL="0" indent="0" algn="l">
               <a:lnSpc>
                 <a:spcPts val="1800"/>
               </a:lnSpc>
@@ -21058,7 +22470,7 @@
             <a:endParaRPr lang="en-US" sz="1200" dirty="0"/>
           </a:p>
           <a:p>
-            <a:pPr algn="l" indent="0" marL="0">
+            <a:pPr marL="0" indent="0" algn="l">
               <a:lnSpc>
                 <a:spcPts val="1800"/>
               </a:lnSpc>
@@ -21078,7 +22490,7 @@
             <a:endParaRPr lang="en-US" sz="1200" dirty="0"/>
           </a:p>
           <a:p>
-            <a:pPr algn="l" indent="0" marL="0">
+            <a:pPr marL="0" indent="0" algn="l">
               <a:lnSpc>
                 <a:spcPts val="1800"/>
               </a:lnSpc>
@@ -21122,7 +22534,7 @@
           </a:bodyPr>
           <a:lstStyle/>
           <a:p>
-            <a:pPr algn="l" indent="0" marL="0">
+            <a:pPr marL="0" indent="0" algn="l">
               <a:lnSpc>
                 <a:spcPts val="2300"/>
               </a:lnSpc>
@@ -21166,7 +22578,7 @@
           </a:bodyPr>
           <a:lstStyle/>
           <a:p>
-            <a:pPr algn="l" indent="0" marL="0">
+            <a:pPr marL="0" indent="0" algn="l">
               <a:lnSpc>
                 <a:spcPts val="1680"/>
               </a:lnSpc>
@@ -21210,14 +22622,14 @@
           </a:bodyPr>
           <a:lstStyle/>
           <a:p>
-            <a:pPr algn="r" indent="0" marL="0">
+            <a:pPr marL="0" indent="0" algn="r">
               <a:lnSpc>
                 <a:spcPts val="1680"/>
               </a:lnSpc>
               <a:buNone/>
             </a:pPr>
             <a:r>
-              <a:rPr lang="en-US" sz="1200" dirty="0">
+              <a:rPr lang="en-US" sz="1200">
                 <a:solidFill>
                   <a:srgbClr val="66666D"/>
                 </a:solidFill>
@@ -21225,7 +22637,7 @@
                 <a:ea typeface="Nunito Sans" pitchFamily="34" charset="-122"/>
                 <a:cs typeface="Nunito Sans" pitchFamily="34" charset="-120"/>
               </a:rPr>
-              <a:t>08 / 16</a:t>
+              <a:t>08 / 17</a:t>
             </a:r>
             <a:endParaRPr lang="en-US" sz="1200" dirty="0"/>
           </a:p>
@@ -21247,6 +22659,7 @@
         <a:solidFill>
           <a:srgbClr val="FFF9FA"/>
         </a:solidFill>
+        <a:effectLst/>
       </p:bgPr>
     </p:bg>
     <p:spTree>
@@ -21286,14 +22699,14 @@
           </a:bodyPr>
           <a:lstStyle/>
           <a:p>
-            <a:pPr algn="l" indent="0" marL="0">
+            <a:pPr marL="0" indent="0" algn="l">
               <a:lnSpc>
                 <a:spcPts val="1820"/>
               </a:lnSpc>
               <a:buNone/>
             </a:pPr>
             <a:r>
-              <a:rPr lang="en-US" sz="1300" b="1" spc="150" kern="0" dirty="0">
+              <a:rPr lang="en-US" sz="1300" b="1" kern="0" spc="150" dirty="0">
                 <a:solidFill>
                   <a:srgbClr val="333333"/>
                 </a:solidFill>
@@ -21330,7 +22743,7 @@
           </a:bodyPr>
           <a:lstStyle/>
           <a:p>
-            <a:pPr algn="l" indent="0" marL="0">
+            <a:pPr marL="0" indent="0" algn="l">
               <a:lnSpc>
                 <a:spcPts val="3360"/>
               </a:lnSpc>
@@ -21360,7 +22773,7 @@
           <p:nvPr>
             <p:extLst>
               <p:ext uri="{D42A27DB-BD31-4B8C-83A1-F6EECF244321}">
-                <p14:modId xmlns:p14="http://schemas.microsoft.com/office/powerpoint/2010/main" val="1579011935"/>
+                <p14:modId xmlns:p14="http://schemas.microsoft.com/office/powerpoint/2010/main" val="1678613283"/>
               </p:ext>
             </p:extLst>
           </p:nvPr>
@@ -21374,9 +22787,27 @@
             <a:tbl>
               <a:tblPr/>
               <a:tblGrid>
-                <a:gridCol w="2532888"/>
-                <a:gridCol w="4221480"/>
-                <a:gridCol w="3799332"/>
+                <a:gridCol w="2532888">
+                  <a:extLst>
+                    <a:ext uri="{9D8B030D-6E8A-4147-A177-3AD203B41FA5}">
+                      <a16:colId xmlns:a16="http://schemas.microsoft.com/office/drawing/2014/main" val="20000"/>
+                    </a:ext>
+                  </a:extLst>
+                </a:gridCol>
+                <a:gridCol w="4221480">
+                  <a:extLst>
+                    <a:ext uri="{9D8B030D-6E8A-4147-A177-3AD203B41FA5}">
+                      <a16:colId xmlns:a16="http://schemas.microsoft.com/office/drawing/2014/main" val="20001"/>
+                    </a:ext>
+                  </a:extLst>
+                </a:gridCol>
+                <a:gridCol w="3799332">
+                  <a:extLst>
+                    <a:ext uri="{9D8B030D-6E8A-4147-A177-3AD203B41FA5}">
+                      <a16:colId xmlns:a16="http://schemas.microsoft.com/office/drawing/2014/main" val="20002"/>
+                    </a:ext>
+                  </a:extLst>
+                </a:gridCol>
               </a:tblGrid>
               <a:tr h="359271">
                 <a:tc>
@@ -21384,7 +22815,7 @@
                     <a:bodyPr/>
                     <a:lstStyle/>
                     <a:p>
-                      <a:pPr indent="0" marL="0">
+                      <a:pPr marL="0" indent="0">
                         <a:lnSpc>
                           <a:spcPts val="1820"/>
                         </a:lnSpc>
@@ -21408,7 +22839,7 @@
                       </a:endParaRPr>
                     </a:p>
                   </a:txBody>
-                  <a:tcPr marL="57785" marR="57785" marT="57785" marB="57785" anchor="t">
+                  <a:tcPr marL="57785" marR="57785" marT="57785" marB="57785">
                     <a:lnL w="12700" cap="flat" cmpd="sng" algn="ctr">
                       <a:solidFill>
                         <a:srgbClr val="CBC7C7"/>
@@ -21455,7 +22886,7 @@
                     <a:bodyPr/>
                     <a:lstStyle/>
                     <a:p>
-                      <a:pPr indent="0" marL="0">
+                      <a:pPr marL="0" indent="0">
                         <a:lnSpc>
                           <a:spcPts val="1820"/>
                         </a:lnSpc>
@@ -21479,7 +22910,7 @@
                       </a:endParaRPr>
                     </a:p>
                   </a:txBody>
-                  <a:tcPr marL="57785" marR="57785" marT="57785" marB="57785" anchor="t">
+                  <a:tcPr marL="57785" marR="57785" marT="57785" marB="57785">
                     <a:lnL w="12700" cap="flat" cmpd="sng" algn="ctr">
                       <a:solidFill>
                         <a:srgbClr val="CBBDC0"/>
@@ -21526,7 +22957,7 @@
                     <a:bodyPr/>
                     <a:lstStyle/>
                     <a:p>
-                      <a:pPr indent="0" marL="0">
+                      <a:pPr marL="0" indent="0">
                         <a:lnSpc>
                           <a:spcPts val="1820"/>
                         </a:lnSpc>
@@ -21550,7 +22981,7 @@
                       </a:endParaRPr>
                     </a:p>
                   </a:txBody>
-                  <a:tcPr marL="57785" marR="57785" marT="57785" marB="57785" anchor="t">
+                  <a:tcPr marL="57785" marR="57785" marT="57785" marB="57785">
                     <a:lnL w="12700" cap="flat" cmpd="sng" algn="ctr">
                       <a:solidFill>
                         <a:srgbClr val="CBBDC0"/>
@@ -21592,6 +23023,11 @@
                     </a:solidFill>
                   </a:tcPr>
                 </a:tc>
+                <a:extLst>
+                  <a:ext uri="{0D108BD9-81ED-4DB2-BD59-A6C34878D82A}">
+                    <a16:rowId xmlns:a16="http://schemas.microsoft.com/office/drawing/2014/main" val="10000"/>
+                  </a:ext>
+                </a:extLst>
               </a:tr>
               <a:tr h="359271">
                 <a:tc>
@@ -21599,7 +23035,7 @@
                     <a:bodyPr/>
                     <a:lstStyle/>
                     <a:p>
-                      <a:pPr indent="0" marL="0">
+                      <a:pPr marL="0" indent="0">
                         <a:lnSpc>
                           <a:spcPts val="1820"/>
                         </a:lnSpc>
@@ -21623,7 +23059,7 @@
                       </a:endParaRPr>
                     </a:p>
                   </a:txBody>
-                  <a:tcPr marL="57785" marR="57785" marT="57785" marB="57785" anchor="t">
+                  <a:tcPr marL="57785" marR="57785" marT="57785" marB="57785">
                     <a:lnL w="12700" cap="flat" cmpd="sng" algn="ctr">
                       <a:solidFill>
                         <a:srgbClr val="CBC7C7"/>
@@ -21667,14 +23103,14 @@
                     <a:bodyPr/>
                     <a:lstStyle/>
                     <a:p>
-                      <a:pPr indent="0" marL="0">
+                      <a:pPr marL="0" indent="0">
                         <a:lnSpc>
                           <a:spcPts val="1820"/>
                         </a:lnSpc>
                         <a:buNone/>
                       </a:pPr>
                       <a:r>
-                        <a:rPr lang="en-US" sz="1300" dirty="0">
+                        <a:rPr lang="en-US" sz="1300">
                           <a:solidFill>
                             <a:srgbClr val="2B2B2E"/>
                           </a:solidFill>
@@ -21682,7 +23118,7 @@
                           <a:ea typeface="Nunito Sans" pitchFamily="34" charset="-122"/>
                           <a:cs typeface="Nunito Sans" pitchFamily="34" charset="-120"/>
                         </a:rPr>
-                        <a:t>PrimeNG MCP · index.json · Storybook MCP</a:t>
+                        <a:t>plectrum MCP · PrimeNG MCP · Storybook MCP</a:t>
                       </a:r>
                       <a:endParaRPr lang="en-US" sz="1300" dirty="0">
                         <a:latin typeface="Nunito Sans" charset="0"/>
@@ -21691,7 +23127,7 @@
                       </a:endParaRPr>
                     </a:p>
                   </a:txBody>
-                  <a:tcPr marL="57785" marR="57785" marT="57785" marB="57785" anchor="t">
+                  <a:tcPr marL="57785" marR="57785" marT="57785" marB="57785">
                     <a:lnL w="12700" cap="flat" cmpd="sng" algn="ctr">
                       <a:solidFill>
                         <a:srgbClr val="CBC7C7"/>
@@ -21735,7 +23171,7 @@
                     <a:bodyPr/>
                     <a:lstStyle/>
                     <a:p>
-                      <a:pPr indent="0" marL="0">
+                      <a:pPr marL="0" indent="0">
                         <a:lnSpc>
                           <a:spcPts val="1820"/>
                         </a:lnSpc>
@@ -21759,7 +23195,7 @@
                       </a:endParaRPr>
                     </a:p>
                   </a:txBody>
-                  <a:tcPr marL="57785" marR="57785" marT="57785" marB="57785" anchor="t">
+                  <a:tcPr marL="57785" marR="57785" marT="57785" marB="57785">
                     <a:lnL w="12700" cap="flat" cmpd="sng" algn="ctr">
                       <a:solidFill>
                         <a:srgbClr val="CBC7C7"/>
@@ -21798,6 +23234,11 @@
                     </a:lnB>
                   </a:tcPr>
                 </a:tc>
+                <a:extLst>
+                  <a:ext uri="{0D108BD9-81ED-4DB2-BD59-A6C34878D82A}">
+                    <a16:rowId xmlns:a16="http://schemas.microsoft.com/office/drawing/2014/main" val="10001"/>
+                  </a:ext>
+                </a:extLst>
               </a:tr>
               <a:tr h="359271">
                 <a:tc>
@@ -21805,7 +23246,7 @@
                     <a:bodyPr/>
                     <a:lstStyle/>
                     <a:p>
-                      <a:pPr indent="0" marL="0">
+                      <a:pPr marL="0" indent="0">
                         <a:lnSpc>
                           <a:spcPts val="1820"/>
                         </a:lnSpc>
@@ -21829,7 +23270,7 @@
                       </a:endParaRPr>
                     </a:p>
                   </a:txBody>
-                  <a:tcPr marL="57785" marR="57785" marT="57785" marB="57785" anchor="t">
+                  <a:tcPr marL="57785" marR="57785" marT="57785" marB="57785">
                     <a:lnL w="12700" cap="flat" cmpd="sng" algn="ctr">
                       <a:solidFill>
                         <a:srgbClr val="CBC7C7"/>
@@ -21876,7 +23317,7 @@
                     <a:bodyPr/>
                     <a:lstStyle/>
                     <a:p>
-                      <a:pPr indent="0" marL="0">
+                      <a:pPr marL="0" indent="0">
                         <a:lnSpc>
                           <a:spcPts val="1820"/>
                         </a:lnSpc>
@@ -21900,7 +23341,7 @@
                       </a:endParaRPr>
                     </a:p>
                   </a:txBody>
-                  <a:tcPr marL="57785" marR="57785" marT="57785" marB="57785" anchor="t">
+                  <a:tcPr marL="57785" marR="57785" marT="57785" marB="57785">
                     <a:lnL w="12700" cap="flat" cmpd="sng" algn="ctr">
                       <a:solidFill>
                         <a:srgbClr val="CBCBCB"/>
@@ -21947,7 +23388,7 @@
                     <a:bodyPr/>
                     <a:lstStyle/>
                     <a:p>
-                      <a:pPr indent="0" marL="0">
+                      <a:pPr marL="0" indent="0">
                         <a:lnSpc>
                           <a:spcPts val="1820"/>
                         </a:lnSpc>
@@ -21971,7 +23412,7 @@
                       </a:endParaRPr>
                     </a:p>
                   </a:txBody>
-                  <a:tcPr marL="57785" marR="57785" marT="57785" marB="57785" anchor="t">
+                  <a:tcPr marL="57785" marR="57785" marT="57785" marB="57785">
                     <a:lnL w="12700" cap="flat" cmpd="sng" algn="ctr">
                       <a:solidFill>
                         <a:srgbClr val="CBCBCB"/>
@@ -22013,6 +23454,11 @@
                     </a:solidFill>
                   </a:tcPr>
                 </a:tc>
+                <a:extLst>
+                  <a:ext uri="{0D108BD9-81ED-4DB2-BD59-A6C34878D82A}">
+                    <a16:rowId xmlns:a16="http://schemas.microsoft.com/office/drawing/2014/main" val="10002"/>
+                  </a:ext>
+                </a:extLst>
               </a:tr>
               <a:tr h="359271">
                 <a:tc>
@@ -22020,7 +23466,7 @@
                     <a:bodyPr/>
                     <a:lstStyle/>
                     <a:p>
-                      <a:pPr indent="0" marL="0">
+                      <a:pPr marL="0" indent="0">
                         <a:lnSpc>
                           <a:spcPts val="1820"/>
                         </a:lnSpc>
@@ -22044,7 +23490,7 @@
                       </a:endParaRPr>
                     </a:p>
                   </a:txBody>
-                  <a:tcPr marL="57785" marR="57785" marT="57785" marB="57785" anchor="t">
+                  <a:tcPr marL="57785" marR="57785" marT="57785" marB="57785">
                     <a:lnL w="12700" cap="flat" cmpd="sng" algn="ctr">
                       <a:solidFill>
                         <a:srgbClr val="CBC7C7"/>
@@ -22088,7 +23534,7 @@
                     <a:bodyPr/>
                     <a:lstStyle/>
                     <a:p>
-                      <a:pPr indent="0" marL="0">
+                      <a:pPr marL="0" indent="0">
                         <a:lnSpc>
                           <a:spcPts val="1820"/>
                         </a:lnSpc>
@@ -22112,7 +23558,7 @@
                       </a:endParaRPr>
                     </a:p>
                   </a:txBody>
-                  <a:tcPr marL="57785" marR="57785" marT="57785" marB="57785" anchor="t">
+                  <a:tcPr marL="57785" marR="57785" marT="57785" marB="57785">
                     <a:lnL w="12700" cap="flat" cmpd="sng" algn="ctr">
                       <a:solidFill>
                         <a:srgbClr val="CBC7C7"/>
@@ -22156,7 +23602,7 @@
                     <a:bodyPr/>
                     <a:lstStyle/>
                     <a:p>
-                      <a:pPr indent="0" marL="0">
+                      <a:pPr marL="0" indent="0">
                         <a:lnSpc>
                           <a:spcPts val="1820"/>
                         </a:lnSpc>
@@ -22180,7 +23626,7 @@
                       </a:endParaRPr>
                     </a:p>
                   </a:txBody>
-                  <a:tcPr marL="57785" marR="57785" marT="57785" marB="57785" anchor="t">
+                  <a:tcPr marL="57785" marR="57785" marT="57785" marB="57785">
                     <a:lnL w="12700" cap="flat" cmpd="sng" algn="ctr">
                       <a:solidFill>
                         <a:srgbClr val="CBC7C7"/>
@@ -22219,6 +23665,11 @@
                     </a:lnB>
                   </a:tcPr>
                 </a:tc>
+                <a:extLst>
+                  <a:ext uri="{0D108BD9-81ED-4DB2-BD59-A6C34878D82A}">
+                    <a16:rowId xmlns:a16="http://schemas.microsoft.com/office/drawing/2014/main" val="10003"/>
+                  </a:ext>
+                </a:extLst>
               </a:tr>
               <a:tr h="359271">
                 <a:tc>
@@ -22226,7 +23677,7 @@
                     <a:bodyPr/>
                     <a:lstStyle/>
                     <a:p>
-                      <a:pPr indent="0" marL="0">
+                      <a:pPr marL="0" indent="0">
                         <a:lnSpc>
                           <a:spcPts val="1820"/>
                         </a:lnSpc>
@@ -22250,7 +23701,7 @@
                       </a:endParaRPr>
                     </a:p>
                   </a:txBody>
-                  <a:tcPr marL="57785" marR="57785" marT="57785" marB="57785" anchor="t">
+                  <a:tcPr marL="57785" marR="57785" marT="57785" marB="57785">
                     <a:lnL w="12700" cap="flat" cmpd="sng" algn="ctr">
                       <a:solidFill>
                         <a:srgbClr val="CBC7C7"/>
@@ -22297,7 +23748,7 @@
                     <a:bodyPr/>
                     <a:lstStyle/>
                     <a:p>
-                      <a:pPr indent="0" marL="0">
+                      <a:pPr marL="0" indent="0">
                         <a:lnSpc>
                           <a:spcPts val="1820"/>
                         </a:lnSpc>
@@ -22321,7 +23772,7 @@
                       </a:endParaRPr>
                     </a:p>
                   </a:txBody>
-                  <a:tcPr marL="57785" marR="57785" marT="57785" marB="57785" anchor="t">
+                  <a:tcPr marL="57785" marR="57785" marT="57785" marB="57785">
                     <a:lnL w="12700" cap="flat" cmpd="sng" algn="ctr">
                       <a:solidFill>
                         <a:srgbClr val="CBCBCB"/>
@@ -22368,7 +23819,7 @@
                     <a:bodyPr/>
                     <a:lstStyle/>
                     <a:p>
-                      <a:pPr indent="0" marL="0">
+                      <a:pPr marL="0" indent="0">
                         <a:lnSpc>
                           <a:spcPts val="1820"/>
                         </a:lnSpc>
@@ -22392,7 +23843,7 @@
                       </a:endParaRPr>
                     </a:p>
                   </a:txBody>
-                  <a:tcPr marL="57785" marR="57785" marT="57785" marB="57785" anchor="t">
+                  <a:tcPr marL="57785" marR="57785" marT="57785" marB="57785">
                     <a:lnL w="12700" cap="flat" cmpd="sng" algn="ctr">
                       <a:solidFill>
                         <a:srgbClr val="CBCBCB"/>
@@ -22434,6 +23885,11 @@
                     </a:solidFill>
                   </a:tcPr>
                 </a:tc>
+                <a:extLst>
+                  <a:ext uri="{0D108BD9-81ED-4DB2-BD59-A6C34878D82A}">
+                    <a16:rowId xmlns:a16="http://schemas.microsoft.com/office/drawing/2014/main" val="10004"/>
+                  </a:ext>
+                </a:extLst>
               </a:tr>
               <a:tr h="359271">
                 <a:tc>
@@ -22441,7 +23897,7 @@
                     <a:bodyPr/>
                     <a:lstStyle/>
                     <a:p>
-                      <a:pPr indent="0" marL="0">
+                      <a:pPr marL="0" indent="0">
                         <a:lnSpc>
                           <a:spcPts val="1820"/>
                         </a:lnSpc>
@@ -22465,7 +23921,7 @@
                       </a:endParaRPr>
                     </a:p>
                   </a:txBody>
-                  <a:tcPr marL="57785" marR="57785" marT="57785" marB="57785" anchor="t">
+                  <a:tcPr marL="57785" marR="57785" marT="57785" marB="57785">
                     <a:lnL w="12700" cap="flat" cmpd="sng" algn="ctr">
                       <a:solidFill>
                         <a:srgbClr val="CBC7C7"/>
@@ -22509,7 +23965,7 @@
                     <a:bodyPr/>
                     <a:lstStyle/>
                     <a:p>
-                      <a:pPr indent="0" marL="0">
+                      <a:pPr marL="0" indent="0">
                         <a:lnSpc>
                           <a:spcPts val="1820"/>
                         </a:lnSpc>
@@ -22533,7 +23989,7 @@
                       </a:endParaRPr>
                     </a:p>
                   </a:txBody>
-                  <a:tcPr marL="57785" marR="57785" marT="57785" marB="57785" anchor="t">
+                  <a:tcPr marL="57785" marR="57785" marT="57785" marB="57785">
                     <a:lnL w="12700" cap="flat" cmpd="sng" algn="ctr">
                       <a:solidFill>
                         <a:srgbClr val="CBC7C7"/>
@@ -22577,7 +24033,7 @@
                     <a:bodyPr/>
                     <a:lstStyle/>
                     <a:p>
-                      <a:pPr indent="0" marL="0">
+                      <a:pPr marL="0" indent="0">
                         <a:lnSpc>
                           <a:spcPts val="1820"/>
                         </a:lnSpc>
@@ -22601,7 +24057,7 @@
                       </a:endParaRPr>
                     </a:p>
                   </a:txBody>
-                  <a:tcPr marL="57785" marR="57785" marT="57785" marB="57785" anchor="t">
+                  <a:tcPr marL="57785" marR="57785" marT="57785" marB="57785">
                     <a:lnL w="12700" cap="flat" cmpd="sng" algn="ctr">
                       <a:solidFill>
                         <a:srgbClr val="CBC7C7"/>
@@ -22640,6 +24096,11 @@
                     </a:lnB>
                   </a:tcPr>
                 </a:tc>
+                <a:extLst>
+                  <a:ext uri="{0D108BD9-81ED-4DB2-BD59-A6C34878D82A}">
+                    <a16:rowId xmlns:a16="http://schemas.microsoft.com/office/drawing/2014/main" val="10005"/>
+                  </a:ext>
+                </a:extLst>
               </a:tr>
               <a:tr h="359271">
                 <a:tc>
@@ -22647,7 +24108,7 @@
                     <a:bodyPr/>
                     <a:lstStyle/>
                     <a:p>
-                      <a:pPr indent="0" marL="0">
+                      <a:pPr marL="0" indent="0">
                         <a:lnSpc>
                           <a:spcPts val="1820"/>
                         </a:lnSpc>
@@ -22671,7 +24132,7 @@
                       </a:endParaRPr>
                     </a:p>
                   </a:txBody>
-                  <a:tcPr marL="57785" marR="57785" marT="57785" marB="57785" anchor="t">
+                  <a:tcPr marL="57785" marR="57785" marT="57785" marB="57785">
                     <a:lnL w="12700" cap="flat" cmpd="sng" algn="ctr">
                       <a:solidFill>
                         <a:srgbClr val="CBC7C7"/>
@@ -22718,7 +24179,7 @@
                     <a:bodyPr/>
                     <a:lstStyle/>
                     <a:p>
-                      <a:pPr indent="0" marL="0">
+                      <a:pPr marL="0" indent="0">
                         <a:lnSpc>
                           <a:spcPts val="1820"/>
                         </a:lnSpc>
@@ -22742,7 +24203,7 @@
                       </a:endParaRPr>
                     </a:p>
                   </a:txBody>
-                  <a:tcPr marL="57785" marR="57785" marT="57785" marB="57785" anchor="t">
+                  <a:tcPr marL="57785" marR="57785" marT="57785" marB="57785">
                     <a:lnL w="12700" cap="flat" cmpd="sng" algn="ctr">
                       <a:solidFill>
                         <a:srgbClr val="CBCBCB"/>
@@ -22789,7 +24250,7 @@
                     <a:bodyPr/>
                     <a:lstStyle/>
                     <a:p>
-                      <a:pPr indent="0" marL="0">
+                      <a:pPr marL="0" indent="0">
                         <a:lnSpc>
                           <a:spcPts val="1820"/>
                         </a:lnSpc>
@@ -22813,7 +24274,7 @@
                       </a:endParaRPr>
                     </a:p>
                   </a:txBody>
-                  <a:tcPr marL="57785" marR="57785" marT="57785" marB="57785" anchor="t">
+                  <a:tcPr marL="57785" marR="57785" marT="57785" marB="57785">
                     <a:lnL w="12700" cap="flat" cmpd="sng" algn="ctr">
                       <a:solidFill>
                         <a:srgbClr val="CBCBCB"/>
@@ -22855,6 +24316,11 @@
                     </a:solidFill>
                   </a:tcPr>
                 </a:tc>
+                <a:extLst>
+                  <a:ext uri="{0D108BD9-81ED-4DB2-BD59-A6C34878D82A}">
+                    <a16:rowId xmlns:a16="http://schemas.microsoft.com/office/drawing/2014/main" val="10006"/>
+                  </a:ext>
+                </a:extLst>
               </a:tr>
             </a:tbl>
           </a:graphicData>
@@ -22905,7 +24371,7 @@
           </a:bodyPr>
           <a:lstStyle/>
           <a:p>
-            <a:pPr algn="l" indent="0" marL="0">
+            <a:pPr marL="0" indent="0" algn="l">
               <a:lnSpc>
                 <a:spcPts val="1920"/>
               </a:lnSpc>
@@ -22949,14 +24415,14 @@
           </a:bodyPr>
           <a:lstStyle/>
           <a:p>
-            <a:pPr algn="l" indent="0" marL="0">
+            <a:pPr marL="0" indent="0" algn="l">
               <a:lnSpc>
                 <a:spcPts val="1680"/>
               </a:lnSpc>
               <a:buNone/>
             </a:pPr>
             <a:r>
-              <a:rPr lang="en-US" sz="1200" dirty="0">
+              <a:rPr lang="en-US" sz="1200">
                 <a:solidFill>
                   <a:srgbClr val="C9C9CF"/>
                 </a:solidFill>
@@ -22964,7 +24430,7 @@
                 <a:ea typeface="Nunito Sans" pitchFamily="34" charset="-122"/>
                 <a:cs typeface="Nunito Sans" pitchFamily="34" charset="-120"/>
               </a:rPr>
-              <a:t>Storybook › AI strategy</a:t>
+              <a:t>Storybook › How agents work</a:t>
             </a:r>
             <a:endParaRPr lang="en-US" sz="1200" dirty="0"/>
           </a:p>
@@ -23015,7 +24481,7 @@
           </a:bodyPr>
           <a:lstStyle/>
           <a:p>
-            <a:pPr algn="l" indent="0" marL="0">
+            <a:pPr marL="0" indent="0" algn="l">
               <a:lnSpc>
                 <a:spcPts val="1800"/>
               </a:lnSpc>
@@ -23059,7 +24525,7 @@
           </a:bodyPr>
           <a:lstStyle/>
           <a:p>
-            <a:pPr algn="l" indent="0" marL="0">
+            <a:pPr marL="0" indent="0" algn="l">
               <a:lnSpc>
                 <a:spcPts val="1680"/>
               </a:lnSpc>
@@ -23103,7 +24569,7 @@
           </a:bodyPr>
           <a:lstStyle/>
           <a:p>
-            <a:pPr algn="l" indent="0" marL="0">
+            <a:pPr marL="0" indent="0" algn="l">
               <a:lnSpc>
                 <a:spcPts val="1680"/>
               </a:lnSpc>
@@ -23147,14 +24613,14 @@
           </a:bodyPr>
           <a:lstStyle/>
           <a:p>
-            <a:pPr algn="r" indent="0" marL="0">
+            <a:pPr marL="0" indent="0" algn="r">
               <a:lnSpc>
                 <a:spcPts val="1680"/>
               </a:lnSpc>
               <a:buNone/>
             </a:pPr>
             <a:r>
-              <a:rPr lang="en-US" sz="1200" dirty="0">
+              <a:rPr lang="en-US" sz="1200">
                 <a:solidFill>
                   <a:srgbClr val="6E6E75"/>
                 </a:solidFill>
@@ -23162,7 +24628,7 @@
                 <a:ea typeface="Nunito Sans" pitchFamily="34" charset="-122"/>
                 <a:cs typeface="Nunito Sans" pitchFamily="34" charset="-120"/>
               </a:rPr>
-              <a:t>09 / 16</a:t>
+              <a:t>09 / 17</a:t>
             </a:r>
             <a:endParaRPr lang="en-US" sz="1200" dirty="0"/>
           </a:p>
@@ -23469,4 +24935,299 @@
     </a:ext>
   </a:extLst>
 </a:theme>
+</file>
+
+<file path=ppt/theme/theme2.xml><?xml version="1.0" encoding="utf-8"?>
+<a:theme xmlns:a="http://schemas.openxmlformats.org/drawingml/2006/main" name="Office Theme">
+  <a:themeElements>
+    <a:clrScheme name="Office">
+      <a:dk1>
+        <a:sysClr val="windowText" lastClr="000000"/>
+      </a:dk1>
+      <a:lt1>
+        <a:sysClr val="window" lastClr="FFFFFF"/>
+      </a:lt1>
+      <a:dk2>
+        <a:srgbClr val="44546A"/>
+      </a:dk2>
+      <a:lt2>
+        <a:srgbClr val="E7E6E6"/>
+      </a:lt2>
+      <a:accent1>
+        <a:srgbClr val="4472C4"/>
+      </a:accent1>
+      <a:accent2>
+        <a:srgbClr val="ED7D31"/>
+      </a:accent2>
+      <a:accent3>
+        <a:srgbClr val="A5A5A5"/>
+      </a:accent3>
+      <a:accent4>
+        <a:srgbClr val="FFC000"/>
+      </a:accent4>
+      <a:accent5>
+        <a:srgbClr val="5B9BD5"/>
+      </a:accent5>
+      <a:accent6>
+        <a:srgbClr val="70AD47"/>
+      </a:accent6>
+      <a:hlink>
+        <a:srgbClr val="0563C1"/>
+      </a:hlink>
+      <a:folHlink>
+        <a:srgbClr val="954F72"/>
+      </a:folHlink>
+    </a:clrScheme>
+    <a:fontScheme name="Office">
+      <a:majorFont>
+        <a:latin typeface="Calibri Light" panose="020F0302020204030204"/>
+        <a:ea typeface=""/>
+        <a:cs typeface=""/>
+        <a:font script="Jpan" typeface="游ゴシック Light"/>
+        <a:font script="Hang" typeface="맑은 고딕"/>
+        <a:font script="Hans" typeface="等线 Light"/>
+        <a:font script="Hant" typeface="新細明體"/>
+        <a:font script="Arab" typeface="Times New Roman"/>
+        <a:font script="Hebr" typeface="Times New Roman"/>
+        <a:font script="Thai" typeface="Angsana New"/>
+        <a:font script="Ethi" typeface="Nyala"/>
+        <a:font script="Beng" typeface="Vrinda"/>
+        <a:font script="Gujr" typeface="Shruti"/>
+        <a:font script="Khmr" typeface="MoolBoran"/>
+        <a:font script="Knda" typeface="Tunga"/>
+        <a:font script="Guru" typeface="Raavi"/>
+        <a:font script="Cans" typeface="Euphemia"/>
+        <a:font script="Cher" typeface="Plantagenet Cherokee"/>
+        <a:font script="Yiii" typeface="Microsoft Yi Baiti"/>
+        <a:font script="Tibt" typeface="Microsoft Himalaya"/>
+        <a:font script="Thaa" typeface="MV Boli"/>
+        <a:font script="Deva" typeface="Mangal"/>
+        <a:font script="Telu" typeface="Gautami"/>
+        <a:font script="Taml" typeface="Latha"/>
+        <a:font script="Syrc" typeface="Estrangelo Edessa"/>
+        <a:font script="Orya" typeface="Kalinga"/>
+        <a:font script="Mlym" typeface="Kartika"/>
+        <a:font script="Laoo" typeface="DokChampa"/>
+        <a:font script="Sinh" typeface="Iskoola Pota"/>
+        <a:font script="Mong" typeface="Mongolian Baiti"/>
+        <a:font script="Viet" typeface="Times New Roman"/>
+        <a:font script="Uigh" typeface="Microsoft Uighur"/>
+        <a:font script="Geor" typeface="Sylfaen"/>
+        <a:font script="Armn" typeface="Arial"/>
+        <a:font script="Bugi" typeface="Leelawadee UI"/>
+        <a:font script="Bopo" typeface="Microsoft JhengHei"/>
+        <a:font script="Java" typeface="Javanese Text"/>
+        <a:font script="Lisu" typeface="Segoe UI"/>
+        <a:font script="Mymr" typeface="Myanmar Text"/>
+        <a:font script="Nkoo" typeface="Ebrima"/>
+        <a:font script="Olck" typeface="Nirmala UI"/>
+        <a:font script="Osma" typeface="Ebrima"/>
+        <a:font script="Phag" typeface="Phagspa"/>
+        <a:font script="Syrn" typeface="Estrangelo Edessa"/>
+        <a:font script="Syrj" typeface="Estrangelo Edessa"/>
+        <a:font script="Syre" typeface="Estrangelo Edessa"/>
+        <a:font script="Sora" typeface="Nirmala UI"/>
+        <a:font script="Tale" typeface="Microsoft Tai Le"/>
+        <a:font script="Talu" typeface="Microsoft New Tai Lue"/>
+        <a:font script="Tfng" typeface="Ebrima"/>
+      </a:majorFont>
+      <a:minorFont>
+        <a:latin typeface="Calibri" panose="020F0502020204030204"/>
+        <a:ea typeface=""/>
+        <a:cs typeface=""/>
+        <a:font script="Jpan" typeface="游ゴシック"/>
+        <a:font script="Hang" typeface="맑은 고딕"/>
+        <a:font script="Hans" typeface="等线"/>
+        <a:font script="Hant" typeface="新細明體"/>
+        <a:font script="Arab" typeface="Arial"/>
+        <a:font script="Hebr" typeface="Arial"/>
+        <a:font script="Thai" typeface="Cordia New"/>
+        <a:font script="Ethi" typeface="Nyala"/>
+        <a:font script="Beng" typeface="Vrinda"/>
+        <a:font script="Gujr" typeface="Shruti"/>
+        <a:font script="Khmr" typeface="DaunPenh"/>
+        <a:font script="Knda" typeface="Tunga"/>
+        <a:font script="Guru" typeface="Raavi"/>
+        <a:font script="Cans" typeface="Euphemia"/>
+        <a:font script="Cher" typeface="Plantagenet Cherokee"/>
+        <a:font script="Yiii" typeface="Microsoft Yi Baiti"/>
+        <a:font script="Tibt" typeface="Microsoft Himalaya"/>
+        <a:font script="Thaa" typeface="MV Boli"/>
+        <a:font script="Deva" typeface="Mangal"/>
+        <a:font script="Telu" typeface="Gautami"/>
+        <a:font script="Taml" typeface="Latha"/>
+        <a:font script="Syrc" typeface="Estrangelo Edessa"/>
+        <a:font script="Orya" typeface="Kalinga"/>
+        <a:font script="Mlym" typeface="Kartika"/>
+        <a:font script="Laoo" typeface="DokChampa"/>
+        <a:font script="Sinh" typeface="Iskoola Pota"/>
+        <a:font script="Mong" typeface="Mongolian Baiti"/>
+        <a:font script="Viet" typeface="Arial"/>
+        <a:font script="Uigh" typeface="Microsoft Uighur"/>
+        <a:font script="Geor" typeface="Sylfaen"/>
+        <a:font script="Armn" typeface="Arial"/>
+        <a:font script="Bugi" typeface="Leelawadee UI"/>
+        <a:font script="Bopo" typeface="Microsoft JhengHei"/>
+        <a:font script="Java" typeface="Javanese Text"/>
+        <a:font script="Lisu" typeface="Segoe UI"/>
+        <a:font script="Mymr" typeface="Myanmar Text"/>
+        <a:font script="Nkoo" typeface="Ebrima"/>
+        <a:font script="Olck" typeface="Nirmala UI"/>
+        <a:font script="Osma" typeface="Ebrima"/>
+        <a:font script="Phag" typeface="Phagspa"/>
+        <a:font script="Syrn" typeface="Estrangelo Edessa"/>
+        <a:font script="Syrj" typeface="Estrangelo Edessa"/>
+        <a:font script="Syre" typeface="Estrangelo Edessa"/>
+        <a:font script="Sora" typeface="Nirmala UI"/>
+        <a:font script="Tale" typeface="Microsoft Tai Le"/>
+        <a:font script="Talu" typeface="Microsoft New Tai Lue"/>
+        <a:font script="Tfng" typeface="Ebrima"/>
+      </a:minorFont>
+    </a:fontScheme>
+    <a:fmtScheme name="Office">
+      <a:fillStyleLst>
+        <a:solidFill>
+          <a:schemeClr val="phClr"/>
+        </a:solidFill>
+        <a:gradFill rotWithShape="1">
+          <a:gsLst>
+            <a:gs pos="0">
+              <a:schemeClr val="phClr">
+                <a:lumMod val="110000"/>
+                <a:satMod val="105000"/>
+                <a:tint val="67000"/>
+              </a:schemeClr>
+            </a:gs>
+            <a:gs pos="50000">
+              <a:schemeClr val="phClr">
+                <a:lumMod val="105000"/>
+                <a:satMod val="103000"/>
+                <a:tint val="73000"/>
+              </a:schemeClr>
+            </a:gs>
+            <a:gs pos="100000">
+              <a:schemeClr val="phClr">
+                <a:lumMod val="105000"/>
+                <a:satMod val="109000"/>
+                <a:tint val="81000"/>
+              </a:schemeClr>
+            </a:gs>
+          </a:gsLst>
+          <a:lin ang="5400000" scaled="0"/>
+        </a:gradFill>
+        <a:gradFill rotWithShape="1">
+          <a:gsLst>
+            <a:gs pos="0">
+              <a:schemeClr val="phClr">
+                <a:satMod val="103000"/>
+                <a:lumMod val="102000"/>
+                <a:tint val="94000"/>
+              </a:schemeClr>
+            </a:gs>
+            <a:gs pos="50000">
+              <a:schemeClr val="phClr">
+                <a:satMod val="110000"/>
+                <a:lumMod val="100000"/>
+                <a:shade val="100000"/>
+              </a:schemeClr>
+            </a:gs>
+            <a:gs pos="100000">
+              <a:schemeClr val="phClr">
+                <a:lumMod val="99000"/>
+                <a:satMod val="120000"/>
+                <a:shade val="78000"/>
+              </a:schemeClr>
+            </a:gs>
+          </a:gsLst>
+          <a:lin ang="5400000" scaled="0"/>
+        </a:gradFill>
+      </a:fillStyleLst>
+      <a:lnStyleLst>
+        <a:ln w="6350" cap="flat" cmpd="sng" algn="ctr">
+          <a:solidFill>
+            <a:schemeClr val="phClr"/>
+          </a:solidFill>
+          <a:prstDash val="solid"/>
+          <a:miter lim="800000"/>
+        </a:ln>
+        <a:ln w="12700" cap="flat" cmpd="sng" algn="ctr">
+          <a:solidFill>
+            <a:schemeClr val="phClr"/>
+          </a:solidFill>
+          <a:prstDash val="solid"/>
+          <a:miter lim="800000"/>
+        </a:ln>
+        <a:ln w="19050" cap="flat" cmpd="sng" algn="ctr">
+          <a:solidFill>
+            <a:schemeClr val="phClr"/>
+          </a:solidFill>
+          <a:prstDash val="solid"/>
+          <a:miter lim="800000"/>
+        </a:ln>
+      </a:lnStyleLst>
+      <a:effectStyleLst>
+        <a:effectStyle>
+          <a:effectLst/>
+        </a:effectStyle>
+        <a:effectStyle>
+          <a:effectLst/>
+        </a:effectStyle>
+        <a:effectStyle>
+          <a:effectLst>
+            <a:outerShdw blurRad="57150" dist="19050" dir="5400000" algn="ctr" rotWithShape="0">
+              <a:srgbClr val="000000">
+                <a:alpha val="63000"/>
+              </a:srgbClr>
+            </a:outerShdw>
+          </a:effectLst>
+        </a:effectStyle>
+      </a:effectStyleLst>
+      <a:bgFillStyleLst>
+        <a:solidFill>
+          <a:schemeClr val="phClr"/>
+        </a:solidFill>
+        <a:solidFill>
+          <a:schemeClr val="phClr">
+            <a:tint val="95000"/>
+            <a:satMod val="170000"/>
+          </a:schemeClr>
+        </a:solidFill>
+        <a:gradFill rotWithShape="1">
+          <a:gsLst>
+            <a:gs pos="0">
+              <a:schemeClr val="phClr">
+                <a:tint val="93000"/>
+                <a:satMod val="150000"/>
+                <a:shade val="98000"/>
+                <a:lumMod val="102000"/>
+              </a:schemeClr>
+            </a:gs>
+            <a:gs pos="50000">
+              <a:schemeClr val="phClr">
+                <a:tint val="98000"/>
+                <a:satMod val="130000"/>
+                <a:shade val="90000"/>
+                <a:lumMod val="103000"/>
+              </a:schemeClr>
+            </a:gs>
+            <a:gs pos="100000">
+              <a:schemeClr val="phClr">
+                <a:shade val="63000"/>
+                <a:satMod val="120000"/>
+              </a:schemeClr>
+            </a:gs>
+          </a:gsLst>
+          <a:lin ang="5400000" scaled="0"/>
+        </a:gradFill>
+      </a:bgFillStyleLst>
+    </a:fmtScheme>
+  </a:themeElements>
+  <a:objectDefaults/>
+  <a:extraClrSchemeLst/>
+  <a:extLst>
+    <a:ext uri="{05A4C25C-085E-4340-85A3-A5531E510DB2}">
+      <thm15:themeFamily xmlns:thm15="http://schemas.microsoft.com/office/thememl/2012/main" name="Office Theme" id="{62F939B6-93AF-4DB8-9C6B-D6C7DFDC589F}" vid="{4A3C46E8-61CC-4603-A589-7422A47A8E4A}"/>
+    </a:ext>
+  </a:extLst>
+</a:theme>
 </file>
--- a/docs/Storybook for application teams.pptx
+++ b/docs/Storybook for application teams.pptx
@@ -16763,7 +16763,7 @@
         </p:spPr>
         <p:txBody>
           <a:bodyPr wrap="square" lIns="0" tIns="0" rIns="0" bIns="0" rtlCol="0" anchor="t">
-            <a:normAutofit/>
+            <a:normAutofit fontScale="92500" lnSpcReduction="10000"/>
           </a:bodyPr>
           <a:lstStyle/>
           <a:p>
@@ -17134,7 +17134,7 @@
         </p:nvGraphicFramePr>
         <p:xfrm>
           <a:off x="825500" y="1762621"/>
-          <a:ext cx="10553700" cy="2328069"/>
+          <a:ext cx="10553700" cy="2328067"/>
         </p:xfrm>
         <a:graphic>
           <a:graphicData uri="http://schemas.openxmlformats.org/drawingml/2006/table">
@@ -22780,7 +22780,7 @@
         </p:nvGraphicFramePr>
         <p:xfrm>
           <a:off x="825500" y="1686421"/>
-          <a:ext cx="10553700" cy="2514898"/>
+          <a:ext cx="10553700" cy="2514897"/>
         </p:xfrm>
         <a:graphic>
           <a:graphicData uri="http://schemas.openxmlformats.org/drawingml/2006/table">
